--- a/presentation/Jev_Team_Overview.pptx
+++ b/presentation/Jev_Team_Overview.pptx
@@ -9,6 +9,8 @@
     <p:sldId id="257" r:id="rId9"/>
     <p:sldId id="258" r:id="rId10"/>
     <p:sldId id="259" r:id="rId11"/>
+    <p:sldId id="260" r:id="rId12"/>
+    <p:sldId id="261" r:id="rId13"/>
   </p:sldIdLst>
   <p:sldSz cx="12191695" cy="6858000" type="screen4x3"/>
   <p:notesSz cx="6858000" cy="9144000"/>
@@ -851,12 +853,135 @@
           <a:lstStyle/>
           <a:p>
             <a:r>
-              <a:t>REPO: samples/ - six runnable Python samples + jev_client.py (local Laya backend or any Jev-compatible HTTP endpoint via JEV_BASE_URL / JEV_API_KEY). Run: python -m venv .venv; .venv\Scripts\pip install -r samples\requirements.txt; cd samples; ..\.venv\Scripts\python 01_lead_scoring.py</a:t>
+              <a:t>AVAILABILITY: Jev (TypeSafe AI) has been in early access since 15 Sep 2026. You apply for the preview, then create an API key under "API keys" (free starter credit is typical). It is NOT in the Microsoft Foundry model catalog - there is no one-click deployment.</a:t>
             </a:r>
           </a:p>
           <a:p/>
           <a:p>
             <a:r>
+              <a:t>MICROSOFT FOUNDRY (Microsoft Tech Community, "Using Jev with Agents in Microsoft Foundry for Model Evaluation", 30 Sep 2026):</a:t>
+            </a:r>
+          </a:p>
+          <a:p>
+            <a:r>
+              <a:t>- Create a Foundry agent, add an OpenAPI tool with an OpenAPI 3.0 schema for POST https://api.typesafe.ai/v1/systemone (operationId evaluate_with_jev; Noul / Choice / Score question schemas) and a new connection holding the key as "Bearer &lt;key&gt;".</a:t>
+            </a:r>
+          </a:p>
+          <a:p>
+            <a:r>
+              <a:t>- Agent instructions: for every support message MUST call evaluate_with_jev, use exactly 'instructions' and 'criteria' properties, model "jev-latest", pass the original message as state, do not classify yourself, show the Jev output.</a:t>
+            </a:r>
+          </a:p>
+          <a:p>
+            <a:r>
+              <a:t>- Example from the article: "The room had no water in and one of the towels was dirty" -&gt; billing noul 0.02, tone choice frustrated (0.74, confidence 0.6), urgency score 1.81 (handle today 0.85). The application then routes / escalates / requires human review deterministically.</a:t>
+            </a:r>
+          </a:p>
+          <a:p>
+            <a:r>
+              <a:t>- Pattern: User/Application -&gt; Foundry model or agent -&gt; Jev judgement -&gt; deterministic logic -&gt; action/response.</a:t>
+            </a:r>
+          </a:p>
+          <a:p>
+            <a:r>
+              <a:t>- Why Jev: consistent evaluation against explicit criteria, structured outputs, classification/routing, guardrails before tool calls, model routing; every decision has a probability for thresholds.</a:t>
+            </a:r>
+          </a:p>
+          <a:p>
+            <a:r>
+              <a:t>- Explainability: SHAP-style attribution is hard when the model is only reachable through a hosted API. Jev does not replace SHAP but adds a separate, measurable judgement layer around opaque MaaS models.</a:t>
+            </a:r>
+          </a:p>
+          <a:p>
+            <a:r>
+              <a:t>- Pricing (Sept 2026): jev-1.13.0 $0.042 per 1M input tokens, output free; limits 250,000 tokens/s and 1,200 requests/min (subject to change). Typical latency ~70-500 ms.</a:t>
+            </a:r>
+          </a:p>
+          <a:p/>
+          <a:p>
+            <a:r>
+              <a:t>OPEN SOURCE: Laya (huggingface.co/convaiinnovations/laya) - Apache-2.0, Jev-compatible request/response shape, runs locally; laya-serve exposes POST /v1/systemone so Jev clients only change the base URL. All our samples run on it.</a:t>
+            </a:r>
+          </a:p>
+          <a:p/>
+          <a:p>
+            <a:r>
+              <a:t>RUN THE SAMPLES: git clone https://github.com/stvonolf/jev-samples; python -m venv .venv; .venv\Scripts\python -m pip install -r samples\requirements.txt; cd samples; ..\.venv\Scripts\python 01_lead_scoring.py (01-06), ..\.venv\Scripts\python 07_ui_demos.py for the browser demos (http://localhost:8765). First run downloads ~0.8 GB of model weights.</a:t>
+            </a:r>
+          </a:p>
+        </p:txBody>
+      </p:sp>
+      <p:sp>
+        <p:nvSpPr>
+          <p:cNvPr id="4" name="Slide Number Placeholder 3"/>
+          <p:cNvSpPr>
+            <a:spLocks noGrp="1"/>
+          </p:cNvSpPr>
+          <p:nvPr>
+            <p:ph type="sldNum" idx="5" sz="quarter"/>
+          </p:nvPr>
+        </p:nvSpPr>
+        <p:spPr/>
+      </p:sp>
+    </p:spTree>
+  </p:cSld>
+  <p:clrMapOvr>
+    <a:masterClrMapping/>
+  </p:clrMapOvr>
+</p:notes>
+</file>
+
+<file path=ppt/notesSlides/notesSlide5.xml><?xml version="1.0" encoding="utf-8"?>
+<p:notes xmlns:a="http://schemas.openxmlformats.org/drawingml/2006/main" xmlns:p="http://schemas.openxmlformats.org/presentationml/2006/main" xmlns:r="http://schemas.openxmlformats.org/officeDocument/2006/relationships">
+  <p:cSld>
+    <p:spTree>
+      <p:nvGrpSpPr>
+        <p:cNvPr id="1" name=""/>
+        <p:cNvGrpSpPr/>
+        <p:nvPr/>
+      </p:nvGrpSpPr>
+      <p:grpSpPr>
+        <a:xfrm>
+          <a:off x="0" y="0"/>
+          <a:ext cx="0" cy="0"/>
+          <a:chOff x="0" y="0"/>
+          <a:chExt cx="0" cy="0"/>
+        </a:xfrm>
+      </p:grpSpPr>
+      <p:sp>
+        <p:nvSpPr>
+          <p:cNvPr id="2" name="Slide Image Placeholder 1"/>
+          <p:cNvSpPr>
+            <a:spLocks noGrp="1"/>
+          </p:cNvSpPr>
+          <p:nvPr>
+            <p:ph type="sldImg" idx="2"/>
+          </p:nvPr>
+        </p:nvSpPr>
+        <p:spPr/>
+      </p:sp>
+      <p:sp>
+        <p:nvSpPr>
+          <p:cNvPr id="3" name="Notes Placeholder 2"/>
+          <p:cNvSpPr>
+            <a:spLocks noGrp="1"/>
+          </p:cNvSpPr>
+          <p:nvPr>
+            <p:ph type="body" idx="3" sz="quarter"/>
+          </p:nvPr>
+        </p:nvSpPr>
+        <p:spPr/>
+        <p:txBody>
+          <a:bodyPr/>
+          <a:lstStyle/>
+          <a:p>
+            <a:r>
+              <a:t>REPO: https://github.com/stvonolf/jev-samples - samples/ has seven runnable Python samples + jev_client.py (local Laya backend or any Jev-compatible HTTP endpoint via JEV_BASE_URL / JEV_API_KEY). Run: git clone https://github.com/stvonolf/jev-samples; cd jev-samples; python -m venv .venv; .venv\Scripts\python -m pip install -r samples\requirements.txt; cd samples; ..\.venv\Scripts\python 01_lead_scoring.py (01-06 are console samples); ..\.venv\Scripts\python 07_ui_demos.py starts the browser demos on http://localhost:8765.</a:t>
+            </a:r>
+          </a:p>
+          <a:p/>
+          <a:p>
+            <a:r>
               <a:t>LAYA (huggingface.co/convaiinnovations/laya): ModernBERT-large backbone (395M) + a decision head trained from scratch, 421M total; multilingual checkpoint on mmBERT-base for 100+ languages; trained with RLCD-style proper scoring rules. laya-serve exposes the same POST /v1/systemone request/response shape as TypeSafe Jev. Author-reported vs Jev (third-party numbers, different setups): 7.8x faster on a T4 GPU (32.8 ms vs 236-276 ms p50), better calibration after temperature fitting, but Jev is better with &gt;20 options (Banking77: 0.87 vs 0.43). The base checkpoint scores 0.36 on the typed-decisions benchmark; the fine-tuned typed-decisions checkpoint 0.77 - fine-tuning matters.</a:t>
             </a:r>
           </a:p>
@@ -876,6 +1001,100 @@
           <a:p>
             <a:r>
               <a:t>NEXT STEPS: one pilot use case, label data, measure Laya vs Jev, ship behind confidence gating with human review for the middle band.</a:t>
+            </a:r>
+          </a:p>
+        </p:txBody>
+      </p:sp>
+      <p:sp>
+        <p:nvSpPr>
+          <p:cNvPr id="4" name="Slide Number Placeholder 3"/>
+          <p:cNvSpPr>
+            <a:spLocks noGrp="1"/>
+          </p:cNvSpPr>
+          <p:nvPr>
+            <p:ph type="sldNum" idx="5" sz="quarter"/>
+          </p:nvPr>
+        </p:nvSpPr>
+        <p:spPr/>
+      </p:sp>
+    </p:spTree>
+  </p:cSld>
+  <p:clrMapOvr>
+    <a:masterClrMapping/>
+  </p:clrMapOvr>
+</p:notes>
+</file>
+
+<file path=ppt/notesSlides/notesSlide6.xml><?xml version="1.0" encoding="utf-8"?>
+<p:notes xmlns:a="http://schemas.openxmlformats.org/drawingml/2006/main" xmlns:p="http://schemas.openxmlformats.org/presentationml/2006/main" xmlns:r="http://schemas.openxmlformats.org/officeDocument/2006/relationships">
+  <p:cSld>
+    <p:spTree>
+      <p:nvGrpSpPr>
+        <p:cNvPr id="1" name=""/>
+        <p:cNvGrpSpPr/>
+        <p:nvPr/>
+      </p:nvGrpSpPr>
+      <p:grpSpPr>
+        <a:xfrm>
+          <a:off x="0" y="0"/>
+          <a:ext cx="0" cy="0"/>
+          <a:chOff x="0" y="0"/>
+          <a:chExt cx="0" cy="0"/>
+        </a:xfrm>
+      </p:grpSpPr>
+      <p:sp>
+        <p:nvSpPr>
+          <p:cNvPr id="2" name="Slide Image Placeholder 1"/>
+          <p:cNvSpPr>
+            <a:spLocks noGrp="1"/>
+          </p:cNvSpPr>
+          <p:nvPr>
+            <p:ph type="sldImg" idx="2"/>
+          </p:nvPr>
+        </p:nvSpPr>
+        <p:spPr/>
+      </p:sp>
+      <p:sp>
+        <p:nvSpPr>
+          <p:cNvPr id="3" name="Notes Placeholder 2"/>
+          <p:cNvSpPr>
+            <a:spLocks noGrp="1"/>
+          </p:cNvSpPr>
+          <p:nvPr>
+            <p:ph type="body" idx="3" sz="quarter"/>
+          </p:nvPr>
+        </p:nvSpPr>
+        <p:spPr/>
+        <p:txBody>
+          <a:bodyPr/>
+          <a:lstStyle/>
+          <a:p>
+            <a:r>
+              <a:t>SAMPLE 07 (samples/07_ui_demos.py): a stdlib-only web server on top of jev_client.DecisionClient - so it runs on local Laya by default and on TypeSafe Jev when JEV_BASE_URL / JEV_API_KEY are set. Open http://localhost:8765. One demo per primitive.</a:t>
+            </a:r>
+          </a:p>
+          <a:p/>
+          <a:p>
+            <a:r>
+              <a:t>TROLLEY (/trolley, Choice), modelled on the "The trolley problem, 100 times" demo from video 2 (X post by @FinanceYF5): one Choice per trial ("pull_the_lever" vs "leave_it_alone", criteria spell out who dies). Each trial uses freshly randomised wording (vehicle, people, sentence template), so the 100 decisions are not identical calls. First 5 trials at 1x, then 10x, like the original. Classic mode reproduces the video (100/100 pull). Sanity-check mode swaps the counts (1 on main, 5 on side) - Laya still pulls the lever (0 of 13 trials chose fewer deaths in our run), and a random-counts mode shows the same. Lesson: fast decision models pattern-match; put arithmetic and hard rules in code.</a:t>
+            </a:r>
+          </a:p>
+          <a:p/>
+          <a:p>
+            <a:r>
+              <a:t>CREATIVE (/creative, Noul), modelled on the designer demo (@heystefan_): type a request, every emoji in a pile of ~235 gets a Noul. Emoji that stand out for the request animate up under the prompt as decisions stream in, 8 per request. Because P(related) levels vary by prompt (wear ~0.9 max, lose weight ~0.3 max), the UI selects relative outliers (mean + 2.5 sd, at most 12). Speed on our laptop CPU: ~0.15-0.3 s per emoji decision, so a brand-new prompt takes ~40-75 s; the suggested prompts are pre-computed and cached at server start so they replay instantly. On a GPU or the Jev API this is real time.</a:t>
+            </a:r>
+          </a:p>
+          <a:p/>
+          <a:p>
+            <a:r>
+              <a:t>SCORE (/score): "How hot is this message?" - four Score questions about one customer message (frustration: calm/slightly annoyed/frustrated/furious; urgency: no time pressure ... emergency; churn risk: very unlikely ... about to cancel; sentiment: negative/neutral/positive), re-evaluated 0.7 s after you stop typing (~1.3-1.5 s per evaluation on the laptop CPU). Each gauge shades the levels by probability and puts a needle at the probability-weighted score, so you can see it land between levels. "Play escalation" types an invoice complaint sentence by sentence: frustration 0.96 -&gt; 1.42 -&gt; 1.84 -&gt; 2.11 -&gt; 2.44, churn jumps to 2.84 at "we will cancel". Priority = 0.40 frustration + 0.35 urgency + 0.25 churn (normalised) is computed in code and mapped to a route (normal queue / reply today / priority / escalate to retention; happy customers -&gt; testimonial for marketing). We first tried scoring short email subject lines - only urgency separated well, so Score works best on richer text.</a:t>
+            </a:r>
+          </a:p>
+          <a:p/>
+          <a:p>
+            <a:r>
+              <a:t>WHAT WE TRIED (creative): grouped Choice (10 emoji + "none" per question) was faster but less precise; mean-pooled encoder embeddings as a shortlist were no better than random; the emoji + name state with "Is this related to: X?" had the best ranking (AUC ~0.9 on labelled sets, except physics questions like magnets).</a:t>
             </a:r>
           </a:p>
         </p:txBody>
@@ -3926,7 +4145,7 @@
                 </a:solidFill>
                 <a:latin typeface="Segoe UI Semibold"/>
               </a:rPr>
-              <a:t>JEV · TEAM BRIEFING  ·  1 / 4</a:t>
+              <a:t>JEV · TEAM BRIEFING  ·  1 / 6</a:t>
             </a:r>
           </a:p>
         </p:txBody>
@@ -5173,6 +5392,59 @@
                 <a:latin typeface="Segoe UI"/>
               </a:rPr>
               <a:t>Demo from “Building a Harness with Jev” – LangChain</a:t>
+            </a:r>
+          </a:p>
+        </p:txBody>
+      </p:sp>
+      <p:sp>
+        <p:nvSpPr>
+          <p:cNvPr id="25" name="TextBox 24">
+            <a:hlinkClick r:id="rId5"/>
+          </p:cNvPr>
+          <p:cNvSpPr txBox="1"/>
+          <p:nvPr/>
+        </p:nvSpPr>
+        <p:spPr>
+          <a:xfrm>
+            <a:off x="457200" y="6309360"/>
+            <a:ext cx="6675120" cy="292608"/>
+          </a:xfrm>
+          <a:prstGeom prst="rect">
+            <a:avLst/>
+          </a:prstGeom>
+          <a:noFill/>
+        </p:spPr>
+        <p:txBody>
+          <a:bodyPr wrap="square" anchor="t" lIns="36576" rIns="36576" tIns="36576" bIns="36576">
+            <a:spAutoFit/>
+          </a:bodyPr>
+          <a:lstStyle/>
+          <a:p>
+            <a:pPr algn="l">
+              <a:lnSpc>
+                <a:spcPct val="100000"/>
+              </a:lnSpc>
+              <a:spcAft>
+                <a:spcPts val="0"/>
+              </a:spcAft>
+            </a:pPr>
+            <a:r>
+              <a:rPr sz="1200" b="0" i="0">
+                <a:solidFill>
+                  <a:srgbClr val="A3A9BC"/>
+                </a:solidFill>
+                <a:latin typeface="Segoe UI"/>
+              </a:rPr>
+              <a:t>Slides, samples &amp; UI demos:  </a:t>
+            </a:r>
+            <a:r>
+              <a:rPr sz="1200" b="0" i="0" u="sng">
+                <a:solidFill>
+                  <a:srgbClr val="22D3EE"/>
+                </a:solidFill>
+                <a:latin typeface="Segoe UI Semibold"/>
+              </a:rPr>
+              <a:t>github.com/stvonolf/jev-samples</a:t>
             </a:r>
           </a:p>
         </p:txBody>
@@ -5240,7 +5512,7 @@
                 </a:solidFill>
                 <a:latin typeface="Segoe UI Semibold"/>
               </a:rPr>
-              <a:t>HOW IT WORKS  ·  2 / 4</a:t>
+              <a:t>HOW IT WORKS  ·  2 / 6</a:t>
             </a:r>
           </a:p>
         </p:txBody>
@@ -6790,7 +7062,7 @@
                 </a:solidFill>
                 <a:latin typeface="Segoe UI Semibold"/>
               </a:rPr>
-              <a:t>FOR MARKETING SOFTWARE  ·  3 / 4</a:t>
+              <a:t>FOR MARKETING SOFTWARE  ·  3 / 6</a:t>
             </a:r>
           </a:p>
         </p:txBody>
@@ -8126,7 +8398,7 @@
       </p:graphicFrame>
       <p:pic>
         <p:nvPicPr>
-          <p:cNvPr id="5" name="Picture 4" descr="yt_I34qxJjyms0.jpg">
+          <p:cNvPr id="5" name="Picture 4" descr="yt_I34qxJjyms0_demos.jpg">
             <a:hlinkClick r:id="rId3"/>
           </p:cNvPr>
           <p:cNvPicPr>
@@ -8143,7 +8415,7 @@
         <p:spPr>
           <a:xfrm>
             <a:off x="7772400" y="1280160"/>
-            <a:ext cx="3959352" cy="2227136"/>
+            <a:ext cx="3959352" cy="1781708"/>
           </a:xfrm>
           <a:prstGeom prst="rect">
             <a:avLst/>
@@ -8165,7 +8437,7 @@
         </p:nvSpPr>
         <p:spPr>
           <a:xfrm>
-            <a:off x="7772400" y="3529584"/>
+            <a:off x="7772400" y="3098444"/>
             <a:ext cx="3977639" cy="274320"/>
           </a:xfrm>
           <a:prstGeom prst="rect">
@@ -8207,8 +8479,8 @@
         </p:nvSpPr>
         <p:spPr>
           <a:xfrm>
-            <a:off x="7772400" y="3840480"/>
-            <a:ext cx="3977639" cy="1005840"/>
+            <a:off x="7772400" y="3445916"/>
+            <a:ext cx="3977639" cy="1463040"/>
           </a:xfrm>
           <a:prstGeom prst="rect">
             <a:avLst/>
@@ -8226,7 +8498,7 @@
                 <a:spcPct val="100000"/>
               </a:lnSpc>
               <a:spcAft>
-                <a:spcPts val="300"/>
+                <a:spcPts val="400"/>
               </a:spcAft>
             </a:pPr>
             <a:r>
@@ -8254,7 +8526,7 @@
                 <a:spcPct val="100000"/>
               </a:lnSpc>
               <a:spcAft>
-                <a:spcPts val="300"/>
+                <a:spcPts val="400"/>
               </a:spcAft>
             </a:pPr>
             <a:r>
@@ -8273,7 +8545,35 @@
                 </a:solidFill>
                 <a:latin typeface="Segoe UI"/>
               </a:rPr>
-              <a:t>driving sim, trolley problem 100/100, voice-controlled drawing app, live slop detector, Laya playing Snake at ~60 decisions/s</a:t>
+              <a:t>driving sim, trolley problem 100/100, designer's emoji explorer, voice-controlled drawing app, live slop detector, Laya playing Snake at ~60 decisions/s</a:t>
+            </a:r>
+          </a:p>
+          <a:p>
+            <a:pPr algn="l">
+              <a:lnSpc>
+                <a:spcPct val="100000"/>
+              </a:lnSpc>
+              <a:spcAft>
+                <a:spcPts val="400"/>
+              </a:spcAft>
+            </a:pPr>
+            <a:r>
+              <a:rPr sz="1050" b="0" i="0">
+                <a:solidFill>
+                  <a:srgbClr val="22D3EE"/>
+                </a:solidFill>
+                <a:latin typeface="Segoe UI Semibold"/>
+              </a:rPr>
+              <a:t>We rebuilt two of them </a:t>
+            </a:r>
+            <a:r>
+              <a:rPr sz="1050" b="0" i="0">
+                <a:solidFill>
+                  <a:srgbClr val="22D3EE"/>
+                </a:solidFill>
+                <a:latin typeface="Segoe UI"/>
+              </a:rPr>
+              <a:t>→ slide 6</a:t>
             </a:r>
           </a:p>
         </p:txBody>
@@ -8917,7 +9217,7 @@
                 </a:solidFill>
                 <a:latin typeface="Segoe UI Semibold"/>
               </a:rPr>
-              <a:t>HANDS-ON  ·  4 / 4</a:t>
+              <a:t>GETTING ACCESS  ·  4 / 6</a:t>
             </a:r>
           </a:p>
         </p:txBody>
@@ -8959,7 +9259,7 @@
                 </a:solidFill>
                 <a:latin typeface="Segoe UI Semibold"/>
               </a:rPr>
-              <a:t>We built it: 6 samples running locally on Laya</a:t>
+              <a:t>Jev is not publicly available yet - not even in Microsoft Foundry</a:t>
             </a:r>
           </a:p>
         </p:txBody>
@@ -9001,22 +9301,1852 @@
                 </a:solidFill>
                 <a:latin typeface="Segoe UI"/>
               </a:rPr>
-              <a:t>Laya: open-source (Apache-2.0), Jev-compatible, 421M params, same /v1/systemone shape. Runs on a laptop CPU.</a:t>
+              <a:t>Early access since 15 Sep 2026, sign-up required. Three ways to work with a System One model today:</a:t>
+            </a:r>
+          </a:p>
+        </p:txBody>
+      </p:sp>
+      <p:sp>
+        <p:nvSpPr>
+          <p:cNvPr id="5" name="Rounded Rectangle 4"/>
+          <p:cNvSpPr/>
+          <p:nvPr/>
+        </p:nvSpPr>
+        <p:spPr>
+          <a:xfrm>
+            <a:off x="457200" y="1600200"/>
+            <a:ext cx="3611880" cy="2834640"/>
+          </a:xfrm>
+          <a:prstGeom prst="roundRect">
+            <a:avLst>
+              <a:gd name="adj" fmla="val 6000"/>
+            </a:avLst>
+          </a:prstGeom>
+          <a:solidFill>
+            <a:srgbClr val="1A1D27"/>
+          </a:solidFill>
+          <a:ln>
+            <a:noFill/>
+          </a:ln>
+          <a:effectLst/>
+        </p:spPr>
+        <p:style>
+          <a:lnRef idx="1">
+            <a:schemeClr val="accent1"/>
+          </a:lnRef>
+          <a:fillRef idx="3">
+            <a:schemeClr val="accent1"/>
+          </a:fillRef>
+          <a:effectRef idx="2">
+            <a:schemeClr val="accent1"/>
+          </a:effectRef>
+          <a:fontRef idx="minor">
+            <a:schemeClr val="lt1"/>
+          </a:fontRef>
+        </p:style>
+        <p:txBody>
+          <a:bodyPr rtlCol="0" anchor="ctr"/>
+          <a:lstStyle/>
+          <a:p/>
+        </p:txBody>
+      </p:sp>
+      <p:sp>
+        <p:nvSpPr>
+          <p:cNvPr id="6" name="Rectangle 5"/>
+          <p:cNvSpPr/>
+          <p:nvPr/>
+        </p:nvSpPr>
+        <p:spPr>
+          <a:xfrm>
+            <a:off x="457200" y="1600200"/>
+            <a:ext cx="3611880" cy="64008"/>
+          </a:xfrm>
+          <a:prstGeom prst="rect">
+            <a:avLst/>
+          </a:prstGeom>
+          <a:solidFill>
+            <a:srgbClr val="FBBF24"/>
+          </a:solidFill>
+          <a:ln>
+            <a:noFill/>
+          </a:ln>
+          <a:effectLst/>
+        </p:spPr>
+        <p:style>
+          <a:lnRef idx="1">
+            <a:schemeClr val="accent1"/>
+          </a:lnRef>
+          <a:fillRef idx="3">
+            <a:schemeClr val="accent1"/>
+          </a:fillRef>
+          <a:effectRef idx="2">
+            <a:schemeClr val="accent1"/>
+          </a:effectRef>
+          <a:fontRef idx="minor">
+            <a:schemeClr val="lt1"/>
+          </a:fontRef>
+        </p:style>
+        <p:txBody>
+          <a:bodyPr rtlCol="0" anchor="ctr"/>
+          <a:lstStyle/>
+          <a:p/>
+        </p:txBody>
+      </p:sp>
+      <p:sp>
+        <p:nvSpPr>
+          <p:cNvPr id="7" name="TextBox 6"/>
+          <p:cNvSpPr txBox="1"/>
+          <p:nvPr/>
+        </p:nvSpPr>
+        <p:spPr>
+          <a:xfrm>
+            <a:off x="621792" y="1746504"/>
+            <a:ext cx="3337560" cy="365760"/>
+          </a:xfrm>
+          <a:prstGeom prst="rect">
+            <a:avLst/>
+          </a:prstGeom>
+          <a:noFill/>
+        </p:spPr>
+        <p:txBody>
+          <a:bodyPr wrap="square" anchor="t" lIns="36576" rIns="36576" tIns="36576" bIns="36576">
+            <a:spAutoFit/>
+          </a:bodyPr>
+          <a:lstStyle/>
+          <a:p>
+            <a:pPr algn="l">
+              <a:lnSpc>
+                <a:spcPct val="100000"/>
+              </a:lnSpc>
+              <a:spcAft>
+                <a:spcPts val="0"/>
+              </a:spcAft>
+            </a:pPr>
+            <a:r>
+              <a:rPr sz="1450" b="0" i="0">
+                <a:solidFill>
+                  <a:srgbClr val="FBBF24"/>
+                </a:solidFill>
+                <a:latin typeface="Segoe UI Semibold"/>
+              </a:rPr>
+              <a:t>①  TypeSafe API  (sign-up)</a:t>
+            </a:r>
+          </a:p>
+        </p:txBody>
+      </p:sp>
+      <p:sp>
+        <p:nvSpPr>
+          <p:cNvPr id="8" name="TextBox 7"/>
+          <p:cNvSpPr txBox="1"/>
+          <p:nvPr/>
+        </p:nvSpPr>
+        <p:spPr>
+          <a:xfrm>
+            <a:off x="621792" y="2148840"/>
+            <a:ext cx="3337560" cy="1920240"/>
+          </a:xfrm>
+          <a:prstGeom prst="rect">
+            <a:avLst/>
+          </a:prstGeom>
+          <a:noFill/>
+        </p:spPr>
+        <p:txBody>
+          <a:bodyPr wrap="square" anchor="t" lIns="36576" rIns="36576" tIns="36576" bIns="36576">
+            <a:spAutoFit/>
+          </a:bodyPr>
+          <a:lstStyle/>
+          <a:p>
+            <a:pPr algn="l">
+              <a:lnSpc>
+                <a:spcPct val="100000"/>
+              </a:lnSpc>
+              <a:spcAft>
+                <a:spcPts val="500"/>
+              </a:spcAft>
+            </a:pPr>
+            <a:r>
+              <a:rPr sz="1050" b="0" i="0">
+                <a:solidFill>
+                  <a:srgbClr val="FBBF24"/>
+                </a:solidFill>
+                <a:latin typeface="Segoe UI"/>
+              </a:rPr>
+              <a:t>•  </a:t>
+            </a:r>
+            <a:r>
+              <a:rPr sz="1050" b="0" i="0">
+                <a:solidFill>
+                  <a:srgbClr val="F5F6FA"/>
+                </a:solidFill>
+                <a:latin typeface="Segoe UI"/>
+              </a:rPr>
+              <a:t>Apply for the preview at typesafe.ai, then create an API key (comes with free credit).</a:t>
+            </a:r>
+          </a:p>
+          <a:p>
+            <a:pPr algn="l">
+              <a:lnSpc>
+                <a:spcPct val="100000"/>
+              </a:lnSpc>
+              <a:spcAft>
+                <a:spcPts val="500"/>
+              </a:spcAft>
+            </a:pPr>
+            <a:r>
+              <a:rPr sz="1050" b="0" i="0">
+                <a:solidFill>
+                  <a:srgbClr val="FBBF24"/>
+                </a:solidFill>
+                <a:latin typeface="Segoe UI"/>
+              </a:rPr>
+              <a:t>•  </a:t>
+            </a:r>
+            <a:r>
+              <a:rPr sz="1050" b="0" i="0">
+                <a:solidFill>
+                  <a:srgbClr val="F5F6FA"/>
+                </a:solidFill>
+                <a:latin typeface="Segoe UI"/>
+              </a:rPr>
+              <a:t>POST api.typesafe.ai/v1/systemone, model “jev-latest”; SDKs and langchain-typesafe.</a:t>
+            </a:r>
+          </a:p>
+          <a:p>
+            <a:pPr algn="l">
+              <a:lnSpc>
+                <a:spcPct val="100000"/>
+              </a:lnSpc>
+              <a:spcAft>
+                <a:spcPts val="500"/>
+              </a:spcAft>
+            </a:pPr>
+            <a:r>
+              <a:rPr sz="1050" b="0" i="0">
+                <a:solidFill>
+                  <a:srgbClr val="FBBF24"/>
+                </a:solidFill>
+                <a:latin typeface="Segoe UI"/>
+              </a:rPr>
+              <a:t>•  </a:t>
+            </a:r>
+            <a:r>
+              <a:rPr sz="1050" b="0" i="0">
+                <a:solidFill>
+                  <a:srgbClr val="F5F6FA"/>
+                </a:solidFill>
+                <a:latin typeface="Segoe UI"/>
+              </a:rPr>
+              <a:t>$0.042 per 1M input tokens, output free · 250k tokens/s, 1,200 requests/min.</a:t>
+            </a:r>
+          </a:p>
+          <a:p>
+            <a:pPr algn="l">
+              <a:lnSpc>
+                <a:spcPct val="100000"/>
+              </a:lnSpc>
+              <a:spcAft>
+                <a:spcPts val="500"/>
+              </a:spcAft>
+            </a:pPr>
+            <a:r>
+              <a:rPr sz="1050" b="0" i="0">
+                <a:solidFill>
+                  <a:srgbClr val="FBBF24"/>
+                </a:solidFill>
+                <a:latin typeface="Segoe UI"/>
+              </a:rPr>
+              <a:t>•  </a:t>
+            </a:r>
+            <a:r>
+              <a:rPr sz="1050" b="0" i="0">
+                <a:solidFill>
+                  <a:srgbClr val="F5F6FA"/>
+                </a:solidFill>
+                <a:latin typeface="Segoe UI"/>
+              </a:rPr>
+              <a:t>Our samples: set JEV_BASE_URL + JEV_API_KEY.</a:t>
+            </a:r>
+          </a:p>
+        </p:txBody>
+      </p:sp>
+      <p:sp>
+        <p:nvSpPr>
+          <p:cNvPr id="9" name="TextBox 8">
+            <a:hlinkClick r:id="rId2"/>
+          </p:cNvPr>
+          <p:cNvSpPr txBox="1"/>
+          <p:nvPr/>
+        </p:nvSpPr>
+        <p:spPr>
+          <a:xfrm>
+            <a:off x="621792" y="4069079"/>
+            <a:ext cx="3337560" cy="292608"/>
+          </a:xfrm>
+          <a:prstGeom prst="rect">
+            <a:avLst/>
+          </a:prstGeom>
+          <a:noFill/>
+        </p:spPr>
+        <p:txBody>
+          <a:bodyPr wrap="square" anchor="t" lIns="36576" rIns="36576" tIns="36576" bIns="36576">
+            <a:spAutoFit/>
+          </a:bodyPr>
+          <a:lstStyle/>
+          <a:p>
+            <a:pPr algn="l">
+              <a:lnSpc>
+                <a:spcPct val="100000"/>
+              </a:lnSpc>
+              <a:spcAft>
+                <a:spcPts val="0"/>
+              </a:spcAft>
+            </a:pPr>
+            <a:r>
+              <a:rPr sz="1000" b="0" i="0" u="sng">
+                <a:solidFill>
+                  <a:srgbClr val="FBBF24"/>
+                </a:solidFill>
+                <a:latin typeface="Segoe UI Semibold"/>
+              </a:rPr>
+              <a:t>docs.typesafe.ai</a:t>
+            </a:r>
+          </a:p>
+        </p:txBody>
+      </p:sp>
+      <p:sp>
+        <p:nvSpPr>
+          <p:cNvPr id="10" name="Rounded Rectangle 9"/>
+          <p:cNvSpPr/>
+          <p:nvPr/>
+        </p:nvSpPr>
+        <p:spPr>
+          <a:xfrm>
+            <a:off x="4288536" y="1600200"/>
+            <a:ext cx="3611880" cy="2834640"/>
+          </a:xfrm>
+          <a:prstGeom prst="roundRect">
+            <a:avLst>
+              <a:gd name="adj" fmla="val 6000"/>
+            </a:avLst>
+          </a:prstGeom>
+          <a:solidFill>
+            <a:srgbClr val="1A1D27"/>
+          </a:solidFill>
+          <a:ln>
+            <a:noFill/>
+          </a:ln>
+          <a:effectLst/>
+        </p:spPr>
+        <p:style>
+          <a:lnRef idx="1">
+            <a:schemeClr val="accent1"/>
+          </a:lnRef>
+          <a:fillRef idx="3">
+            <a:schemeClr val="accent1"/>
+          </a:fillRef>
+          <a:effectRef idx="2">
+            <a:schemeClr val="accent1"/>
+          </a:effectRef>
+          <a:fontRef idx="minor">
+            <a:schemeClr val="lt1"/>
+          </a:fontRef>
+        </p:style>
+        <p:txBody>
+          <a:bodyPr rtlCol="0" anchor="ctr"/>
+          <a:lstStyle/>
+          <a:p/>
+        </p:txBody>
+      </p:sp>
+      <p:sp>
+        <p:nvSpPr>
+          <p:cNvPr id="11" name="Rectangle 10"/>
+          <p:cNvSpPr/>
+          <p:nvPr/>
+        </p:nvSpPr>
+        <p:spPr>
+          <a:xfrm>
+            <a:off x="4288536" y="1600200"/>
+            <a:ext cx="3611880" cy="64008"/>
+          </a:xfrm>
+          <a:prstGeom prst="rect">
+            <a:avLst/>
+          </a:prstGeom>
+          <a:solidFill>
+            <a:srgbClr val="22D3EE"/>
+          </a:solidFill>
+          <a:ln>
+            <a:noFill/>
+          </a:ln>
+          <a:effectLst/>
+        </p:spPr>
+        <p:style>
+          <a:lnRef idx="1">
+            <a:schemeClr val="accent1"/>
+          </a:lnRef>
+          <a:fillRef idx="3">
+            <a:schemeClr val="accent1"/>
+          </a:fillRef>
+          <a:effectRef idx="2">
+            <a:schemeClr val="accent1"/>
+          </a:effectRef>
+          <a:fontRef idx="minor">
+            <a:schemeClr val="lt1"/>
+          </a:fontRef>
+        </p:style>
+        <p:txBody>
+          <a:bodyPr rtlCol="0" anchor="ctr"/>
+          <a:lstStyle/>
+          <a:p/>
+        </p:txBody>
+      </p:sp>
+      <p:sp>
+        <p:nvSpPr>
+          <p:cNvPr id="12" name="TextBox 11"/>
+          <p:cNvSpPr txBox="1"/>
+          <p:nvPr/>
+        </p:nvSpPr>
+        <p:spPr>
+          <a:xfrm>
+            <a:off x="4453128" y="1746504"/>
+            <a:ext cx="3337560" cy="365760"/>
+          </a:xfrm>
+          <a:prstGeom prst="rect">
+            <a:avLst/>
+          </a:prstGeom>
+          <a:noFill/>
+        </p:spPr>
+        <p:txBody>
+          <a:bodyPr wrap="square" anchor="t" lIns="36576" rIns="36576" tIns="36576" bIns="36576">
+            <a:spAutoFit/>
+          </a:bodyPr>
+          <a:lstStyle/>
+          <a:p>
+            <a:pPr algn="l">
+              <a:lnSpc>
+                <a:spcPct val="100000"/>
+              </a:lnSpc>
+              <a:spcAft>
+                <a:spcPts val="0"/>
+              </a:spcAft>
+            </a:pPr>
+            <a:r>
+              <a:rPr sz="1450" b="0" i="0">
+                <a:solidFill>
+                  <a:srgbClr val="22D3EE"/>
+                </a:solidFill>
+                <a:latin typeface="Segoe UI Semibold"/>
+              </a:rPr>
+              <a:t>②  Microsoft Foundry agent</a:t>
+            </a:r>
+          </a:p>
+        </p:txBody>
+      </p:sp>
+      <p:sp>
+        <p:nvSpPr>
+          <p:cNvPr id="13" name="TextBox 12"/>
+          <p:cNvSpPr txBox="1"/>
+          <p:nvPr/>
+        </p:nvSpPr>
+        <p:spPr>
+          <a:xfrm>
+            <a:off x="4453128" y="2148840"/>
+            <a:ext cx="3337560" cy="1920240"/>
+          </a:xfrm>
+          <a:prstGeom prst="rect">
+            <a:avLst/>
+          </a:prstGeom>
+          <a:noFill/>
+        </p:spPr>
+        <p:txBody>
+          <a:bodyPr wrap="square" anchor="t" lIns="36576" rIns="36576" tIns="36576" bIns="36576">
+            <a:spAutoFit/>
+          </a:bodyPr>
+          <a:lstStyle/>
+          <a:p>
+            <a:pPr algn="l">
+              <a:lnSpc>
+                <a:spcPct val="100000"/>
+              </a:lnSpc>
+              <a:spcAft>
+                <a:spcPts val="500"/>
+              </a:spcAft>
+            </a:pPr>
+            <a:r>
+              <a:rPr sz="1050" b="0" i="0">
+                <a:solidFill>
+                  <a:srgbClr val="22D3EE"/>
+                </a:solidFill>
+                <a:latin typeface="Segoe UI"/>
+              </a:rPr>
+              <a:t>•  </a:t>
+            </a:r>
+            <a:r>
+              <a:rPr sz="1050" b="0" i="0">
+                <a:solidFill>
+                  <a:srgbClr val="F5F6FA"/>
+                </a:solidFill>
+                <a:latin typeface="Segoe UI"/>
+              </a:rPr>
+              <a:t>Not in the Foundry model catalog - you bring your own TypeSafe key.</a:t>
+            </a:r>
+          </a:p>
+          <a:p>
+            <a:pPr algn="l">
+              <a:lnSpc>
+                <a:spcPct val="100000"/>
+              </a:lnSpc>
+              <a:spcAft>
+                <a:spcPts val="500"/>
+              </a:spcAft>
+            </a:pPr>
+            <a:r>
+              <a:rPr sz="1050" b="0" i="0">
+                <a:solidFill>
+                  <a:srgbClr val="22D3EE"/>
+                </a:solidFill>
+                <a:latin typeface="Segoe UI"/>
+              </a:rPr>
+              <a:t>•  </a:t>
+            </a:r>
+            <a:r>
+              <a:rPr sz="1050" b="0" i="0">
+                <a:solidFill>
+                  <a:srgbClr val="F5F6FA"/>
+                </a:solidFill>
+                <a:latin typeface="Segoe UI"/>
+              </a:rPr>
+              <a:t>Add an OpenAPI tool “evaluate_with_jev” (POST /v1/systemone) with a “Bearer &lt;key&gt;” connection.</a:t>
+            </a:r>
+          </a:p>
+          <a:p>
+            <a:pPr algn="l">
+              <a:lnSpc>
+                <a:spcPct val="100000"/>
+              </a:lnSpc>
+              <a:spcAft>
+                <a:spcPts val="500"/>
+              </a:spcAft>
+            </a:pPr>
+            <a:r>
+              <a:rPr sz="1050" b="0" i="0">
+                <a:solidFill>
+                  <a:srgbClr val="22D3EE"/>
+                </a:solidFill>
+                <a:latin typeface="Segoe UI"/>
+              </a:rPr>
+              <a:t>•  </a:t>
+            </a:r>
+            <a:r>
+              <a:rPr sz="1050" b="0" i="0">
+                <a:solidFill>
+                  <a:srgbClr val="F5F6FA"/>
+                </a:solidFill>
+                <a:latin typeface="Segoe UI"/>
+              </a:rPr>
+              <a:t>Agent instructions: always call Jev, use its values, never classify on its own.</a:t>
+            </a:r>
+          </a:p>
+          <a:p>
+            <a:pPr algn="l">
+              <a:lnSpc>
+                <a:spcPct val="100000"/>
+              </a:lnSpc>
+              <a:spcAft>
+                <a:spcPts val="500"/>
+              </a:spcAft>
+            </a:pPr>
+            <a:r>
+              <a:rPr sz="1050" b="0" i="0">
+                <a:solidFill>
+                  <a:srgbClr val="22D3EE"/>
+                </a:solidFill>
+                <a:latin typeface="Segoe UI"/>
+              </a:rPr>
+              <a:t>•  </a:t>
+            </a:r>
+            <a:r>
+              <a:rPr sz="1050" b="0" i="0">
+                <a:solidFill>
+                  <a:srgbClr val="F5F6FA"/>
+                </a:solidFill>
+                <a:latin typeface="Segoe UI"/>
+              </a:rPr>
+              <a:t>“The room had no water and a towel was dirty” → billing 0.02 · tone frustrated (.74) · urgency 1.81 → handle today.</a:t>
+            </a:r>
+          </a:p>
+        </p:txBody>
+      </p:sp>
+      <p:sp>
+        <p:nvSpPr>
+          <p:cNvPr id="14" name="TextBox 13">
+            <a:hlinkClick r:id="rId3"/>
+          </p:cNvPr>
+          <p:cNvSpPr txBox="1"/>
+          <p:nvPr/>
+        </p:nvSpPr>
+        <p:spPr>
+          <a:xfrm>
+            <a:off x="4453128" y="4069079"/>
+            <a:ext cx="3337560" cy="292608"/>
+          </a:xfrm>
+          <a:prstGeom prst="rect">
+            <a:avLst/>
+          </a:prstGeom>
+          <a:noFill/>
+        </p:spPr>
+        <p:txBody>
+          <a:bodyPr wrap="square" anchor="t" lIns="36576" rIns="36576" tIns="36576" bIns="36576">
+            <a:spAutoFit/>
+          </a:bodyPr>
+          <a:lstStyle/>
+          <a:p>
+            <a:pPr algn="l">
+              <a:lnSpc>
+                <a:spcPct val="100000"/>
+              </a:lnSpc>
+              <a:spcAft>
+                <a:spcPts val="0"/>
+              </a:spcAft>
+            </a:pPr>
+            <a:r>
+              <a:rPr sz="1000" b="0" i="0" u="sng">
+                <a:solidFill>
+                  <a:srgbClr val="22D3EE"/>
+                </a:solidFill>
+                <a:latin typeface="Segoe UI Semibold"/>
+              </a:rPr>
+              <a:t>Microsoft Tech Community article</a:t>
+            </a:r>
+          </a:p>
+        </p:txBody>
+      </p:sp>
+      <p:sp>
+        <p:nvSpPr>
+          <p:cNvPr id="15" name="Rounded Rectangle 14"/>
+          <p:cNvSpPr/>
+          <p:nvPr/>
+        </p:nvSpPr>
+        <p:spPr>
+          <a:xfrm>
+            <a:off x="8119872" y="1600200"/>
+            <a:ext cx="3611880" cy="2834640"/>
+          </a:xfrm>
+          <a:prstGeom prst="roundRect">
+            <a:avLst>
+              <a:gd name="adj" fmla="val 6000"/>
+            </a:avLst>
+          </a:prstGeom>
+          <a:solidFill>
+            <a:srgbClr val="1A1D27"/>
+          </a:solidFill>
+          <a:ln>
+            <a:noFill/>
+          </a:ln>
+          <a:effectLst/>
+        </p:spPr>
+        <p:style>
+          <a:lnRef idx="1">
+            <a:schemeClr val="accent1"/>
+          </a:lnRef>
+          <a:fillRef idx="3">
+            <a:schemeClr val="accent1"/>
+          </a:fillRef>
+          <a:effectRef idx="2">
+            <a:schemeClr val="accent1"/>
+          </a:effectRef>
+          <a:fontRef idx="minor">
+            <a:schemeClr val="lt1"/>
+          </a:fontRef>
+        </p:style>
+        <p:txBody>
+          <a:bodyPr rtlCol="0" anchor="ctr"/>
+          <a:lstStyle/>
+          <a:p/>
+        </p:txBody>
+      </p:sp>
+      <p:sp>
+        <p:nvSpPr>
+          <p:cNvPr id="16" name="Rectangle 15"/>
+          <p:cNvSpPr/>
+          <p:nvPr/>
+        </p:nvSpPr>
+        <p:spPr>
+          <a:xfrm>
+            <a:off x="8119872" y="1600200"/>
+            <a:ext cx="3611880" cy="64008"/>
+          </a:xfrm>
+          <a:prstGeom prst="rect">
+            <a:avLst/>
+          </a:prstGeom>
+          <a:solidFill>
+            <a:srgbClr val="34D399"/>
+          </a:solidFill>
+          <a:ln>
+            <a:noFill/>
+          </a:ln>
+          <a:effectLst/>
+        </p:spPr>
+        <p:style>
+          <a:lnRef idx="1">
+            <a:schemeClr val="accent1"/>
+          </a:lnRef>
+          <a:fillRef idx="3">
+            <a:schemeClr val="accent1"/>
+          </a:fillRef>
+          <a:effectRef idx="2">
+            <a:schemeClr val="accent1"/>
+          </a:effectRef>
+          <a:fontRef idx="minor">
+            <a:schemeClr val="lt1"/>
+          </a:fontRef>
+        </p:style>
+        <p:txBody>
+          <a:bodyPr rtlCol="0" anchor="ctr"/>
+          <a:lstStyle/>
+          <a:p/>
+        </p:txBody>
+      </p:sp>
+      <p:sp>
+        <p:nvSpPr>
+          <p:cNvPr id="17" name="TextBox 16"/>
+          <p:cNvSpPr txBox="1"/>
+          <p:nvPr/>
+        </p:nvSpPr>
+        <p:spPr>
+          <a:xfrm>
+            <a:off x="8284464" y="1746504"/>
+            <a:ext cx="3337560" cy="365760"/>
+          </a:xfrm>
+          <a:prstGeom prst="rect">
+            <a:avLst/>
+          </a:prstGeom>
+          <a:noFill/>
+        </p:spPr>
+        <p:txBody>
+          <a:bodyPr wrap="square" anchor="t" lIns="36576" rIns="36576" tIns="36576" bIns="36576">
+            <a:spAutoFit/>
+          </a:bodyPr>
+          <a:lstStyle/>
+          <a:p>
+            <a:pPr algn="l">
+              <a:lnSpc>
+                <a:spcPct val="100000"/>
+              </a:lnSpc>
+              <a:spcAft>
+                <a:spcPts val="0"/>
+              </a:spcAft>
+            </a:pPr>
+            <a:r>
+              <a:rPr sz="1450" b="0" i="0">
+                <a:solidFill>
+                  <a:srgbClr val="34D399"/>
+                </a:solidFill>
+                <a:latin typeface="Segoe UI Semibold"/>
+              </a:rPr>
+              <a:t>③  Open-source Laya  (no sign-up)</a:t>
+            </a:r>
+          </a:p>
+        </p:txBody>
+      </p:sp>
+      <p:sp>
+        <p:nvSpPr>
+          <p:cNvPr id="18" name="TextBox 17"/>
+          <p:cNvSpPr txBox="1"/>
+          <p:nvPr/>
+        </p:nvSpPr>
+        <p:spPr>
+          <a:xfrm>
+            <a:off x="8284464" y="2148840"/>
+            <a:ext cx="3337560" cy="1920240"/>
+          </a:xfrm>
+          <a:prstGeom prst="rect">
+            <a:avLst/>
+          </a:prstGeom>
+          <a:noFill/>
+        </p:spPr>
+        <p:txBody>
+          <a:bodyPr wrap="square" anchor="t" lIns="36576" rIns="36576" tIns="36576" bIns="36576">
+            <a:spAutoFit/>
+          </a:bodyPr>
+          <a:lstStyle/>
+          <a:p>
+            <a:pPr algn="l">
+              <a:lnSpc>
+                <a:spcPct val="100000"/>
+              </a:lnSpc>
+              <a:spcAft>
+                <a:spcPts val="500"/>
+              </a:spcAft>
+            </a:pPr>
+            <a:r>
+              <a:rPr sz="1050" b="0" i="0">
+                <a:solidFill>
+                  <a:srgbClr val="34D399"/>
+                </a:solidFill>
+                <a:latin typeface="Segoe UI"/>
+              </a:rPr>
+              <a:t>•  </a:t>
+            </a:r>
+            <a:r>
+              <a:rPr sz="1050" b="0" i="0">
+                <a:solidFill>
+                  <a:srgbClr val="F5F6FA"/>
+                </a:solidFill>
+                <a:latin typeface="Segoe UI"/>
+              </a:rPr>
+              <a:t>Apache-2.0, 421M params, runs on a laptop CPU (~0.3 s per question; ~33 ms on a T4 GPU).</a:t>
+            </a:r>
+          </a:p>
+          <a:p>
+            <a:pPr algn="l">
+              <a:lnSpc>
+                <a:spcPct val="100000"/>
+              </a:lnSpc>
+              <a:spcAft>
+                <a:spcPts val="500"/>
+              </a:spcAft>
+            </a:pPr>
+            <a:r>
+              <a:rPr sz="1050" b="0" i="0">
+                <a:solidFill>
+                  <a:srgbClr val="34D399"/>
+                </a:solidFill>
+                <a:latin typeface="Segoe UI"/>
+              </a:rPr>
+              <a:t>•  </a:t>
+            </a:r>
+            <a:r>
+              <a:rPr sz="1050" b="0" i="0">
+                <a:solidFill>
+                  <a:srgbClr val="F5F6FA"/>
+                </a:solidFill>
+                <a:latin typeface="Segoe UI"/>
+              </a:rPr>
+              <a:t>Same state + questions → typed answers; laya-serve exposes /v1/systemone.</a:t>
+            </a:r>
+          </a:p>
+          <a:p>
+            <a:pPr algn="l">
+              <a:lnSpc>
+                <a:spcPct val="100000"/>
+              </a:lnSpc>
+              <a:spcAft>
+                <a:spcPts val="500"/>
+              </a:spcAft>
+            </a:pPr>
+            <a:r>
+              <a:rPr sz="1050" b="0" i="0">
+                <a:solidFill>
+                  <a:srgbClr val="34D399"/>
+                </a:solidFill>
+                <a:latin typeface="Segoe UI"/>
+              </a:rPr>
+              <a:t>•  </a:t>
+            </a:r>
+            <a:r>
+              <a:rPr sz="1050" b="0" i="0">
+                <a:solidFill>
+                  <a:srgbClr val="F5F6FA"/>
+                </a:solidFill>
+                <a:latin typeface="Segoe UI"/>
+              </a:rPr>
+              <a:t>Zero-shot quality is lower than Jev: test wording, fine-tune for production.</a:t>
+            </a:r>
+          </a:p>
+          <a:p>
+            <a:pPr algn="l">
+              <a:lnSpc>
+                <a:spcPct val="100000"/>
+              </a:lnSpc>
+              <a:spcAft>
+                <a:spcPts val="500"/>
+              </a:spcAft>
+            </a:pPr>
+            <a:r>
+              <a:rPr sz="1050" b="0" i="0">
+                <a:solidFill>
+                  <a:srgbClr val="34D399"/>
+                </a:solidFill>
+                <a:latin typeface="Segoe UI"/>
+              </a:rPr>
+              <a:t>•  </a:t>
+            </a:r>
+            <a:r>
+              <a:rPr sz="1050" b="0" i="0">
+                <a:solidFill>
+                  <a:srgbClr val="F5F6FA"/>
+                </a:solidFill>
+                <a:latin typeface="Segoe UI"/>
+              </a:rPr>
+              <a:t>Powers all our samples and UI demos.</a:t>
+            </a:r>
+          </a:p>
+        </p:txBody>
+      </p:sp>
+      <p:sp>
+        <p:nvSpPr>
+          <p:cNvPr id="19" name="TextBox 18">
+            <a:hlinkClick r:id="rId4"/>
+          </p:cNvPr>
+          <p:cNvSpPr txBox="1"/>
+          <p:nvPr/>
+        </p:nvSpPr>
+        <p:spPr>
+          <a:xfrm>
+            <a:off x="8284464" y="4069079"/>
+            <a:ext cx="3337560" cy="292608"/>
+          </a:xfrm>
+          <a:prstGeom prst="rect">
+            <a:avLst/>
+          </a:prstGeom>
+          <a:noFill/>
+        </p:spPr>
+        <p:txBody>
+          <a:bodyPr wrap="square" anchor="t" lIns="36576" rIns="36576" tIns="36576" bIns="36576">
+            <a:spAutoFit/>
+          </a:bodyPr>
+          <a:lstStyle/>
+          <a:p>
+            <a:pPr algn="l">
+              <a:lnSpc>
+                <a:spcPct val="100000"/>
+              </a:lnSpc>
+              <a:spcAft>
+                <a:spcPts val="0"/>
+              </a:spcAft>
+            </a:pPr>
+            <a:r>
+              <a:rPr sz="1000" b="0" i="0" u="sng">
+                <a:solidFill>
+                  <a:srgbClr val="34D399"/>
+                </a:solidFill>
+                <a:latin typeface="Segoe UI Semibold"/>
+              </a:rPr>
+              <a:t>huggingface.co/convaiinnovations/laya</a:t>
+            </a:r>
+          </a:p>
+        </p:txBody>
+      </p:sp>
+      <p:sp>
+        <p:nvSpPr>
+          <p:cNvPr id="20" name="Rounded Rectangle 19"/>
+          <p:cNvSpPr/>
+          <p:nvPr/>
+        </p:nvSpPr>
+        <p:spPr>
+          <a:xfrm>
+            <a:off x="457200" y="4617720"/>
+            <a:ext cx="6812280" cy="1874519"/>
+          </a:xfrm>
+          <a:prstGeom prst="roundRect">
+            <a:avLst>
+              <a:gd name="adj" fmla="val 6000"/>
+            </a:avLst>
+          </a:prstGeom>
+          <a:solidFill>
+            <a:srgbClr val="1A1D27"/>
+          </a:solidFill>
+          <a:ln>
+            <a:noFill/>
+          </a:ln>
+          <a:effectLst/>
+        </p:spPr>
+        <p:style>
+          <a:lnRef idx="1">
+            <a:schemeClr val="accent1"/>
+          </a:lnRef>
+          <a:fillRef idx="3">
+            <a:schemeClr val="accent1"/>
+          </a:fillRef>
+          <a:effectRef idx="2">
+            <a:schemeClr val="accent1"/>
+          </a:effectRef>
+          <a:fontRef idx="minor">
+            <a:schemeClr val="lt1"/>
+          </a:fontRef>
+        </p:style>
+        <p:txBody>
+          <a:bodyPr rtlCol="0" anchor="ctr"/>
+          <a:lstStyle/>
+          <a:p/>
+        </p:txBody>
+      </p:sp>
+      <p:sp>
+        <p:nvSpPr>
+          <p:cNvPr id="21" name="TextBox 20"/>
+          <p:cNvSpPr txBox="1"/>
+          <p:nvPr/>
+        </p:nvSpPr>
+        <p:spPr>
+          <a:xfrm>
+            <a:off x="621792" y="4690872"/>
+            <a:ext cx="6583680" cy="274320"/>
+          </a:xfrm>
+          <a:prstGeom prst="rect">
+            <a:avLst/>
+          </a:prstGeom>
+          <a:noFill/>
+        </p:spPr>
+        <p:txBody>
+          <a:bodyPr wrap="square" anchor="t" lIns="36576" rIns="36576" tIns="36576" bIns="36576">
+            <a:spAutoFit/>
+          </a:bodyPr>
+          <a:lstStyle/>
+          <a:p>
+            <a:pPr algn="l">
+              <a:lnSpc>
+                <a:spcPct val="100000"/>
+              </a:lnSpc>
+              <a:spcAft>
+                <a:spcPts val="0"/>
+              </a:spcAft>
+            </a:pPr>
+            <a:r>
+              <a:rPr sz="1200" b="0" i="0">
+                <a:solidFill>
+                  <a:srgbClr val="F5F6FA"/>
+                </a:solidFill>
+                <a:latin typeface="Segoe UI Semibold"/>
+              </a:rPr>
+              <a:t>Pattern from the Foundry article: </a:t>
+            </a:r>
+            <a:r>
+              <a:rPr sz="1200" b="0" i="0">
+                <a:solidFill>
+                  <a:srgbClr val="A3A9BC"/>
+                </a:solidFill>
+                <a:latin typeface="Segoe UI"/>
+              </a:rPr>
+              <a:t>Jev as a judgement layer</a:t>
+            </a:r>
+          </a:p>
+        </p:txBody>
+      </p:sp>
+      <p:sp>
+        <p:nvSpPr>
+          <p:cNvPr id="22" name="Pentagon 21"/>
+          <p:cNvSpPr/>
+          <p:nvPr/>
+        </p:nvSpPr>
+        <p:spPr>
+          <a:xfrm>
+            <a:off x="621792" y="5074920"/>
+            <a:ext cx="1417320" cy="640080"/>
+          </a:xfrm>
+          <a:prstGeom prst="homePlate">
+            <a:avLst/>
+          </a:prstGeom>
+          <a:solidFill>
+            <a:srgbClr val="242836"/>
+          </a:solidFill>
+          <a:ln>
+            <a:noFill/>
+          </a:ln>
+          <a:effectLst/>
+        </p:spPr>
+        <p:style>
+          <a:lnRef idx="1">
+            <a:schemeClr val="accent1"/>
+          </a:lnRef>
+          <a:fillRef idx="3">
+            <a:schemeClr val="accent1"/>
+          </a:fillRef>
+          <a:effectRef idx="2">
+            <a:schemeClr val="accent1"/>
+          </a:effectRef>
+          <a:fontRef idx="minor">
+            <a:schemeClr val="lt1"/>
+          </a:fontRef>
+        </p:style>
+        <p:txBody>
+          <a:bodyPr rtlCol="0" anchor="ctr" wrap="square" lIns="36576" rIns="36576" tIns="36576" bIns="36576"/>
+          <a:lstStyle/>
+          <a:p>
+            <a:pPr algn="ctr">
+              <a:lnSpc>
+                <a:spcPct val="100000"/>
+              </a:lnSpc>
+              <a:spcAft>
+                <a:spcPts val="0"/>
+              </a:spcAft>
+            </a:pPr>
+            <a:r>
+              <a:rPr sz="950" b="0" i="0">
+                <a:solidFill>
+                  <a:srgbClr val="F5F6FA"/>
+                </a:solidFill>
+                <a:latin typeface="Segoe UI"/>
+              </a:rPr>
+              <a:t>User / app</a:t>
+            </a:r>
+          </a:p>
+        </p:txBody>
+      </p:sp>
+      <p:sp>
+        <p:nvSpPr>
+          <p:cNvPr id="23" name="Chevron 22"/>
+          <p:cNvSpPr/>
+          <p:nvPr/>
+        </p:nvSpPr>
+        <p:spPr>
+          <a:xfrm>
+            <a:off x="1920240" y="5074920"/>
+            <a:ext cx="1417320" cy="640080"/>
+          </a:xfrm>
+          <a:prstGeom prst="chevron">
+            <a:avLst/>
+          </a:prstGeom>
+          <a:solidFill>
+            <a:srgbClr val="242836"/>
+          </a:solidFill>
+          <a:ln>
+            <a:noFill/>
+          </a:ln>
+          <a:effectLst/>
+        </p:spPr>
+        <p:style>
+          <a:lnRef idx="1">
+            <a:schemeClr val="accent1"/>
+          </a:lnRef>
+          <a:fillRef idx="3">
+            <a:schemeClr val="accent1"/>
+          </a:fillRef>
+          <a:effectRef idx="2">
+            <a:schemeClr val="accent1"/>
+          </a:effectRef>
+          <a:fontRef idx="minor">
+            <a:schemeClr val="lt1"/>
+          </a:fontRef>
+        </p:style>
+        <p:txBody>
+          <a:bodyPr rtlCol="0" anchor="ctr" wrap="square" lIns="36576" rIns="36576" tIns="36576" bIns="36576"/>
+          <a:lstStyle/>
+          <a:p>
+            <a:pPr algn="ctr">
+              <a:lnSpc>
+                <a:spcPct val="100000"/>
+              </a:lnSpc>
+              <a:spcAft>
+                <a:spcPts val="0"/>
+              </a:spcAft>
+            </a:pPr>
+            <a:r>
+              <a:rPr sz="950" b="0" i="0">
+                <a:solidFill>
+                  <a:srgbClr val="F5F6FA"/>
+                </a:solidFill>
+                <a:latin typeface="Segoe UI"/>
+              </a:rPr>
+              <a:t>Foundry agent
+or model</a:t>
+            </a:r>
+          </a:p>
+        </p:txBody>
+      </p:sp>
+      <p:sp>
+        <p:nvSpPr>
+          <p:cNvPr id="24" name="Chevron 23"/>
+          <p:cNvSpPr/>
+          <p:nvPr/>
+        </p:nvSpPr>
+        <p:spPr>
+          <a:xfrm>
+            <a:off x="3218688" y="5074920"/>
+            <a:ext cx="1417320" cy="640080"/>
+          </a:xfrm>
+          <a:prstGeom prst="chevron">
+            <a:avLst/>
+          </a:prstGeom>
+          <a:solidFill>
+            <a:srgbClr val="22D3EE"/>
+          </a:solidFill>
+          <a:ln>
+            <a:noFill/>
+          </a:ln>
+          <a:effectLst/>
+        </p:spPr>
+        <p:style>
+          <a:lnRef idx="1">
+            <a:schemeClr val="accent1"/>
+          </a:lnRef>
+          <a:fillRef idx="3">
+            <a:schemeClr val="accent1"/>
+          </a:fillRef>
+          <a:effectRef idx="2">
+            <a:schemeClr val="accent1"/>
+          </a:effectRef>
+          <a:fontRef idx="minor">
+            <a:schemeClr val="lt1"/>
+          </a:fontRef>
+        </p:style>
+        <p:txBody>
+          <a:bodyPr rtlCol="0" anchor="ctr" wrap="square" lIns="36576" rIns="36576" tIns="36576" bIns="36576"/>
+          <a:lstStyle/>
+          <a:p>
+            <a:pPr algn="ctr">
+              <a:lnSpc>
+                <a:spcPct val="100000"/>
+              </a:lnSpc>
+              <a:spcAft>
+                <a:spcPts val="0"/>
+              </a:spcAft>
+            </a:pPr>
+            <a:r>
+              <a:rPr sz="950" b="0" i="0">
+                <a:solidFill>
+                  <a:srgbClr val="0F1117"/>
+                </a:solidFill>
+                <a:latin typeface="Segoe UI Semibold"/>
+              </a:rPr>
+              <a:t>Jev judgement</a:t>
+            </a:r>
+          </a:p>
+        </p:txBody>
+      </p:sp>
+      <p:sp>
+        <p:nvSpPr>
+          <p:cNvPr id="25" name="Chevron 24"/>
+          <p:cNvSpPr/>
+          <p:nvPr/>
+        </p:nvSpPr>
+        <p:spPr>
+          <a:xfrm>
+            <a:off x="4517136" y="5074920"/>
+            <a:ext cx="1417320" cy="640080"/>
+          </a:xfrm>
+          <a:prstGeom prst="chevron">
+            <a:avLst/>
+          </a:prstGeom>
+          <a:solidFill>
+            <a:srgbClr val="242836"/>
+          </a:solidFill>
+          <a:ln>
+            <a:noFill/>
+          </a:ln>
+          <a:effectLst/>
+        </p:spPr>
+        <p:style>
+          <a:lnRef idx="1">
+            <a:schemeClr val="accent1"/>
+          </a:lnRef>
+          <a:fillRef idx="3">
+            <a:schemeClr val="accent1"/>
+          </a:fillRef>
+          <a:effectRef idx="2">
+            <a:schemeClr val="accent1"/>
+          </a:effectRef>
+          <a:fontRef idx="minor">
+            <a:schemeClr val="lt1"/>
+          </a:fontRef>
+        </p:style>
+        <p:txBody>
+          <a:bodyPr rtlCol="0" anchor="ctr" wrap="square" lIns="36576" rIns="36576" tIns="36576" bIns="36576"/>
+          <a:lstStyle/>
+          <a:p>
+            <a:pPr algn="ctr">
+              <a:lnSpc>
+                <a:spcPct val="100000"/>
+              </a:lnSpc>
+              <a:spcAft>
+                <a:spcPts val="0"/>
+              </a:spcAft>
+            </a:pPr>
+            <a:r>
+              <a:rPr sz="950" b="0" i="0">
+                <a:solidFill>
+                  <a:srgbClr val="F5F6FA"/>
+                </a:solidFill>
+                <a:latin typeface="Segoe UI"/>
+              </a:rPr>
+              <a:t>Business rules
+(code)</a:t>
+            </a:r>
+          </a:p>
+        </p:txBody>
+      </p:sp>
+      <p:sp>
+        <p:nvSpPr>
+          <p:cNvPr id="26" name="Chevron 25"/>
+          <p:cNvSpPr/>
+          <p:nvPr/>
+        </p:nvSpPr>
+        <p:spPr>
+          <a:xfrm>
+            <a:off x="5815583" y="5074920"/>
+            <a:ext cx="1417320" cy="640080"/>
+          </a:xfrm>
+          <a:prstGeom prst="chevron">
+            <a:avLst/>
+          </a:prstGeom>
+          <a:solidFill>
+            <a:srgbClr val="242836"/>
+          </a:solidFill>
+          <a:ln>
+            <a:noFill/>
+          </a:ln>
+          <a:effectLst/>
+        </p:spPr>
+        <p:style>
+          <a:lnRef idx="1">
+            <a:schemeClr val="accent1"/>
+          </a:lnRef>
+          <a:fillRef idx="3">
+            <a:schemeClr val="accent1"/>
+          </a:fillRef>
+          <a:effectRef idx="2">
+            <a:schemeClr val="accent1"/>
+          </a:effectRef>
+          <a:fontRef idx="minor">
+            <a:schemeClr val="lt1"/>
+          </a:fontRef>
+        </p:style>
+        <p:txBody>
+          <a:bodyPr rtlCol="0" anchor="ctr" wrap="square" lIns="36576" rIns="36576" tIns="36576" bIns="36576"/>
+          <a:lstStyle/>
+          <a:p>
+            <a:pPr algn="ctr">
+              <a:lnSpc>
+                <a:spcPct val="100000"/>
+              </a:lnSpc>
+              <a:spcAft>
+                <a:spcPts val="0"/>
+              </a:spcAft>
+            </a:pPr>
+            <a:r>
+              <a:rPr sz="950" b="0" i="0">
+                <a:solidFill>
+                  <a:srgbClr val="F5F6FA"/>
+                </a:solidFill>
+                <a:latin typeface="Segoe UI"/>
+              </a:rPr>
+              <a:t>Action /
+response</a:t>
+            </a:r>
+          </a:p>
+        </p:txBody>
+      </p:sp>
+      <p:sp>
+        <p:nvSpPr>
+          <p:cNvPr id="27" name="TextBox 26"/>
+          <p:cNvSpPr txBox="1"/>
+          <p:nvPr/>
+        </p:nvSpPr>
+        <p:spPr>
+          <a:xfrm>
+            <a:off x="621792" y="5806440"/>
+            <a:ext cx="6537960" cy="685800"/>
+          </a:xfrm>
+          <a:prstGeom prst="rect">
+            <a:avLst/>
+          </a:prstGeom>
+          <a:noFill/>
+        </p:spPr>
+        <p:txBody>
+          <a:bodyPr wrap="square" anchor="t" lIns="36576" rIns="36576" tIns="36576" bIns="36576">
+            <a:spAutoFit/>
+          </a:bodyPr>
+          <a:lstStyle/>
+          <a:p>
+            <a:pPr algn="l">
+              <a:lnSpc>
+                <a:spcPct val="100000"/>
+              </a:lnSpc>
+              <a:spcAft>
+                <a:spcPts val="0"/>
+              </a:spcAft>
+            </a:pPr>
+            <a:r>
+              <a:rPr sz="1050" b="0" i="0">
+                <a:solidFill>
+                  <a:srgbClr val="F5F6FA"/>
+                </a:solidFill>
+                <a:latin typeface="Segoe UI Semibold"/>
+              </a:rPr>
+              <a:t>Explainability for Model-as-a-Service: </a:t>
+            </a:r>
+            <a:r>
+              <a:rPr sz="1050" b="0" i="0">
+                <a:solidFill>
+                  <a:srgbClr val="A3A9BC"/>
+                </a:solidFill>
+                <a:latin typeface="Segoe UI"/>
+              </a:rPr>
+              <a:t>not SHAP-style feature attribution, but a measurable layer that checks an opaque hosted LLM's inputs, outputs and proposed actions against explicit criteria - with a confidence to gate on.</a:t>
+            </a:r>
+          </a:p>
+        </p:txBody>
+      </p:sp>
+      <p:sp>
+        <p:nvSpPr>
+          <p:cNvPr id="28" name="Rounded Rectangle 27"/>
+          <p:cNvSpPr/>
+          <p:nvPr/>
+        </p:nvSpPr>
+        <p:spPr>
+          <a:xfrm>
+            <a:off x="7452360" y="4617720"/>
+            <a:ext cx="4279392" cy="1874519"/>
+          </a:xfrm>
+          <a:prstGeom prst="roundRect">
+            <a:avLst>
+              <a:gd name="adj" fmla="val 6000"/>
+            </a:avLst>
+          </a:prstGeom>
+          <a:solidFill>
+            <a:srgbClr val="1A1D27"/>
+          </a:solidFill>
+          <a:ln w="15875">
+            <a:solidFill>
+              <a:srgbClr val="34D399"/>
+            </a:solidFill>
+          </a:ln>
+          <a:effectLst/>
+        </p:spPr>
+        <p:style>
+          <a:lnRef idx="1">
+            <a:schemeClr val="accent1"/>
+          </a:lnRef>
+          <a:fillRef idx="3">
+            <a:schemeClr val="accent1"/>
+          </a:fillRef>
+          <a:effectRef idx="2">
+            <a:schemeClr val="accent1"/>
+          </a:effectRef>
+          <a:fontRef idx="minor">
+            <a:schemeClr val="lt1"/>
+          </a:fontRef>
+        </p:style>
+        <p:txBody>
+          <a:bodyPr rtlCol="0" anchor="ctr"/>
+          <a:lstStyle/>
+          <a:p/>
+        </p:txBody>
+      </p:sp>
+      <p:sp>
+        <p:nvSpPr>
+          <p:cNvPr id="29" name="TextBox 28">
+            <a:hlinkClick r:id="rId5"/>
+          </p:cNvPr>
+          <p:cNvSpPr txBox="1"/>
+          <p:nvPr/>
+        </p:nvSpPr>
+        <p:spPr>
+          <a:xfrm>
+            <a:off x="7589520" y="4681728"/>
+            <a:ext cx="4023360" cy="292608"/>
+          </a:xfrm>
+          <a:prstGeom prst="rect">
+            <a:avLst/>
+          </a:prstGeom>
+          <a:noFill/>
+        </p:spPr>
+        <p:txBody>
+          <a:bodyPr wrap="square" anchor="t" lIns="36576" rIns="36576" tIns="36576" bIns="36576">
+            <a:spAutoFit/>
+          </a:bodyPr>
+          <a:lstStyle/>
+          <a:p>
+            <a:pPr algn="l">
+              <a:lnSpc>
+                <a:spcPct val="100000"/>
+              </a:lnSpc>
+              <a:spcAft>
+                <a:spcPts val="0"/>
+              </a:spcAft>
+            </a:pPr>
+            <a:r>
+              <a:rPr sz="1150" b="0" i="0">
+                <a:solidFill>
+                  <a:srgbClr val="A3A9BC"/>
+                </a:solidFill>
+                <a:latin typeface="Segoe UI"/>
+              </a:rPr>
+              <a:t>Run our samples:  </a:t>
+            </a:r>
+            <a:r>
+              <a:rPr sz="1150" b="0" i="0" u="sng">
+                <a:solidFill>
+                  <a:srgbClr val="34D399"/>
+                </a:solidFill>
+                <a:latin typeface="Segoe UI Semibold"/>
+              </a:rPr>
+              <a:t>github.com/stvonolf/jev-samples</a:t>
+            </a:r>
+          </a:p>
+        </p:txBody>
+      </p:sp>
+      <p:sp>
+        <p:nvSpPr>
+          <p:cNvPr id="30" name="TextBox 29"/>
+          <p:cNvSpPr txBox="1"/>
+          <p:nvPr/>
+        </p:nvSpPr>
+        <p:spPr>
+          <a:xfrm>
+            <a:off x="7589520" y="5029200"/>
+            <a:ext cx="4069080" cy="1463040"/>
+          </a:xfrm>
+          <a:prstGeom prst="rect">
+            <a:avLst/>
+          </a:prstGeom>
+          <a:noFill/>
+        </p:spPr>
+        <p:txBody>
+          <a:bodyPr wrap="square" anchor="t" lIns="36576" rIns="36576" tIns="36576" bIns="36576">
+            <a:spAutoFit/>
+          </a:bodyPr>
+          <a:lstStyle/>
+          <a:p>
+            <a:pPr algn="l">
+              <a:lnSpc>
+                <a:spcPct val="110000"/>
+              </a:lnSpc>
+              <a:spcAft>
+                <a:spcPts val="0"/>
+              </a:spcAft>
+            </a:pPr>
+            <a:r>
+              <a:rPr sz="900" b="0" i="0">
+                <a:solidFill>
+                  <a:srgbClr val="F5F6FA"/>
+                </a:solidFill>
+                <a:latin typeface="Consolas"/>
+              </a:rPr>
+              <a:t>git clone https://github.com/stvonolf/jev-samples</a:t>
+            </a:r>
+          </a:p>
+          <a:p>
+            <a:pPr algn="l">
+              <a:lnSpc>
+                <a:spcPct val="110000"/>
+              </a:lnSpc>
+              <a:spcAft>
+                <a:spcPts val="0"/>
+              </a:spcAft>
+            </a:pPr>
+            <a:r>
+              <a:rPr sz="900" b="0" i="0">
+                <a:solidFill>
+                  <a:srgbClr val="F5F6FA"/>
+                </a:solidFill>
+                <a:latin typeface="Consolas"/>
+              </a:rPr>
+              <a:t>cd jev-samples</a:t>
+            </a:r>
+          </a:p>
+          <a:p>
+            <a:pPr algn="l">
+              <a:lnSpc>
+                <a:spcPct val="110000"/>
+              </a:lnSpc>
+              <a:spcAft>
+                <a:spcPts val="0"/>
+              </a:spcAft>
+            </a:pPr>
+            <a:r>
+              <a:rPr sz="900" b="0" i="0">
+                <a:solidFill>
+                  <a:srgbClr val="F5F6FA"/>
+                </a:solidFill>
+                <a:latin typeface="Consolas"/>
+              </a:rPr>
+              <a:t>python -m venv .venv</a:t>
+            </a:r>
+          </a:p>
+          <a:p>
+            <a:pPr algn="l">
+              <a:lnSpc>
+                <a:spcPct val="110000"/>
+              </a:lnSpc>
+              <a:spcAft>
+                <a:spcPts val="0"/>
+              </a:spcAft>
+            </a:pPr>
+            <a:r>
+              <a:rPr sz="900" b="0" i="0">
+                <a:solidFill>
+                  <a:srgbClr val="F5F6FA"/>
+                </a:solidFill>
+                <a:latin typeface="Consolas"/>
+              </a:rPr>
+              <a:t>.venv\Scripts\pip install -r samples\requirements.txt</a:t>
+            </a:r>
+          </a:p>
+          <a:p>
+            <a:pPr algn="l">
+              <a:lnSpc>
+                <a:spcPct val="110000"/>
+              </a:lnSpc>
+              <a:spcAft>
+                <a:spcPts val="0"/>
+              </a:spcAft>
+            </a:pPr>
+            <a:r>
+              <a:rPr sz="900" b="0" i="0">
+                <a:solidFill>
+                  <a:srgbClr val="F5F6FA"/>
+                </a:solidFill>
+                <a:latin typeface="Consolas"/>
+              </a:rPr>
+              <a:t>cd samples</a:t>
+            </a:r>
+          </a:p>
+          <a:p>
+            <a:pPr algn="l">
+              <a:lnSpc>
+                <a:spcPct val="110000"/>
+              </a:lnSpc>
+              <a:spcAft>
+                <a:spcPts val="0"/>
+              </a:spcAft>
+            </a:pPr>
+            <a:r>
+              <a:rPr sz="900" b="0" i="0">
+                <a:solidFill>
+                  <a:srgbClr val="F5F6FA"/>
+                </a:solidFill>
+                <a:latin typeface="Consolas"/>
+              </a:rPr>
+              <a:t>..\.venv\Scripts\python 01_lead_scoring.py</a:t>
+            </a:r>
+          </a:p>
+          <a:p>
+            <a:pPr algn="l">
+              <a:lnSpc>
+                <a:spcPct val="110000"/>
+              </a:lnSpc>
+              <a:spcAft>
+                <a:spcPts val="0"/>
+              </a:spcAft>
+            </a:pPr>
+            <a:r>
+              <a:rPr sz="900" b="0" i="0">
+                <a:solidFill>
+                  <a:srgbClr val="F5F6FA"/>
+                </a:solidFill>
+                <a:latin typeface="Consolas"/>
+              </a:rPr>
+              <a:t>..\.venv\Scripts\python 07_ui_demos.py   # UI demos</a:t>
+            </a:r>
+          </a:p>
+        </p:txBody>
+      </p:sp>
+    </p:spTree>
+  </p:cSld>
+  <p:clrMapOvr>
+    <a:masterClrMapping/>
+  </p:clrMapOvr>
+</p:sld>
+</file>
+
+<file path=ppt/slides/slide5.xml><?xml version="1.0" encoding="utf-8"?>
+<p:sld xmlns:a="http://schemas.openxmlformats.org/drawingml/2006/main" xmlns:p="http://schemas.openxmlformats.org/presentationml/2006/main" xmlns:r="http://schemas.openxmlformats.org/officeDocument/2006/relationships">
+  <p:cSld>
+    <p:bg>
+      <p:bgPr>
+        <a:solidFill>
+          <a:srgbClr val="0F1117"/>
+        </a:solidFill>
+        <a:effectLst/>
+      </p:bgPr>
+    </p:bg>
+    <p:spTree>
+      <p:nvGrpSpPr>
+        <p:cNvPr id="1" name=""/>
+        <p:cNvGrpSpPr/>
+        <p:nvPr/>
+      </p:nvGrpSpPr>
+      <p:grpSpPr/>
+      <p:sp>
+        <p:nvSpPr>
+          <p:cNvPr id="2" name="TextBox 1"/>
+          <p:cNvSpPr txBox="1"/>
+          <p:nvPr/>
+        </p:nvSpPr>
+        <p:spPr>
+          <a:xfrm>
+            <a:off x="457200" y="292608"/>
+            <a:ext cx="8229600" cy="274320"/>
+          </a:xfrm>
+          <a:prstGeom prst="rect">
+            <a:avLst/>
+          </a:prstGeom>
+          <a:noFill/>
+        </p:spPr>
+        <p:txBody>
+          <a:bodyPr wrap="square" anchor="t" lIns="36576" rIns="36576" tIns="36576" bIns="36576">
+            <a:spAutoFit/>
+          </a:bodyPr>
+          <a:lstStyle/>
+          <a:p>
+            <a:pPr algn="l">
+              <a:lnSpc>
+                <a:spcPct val="100000"/>
+              </a:lnSpc>
+              <a:spcAft>
+                <a:spcPts val="0"/>
+              </a:spcAft>
+            </a:pPr>
+            <a:r>
+              <a:rPr sz="1100" b="0" i="0">
+                <a:solidFill>
+                  <a:srgbClr val="22D3EE"/>
+                </a:solidFill>
+                <a:latin typeface="Segoe UI Semibold"/>
+              </a:rPr>
+              <a:t>HANDS-ON  ·  5 / 6</a:t>
+            </a:r>
+          </a:p>
+        </p:txBody>
+      </p:sp>
+      <p:sp>
+        <p:nvSpPr>
+          <p:cNvPr id="3" name="TextBox 2"/>
+          <p:cNvSpPr txBox="1"/>
+          <p:nvPr/>
+        </p:nvSpPr>
+        <p:spPr>
+          <a:xfrm>
+            <a:off x="457200" y="530352"/>
+            <a:ext cx="11247120" cy="640080"/>
+          </a:xfrm>
+          <a:prstGeom prst="rect">
+            <a:avLst/>
+          </a:prstGeom>
+          <a:noFill/>
+        </p:spPr>
+        <p:txBody>
+          <a:bodyPr wrap="square" anchor="t" lIns="36576" rIns="36576" tIns="36576" bIns="36576">
+            <a:spAutoFit/>
+          </a:bodyPr>
+          <a:lstStyle/>
+          <a:p>
+            <a:pPr algn="l">
+              <a:lnSpc>
+                <a:spcPct val="100000"/>
+              </a:lnSpc>
+              <a:spcAft>
+                <a:spcPts val="0"/>
+              </a:spcAft>
+            </a:pPr>
+            <a:r>
+              <a:rPr sz="3000" b="0" i="0">
+                <a:solidFill>
+                  <a:srgbClr val="F5F6FA"/>
+                </a:solidFill>
+                <a:latin typeface="Segoe UI Semibold"/>
+              </a:rPr>
+              <a:t>We built it: 7 samples running locally on Laya</a:t>
+            </a:r>
+          </a:p>
+        </p:txBody>
+      </p:sp>
+      <p:sp>
+        <p:nvSpPr>
+          <p:cNvPr id="4" name="TextBox 3"/>
+          <p:cNvSpPr txBox="1"/>
+          <p:nvPr/>
+        </p:nvSpPr>
+        <p:spPr>
+          <a:xfrm>
+            <a:off x="457200" y="1115568"/>
+            <a:ext cx="7132320" cy="365760"/>
+          </a:xfrm>
+          <a:prstGeom prst="rect">
+            <a:avLst/>
+          </a:prstGeom>
+          <a:noFill/>
+        </p:spPr>
+        <p:txBody>
+          <a:bodyPr wrap="square" anchor="t" lIns="36576" rIns="36576" tIns="36576" bIns="36576">
+            <a:spAutoFit/>
+          </a:bodyPr>
+          <a:lstStyle/>
+          <a:p>
+            <a:pPr algn="l">
+              <a:lnSpc>
+                <a:spcPct val="100000"/>
+              </a:lnSpc>
+              <a:spcAft>
+                <a:spcPts val="0"/>
+              </a:spcAft>
+            </a:pPr>
+            <a:r>
+              <a:rPr sz="1400" b="0" i="0">
+                <a:solidFill>
+                  <a:srgbClr val="A3A9BC"/>
+                </a:solidFill>
+                <a:latin typeface="Segoe UI"/>
+              </a:rPr>
+              <a:t>Laya: open-source (Apache-2.0), Jev-compatible, 421M params. Runs on a laptop CPU.</a:t>
+            </a:r>
+          </a:p>
+        </p:txBody>
+      </p:sp>
+      <p:sp>
+        <p:nvSpPr>
+          <p:cNvPr id="5" name="TextBox 4">
+            <a:hlinkClick r:id="rId2"/>
+          </p:cNvPr>
+          <p:cNvSpPr txBox="1"/>
+          <p:nvPr/>
+        </p:nvSpPr>
+        <p:spPr>
+          <a:xfrm>
+            <a:off x="7726679" y="1143000"/>
+            <a:ext cx="4023360" cy="292608"/>
+          </a:xfrm>
+          <a:prstGeom prst="rect">
+            <a:avLst/>
+          </a:prstGeom>
+          <a:noFill/>
+        </p:spPr>
+        <p:txBody>
+          <a:bodyPr wrap="square" anchor="t" lIns="36576" rIns="36576" tIns="36576" bIns="36576">
+            <a:spAutoFit/>
+          </a:bodyPr>
+          <a:lstStyle/>
+          <a:p>
+            <a:pPr algn="l">
+              <a:lnSpc>
+                <a:spcPct val="100000"/>
+              </a:lnSpc>
+              <a:spcAft>
+                <a:spcPts val="0"/>
+              </a:spcAft>
+            </a:pPr>
+            <a:r>
+              <a:rPr sz="1300" b="0" i="0">
+                <a:solidFill>
+                  <a:srgbClr val="A3A9BC"/>
+                </a:solidFill>
+                <a:latin typeface="Segoe UI"/>
+              </a:rPr>
+              <a:t>Code:  </a:t>
+            </a:r>
+            <a:r>
+              <a:rPr sz="1300" b="0" i="0" u="sng">
+                <a:solidFill>
+                  <a:srgbClr val="22D3EE"/>
+                </a:solidFill>
+                <a:latin typeface="Segoe UI Semibold"/>
+              </a:rPr>
+              <a:t>github.com/stvonolf/jev-samples</a:t>
             </a:r>
           </a:p>
         </p:txBody>
       </p:sp>
       <p:graphicFrame>
         <p:nvGraphicFramePr>
-          <p:cNvPr id="5" name="Table 4"/>
+          <p:cNvPr id="6" name="Table 5"/>
           <p:cNvGraphicFramePr>
             <a:graphicFrameLocks noGrp="1"/>
           </p:cNvGraphicFramePr>
           <p:nvPr/>
         </p:nvGraphicFramePr>
         <p:xfrm>
-          <a:off x="457200" y="1645920"/>
-          <a:ext cx="7040880" cy="3200400"/>
+          <a:off x="457200" y="1600200"/>
+          <a:ext cx="7040880" cy="3218688"/>
         </p:xfrm>
         <a:graphic>
           <a:graphicData uri="http://schemas.openxmlformats.org/drawingml/2006/table">
@@ -9030,7 +11160,7 @@
                 <a:gridCol w="1554480"/>
                 <a:gridCol w="3410712"/>
               </a:tblGrid>
-              <a:tr h="457200">
+              <a:tr h="402336">
                 <a:tc>
                   <a:txBody>
                     <a:bodyPr wrap="square"/>
@@ -9216,7 +11346,7 @@
                   </a:tcPr>
                 </a:tc>
               </a:tr>
-              <a:tr h="457200">
+              <a:tr h="402336">
                 <a:tc>
                   <a:txBody>
                     <a:bodyPr wrap="square"/>
@@ -9402,7 +11532,7 @@
                   </a:tcPr>
                 </a:tc>
               </a:tr>
-              <a:tr h="457200">
+              <a:tr h="402336">
                 <a:tc>
                   <a:txBody>
                     <a:bodyPr wrap="square"/>
@@ -9588,7 +11718,7 @@
                   </a:tcPr>
                 </a:tc>
               </a:tr>
-              <a:tr h="457200">
+              <a:tr h="402336">
                 <a:tc>
                   <a:txBody>
                     <a:bodyPr wrap="square"/>
@@ -9774,7 +11904,7 @@
                   </a:tcPr>
                 </a:tc>
               </a:tr>
-              <a:tr h="457200">
+              <a:tr h="402336">
                 <a:tc>
                   <a:txBody>
                     <a:bodyPr wrap="square"/>
@@ -9960,7 +12090,7 @@
                   </a:tcPr>
                 </a:tc>
               </a:tr>
-              <a:tr h="457200">
+              <a:tr h="402336">
                 <a:tc>
                   <a:txBody>
                     <a:bodyPr wrap="square"/>
@@ -10146,7 +12276,7 @@
                   </a:tcPr>
                 </a:tc>
               </a:tr>
-              <a:tr h="457200">
+              <a:tr h="402336">
                 <a:tc>
                   <a:txBody>
                     <a:bodyPr wrap="square"/>
@@ -10332,20 +12462,206 @@
                   </a:tcPr>
                 </a:tc>
               </a:tr>
+              <a:tr h="402336">
+                <a:tc>
+                  <a:txBody>
+                    <a:bodyPr wrap="square"/>
+                    <a:lstStyle/>
+                    <a:p>
+                      <a:r>
+                        <a:rPr sz="1050" b="0" i="0">
+                          <a:solidFill>
+                            <a:srgbClr val="A3A9BC"/>
+                          </a:solidFill>
+                          <a:latin typeface="Segoe UI Semibold"/>
+                        </a:rPr>
+                        <a:t>07</a:t>
+                      </a:r>
+                    </a:p>
+                  </a:txBody>
+                  <a:tcPr marL="73152" marR="73152" marT="27432" marB="27432" anchor="ctr">
+                    <a:lnL w="9525" cap="flat" cmpd="sng" algn="ctr">
+                      <a:solidFill>
+                        <a:srgbClr val="33384A"/>
+                      </a:solidFill>
+                      <a:prstDash val="solid"/>
+                    </a:lnL>
+                    <a:lnR w="9525" cap="flat" cmpd="sng" algn="ctr">
+                      <a:solidFill>
+                        <a:srgbClr val="33384A"/>
+                      </a:solidFill>
+                      <a:prstDash val="solid"/>
+                    </a:lnR>
+                    <a:lnT w="9525" cap="flat" cmpd="sng" algn="ctr">
+                      <a:solidFill>
+                        <a:srgbClr val="33384A"/>
+                      </a:solidFill>
+                      <a:prstDash val="solid"/>
+                    </a:lnT>
+                    <a:lnB w="9525" cap="flat" cmpd="sng" algn="ctr">
+                      <a:solidFill>
+                        <a:srgbClr val="33384A"/>
+                      </a:solidFill>
+                      <a:prstDash val="solid"/>
+                    </a:lnB>
+                    <a:solidFill>
+                      <a:srgbClr val="1A1D27"/>
+                    </a:solidFill>
+                  </a:tcPr>
+                </a:tc>
+                <a:tc>
+                  <a:txBody>
+                    <a:bodyPr wrap="square"/>
+                    <a:lstStyle/>
+                    <a:p>
+                      <a:r>
+                        <a:rPr sz="1050" b="0" i="0">
+                          <a:solidFill>
+                            <a:srgbClr val="F5F6FA"/>
+                          </a:solidFill>
+                          <a:latin typeface="Segoe UI Semibold"/>
+                        </a:rPr>
+                        <a:t>UI demos (browser)</a:t>
+                      </a:r>
+                    </a:p>
+                  </a:txBody>
+                  <a:tcPr marL="73152" marR="73152" marT="27432" marB="27432" anchor="ctr">
+                    <a:lnL w="9525" cap="flat" cmpd="sng" algn="ctr">
+                      <a:solidFill>
+                        <a:srgbClr val="33384A"/>
+                      </a:solidFill>
+                      <a:prstDash val="solid"/>
+                    </a:lnL>
+                    <a:lnR w="9525" cap="flat" cmpd="sng" algn="ctr">
+                      <a:solidFill>
+                        <a:srgbClr val="33384A"/>
+                      </a:solidFill>
+                      <a:prstDash val="solid"/>
+                    </a:lnR>
+                    <a:lnT w="9525" cap="flat" cmpd="sng" algn="ctr">
+                      <a:solidFill>
+                        <a:srgbClr val="33384A"/>
+                      </a:solidFill>
+                      <a:prstDash val="solid"/>
+                    </a:lnT>
+                    <a:lnB w="9525" cap="flat" cmpd="sng" algn="ctr">
+                      <a:solidFill>
+                        <a:srgbClr val="33384A"/>
+                      </a:solidFill>
+                      <a:prstDash val="solid"/>
+                    </a:lnB>
+                    <a:solidFill>
+                      <a:srgbClr val="1A1D27"/>
+                    </a:solidFill>
+                  </a:tcPr>
+                </a:tc>
+                <a:tc>
+                  <a:txBody>
+                    <a:bodyPr wrap="square"/>
+                    <a:lstStyle/>
+                    <a:p>
+                      <a:r>
+                        <a:rPr sz="1050" b="0" i="0">
+                          <a:solidFill>
+                            <a:srgbClr val="E040FB"/>
+                          </a:solidFill>
+                          <a:latin typeface="Segoe UI Semibold"/>
+                        </a:rPr>
+                        <a:t>Choice + Score + Noul</a:t>
+                      </a:r>
+                    </a:p>
+                  </a:txBody>
+                  <a:tcPr marL="73152" marR="73152" marT="27432" marB="27432" anchor="ctr">
+                    <a:lnL w="9525" cap="flat" cmpd="sng" algn="ctr">
+                      <a:solidFill>
+                        <a:srgbClr val="33384A"/>
+                      </a:solidFill>
+                      <a:prstDash val="solid"/>
+                    </a:lnL>
+                    <a:lnR w="9525" cap="flat" cmpd="sng" algn="ctr">
+                      <a:solidFill>
+                        <a:srgbClr val="33384A"/>
+                      </a:solidFill>
+                      <a:prstDash val="solid"/>
+                    </a:lnR>
+                    <a:lnT w="9525" cap="flat" cmpd="sng" algn="ctr">
+                      <a:solidFill>
+                        <a:srgbClr val="33384A"/>
+                      </a:solidFill>
+                      <a:prstDash val="solid"/>
+                    </a:lnT>
+                    <a:lnB w="9525" cap="flat" cmpd="sng" algn="ctr">
+                      <a:solidFill>
+                        <a:srgbClr val="33384A"/>
+                      </a:solidFill>
+                      <a:prstDash val="solid"/>
+                    </a:lnB>
+                    <a:solidFill>
+                      <a:srgbClr val="1A1D27"/>
+                    </a:solidFill>
+                  </a:tcPr>
+                </a:tc>
+                <a:tc>
+                  <a:txBody>
+                    <a:bodyPr wrap="square"/>
+                    <a:lstStyle/>
+                    <a:p>
+                      <a:r>
+                        <a:rPr sz="1050" b="0" i="0">
+                          <a:solidFill>
+                            <a:srgbClr val="A3A9BC"/>
+                          </a:solidFill>
+                          <a:latin typeface="Segoe UI"/>
+                        </a:rPr>
+                        <a:t>Trolley ×100, creative emoji pile, live Score gauges for customer messages → slide 6</a:t>
+                      </a:r>
+                    </a:p>
+                  </a:txBody>
+                  <a:tcPr marL="73152" marR="73152" marT="27432" marB="27432" anchor="ctr">
+                    <a:lnL w="9525" cap="flat" cmpd="sng" algn="ctr">
+                      <a:solidFill>
+                        <a:srgbClr val="33384A"/>
+                      </a:solidFill>
+                      <a:prstDash val="solid"/>
+                    </a:lnL>
+                    <a:lnR w="9525" cap="flat" cmpd="sng" algn="ctr">
+                      <a:solidFill>
+                        <a:srgbClr val="33384A"/>
+                      </a:solidFill>
+                      <a:prstDash val="solid"/>
+                    </a:lnR>
+                    <a:lnT w="9525" cap="flat" cmpd="sng" algn="ctr">
+                      <a:solidFill>
+                        <a:srgbClr val="33384A"/>
+                      </a:solidFill>
+                      <a:prstDash val="solid"/>
+                    </a:lnT>
+                    <a:lnB w="9525" cap="flat" cmpd="sng" algn="ctr">
+                      <a:solidFill>
+                        <a:srgbClr val="33384A"/>
+                      </a:solidFill>
+                      <a:prstDash val="solid"/>
+                    </a:lnB>
+                    <a:solidFill>
+                      <a:srgbClr val="1A1D27"/>
+                    </a:solidFill>
+                  </a:tcPr>
+                </a:tc>
+              </a:tr>
             </a:tbl>
           </a:graphicData>
         </a:graphic>
       </p:graphicFrame>
       <p:pic>
         <p:nvPicPr>
-          <p:cNvPr id="6" name="Picture 5" descr="terminal_06_agent_harness.png"/>
+          <p:cNvPr id="7" name="Picture 6" descr="terminal_06_agent_harness.png"/>
           <p:cNvPicPr>
             <a:picLocks noChangeAspect="1"/>
           </p:cNvPicPr>
           <p:nvPr/>
         </p:nvPicPr>
         <p:blipFill>
-          <a:blip r:embed="rId2"/>
+          <a:blip r:embed="rId3"/>
           <a:stretch>
             <a:fillRect/>
           </a:stretch>
@@ -10367,7 +12683,7 @@
       </p:pic>
       <p:sp>
         <p:nvSpPr>
-          <p:cNvPr id="7" name="TextBox 6"/>
+          <p:cNvPr id="8" name="TextBox 7"/>
           <p:cNvSpPr txBox="1"/>
           <p:nvPr/>
         </p:nvSpPr>
@@ -10409,7 +12725,7 @@
       </p:sp>
       <p:sp>
         <p:nvSpPr>
-          <p:cNvPr id="8" name="Rounded Rectangle 7"/>
+          <p:cNvPr id="9" name="Rounded Rectangle 8"/>
           <p:cNvSpPr/>
           <p:nvPr/>
         </p:nvSpPr>
@@ -10453,7 +12769,7 @@
       </p:sp>
       <p:sp>
         <p:nvSpPr>
-          <p:cNvPr id="9" name="TextBox 8"/>
+          <p:cNvPr id="10" name="TextBox 9"/>
           <p:cNvSpPr txBox="1"/>
           <p:nvPr/>
         </p:nvSpPr>
@@ -10495,7 +12811,7 @@
       </p:sp>
       <p:sp>
         <p:nvSpPr>
-          <p:cNvPr id="10" name="TextBox 9"/>
+          <p:cNvPr id="11" name="TextBox 10"/>
           <p:cNvSpPr txBox="1"/>
           <p:nvPr/>
         </p:nvSpPr>
@@ -10666,7 +12982,7 @@
       </p:sp>
       <p:sp>
         <p:nvSpPr>
-          <p:cNvPr id="11" name="Rounded Rectangle 10"/>
+          <p:cNvPr id="12" name="Rounded Rectangle 11"/>
           <p:cNvSpPr/>
           <p:nvPr/>
         </p:nvSpPr>
@@ -10712,7 +13028,7 @@
       </p:sp>
       <p:sp>
         <p:nvSpPr>
-          <p:cNvPr id="12" name="TextBox 11"/>
+          <p:cNvPr id="13" name="TextBox 12"/>
           <p:cNvSpPr txBox="1"/>
           <p:nvPr/>
         </p:nvSpPr>
@@ -10754,7 +13070,7 @@
       </p:sp>
       <p:sp>
         <p:nvSpPr>
-          <p:cNvPr id="13" name="TextBox 12"/>
+          <p:cNvPr id="14" name="TextBox 13"/>
           <p:cNvSpPr txBox="1"/>
           <p:nvPr/>
         </p:nvSpPr>
@@ -10847,6 +13163,730 @@
                 <a:latin typeface="Segoe UI"/>
               </a:rPr>
               <a:t>4. Ship behind a confidence gate + human review</a:t>
+            </a:r>
+          </a:p>
+        </p:txBody>
+      </p:sp>
+    </p:spTree>
+  </p:cSld>
+  <p:clrMapOvr>
+    <a:masterClrMapping/>
+  </p:clrMapOvr>
+</p:sld>
+</file>
+
+<file path=ppt/slides/slide6.xml><?xml version="1.0" encoding="utf-8"?>
+<p:sld xmlns:a="http://schemas.openxmlformats.org/drawingml/2006/main" xmlns:p="http://schemas.openxmlformats.org/presentationml/2006/main" xmlns:r="http://schemas.openxmlformats.org/officeDocument/2006/relationships">
+  <p:cSld>
+    <p:bg>
+      <p:bgPr>
+        <a:solidFill>
+          <a:srgbClr val="0F1117"/>
+        </a:solidFill>
+        <a:effectLst/>
+      </p:bgPr>
+    </p:bg>
+    <p:spTree>
+      <p:nvGrpSpPr>
+        <p:cNvPr id="1" name=""/>
+        <p:cNvGrpSpPr/>
+        <p:nvPr/>
+      </p:nvGrpSpPr>
+      <p:grpSpPr/>
+      <p:sp>
+        <p:nvSpPr>
+          <p:cNvPr id="2" name="TextBox 1"/>
+          <p:cNvSpPr txBox="1"/>
+          <p:nvPr/>
+        </p:nvSpPr>
+        <p:spPr>
+          <a:xfrm>
+            <a:off x="457200" y="292608"/>
+            <a:ext cx="8229600" cy="274320"/>
+          </a:xfrm>
+          <a:prstGeom prst="rect">
+            <a:avLst/>
+          </a:prstGeom>
+          <a:noFill/>
+        </p:spPr>
+        <p:txBody>
+          <a:bodyPr wrap="square" anchor="t" lIns="36576" rIns="36576" tIns="36576" bIns="36576">
+            <a:spAutoFit/>
+          </a:bodyPr>
+          <a:lstStyle/>
+          <a:p>
+            <a:pPr algn="l">
+              <a:lnSpc>
+                <a:spcPct val="100000"/>
+              </a:lnSpc>
+              <a:spcAft>
+                <a:spcPts val="0"/>
+              </a:spcAft>
+            </a:pPr>
+            <a:r>
+              <a:rPr sz="1100" b="0" i="0">
+                <a:solidFill>
+                  <a:srgbClr val="22D3EE"/>
+                </a:solidFill>
+                <a:latin typeface="Segoe UI Semibold"/>
+              </a:rPr>
+              <a:t>LIVE DEMOS  ·  6 / 6</a:t>
+            </a:r>
+          </a:p>
+        </p:txBody>
+      </p:sp>
+      <p:sp>
+        <p:nvSpPr>
+          <p:cNvPr id="3" name="TextBox 2"/>
+          <p:cNvSpPr txBox="1"/>
+          <p:nvPr/>
+        </p:nvSpPr>
+        <p:spPr>
+          <a:xfrm>
+            <a:off x="457200" y="530352"/>
+            <a:ext cx="11247120" cy="640080"/>
+          </a:xfrm>
+          <a:prstGeom prst="rect">
+            <a:avLst/>
+          </a:prstGeom>
+          <a:noFill/>
+        </p:spPr>
+        <p:txBody>
+          <a:bodyPr wrap="square" anchor="t" lIns="36576" rIns="36576" tIns="36576" bIns="36576">
+            <a:spAutoFit/>
+          </a:bodyPr>
+          <a:lstStyle/>
+          <a:p>
+            <a:pPr algn="l">
+              <a:lnSpc>
+                <a:spcPct val="100000"/>
+              </a:lnSpc>
+              <a:spcAft>
+                <a:spcPts val="0"/>
+              </a:spcAft>
+            </a:pPr>
+            <a:r>
+              <a:rPr sz="3000" b="0" i="0">
+                <a:solidFill>
+                  <a:srgbClr val="F5F6FA"/>
+                </a:solidFill>
+                <a:latin typeface="Segoe UI Semibold"/>
+              </a:rPr>
+              <a:t>Three live UI demos: Choice, Noul and Score</a:t>
+            </a:r>
+          </a:p>
+        </p:txBody>
+      </p:sp>
+      <p:sp>
+        <p:nvSpPr>
+          <p:cNvPr id="4" name="TextBox 3">
+            <a:hlinkClick r:id="rId2"/>
+          </p:cNvPr>
+          <p:cNvSpPr txBox="1"/>
+          <p:nvPr/>
+        </p:nvSpPr>
+        <p:spPr>
+          <a:xfrm>
+            <a:off x="457200" y="1115568"/>
+            <a:ext cx="11247120" cy="292608"/>
+          </a:xfrm>
+          <a:prstGeom prst="rect">
+            <a:avLst/>
+          </a:prstGeom>
+          <a:noFill/>
+        </p:spPr>
+        <p:txBody>
+          <a:bodyPr wrap="square" anchor="t" lIns="36576" rIns="36576" tIns="36576" bIns="36576">
+            <a:spAutoFit/>
+          </a:bodyPr>
+          <a:lstStyle/>
+          <a:p>
+            <a:pPr algn="l">
+              <a:lnSpc>
+                <a:spcPct val="100000"/>
+              </a:lnSpc>
+              <a:spcAft>
+                <a:spcPts val="0"/>
+              </a:spcAft>
+            </a:pPr>
+            <a:r>
+              <a:rPr sz="1300" b="0" i="0">
+                <a:solidFill>
+                  <a:srgbClr val="A3A9BC"/>
+                </a:solidFill>
+                <a:latin typeface="Segoe UI"/>
+              </a:rPr>
+              <a:t>Run:  </a:t>
+            </a:r>
+            <a:r>
+              <a:rPr sz="1300" b="0" i="0" u="sng">
+                <a:solidFill>
+                  <a:srgbClr val="22D3EE"/>
+                </a:solidFill>
+                <a:latin typeface="Segoe UI Semibold"/>
+              </a:rPr>
+              <a:t>python samples\07_ui_demos.py  →  http://localhost:8765</a:t>
+            </a:r>
+          </a:p>
+        </p:txBody>
+      </p:sp>
+      <p:pic>
+        <p:nvPicPr>
+          <p:cNvPr id="5" name="Picture 4" descr="ui_trolley.png"/>
+          <p:cNvPicPr>
+            <a:picLocks noChangeAspect="1"/>
+          </p:cNvPicPr>
+          <p:nvPr/>
+        </p:nvPicPr>
+        <p:blipFill>
+          <a:blip r:embed="rId3"/>
+          <a:stretch>
+            <a:fillRect/>
+          </a:stretch>
+        </p:blipFill>
+        <p:spPr>
+          <a:xfrm>
+            <a:off x="457200" y="1554480"/>
+            <a:ext cx="3611880" cy="2152680"/>
+          </a:xfrm>
+          <a:prstGeom prst="rect">
+            <a:avLst/>
+          </a:prstGeom>
+          <a:ln w="12700">
+            <a:solidFill>
+              <a:srgbClr val="33384A"/>
+            </a:solidFill>
+          </a:ln>
+        </p:spPr>
+      </p:pic>
+      <p:sp>
+        <p:nvSpPr>
+          <p:cNvPr id="6" name="TextBox 5"/>
+          <p:cNvSpPr txBox="1"/>
+          <p:nvPr/>
+        </p:nvSpPr>
+        <p:spPr>
+          <a:xfrm>
+            <a:off x="457200" y="3992757"/>
+            <a:ext cx="3611880" cy="320040"/>
+          </a:xfrm>
+          <a:prstGeom prst="rect">
+            <a:avLst/>
+          </a:prstGeom>
+          <a:noFill/>
+        </p:spPr>
+        <p:txBody>
+          <a:bodyPr wrap="square" anchor="t" lIns="36576" rIns="36576" tIns="36576" bIns="36576">
+            <a:spAutoFit/>
+          </a:bodyPr>
+          <a:lstStyle/>
+          <a:p>
+            <a:pPr algn="l">
+              <a:lnSpc>
+                <a:spcPct val="100000"/>
+              </a:lnSpc>
+              <a:spcAft>
+                <a:spcPts val="0"/>
+              </a:spcAft>
+            </a:pPr>
+            <a:r>
+              <a:rPr sz="1300" b="0" i="0">
+                <a:solidFill>
+                  <a:srgbClr val="F5F6FA"/>
+                </a:solidFill>
+                <a:latin typeface="Segoe UI Semibold"/>
+              </a:rPr>
+              <a:t>Trolley problem ×100</a:t>
+            </a:r>
+            <a:r>
+              <a:rPr sz="1300" b="0" i="0">
+                <a:solidFill>
+                  <a:srgbClr val="E040FB"/>
+                </a:solidFill>
+                <a:latin typeface="Segoe UI Semibold"/>
+              </a:rPr>
+              <a:t>   Choice</a:t>
+            </a:r>
+          </a:p>
+        </p:txBody>
+      </p:sp>
+      <p:sp>
+        <p:nvSpPr>
+          <p:cNvPr id="7" name="TextBox 6"/>
+          <p:cNvSpPr txBox="1"/>
+          <p:nvPr/>
+        </p:nvSpPr>
+        <p:spPr>
+          <a:xfrm>
+            <a:off x="457200" y="4340229"/>
+            <a:ext cx="3611880" cy="2103120"/>
+          </a:xfrm>
+          <a:prstGeom prst="rect">
+            <a:avLst/>
+          </a:prstGeom>
+          <a:noFill/>
+        </p:spPr>
+        <p:txBody>
+          <a:bodyPr wrap="square" anchor="t" lIns="36576" rIns="36576" tIns="36576" bIns="36576">
+            <a:spAutoFit/>
+          </a:bodyPr>
+          <a:lstStyle/>
+          <a:p>
+            <a:pPr algn="l">
+              <a:lnSpc>
+                <a:spcPct val="100000"/>
+              </a:lnSpc>
+              <a:spcAft>
+                <a:spcPts val="400"/>
+              </a:spcAft>
+            </a:pPr>
+            <a:r>
+              <a:rPr sz="1050" b="0" i="0">
+                <a:solidFill>
+                  <a:srgbClr val="E040FB"/>
+                </a:solidFill>
+                <a:latin typeface="Segoe UI"/>
+              </a:rPr>
+              <a:t>•  </a:t>
+            </a:r>
+            <a:r>
+              <a:rPr sz="1050" b="0" i="0">
+                <a:solidFill>
+                  <a:srgbClr val="A3A9BC"/>
+                </a:solidFill>
+                <a:latin typeface="Segoe UI"/>
+              </a:rPr>
+              <a:t>Rebuilt from the video. 100 trials, randomised wording: pulled the lever 100 / 100 (P 0.75–0.98).</a:t>
+            </a:r>
+          </a:p>
+          <a:p>
+            <a:pPr algn="l">
+              <a:lnSpc>
+                <a:spcPct val="100000"/>
+              </a:lnSpc>
+              <a:spcAft>
+                <a:spcPts val="400"/>
+              </a:spcAft>
+            </a:pPr>
+            <a:r>
+              <a:rPr sz="1050" b="0" i="0">
+                <a:solidFill>
+                  <a:srgbClr val="E040FB"/>
+                </a:solidFill>
+                <a:latin typeface="Segoe UI"/>
+              </a:rPr>
+              <a:t>•  </a:t>
+            </a:r>
+            <a:r>
+              <a:rPr sz="1050" b="0" i="0">
+                <a:solidFill>
+                  <a:srgbClr val="A3A9BC"/>
+                </a:solidFill>
+                <a:latin typeface="Segoe UI"/>
+              </a:rPr>
+              <a:t>Sanity check with 1 on main and 5 on side: it still pulls (0 / 13 chose fewer deaths).</a:t>
+            </a:r>
+          </a:p>
+          <a:p>
+            <a:pPr algn="l">
+              <a:lnSpc>
+                <a:spcPct val="100000"/>
+              </a:lnSpc>
+              <a:spcAft>
+                <a:spcPts val="400"/>
+              </a:spcAft>
+            </a:pPr>
+            <a:r>
+              <a:rPr sz="1050" b="0" i="0">
+                <a:solidFill>
+                  <a:srgbClr val="E040FB"/>
+                </a:solidFill>
+                <a:latin typeface="Segoe UI"/>
+              </a:rPr>
+              <a:t>•  </a:t>
+            </a:r>
+            <a:r>
+              <a:rPr sz="1050" b="0" i="0">
+                <a:solidFill>
+                  <a:srgbClr val="A3A9BC"/>
+                </a:solidFill>
+                <a:latin typeface="Segoe UI"/>
+              </a:rPr>
+              <a:t>System-1 models react to the story pattern; they don't count.</a:t>
+            </a:r>
+          </a:p>
+        </p:txBody>
+      </p:sp>
+      <p:pic>
+        <p:nvPicPr>
+          <p:cNvPr id="8" name="Picture 7" descr="ui_creative.png"/>
+          <p:cNvPicPr>
+            <a:picLocks noChangeAspect="1"/>
+          </p:cNvPicPr>
+          <p:nvPr/>
+        </p:nvPicPr>
+        <p:blipFill>
+          <a:blip r:embed="rId4"/>
+          <a:stretch>
+            <a:fillRect/>
+          </a:stretch>
+        </p:blipFill>
+        <p:spPr>
+          <a:xfrm>
+            <a:off x="4288536" y="1554480"/>
+            <a:ext cx="3611880" cy="2124635"/>
+          </a:xfrm>
+          <a:prstGeom prst="rect">
+            <a:avLst/>
+          </a:prstGeom>
+          <a:ln w="12700">
+            <a:solidFill>
+              <a:srgbClr val="33384A"/>
+            </a:solidFill>
+          </a:ln>
+        </p:spPr>
+      </p:pic>
+      <p:sp>
+        <p:nvSpPr>
+          <p:cNvPr id="9" name="TextBox 8"/>
+          <p:cNvSpPr txBox="1"/>
+          <p:nvPr/>
+        </p:nvSpPr>
+        <p:spPr>
+          <a:xfrm>
+            <a:off x="4288536" y="3992757"/>
+            <a:ext cx="3611880" cy="320040"/>
+          </a:xfrm>
+          <a:prstGeom prst="rect">
+            <a:avLst/>
+          </a:prstGeom>
+          <a:noFill/>
+        </p:spPr>
+        <p:txBody>
+          <a:bodyPr wrap="square" anchor="t" lIns="36576" rIns="36576" tIns="36576" bIns="36576">
+            <a:spAutoFit/>
+          </a:bodyPr>
+          <a:lstStyle/>
+          <a:p>
+            <a:pPr algn="l">
+              <a:lnSpc>
+                <a:spcPct val="100000"/>
+              </a:lnSpc>
+              <a:spcAft>
+                <a:spcPts val="0"/>
+              </a:spcAft>
+            </a:pPr>
+            <a:r>
+              <a:rPr sz="1300" b="0" i="0">
+                <a:solidFill>
+                  <a:srgbClr val="F5F6FA"/>
+                </a:solidFill>
+                <a:latin typeface="Segoe UI Semibold"/>
+              </a:rPr>
+              <a:t>Creative emoji pile</a:t>
+            </a:r>
+            <a:r>
+              <a:rPr sz="1300" b="0" i="0">
+                <a:solidFill>
+                  <a:srgbClr val="FBBF24"/>
+                </a:solidFill>
+                <a:latin typeface="Segoe UI Semibold"/>
+              </a:rPr>
+              <a:t>   Noul × 235</a:t>
+            </a:r>
+          </a:p>
+        </p:txBody>
+      </p:sp>
+      <p:sp>
+        <p:nvSpPr>
+          <p:cNvPr id="10" name="TextBox 9"/>
+          <p:cNvSpPr txBox="1"/>
+          <p:nvPr/>
+        </p:nvSpPr>
+        <p:spPr>
+          <a:xfrm>
+            <a:off x="4288536" y="4340229"/>
+            <a:ext cx="3611880" cy="2103120"/>
+          </a:xfrm>
+          <a:prstGeom prst="rect">
+            <a:avLst/>
+          </a:prstGeom>
+          <a:noFill/>
+        </p:spPr>
+        <p:txBody>
+          <a:bodyPr wrap="square" anchor="t" lIns="36576" rIns="36576" tIns="36576" bIns="36576">
+            <a:spAutoFit/>
+          </a:bodyPr>
+          <a:lstStyle/>
+          <a:p>
+            <a:pPr algn="l">
+              <a:lnSpc>
+                <a:spcPct val="100000"/>
+              </a:lnSpc>
+              <a:spcAft>
+                <a:spcPts val="400"/>
+              </a:spcAft>
+            </a:pPr>
+            <a:r>
+              <a:rPr sz="1050" b="0" i="0">
+                <a:solidFill>
+                  <a:srgbClr val="FBBF24"/>
+                </a:solidFill>
+                <a:latin typeface="Segoe UI"/>
+              </a:rPr>
+              <a:t>•  </a:t>
+            </a:r>
+            <a:r>
+              <a:rPr sz="1050" b="0" i="0">
+                <a:solidFill>
+                  <a:srgbClr val="A3A9BC"/>
+                </a:solidFill>
+                <a:latin typeface="Segoe UI"/>
+              </a:rPr>
+              <a:t>Rebuilt from the video. Each emoji is one Noul: “Is this related to: &lt;request&gt;?”; outliers fly up live.</a:t>
+            </a:r>
+          </a:p>
+          <a:p>
+            <a:pPr algn="l">
+              <a:lnSpc>
+                <a:spcPct val="100000"/>
+              </a:lnSpc>
+              <a:spcAft>
+                <a:spcPts val="400"/>
+              </a:spcAft>
+            </a:pPr>
+            <a:r>
+              <a:rPr sz="1050" b="0" i="0">
+                <a:solidFill>
+                  <a:srgbClr val="FBBF24"/>
+                </a:solidFill>
+                <a:latin typeface="Segoe UI"/>
+              </a:rPr>
+              <a:t>•  </a:t>
+            </a:r>
+            <a:r>
+              <a:rPr sz="1050" b="0" i="0">
+                <a:solidFill>
+                  <a:srgbClr val="A3A9BC"/>
+                </a:solidFill>
+                <a:latin typeface="Segoe UI"/>
+              </a:rPr>
+              <a:t>Good ranking (winter → scarf, coat, gloves, socks); probability levels differ per prompt → relative threshold.</a:t>
+            </a:r>
+          </a:p>
+          <a:p>
+            <a:pPr algn="l">
+              <a:lnSpc>
+                <a:spcPct val="100000"/>
+              </a:lnSpc>
+              <a:spcAft>
+                <a:spcPts val="400"/>
+              </a:spcAft>
+            </a:pPr>
+            <a:r>
+              <a:rPr sz="1050" b="0" i="0">
+                <a:solidFill>
+                  <a:srgbClr val="FBBF24"/>
+                </a:solidFill>
+                <a:latin typeface="Segoe UI"/>
+              </a:rPr>
+              <a:t>•  </a:t>
+            </a:r>
+            <a:r>
+              <a:rPr sz="1050" b="0" i="0">
+                <a:solidFill>
+                  <a:srgbClr val="A3A9BC"/>
+                </a:solidFill>
+                <a:latin typeface="Segoe UI"/>
+              </a:rPr>
+              <a:t>“starting a band” also picks the bandage.</a:t>
+            </a:r>
+          </a:p>
+        </p:txBody>
+      </p:sp>
+      <p:pic>
+        <p:nvPicPr>
+          <p:cNvPr id="11" name="Picture 10" descr="ui_score.png"/>
+          <p:cNvPicPr>
+            <a:picLocks noChangeAspect="1"/>
+          </p:cNvPicPr>
+          <p:nvPr/>
+        </p:nvPicPr>
+        <p:blipFill>
+          <a:blip r:embed="rId5"/>
+          <a:stretch>
+            <a:fillRect/>
+          </a:stretch>
+        </p:blipFill>
+        <p:spPr>
+          <a:xfrm>
+            <a:off x="8119872" y="1554480"/>
+            <a:ext cx="3611880" cy="2301117"/>
+          </a:xfrm>
+          <a:prstGeom prst="rect">
+            <a:avLst/>
+          </a:prstGeom>
+          <a:ln w="12700">
+            <a:solidFill>
+              <a:srgbClr val="33384A"/>
+            </a:solidFill>
+          </a:ln>
+        </p:spPr>
+      </p:pic>
+      <p:sp>
+        <p:nvSpPr>
+          <p:cNvPr id="12" name="TextBox 11"/>
+          <p:cNvSpPr txBox="1"/>
+          <p:nvPr/>
+        </p:nvSpPr>
+        <p:spPr>
+          <a:xfrm>
+            <a:off x="8119872" y="3992757"/>
+            <a:ext cx="3611880" cy="320040"/>
+          </a:xfrm>
+          <a:prstGeom prst="rect">
+            <a:avLst/>
+          </a:prstGeom>
+          <a:noFill/>
+        </p:spPr>
+        <p:txBody>
+          <a:bodyPr wrap="square" anchor="t" lIns="36576" rIns="36576" tIns="36576" bIns="36576">
+            <a:spAutoFit/>
+          </a:bodyPr>
+          <a:lstStyle/>
+          <a:p>
+            <a:pPr algn="l">
+              <a:lnSpc>
+                <a:spcPct val="100000"/>
+              </a:lnSpc>
+              <a:spcAft>
+                <a:spcPts val="0"/>
+              </a:spcAft>
+            </a:pPr>
+            <a:r>
+              <a:rPr sz="1300" b="0" i="0">
+                <a:solidFill>
+                  <a:srgbClr val="F5F6FA"/>
+                </a:solidFill>
+                <a:latin typeface="Segoe UI Semibold"/>
+              </a:rPr>
+              <a:t>How hot is this message?</a:t>
+            </a:r>
+            <a:r>
+              <a:rPr sz="1300" b="0" i="0">
+                <a:solidFill>
+                  <a:srgbClr val="22D3EE"/>
+                </a:solidFill>
+                <a:latin typeface="Segoe UI Semibold"/>
+              </a:rPr>
+              <a:t>   Score × 4</a:t>
+            </a:r>
+          </a:p>
+        </p:txBody>
+      </p:sp>
+      <p:sp>
+        <p:nvSpPr>
+          <p:cNvPr id="13" name="TextBox 12"/>
+          <p:cNvSpPr txBox="1"/>
+          <p:nvPr/>
+        </p:nvSpPr>
+        <p:spPr>
+          <a:xfrm>
+            <a:off x="8119872" y="4340229"/>
+            <a:ext cx="3611880" cy="2103120"/>
+          </a:xfrm>
+          <a:prstGeom prst="rect">
+            <a:avLst/>
+          </a:prstGeom>
+          <a:noFill/>
+        </p:spPr>
+        <p:txBody>
+          <a:bodyPr wrap="square" anchor="t" lIns="36576" rIns="36576" tIns="36576" bIns="36576">
+            <a:spAutoFit/>
+          </a:bodyPr>
+          <a:lstStyle/>
+          <a:p>
+            <a:pPr algn="l">
+              <a:lnSpc>
+                <a:spcPct val="100000"/>
+              </a:lnSpc>
+              <a:spcAft>
+                <a:spcPts val="400"/>
+              </a:spcAft>
+            </a:pPr>
+            <a:r>
+              <a:rPr sz="1050" b="0" i="0">
+                <a:solidFill>
+                  <a:srgbClr val="22D3EE"/>
+                </a:solidFill>
+                <a:latin typeface="Segoe UI"/>
+              </a:rPr>
+              <a:t>•  </a:t>
+            </a:r>
+            <a:r>
+              <a:rPr sz="1050" b="0" i="0">
+                <a:solidFill>
+                  <a:srgbClr val="A3A9BC"/>
+                </a:solidFill>
+                <a:latin typeface="Segoe UI"/>
+              </a:rPr>
+              <a:t>Frustration, urgency, churn risk and sentiment, re-scored while you type.</a:t>
+            </a:r>
+          </a:p>
+          <a:p>
+            <a:pPr algn="l">
+              <a:lnSpc>
+                <a:spcPct val="100000"/>
+              </a:lnSpc>
+              <a:spcAft>
+                <a:spcPts val="400"/>
+              </a:spcAft>
+            </a:pPr>
+            <a:r>
+              <a:rPr sz="1050" b="0" i="0">
+                <a:solidFill>
+                  <a:srgbClr val="22D3EE"/>
+                </a:solidFill>
+                <a:latin typeface="Segoe UI"/>
+              </a:rPr>
+              <a:t>•  </a:t>
+            </a:r>
+            <a:r>
+              <a:rPr sz="1050" b="0" i="0">
+                <a:solidFill>
+                  <a:srgbClr val="A3A9BC"/>
+                </a:solidFill>
+                <a:latin typeface="Segoe UI"/>
+              </a:rPr>
+              <a:t>Answers land between levels: frustration 0.96 → 1.42 → 1.84 → 2.11 → 2.44 as the message escalates.</a:t>
+            </a:r>
+          </a:p>
+          <a:p>
+            <a:pPr algn="l">
+              <a:lnSpc>
+                <a:spcPct val="100000"/>
+              </a:lnSpc>
+              <a:spcAft>
+                <a:spcPts val="400"/>
+              </a:spcAft>
+            </a:pPr>
+            <a:r>
+              <a:rPr sz="1050" b="0" i="0">
+                <a:solidFill>
+                  <a:srgbClr val="22D3EE"/>
+                </a:solidFill>
+                <a:latin typeface="Segoe UI"/>
+              </a:rPr>
+              <a:t>•  </a:t>
+            </a:r>
+            <a:r>
+              <a:rPr sz="1050" b="0" i="0">
+                <a:solidFill>
+                  <a:srgbClr val="A3A9BC"/>
+                </a:solidFill>
+                <a:latin typeface="Segoe UI"/>
+              </a:rPr>
+              <a:t>Code: priority 0.81 → escalate to retention; a thank-you note → testimonial for marketing.</a:t>
             </a:r>
           </a:p>
         </p:txBody>

--- a/presentation/Jev_Team_Overview.pptx
+++ b/presentation/Jev_Team_Overview.pptx
@@ -513,13 +513,25 @@
           <a:p/>
           <a:p>
             <a:r>
+              <a:t>TYPESAFE'S OWN POSITIONING (typesafe.ai): "an AI lab building machine-native intelligence infrastructure for automation". "We took the opposite research direction - not chat": RLHF optimises for human preference and produces superhuman instruction followers, but also mode dropping, overconfidence and a lack of reliability, so LLMs need humans in the loop. System One models are built to be used natively by machines, with a new architecture, a new sampler and a new training algorithm (RLCD). Taglines: "Decisions, not strings", "calibrated confidence", "more like code: reliable, fast, type-safe". Headline claim: 193.6x faster and 444.6x cheaper on workflows for System One tasks (their demo: $0.000081 in 0.114 s vs an LLM at $0.013880 in 8.566 s); $42 per billion input tokens (= $0.042 per million), "238x lower input price than Claude Fable 5.1". They also claim "zero hallucinations" - read that as "always a valid typed answer", not "always right". All vendor-reported.</a:t>
+            </a:r>
+          </a:p>
+          <a:p/>
+          <a:p>
+            <a:r>
+              <a:t>SYSTEM ONE (docs.typesafe.ai/concepts/system-one): text input only (strings, JSON objects, arrays of text) - images, audio and video are not supported yet. Calibration is measured across groups of predictions; it does not guarantee that a single answer is correct. No replies, no code, no explanations of reasoning.</a:t>
+            </a:r>
+          </a:p>
+          <a:p/>
+          <a:p>
+            <a:r>
               <a:t>WHY (Caleb Writes Code, "Jev explained in 7min"): the AI stack's application layer pushed models toward chat (RLHF) and coding agents (RLVR). Workflow automation never crossed the cost/speed threshold, even with very capable models. TypeSafe argues that forcing chat/agent-optimised models into automation is the wrong approach and trains for calibrated decisions instead (RLCD). Most community demos show off speed (sorting email, RAG, games, model routing) rather than depth - LLMs can do these functionally, but not at 70-500 ms, because they generate tokens one after another.</a:t>
             </a:r>
           </a:p>
           <a:p/>
           <a:p>
             <a:r>
-              <a:t>HOW FAST/CHEAP: vendor-reported 40-200x faster; LangChain quotes 20-200x faster and 40-400x cheaper on classification-style tasks. Price $0.042 per 1M input tokens, output free (~$0.0004 per decision).</a:t>
+              <a:t>HOW FAST/CHEAP: video 1 quotes 40-200x faster at 70-500 ms end-to-end; LangChain quotes 20-200x faster and 40-400x cheaper on classification-style tasks; TypeSafe's homepage says 193.6x faster / 444.6x cheaper on System One workflows. Price $0.042 per 1M input tokens, output free (~$0.0004 per decision).</a:t>
             </a:r>
           </a:p>
           <a:p/>
@@ -645,6 +657,12 @@
           <a:p>
             <a:r>
               <a:t>DOCS PATTERNS: confidence-gated routing (the answer tells you WHAT, confidence tells you WHETHER to act), composite scoring (atomic scores, weights in code), speculative fan-out (ask everything in one call, code decides what is relevant), intent routing.</a:t>
+            </a:r>
+          </a:p>
+          <a:p/>
+          <a:p>
+            <a:r>
+              <a:t>SYSTEM ONE WORKFLOW (docs.typesafe.ai/concepts/system-one) - refund request: 1) build a state with the customer's message, the relevant transactions and the refund policy; 2) ask independent questions together (refund requested? evidence of a duplicate charge? does the policy support a refund?); 3) combine the answers with deterministic checks in code and route the case for action or review. Confidence decides when to act and when to escalate to a person or a reasoning model. Inputs are text only (strings, JSON objects, arrays of text); calibration holds across groups of predictions, not for every single answer.</a:t>
             </a:r>
           </a:p>
           <a:p/>
@@ -4248,7 +4266,25 @@
                 </a:solidFill>
                 <a:latin typeface="Segoe UI"/>
               </a:rPr>
-              <a:t>TypeSafe AI's first “System One” model: fast, typed, calibrated decisions that software can use directly.</a:t>
+              <a:t>TypeSafe AI: </a:t>
+            </a:r>
+            <a:r>
+              <a:rPr sz="1400" b="0" i="1">
+                <a:solidFill>
+                  <a:srgbClr val="F5F6FA"/>
+                </a:solidFill>
+                <a:latin typeface="Segoe UI"/>
+              </a:rPr>
+              <a:t>“We took the opposite research direction - not chat.” </a:t>
+            </a:r>
+            <a:r>
+              <a:rPr sz="1400" b="0" i="0">
+                <a:solidFill>
+                  <a:srgbClr val="A3A9BC"/>
+                </a:solidFill>
+                <a:latin typeface="Segoe UI"/>
+              </a:rPr>
+              <a:t>Its first System One model makes typed, calibrated decisions for software.</a:t>
             </a:r>
           </a:p>
         </p:txBody>
@@ -4262,7 +4298,7 @@
         <p:spPr>
           <a:xfrm>
             <a:off x="457200" y="2514600"/>
-            <a:ext cx="6720840" cy="4023360"/>
+            <a:ext cx="6720840" cy="3749039"/>
           </a:xfrm>
           <a:prstGeom prst="rect">
             <a:avLst/>
@@ -4280,11 +4316,11 @@
                 <a:spcPct val="105000"/>
               </a:lnSpc>
               <a:spcAft>
-                <a:spcPts val="1100"/>
+                <a:spcPts val="800"/>
               </a:spcAft>
             </a:pPr>
             <a:r>
-              <a:rPr sz="1400" b="0" i="0">
+              <a:rPr sz="1300" b="0" i="0">
                 <a:solidFill>
                   <a:srgbClr val="22D3EE"/>
                 </a:solidFill>
@@ -4293,7 +4329,7 @@
               <a:t>▸  </a:t>
             </a:r>
             <a:r>
-              <a:rPr sz="1400" b="0" i="0">
+              <a:rPr sz="1300" b="0" i="0">
                 <a:solidFill>
                   <a:srgbClr val="F5F6FA"/>
                 </a:solidFill>
@@ -4302,13 +4338,13 @@
               <a:t>What it is.  </a:t>
             </a:r>
             <a:r>
-              <a:rPr sz="1400" b="0" i="0">
+              <a:rPr sz="1300" b="0" i="0">
                 <a:solidFill>
                   <a:srgbClr val="A3A9BC"/>
                 </a:solidFill>
                 <a:latin typeface="Segoe UI"/>
               </a:rPr>
-              <a:t>Input = a state (text or JSON) + typed questions. Output = typed answers with calibrated probabilities. It never generates text, so there is nothing to parse and no broken schema.</a:t>
+              <a:t>Input = a state (text, JSON or arrays of text; no images or audio yet) + typed questions. Output = typed answers with calibrated probabilities. No text generation: nothing to parse, no broken schema.</a:t>
             </a:r>
           </a:p>
           <a:p>
@@ -4317,11 +4353,11 @@
                 <a:spcPct val="105000"/>
               </a:lnSpc>
               <a:spcAft>
-                <a:spcPts val="1100"/>
+                <a:spcPts val="800"/>
               </a:spcAft>
             </a:pPr>
             <a:r>
-              <a:rPr sz="1400" b="0" i="0">
+              <a:rPr sz="1300" b="0" i="0">
                 <a:solidFill>
                   <a:srgbClr val="22D3EE"/>
                 </a:solidFill>
@@ -4330,7 +4366,7 @@
               <a:t>▸  </a:t>
             </a:r>
             <a:r>
-              <a:rPr sz="1400" b="0" i="0">
+              <a:rPr sz="1300" b="0" i="0">
                 <a:solidFill>
                   <a:srgbClr val="F5F6FA"/>
                 </a:solidFill>
@@ -4339,13 +4375,13 @@
               <a:t>Why it exists.  </a:t>
             </a:r>
             <a:r>
-              <a:rPr sz="1400" b="0" i="0">
+              <a:rPr sz="1300" b="0" i="0">
                 <a:solidFill>
                   <a:srgbClr val="A3A9BC"/>
                 </a:solidFill>
                 <a:latin typeface="Segoe UI"/>
               </a:rPr>
-              <a:t>LLMs were optimised for chat (RLHF) and coding agents (RLVR). Workflow automation needs thousands of quick decisions under uncertainty: the neglected use case.</a:t>
+              <a:t>RLHF made LLMs great at chat, but brings mode dropping, overconfidence and unreliability - so they need a human in the loop. Automation needs thousands of reliable decisions.</a:t>
             </a:r>
           </a:p>
           <a:p>
@@ -4354,11 +4390,11 @@
                 <a:spcPct val="105000"/>
               </a:lnSpc>
               <a:spcAft>
-                <a:spcPts val="1100"/>
+                <a:spcPts val="800"/>
               </a:spcAft>
             </a:pPr>
             <a:r>
-              <a:rPr sz="1400" b="0" i="0">
+              <a:rPr sz="1300" b="0" i="0">
                 <a:solidFill>
                   <a:srgbClr val="22D3EE"/>
                 </a:solidFill>
@@ -4367,22 +4403,22 @@
               <a:t>▸  </a:t>
             </a:r>
             <a:r>
-              <a:rPr sz="1400" b="0" i="0">
+              <a:rPr sz="1300" b="0" i="0">
                 <a:solidFill>
                   <a:srgbClr val="F5F6FA"/>
                 </a:solidFill>
                 <a:latin typeface="Segoe UI Semibold"/>
               </a:rPr>
-              <a:t>How it is trained.  </a:t>
-            </a:r>
-            <a:r>
-              <a:rPr sz="1400" b="0" i="0">
+              <a:t>How it is built.  </a:t>
+            </a:r>
+            <a:r>
+              <a:rPr sz="1300" b="0" i="0">
                 <a:solidFill>
                   <a:srgbClr val="A3A9BC"/>
                 </a:solidFill>
                 <a:latin typeface="Segoe UI"/>
               </a:rPr>
-              <a:t>RLCD = reinforcement learning for calibrated decisions. Rewards come from proper scoring rules, so honest probabilities score best.</a:t>
+              <a:t>New architecture, new sampler and a new training algorithm: RLCD (reinforcement learning for calibrated decisions) - honest probabilities score best.</a:t>
             </a:r>
           </a:p>
           <a:p>
@@ -4391,11 +4427,11 @@
                 <a:spcPct val="105000"/>
               </a:lnSpc>
               <a:spcAft>
-                <a:spcPts val="1100"/>
+                <a:spcPts val="800"/>
               </a:spcAft>
             </a:pPr>
             <a:r>
-              <a:rPr sz="1400" b="0" i="0">
+              <a:rPr sz="1300" b="0" i="0">
                 <a:solidFill>
                   <a:srgbClr val="22D3EE"/>
                 </a:solidFill>
@@ -4404,7 +4440,7 @@
               <a:t>▸  </a:t>
             </a:r>
             <a:r>
-              <a:rPr sz="1400" b="0" i="0">
+              <a:rPr sz="1300" b="0" i="0">
                 <a:solidFill>
                   <a:srgbClr val="F5F6FA"/>
                 </a:solidFill>
@@ -4413,13 +4449,13 @@
               <a:t>Speed and cost.  </a:t>
             </a:r>
             <a:r>
-              <a:rPr sz="1400" b="0" i="0">
+              <a:rPr sz="1300" b="0" i="0">
                 <a:solidFill>
                   <a:srgbClr val="A3A9BC"/>
                 </a:solidFill>
                 <a:latin typeface="Segoe UI"/>
               </a:rPr>
-              <a:t>All questions in one parallel pass: 70–500 ms, 20–200× faster and 40–400× cheaper than LLMs on classification-style tasks. $0.042 per 1M input tokens, output is free.</a:t>
+              <a:t>All questions in one parallel pass. TypeSafe: 193.6× faster, 444.6× cheaper on System One workflows (0.11 s / $0.00008 vs 8.6 s / $0.014); $42 per billion input tokens, output free.</a:t>
             </a:r>
           </a:p>
           <a:p>
@@ -4428,11 +4464,11 @@
                 <a:spcPct val="105000"/>
               </a:lnSpc>
               <a:spcAft>
-                <a:spcPts val="1100"/>
+                <a:spcPts val="800"/>
               </a:spcAft>
             </a:pPr>
             <a:r>
-              <a:rPr sz="1400" b="0" i="0">
+              <a:rPr sz="1300" b="0" i="0">
                 <a:solidFill>
                   <a:srgbClr val="22D3EE"/>
                 </a:solidFill>
@@ -4441,7 +4477,7 @@
               <a:t>▸  </a:t>
             </a:r>
             <a:r>
-              <a:rPr sz="1400" b="0" i="0">
+              <a:rPr sz="1300" b="0" i="0">
                 <a:solidFill>
                   <a:srgbClr val="F5F6FA"/>
                 </a:solidFill>
@@ -4450,7 +4486,7 @@
               <a:t>Not an LLM replacement.  </a:t>
             </a:r>
             <a:r>
-              <a:rPr sz="1400" b="0" i="0">
+              <a:rPr sz="1300" b="0" i="0">
                 <a:solidFill>
                   <a:srgbClr val="A3A9BC"/>
                 </a:solidFill>
@@ -6728,7 +6764,58 @@
       </p:sp>
       <p:sp>
         <p:nvSpPr>
-          <p:cNvPr id="26" name="Rounded Rectangle 25"/>
+          <p:cNvPr id="26" name="TextBox 25"/>
+          <p:cNvSpPr txBox="1"/>
+          <p:nvPr/>
+        </p:nvSpPr>
+        <p:spPr>
+          <a:xfrm>
+            <a:off x="621792" y="5989320"/>
+            <a:ext cx="5394960" cy="411480"/>
+          </a:xfrm>
+          <a:prstGeom prst="rect">
+            <a:avLst/>
+          </a:prstGeom>
+          <a:noFill/>
+        </p:spPr>
+        <p:txBody>
+          <a:bodyPr wrap="square" anchor="t" lIns="36576" rIns="36576" tIns="36576" bIns="36576">
+            <a:spAutoFit/>
+          </a:bodyPr>
+          <a:lstStyle/>
+          <a:p>
+            <a:pPr algn="l">
+              <a:lnSpc>
+                <a:spcPct val="100000"/>
+              </a:lnSpc>
+              <a:spcAft>
+                <a:spcPts val="0"/>
+              </a:spcAft>
+            </a:pPr>
+            <a:r>
+              <a:rPr sz="1000" b="0" i="0">
+                <a:solidFill>
+                  <a:srgbClr val="F5F6FA"/>
+                </a:solidFill>
+                <a:latin typeface="Segoe UI Semibold"/>
+              </a:rPr>
+              <a:t>Good to know: </a:t>
+            </a:r>
+            <a:r>
+              <a:rPr sz="1000" b="0" i="0">
+                <a:solidFill>
+                  <a:srgbClr val="A3A9BC"/>
+                </a:solidFill>
+                <a:latin typeface="Segoe UI"/>
+              </a:rPr>
+              <a:t>text input only (strings, JSON, arrays) · calibration holds across many predictions, not for every single answer</a:t>
+            </a:r>
+          </a:p>
+        </p:txBody>
+      </p:sp>
+      <p:sp>
+        <p:nvSpPr>
+          <p:cNvPr id="27" name="Rounded Rectangle 26"/>
           <p:cNvSpPr/>
           <p:nvPr/>
         </p:nvSpPr>
@@ -6772,7 +6859,7 @@
       </p:sp>
       <p:sp>
         <p:nvSpPr>
-          <p:cNvPr id="27" name="TextBox 26"/>
+          <p:cNvPr id="28" name="TextBox 27"/>
           <p:cNvSpPr txBox="1"/>
           <p:nvPr/>
         </p:nvSpPr>
@@ -6823,7 +6910,7 @@
       </p:sp>
       <p:sp>
         <p:nvSpPr>
-          <p:cNvPr id="28" name="TextBox 27"/>
+          <p:cNvPr id="29" name="TextBox 28"/>
           <p:cNvSpPr txBox="1"/>
           <p:nvPr/>
         </p:nvSpPr>
@@ -6957,7 +7044,7 @@
       </p:sp>
       <p:sp>
         <p:nvSpPr>
-          <p:cNvPr id="29" name="TextBox 28">
+          <p:cNvPr id="30" name="TextBox 29">
             <a:hlinkClick r:id="rId2"/>
           </p:cNvPr>
           <p:cNvSpPr txBox="1"/>
@@ -9149,7 +9236,7 @@
                 </a:solidFill>
                 <a:latin typeface="Segoe UI"/>
               </a:rPr>
-              <a:t>no rationale (a number, not a reason) · closed answer sets only · triage-grade accuracy (vendor benchmark ~68% vs ~73% for frontier LLMs) · early access, price may change. If the answer must be written, it belongs to an LLM.</a:t>
+              <a:t>no rationale (a number, not a reason) · closed answer sets, text input only · “zero hallucinations” means always a valid type, not always the right answer · triage-grade accuracy (vendor benchmark ~68% vs ~73% for frontier LLMs) · early access, price may change. If the answer must be written, it belongs to an LLM.</a:t>
             </a:r>
           </a:p>
         </p:txBody>
@@ -9480,7 +9567,7 @@
                 </a:solidFill>
                 <a:latin typeface="Segoe UI"/>
               </a:rPr>
-              <a:t>Apply for the preview at typesafe.ai, then create an API key (comes with free credit).</a:t>
+              <a:t>Request early access at typesafe.ai, sign in at console.typesafe.ai, create an API key (free credit).</a:t>
             </a:r>
           </a:p>
           <a:p>

--- a/presentation/Jev_Team_Overview.pptx
+++ b/presentation/Jev_Team_Overview.pptx
@@ -619,6 +619,13 @@
           <a:lstStyle/>
           <a:p>
             <a:r>
+              <a:t>EXAMPLE CALL (support ticket from the docs / LangChain video): POST /v1/systemone with state "Hi, I've been trying to connect my Stripe account for 3 days and it keeps failing. I'm losing sales. Please help ASAP." and three questions in one request: team (choice: billing / technical / ...), mood (score: calm / frustrated / very angry) and urgent (noul). Answers: team = billing (p 0.84, confidence 0.60), mood = 1.04 (frustrated, not very angry), urgent = 0.999.</a:t>
+            </a:r>
+          </a:p>
+          <a:p/>
+          <a:p/>
+          <a:p>
+            <a:r>
               <a:t>PRIMITIVES (all three videos + docs.typesafe.ai/api):</a:t>
             </a:r>
           </a:p>
@@ -992,6 +999,60 @@
         <p:txBody>
           <a:bodyPr/>
           <a:lstStyle/>
+          <a:p>
+            <a:r>
+              <a:t>RESULTS PER SAMPLE (laptop CPU, zero-shot Laya):</a:t>
+            </a:r>
+          </a:p>
+          <a:p>
+            <a:r>
+              <a:t>- 01 Lead scoring (Choice + Score + Noul): VP with approved budget -&gt; 86/100 -&gt; enterprise AE; student and SEO agency disqualified; a possible competitor (p 0.49) goes to a human check instead of being dropped.</a:t>
+            </a:r>
+          </a:p>
+          <a:p>
+            <a:r>
+              <a:t>- 02 Campaign reply triage, EN/DE/CZ (Choice + Noul): 10/10 correct labels; 7 automated, 1 review, 2 escalated; opt-out requests always suppressed (compliance rule in code).</a:t>
+            </a:r>
+          </a:p>
+          <a:p>
+            <a:r>
+              <a:t>- 03 SEO internal linking (Noul + Choice): 36 page pairs -&gt; 18 links with anchor texts, 54 rejected; the summer-party page gets no links.</a:t>
+            </a:r>
+          </a:p>
+          <a:p>
+            <a:r>
+              <a:t>- 04 Social feed monitor (Noul + Score + Choice): 3/3 slop posts hidden; complaint -&gt; support, cancellation -&gt; retention, question -&gt; sales, feature request -&gt; product.</a:t>
+            </a:r>
+          </a:p>
+          <a:p>
+            <a:r>
+              <a:t>- 05 Command bar (Choice): "cut spend on meta prospecting in half" -&gt; change_budget(meta_prospecting, decrease, 50%); vague commands get "did you mean ...?".</a:t>
+            </a:r>
+          </a:p>
+          <a:p>
+            <a:r>
+              <a:t>- 06 Agent harness (Choice + Noul): routing saves 48% of LLM cost; 6/6 tool calls classified correctly (allow / ask human / block); Jev-as-a-judge catches hype and two invented claims.</a:t>
+            </a:r>
+          </a:p>
+          <a:p>
+            <a:r>
+              <a:t>- 07 UI demos: trolley x100 (Choice), creative emoji pile (Noul), "How hot is this message?" (Score) - next slide.</a:t>
+            </a:r>
+          </a:p>
+          <a:p/>
+          <a:p>
+            <a:r>
+              <a:t>NEXT STEPS: 1) pick one pilot (reply triage or lead scoring); 2) label 300-500 real examples and set thresholds on them; 3) compare Laya (fine-tuned) vs the Jev API on that set; 4) ship behind a confidence gate with human review for the middle band.</a:t>
+            </a:r>
+          </a:p>
+          <a:p/>
+          <a:p>
+            <a:r>
+              <a:t>LEARNINGS IN DETAIL: atomic questions win (one persona Choice beat four disqualifier Nouls); numbers, business rules and routing stay in code; give the model only the text it needs; wording matters - we compared 3-5 phrasings per question on small labelled sets; gate on confidence and fail safe (human, powerful LLM or a clarification question); compliance rules override the model; CPU ~0.3 s per question vs ~33 ms on a T4 GPU.</a:t>
+            </a:r>
+          </a:p>
+          <a:p/>
+          <a:p/>
           <a:p>
             <a:r>
               <a:t>REPO: https://github.com/stvonolf/jev-samples - samples/ has seven runnable Python samples + jev_client.py (local Laya backend or any Jev-compatible HTTP endpoint via JEV_BASE_URL / JEV_API_KEY). Run: git clone https://github.com/stvonolf/jev-samples; cd jev-samples; python -m venv .venv; .venv\Scripts\python -m pip install -r samples\requirements.txt; cd samples; ..\.venv\Scripts\python 01_lead_scoring.py (01-06 are console samples); ..\.venv\Scripts\python 07_ui_demos.py starts the browser demos on http://localhost:8765.</a:t>
@@ -4177,7 +4238,7 @@
         <p:spPr>
           <a:xfrm>
             <a:off x="457200" y="566928"/>
-            <a:ext cx="6949440" cy="1188720"/>
+            <a:ext cx="6400800" cy="1188720"/>
           </a:xfrm>
           <a:prstGeom prst="rect">
             <a:avLst/>
@@ -4199,7 +4260,7 @@
               </a:spcAft>
             </a:pPr>
             <a:r>
-              <a:rPr sz="3600" b="0" i="0">
+              <a:rPr sz="4000" b="0" i="0">
                 <a:solidFill>
                   <a:srgbClr val="F5F6FA"/>
                 </a:solidFill>
@@ -4208,7 +4269,7 @@
               <a:t>Jev: AI that </a:t>
             </a:r>
             <a:r>
-              <a:rPr sz="3600" b="0" i="0">
+              <a:rPr sz="4000" b="0" i="0">
                 <a:solidFill>
                   <a:srgbClr val="E040FB"/>
                 </a:solidFill>
@@ -4217,7 +4278,7 @@
               <a:t>decides</a:t>
             </a:r>
             <a:r>
-              <a:rPr sz="3600" b="0" i="0">
+              <a:rPr sz="4000" b="0" i="0">
                 <a:solidFill>
                   <a:srgbClr val="F5F6FA"/>
                 </a:solidFill>
@@ -4237,8 +4298,8 @@
         </p:nvSpPr>
         <p:spPr>
           <a:xfrm>
-            <a:off x="457200" y="1828800"/>
-            <a:ext cx="6766560" cy="548640"/>
+            <a:off x="457200" y="1965960"/>
+            <a:ext cx="6217920" cy="457200"/>
           </a:xfrm>
           <a:prstGeom prst="rect">
             <a:avLst/>
@@ -4260,31 +4321,13 @@
               </a:spcAft>
             </a:pPr>
             <a:r>
-              <a:rPr sz="1400" b="0" i="0">
+              <a:rPr sz="1700" b="0" i="0">
                 <a:solidFill>
                   <a:srgbClr val="A3A9BC"/>
                 </a:solidFill>
                 <a:latin typeface="Segoe UI"/>
               </a:rPr>
-              <a:t>TypeSafe AI: </a:t>
-            </a:r>
-            <a:r>
-              <a:rPr sz="1400" b="0" i="1">
-                <a:solidFill>
-                  <a:srgbClr val="F5F6FA"/>
-                </a:solidFill>
-                <a:latin typeface="Segoe UI"/>
-              </a:rPr>
-              <a:t>“We took the opposite research direction - not chat.” </a:t>
-            </a:r>
-            <a:r>
-              <a:rPr sz="1400" b="0" i="0">
-                <a:solidFill>
-                  <a:srgbClr val="A3A9BC"/>
-                </a:solidFill>
-                <a:latin typeface="Segoe UI"/>
-              </a:rPr>
-              <a:t>Its first System One model makes typed, calibrated decisions for software.</a:t>
+              <a:t>TypeSafe AI's first “System One” model</a:t>
             </a:r>
           </a:p>
         </p:txBody>
@@ -4297,8 +4340,8 @@
         </p:nvSpPr>
         <p:spPr>
           <a:xfrm>
-            <a:off x="457200" y="2514600"/>
-            <a:ext cx="6720840" cy="3749039"/>
+            <a:off x="457200" y="2743200"/>
+            <a:ext cx="6126480" cy="2651760"/>
           </a:xfrm>
           <a:prstGeom prst="rect">
             <a:avLst/>
@@ -4316,11 +4359,11 @@
                 <a:spcPct val="105000"/>
               </a:lnSpc>
               <a:spcAft>
-                <a:spcPts val="800"/>
+                <a:spcPts val="1800"/>
               </a:spcAft>
             </a:pPr>
             <a:r>
-              <a:rPr sz="1300" b="0" i="0">
+              <a:rPr sz="1900" b="0" i="0">
                 <a:solidFill>
                   <a:srgbClr val="22D3EE"/>
                 </a:solidFill>
@@ -4329,22 +4372,22 @@
               <a:t>▸  </a:t>
             </a:r>
             <a:r>
-              <a:rPr sz="1300" b="0" i="0">
+              <a:rPr sz="1900" b="0" i="0">
                 <a:solidFill>
                   <a:srgbClr val="F5F6FA"/>
                 </a:solidFill>
                 <a:latin typeface="Segoe UI Semibold"/>
               </a:rPr>
-              <a:t>What it is.  </a:t>
-            </a:r>
-            <a:r>
-              <a:rPr sz="1300" b="0" i="0">
+              <a:t>Text in → </a:t>
+            </a:r>
+            <a:r>
+              <a:rPr sz="1900" b="0" i="0">
                 <a:solidFill>
                   <a:srgbClr val="A3A9BC"/>
                 </a:solidFill>
                 <a:latin typeface="Segoe UI"/>
               </a:rPr>
-              <a:t>Input = a state (text, JSON or arrays of text; no images or audio yet) + typed questions. Output = typed answers with calibrated probabilities. No text generation: nothing to parse, no broken schema.</a:t>
+              <a:t>typed decisions + probabilities out</a:t>
             </a:r>
           </a:p>
           <a:p>
@@ -4353,11 +4396,11 @@
                 <a:spcPct val="105000"/>
               </a:lnSpc>
               <a:spcAft>
-                <a:spcPts val="800"/>
+                <a:spcPts val="1800"/>
               </a:spcAft>
             </a:pPr>
             <a:r>
-              <a:rPr sz="1300" b="0" i="0">
+              <a:rPr sz="1900" b="0" i="0">
                 <a:solidFill>
                   <a:srgbClr val="22D3EE"/>
                 </a:solidFill>
@@ -4366,22 +4409,22 @@
               <a:t>▸  </a:t>
             </a:r>
             <a:r>
-              <a:rPr sz="1300" b="0" i="0">
+              <a:rPr sz="1900" b="0" i="0">
                 <a:solidFill>
                   <a:srgbClr val="F5F6FA"/>
                 </a:solidFill>
                 <a:latin typeface="Segoe UI Semibold"/>
               </a:rPr>
-              <a:t>Why it exists.  </a:t>
-            </a:r>
-            <a:r>
-              <a:rPr sz="1300" b="0" i="0">
+              <a:t>One parallel pass: </a:t>
+            </a:r>
+            <a:r>
+              <a:rPr sz="1900" b="0" i="0">
                 <a:solidFill>
                   <a:srgbClr val="A3A9BC"/>
                 </a:solidFill>
                 <a:latin typeface="Segoe UI"/>
               </a:rPr>
-              <a:t>RLHF made LLMs great at chat, but brings mode dropping, overconfidence and unreliability - so they need a human in the loop. Automation needs thousands of reliable decisions.</a:t>
+              <a:t>~0.1 s, ~200× faster and ~400× cheaper than an LLM*</a:t>
             </a:r>
           </a:p>
           <a:p>
@@ -4390,11 +4433,11 @@
                 <a:spcPct val="105000"/>
               </a:lnSpc>
               <a:spcAft>
-                <a:spcPts val="800"/>
+                <a:spcPts val="1800"/>
               </a:spcAft>
             </a:pPr>
             <a:r>
-              <a:rPr sz="1300" b="0" i="0">
+              <a:rPr sz="1900" b="0" i="0">
                 <a:solidFill>
                   <a:srgbClr val="22D3EE"/>
                 </a:solidFill>
@@ -4403,103 +4446,71 @@
               <a:t>▸  </a:t>
             </a:r>
             <a:r>
-              <a:rPr sz="1300" b="0" i="0">
+              <a:rPr sz="1900" b="0" i="0">
                 <a:solidFill>
                   <a:srgbClr val="F5F6FA"/>
                 </a:solidFill>
                 <a:latin typeface="Segoe UI Semibold"/>
               </a:rPr>
-              <a:t>How it is built.  </a:t>
-            </a:r>
-            <a:r>
-              <a:rPr sz="1300" b="0" i="0">
+              <a:t>Fast “System 1” </a:t>
+            </a:r>
+            <a:r>
+              <a:rPr sz="1900" b="0" i="0">
                 <a:solidFill>
                   <a:srgbClr val="A3A9BC"/>
                 </a:solidFill>
                 <a:latin typeface="Segoe UI"/>
               </a:rPr>
-              <a:t>New architecture, new sampler and a new training algorithm: RLCD (reinforcement learning for calibrated decisions) - honest probabilities score best.</a:t>
-            </a:r>
-          </a:p>
+              <a:t>next to the LLM's slow “System 2” - not a replacement</a:t>
+            </a:r>
+          </a:p>
+        </p:txBody>
+      </p:sp>
+      <p:sp>
+        <p:nvSpPr>
+          <p:cNvPr id="6" name="TextBox 5"/>
+          <p:cNvSpPr txBox="1"/>
+          <p:nvPr/>
+        </p:nvSpPr>
+        <p:spPr>
+          <a:xfrm>
+            <a:off x="457200" y="5257800"/>
+            <a:ext cx="6217920" cy="274320"/>
+          </a:xfrm>
+          <a:prstGeom prst="rect">
+            <a:avLst/>
+          </a:prstGeom>
+          <a:noFill/>
+        </p:spPr>
+        <p:txBody>
+          <a:bodyPr wrap="square" anchor="t" lIns="36576" rIns="36576" tIns="36576" bIns="36576">
+            <a:spAutoFit/>
+          </a:bodyPr>
+          <a:lstStyle/>
           <a:p>
             <a:pPr algn="l">
               <a:lnSpc>
-                <a:spcPct val="105000"/>
+                <a:spcPct val="100000"/>
               </a:lnSpc>
               <a:spcAft>
-                <a:spcPts val="800"/>
+                <a:spcPts val="0"/>
               </a:spcAft>
             </a:pPr>
             <a:r>
-              <a:rPr sz="1300" b="0" i="0">
-                <a:solidFill>
-                  <a:srgbClr val="22D3EE"/>
-                </a:solidFill>
-                <a:latin typeface="Segoe UI Semibold"/>
-              </a:rPr>
-              <a:t>▸  </a:t>
-            </a:r>
-            <a:r>
-              <a:rPr sz="1300" b="0" i="0">
-                <a:solidFill>
-                  <a:srgbClr val="F5F6FA"/>
-                </a:solidFill>
-                <a:latin typeface="Segoe UI Semibold"/>
-              </a:rPr>
-              <a:t>Speed and cost.  </a:t>
-            </a:r>
-            <a:r>
-              <a:rPr sz="1300" b="0" i="0">
+              <a:rPr sz="1000" b="0" i="0">
                 <a:solidFill>
                   <a:srgbClr val="A3A9BC"/>
                 </a:solidFill>
                 <a:latin typeface="Segoe UI"/>
               </a:rPr>
-              <a:t>All questions in one parallel pass. TypeSafe: 193.6× faster, 444.6× cheaper on System One workflows (0.11 s / $0.00008 vs 8.6 s / $0.014); $42 per billion input tokens, output free.</a:t>
-            </a:r>
-          </a:p>
-          <a:p>
-            <a:pPr algn="l">
-              <a:lnSpc>
-                <a:spcPct val="105000"/>
-              </a:lnSpc>
-              <a:spcAft>
-                <a:spcPts val="800"/>
-              </a:spcAft>
-            </a:pPr>
-            <a:r>
-              <a:rPr sz="1300" b="0" i="0">
-                <a:solidFill>
-                  <a:srgbClr val="22D3EE"/>
-                </a:solidFill>
-                <a:latin typeface="Segoe UI Semibold"/>
-              </a:rPr>
-              <a:t>▸  </a:t>
-            </a:r>
-            <a:r>
-              <a:rPr sz="1300" b="0" i="0">
-                <a:solidFill>
-                  <a:srgbClr val="F5F6FA"/>
-                </a:solidFill>
-                <a:latin typeface="Segoe UI Semibold"/>
-              </a:rPr>
-              <a:t>Not an LLM replacement.  </a:t>
-            </a:r>
-            <a:r>
-              <a:rPr sz="1300" b="0" i="0">
-                <a:solidFill>
-                  <a:srgbClr val="A3A9BC"/>
-                </a:solidFill>
-                <a:latin typeface="Segoe UI"/>
-              </a:rPr>
-              <a:t>It cannot write, explain or plan. Jev is System 1 (fast intuition); LLMs stay System 2 (slow reasoning). Use both.</a:t>
+              <a:t>* TypeSafe's own benchmark on System One workflows</a:t>
             </a:r>
           </a:p>
         </p:txBody>
       </p:sp>
       <p:pic>
         <p:nvPicPr>
-          <p:cNvPr id="6" name="Picture 5" descr="yt_vj7hysh0mOI.jpg">
+          <p:cNvPr id="7" name="Picture 6" descr="yt_vj7hysh0mOI.jpg">
             <a:hlinkClick r:id="rId3"/>
           </p:cNvPr>
           <p:cNvPicPr>
@@ -4515,8 +4526,8 @@
         </p:blipFill>
         <p:spPr>
           <a:xfrm>
-            <a:off x="7589520" y="411480"/>
-            <a:ext cx="4160520" cy="2340292"/>
+            <a:off x="6903720" y="502920"/>
+            <a:ext cx="4846320" cy="2726055"/>
           </a:xfrm>
           <a:prstGeom prst="rect">
             <a:avLst/>
@@ -4530,7 +4541,7 @@
       </p:pic>
       <p:sp>
         <p:nvSpPr>
-          <p:cNvPr id="7" name="TextBox 6">
+          <p:cNvPr id="8" name="TextBox 7">
             <a:hlinkClick r:id="rId3"/>
           </p:cNvPr>
           <p:cNvSpPr txBox="1"/>
@@ -4538,8 +4549,8 @@
         </p:nvSpPr>
         <p:spPr>
           <a:xfrm>
-            <a:off x="7589520" y="2779776"/>
-            <a:ext cx="4206240" cy="274320"/>
+            <a:off x="6903720" y="3273552"/>
+            <a:ext cx="4846320" cy="274320"/>
           </a:xfrm>
           <a:prstGeom prst="rect">
             <a:avLst/>
@@ -4561,36 +4572,27 @@
               </a:spcAft>
             </a:pPr>
             <a:r>
-              <a:rPr sz="1000" b="0" i="0">
+              <a:rPr sz="1000" b="0" i="0" u="sng">
                 <a:solidFill>
                   <a:srgbClr val="A3A9BC"/>
                 </a:solidFill>
                 <a:latin typeface="Segoe UI"/>
               </a:rPr>
-              <a:t>Video: </a:t>
-            </a:r>
-            <a:r>
-              <a:rPr sz="1000" b="0" i="0" u="sng">
-                <a:solidFill>
-                  <a:srgbClr val="A3A9BC"/>
-                </a:solidFill>
-                <a:latin typeface="Segoe UI"/>
-              </a:rPr>
-              <a:t>“Jev explained in 7min..” – Caleb Writes Code</a:t>
-            </a:r>
-          </a:p>
-        </p:txBody>
-      </p:sp>
-      <p:sp>
-        <p:nvSpPr>
-          <p:cNvPr id="8" name="Rounded Rectangle 7"/>
+              <a:t>▶  “Jev explained in 7min..” – Caleb Writes Code</a:t>
+            </a:r>
+          </a:p>
+        </p:txBody>
+      </p:sp>
+      <p:sp>
+        <p:nvSpPr>
+          <p:cNvPr id="9" name="Rounded Rectangle 8"/>
           <p:cNvSpPr/>
           <p:nvPr/>
         </p:nvSpPr>
         <p:spPr>
           <a:xfrm>
-            <a:off x="7589520" y="3200400"/>
-            <a:ext cx="4160520" cy="3246120"/>
+            <a:off x="6903720" y="3794760"/>
+            <a:ext cx="2359152" cy="1600200"/>
           </a:xfrm>
           <a:prstGeom prst="roundRect">
             <a:avLst>
@@ -4600,8 +4602,10 @@
           <a:solidFill>
             <a:srgbClr val="1A1D27"/>
           </a:solidFill>
-          <a:ln>
-            <a:noFill/>
+          <a:ln w="15875">
+            <a:solidFill>
+              <a:srgbClr val="F87171"/>
+            </a:solidFill>
           </a:ln>
           <a:effectLst/>
         </p:spPr>
@@ -4627,14 +4631,14 @@
       </p:sp>
       <p:sp>
         <p:nvSpPr>
-          <p:cNvPr id="9" name="TextBox 8"/>
+          <p:cNvPr id="10" name="TextBox 9"/>
           <p:cNvSpPr txBox="1"/>
           <p:nvPr/>
         </p:nvSpPr>
         <p:spPr>
           <a:xfrm>
-            <a:off x="7726679" y="3291840"/>
-            <a:ext cx="3931920" cy="320040"/>
+            <a:off x="7068312" y="3886200"/>
+            <a:ext cx="2103120" cy="274320"/>
           </a:xfrm>
           <a:prstGeom prst="rect">
             <a:avLst/>
@@ -4656,36 +4660,27 @@
               </a:spcAft>
             </a:pPr>
             <a:r>
-              <a:rPr sz="1150" b="0" i="0">
-                <a:solidFill>
-                  <a:srgbClr val="F5F6FA"/>
+              <a:rPr sz="1300" b="0" i="0">
+                <a:solidFill>
+                  <a:srgbClr val="F87171"/>
                 </a:solidFill>
                 <a:latin typeface="Segoe UI Semibold"/>
               </a:rPr>
-              <a:t>Same question, two models: </a:t>
-            </a:r>
-            <a:r>
-              <a:rPr sz="1150" b="0" i="0">
-                <a:solidFill>
-                  <a:srgbClr val="A3A9BC"/>
-                </a:solidFill>
-                <a:latin typeface="Segoe UI"/>
-              </a:rPr>
-              <a:t>“Is there PII in this text?”</a:t>
-            </a:r>
-          </a:p>
-        </p:txBody>
-      </p:sp>
-      <p:sp>
-        <p:nvSpPr>
-          <p:cNvPr id="10" name="TextBox 9"/>
+              <a:t>LLM</a:t>
+            </a:r>
+          </a:p>
+        </p:txBody>
+      </p:sp>
+      <p:sp>
+        <p:nvSpPr>
+          <p:cNvPr id="11" name="TextBox 10"/>
           <p:cNvSpPr txBox="1"/>
           <p:nvPr/>
         </p:nvSpPr>
         <p:spPr>
           <a:xfrm>
-            <a:off x="7726679" y="3749039"/>
-            <a:ext cx="914400" cy="274320"/>
+            <a:off x="7068312" y="4206240"/>
+            <a:ext cx="2103120" cy="640080"/>
           </a:xfrm>
           <a:prstGeom prst="rect">
             <a:avLst/>
@@ -4707,27 +4702,27 @@
               </a:spcAft>
             </a:pPr>
             <a:r>
-              <a:rPr sz="1300" b="0" i="0">
-                <a:solidFill>
-                  <a:srgbClr val="F87171"/>
+              <a:rPr sz="3200" b="0" i="0">
+                <a:solidFill>
+                  <a:srgbClr val="F5F6FA"/>
                 </a:solidFill>
                 <a:latin typeface="Segoe UI Semibold"/>
               </a:rPr>
-              <a:t>LLM</a:t>
-            </a:r>
-          </a:p>
-        </p:txBody>
-      </p:sp>
-      <p:sp>
-        <p:nvSpPr>
-          <p:cNvPr id="11" name="TextBox 10"/>
+              <a:t>≈ 5 s</a:t>
+            </a:r>
+          </a:p>
+        </p:txBody>
+      </p:sp>
+      <p:sp>
+        <p:nvSpPr>
+          <p:cNvPr id="12" name="TextBox 11"/>
           <p:cNvSpPr txBox="1"/>
           <p:nvPr/>
         </p:nvSpPr>
         <p:spPr>
           <a:xfrm>
-            <a:off x="10835640" y="3749039"/>
-            <a:ext cx="822960" cy="274320"/>
+            <a:off x="7068312" y="4892040"/>
+            <a:ext cx="2103120" cy="411480"/>
           </a:xfrm>
           <a:prstGeom prst="rect">
             <a:avLst/>
@@ -4740,7 +4735,7 @@
           </a:bodyPr>
           <a:lstStyle/>
           <a:p>
-            <a:pPr algn="r">
+            <a:pPr algn="l">
               <a:lnSpc>
                 <a:spcPct val="100000"/>
               </a:lnSpc>
@@ -4749,27 +4744,27 @@
               </a:spcAft>
             </a:pPr>
             <a:r>
-              <a:rPr sz="1300" b="0" i="0">
-                <a:solidFill>
-                  <a:srgbClr val="F87171"/>
-                </a:solidFill>
-                <a:latin typeface="Segoe UI Semibold"/>
-              </a:rPr>
-              <a:t>≈ 5 s</a:t>
-            </a:r>
-          </a:p>
-        </p:txBody>
-      </p:sp>
-      <p:sp>
-        <p:nvSpPr>
-          <p:cNvPr id="12" name="Rounded Rectangle 11"/>
+              <a:rPr sz="1100" b="0" i="0">
+                <a:solidFill>
+                  <a:srgbClr val="A3A9BC"/>
+                </a:solidFill>
+                <a:latin typeface="Segoe UI"/>
+              </a:rPr>
+              <a:t>text, then parse</a:t>
+            </a:r>
+          </a:p>
+        </p:txBody>
+      </p:sp>
+      <p:sp>
+        <p:nvSpPr>
+          <p:cNvPr id="13" name="Rounded Rectangle 12"/>
           <p:cNvSpPr/>
           <p:nvPr/>
         </p:nvSpPr>
         <p:spPr>
           <a:xfrm>
-            <a:off x="7726679" y="4096511"/>
-            <a:ext cx="1188720" cy="530352"/>
+            <a:off x="9390888" y="3794760"/>
+            <a:ext cx="2359152" cy="1600200"/>
           </a:xfrm>
           <a:prstGeom prst="roundRect">
             <a:avLst>
@@ -4777,10 +4772,12 @@
             </a:avLst>
           </a:prstGeom>
           <a:solidFill>
-            <a:srgbClr val="242836"/>
+            <a:srgbClr val="1A1D27"/>
           </a:solidFill>
-          <a:ln>
-            <a:noFill/>
+          <a:ln w="15875">
+            <a:solidFill>
+              <a:srgbClr val="34D399"/>
+            </a:solidFill>
           </a:ln>
           <a:effectLst/>
         </p:spPr>
@@ -4799,249 +4796,21 @@
           </a:fontRef>
         </p:style>
         <p:txBody>
-          <a:bodyPr rtlCol="0" anchor="ctr" wrap="square" lIns="36576" rIns="36576" tIns="36576" bIns="36576"/>
-          <a:lstStyle/>
-          <a:p>
-            <a:pPr algn="ctr">
-              <a:lnSpc>
-                <a:spcPct val="100000"/>
-              </a:lnSpc>
-              <a:spcAft>
-                <a:spcPts val="0"/>
-              </a:spcAft>
-            </a:pPr>
-            <a:r>
-              <a:rPr sz="1000" b="0" i="0">
-                <a:solidFill>
-                  <a:srgbClr val="F5F6FA"/>
-                </a:solidFill>
-                <a:latin typeface="Segoe UI"/>
-              </a:rPr>
-              <a:t>prompt</a:t>
-            </a:r>
-          </a:p>
-        </p:txBody>
-      </p:sp>
-      <p:sp>
-        <p:nvSpPr>
-          <p:cNvPr id="13" name="TextBox 12"/>
+          <a:bodyPr rtlCol="0" anchor="ctr"/>
+          <a:lstStyle/>
+          <a:p/>
+        </p:txBody>
+      </p:sp>
+      <p:sp>
+        <p:nvSpPr>
+          <p:cNvPr id="14" name="TextBox 13"/>
           <p:cNvSpPr txBox="1"/>
           <p:nvPr/>
         </p:nvSpPr>
         <p:spPr>
           <a:xfrm>
-            <a:off x="8887967" y="4178807"/>
-            <a:ext cx="201168" cy="365760"/>
-          </a:xfrm>
-          <a:prstGeom prst="rect">
-            <a:avLst/>
-          </a:prstGeom>
-          <a:noFill/>
-        </p:spPr>
-        <p:txBody>
-          <a:bodyPr wrap="square" anchor="t" lIns="36576" rIns="36576" tIns="36576" bIns="36576">
-            <a:spAutoFit/>
-          </a:bodyPr>
-          <a:lstStyle/>
-          <a:p>
-            <a:pPr algn="ctr">
-              <a:lnSpc>
-                <a:spcPct val="100000"/>
-              </a:lnSpc>
-              <a:spcAft>
-                <a:spcPts val="0"/>
-              </a:spcAft>
-            </a:pPr>
-            <a:r>
-              <a:rPr sz="1600" b="0" i="0">
-                <a:solidFill>
-                  <a:srgbClr val="A3A9BC"/>
-                </a:solidFill>
-                <a:latin typeface="Segoe UI"/>
-              </a:rPr>
-              <a:t>›</a:t>
-            </a:r>
-          </a:p>
-        </p:txBody>
-      </p:sp>
-      <p:sp>
-        <p:nvSpPr>
-          <p:cNvPr id="14" name="Rounded Rectangle 13"/>
-          <p:cNvSpPr/>
-          <p:nvPr/>
-        </p:nvSpPr>
-        <p:spPr>
-          <a:xfrm>
-            <a:off x="9052559" y="4096511"/>
-            <a:ext cx="1188720" cy="530352"/>
-          </a:xfrm>
-          <a:prstGeom prst="roundRect">
-            <a:avLst>
-              <a:gd name="adj" fmla="val 6000"/>
-            </a:avLst>
-          </a:prstGeom>
-          <a:solidFill>
-            <a:srgbClr val="242836"/>
-          </a:solidFill>
-          <a:ln>
-            <a:noFill/>
-          </a:ln>
-          <a:effectLst/>
-        </p:spPr>
-        <p:style>
-          <a:lnRef idx="1">
-            <a:schemeClr val="accent1"/>
-          </a:lnRef>
-          <a:fillRef idx="3">
-            <a:schemeClr val="accent1"/>
-          </a:fillRef>
-          <a:effectRef idx="2">
-            <a:schemeClr val="accent1"/>
-          </a:effectRef>
-          <a:fontRef idx="minor">
-            <a:schemeClr val="lt1"/>
-          </a:fontRef>
-        </p:style>
-        <p:txBody>
-          <a:bodyPr rtlCol="0" anchor="ctr" wrap="square" lIns="36576" rIns="36576" tIns="36576" bIns="36576"/>
-          <a:lstStyle/>
-          <a:p>
-            <a:pPr algn="ctr">
-              <a:lnSpc>
-                <a:spcPct val="100000"/>
-              </a:lnSpc>
-              <a:spcAft>
-                <a:spcPts val="0"/>
-              </a:spcAft>
-            </a:pPr>
-            <a:r>
-              <a:rPr sz="1000" b="0" i="0">
-                <a:solidFill>
-                  <a:srgbClr val="F5F6FA"/>
-                </a:solidFill>
-                <a:latin typeface="Segoe UI"/>
-              </a:rPr>
-              <a:t>token · token · token …</a:t>
-            </a:r>
-          </a:p>
-        </p:txBody>
-      </p:sp>
-      <p:sp>
-        <p:nvSpPr>
-          <p:cNvPr id="15" name="TextBox 14"/>
-          <p:cNvSpPr txBox="1"/>
-          <p:nvPr/>
-        </p:nvSpPr>
-        <p:spPr>
-          <a:xfrm>
-            <a:off x="10213847" y="4178807"/>
-            <a:ext cx="201168" cy="365760"/>
-          </a:xfrm>
-          <a:prstGeom prst="rect">
-            <a:avLst/>
-          </a:prstGeom>
-          <a:noFill/>
-        </p:spPr>
-        <p:txBody>
-          <a:bodyPr wrap="square" anchor="t" lIns="36576" rIns="36576" tIns="36576" bIns="36576">
-            <a:spAutoFit/>
-          </a:bodyPr>
-          <a:lstStyle/>
-          <a:p>
-            <a:pPr algn="ctr">
-              <a:lnSpc>
-                <a:spcPct val="100000"/>
-              </a:lnSpc>
-              <a:spcAft>
-                <a:spcPts val="0"/>
-              </a:spcAft>
-            </a:pPr>
-            <a:r>
-              <a:rPr sz="1600" b="0" i="0">
-                <a:solidFill>
-                  <a:srgbClr val="A3A9BC"/>
-                </a:solidFill>
-                <a:latin typeface="Segoe UI"/>
-              </a:rPr>
-              <a:t>›</a:t>
-            </a:r>
-          </a:p>
-        </p:txBody>
-      </p:sp>
-      <p:sp>
-        <p:nvSpPr>
-          <p:cNvPr id="16" name="Rounded Rectangle 15"/>
-          <p:cNvSpPr/>
-          <p:nvPr/>
-        </p:nvSpPr>
-        <p:spPr>
-          <a:xfrm>
-            <a:off x="10378440" y="4096511"/>
-            <a:ext cx="1188720" cy="530352"/>
-          </a:xfrm>
-          <a:prstGeom prst="roundRect">
-            <a:avLst>
-              <a:gd name="adj" fmla="val 6000"/>
-            </a:avLst>
-          </a:prstGeom>
-          <a:solidFill>
-            <a:srgbClr val="242836"/>
-          </a:solidFill>
-          <a:ln w="15875">
-            <a:solidFill>
-              <a:srgbClr val="F87171"/>
-            </a:solidFill>
-          </a:ln>
-          <a:effectLst/>
-        </p:spPr>
-        <p:style>
-          <a:lnRef idx="1">
-            <a:schemeClr val="accent1"/>
-          </a:lnRef>
-          <a:fillRef idx="3">
-            <a:schemeClr val="accent1"/>
-          </a:fillRef>
-          <a:effectRef idx="2">
-            <a:schemeClr val="accent1"/>
-          </a:effectRef>
-          <a:fontRef idx="minor">
-            <a:schemeClr val="lt1"/>
-          </a:fontRef>
-        </p:style>
-        <p:txBody>
-          <a:bodyPr rtlCol="0" anchor="ctr" wrap="square" lIns="36576" rIns="36576" tIns="36576" bIns="36576"/>
-          <a:lstStyle/>
-          <a:p>
-            <a:pPr algn="ctr">
-              <a:lnSpc>
-                <a:spcPct val="100000"/>
-              </a:lnSpc>
-              <a:spcAft>
-                <a:spcPts val="0"/>
-              </a:spcAft>
-            </a:pPr>
-            <a:r>
-              <a:rPr sz="1000" b="0" i="0">
-                <a:solidFill>
-                  <a:srgbClr val="F5F6FA"/>
-                </a:solidFill>
-                <a:latin typeface="Segoe UI"/>
-              </a:rPr>
-              <a:t>text → parse</a:t>
-            </a:r>
-          </a:p>
-        </p:txBody>
-      </p:sp>
-      <p:sp>
-        <p:nvSpPr>
-          <p:cNvPr id="17" name="TextBox 16"/>
-          <p:cNvSpPr txBox="1"/>
-          <p:nvPr/>
-        </p:nvSpPr>
-        <p:spPr>
-          <a:xfrm>
-            <a:off x="7726679" y="4937759"/>
-            <a:ext cx="914400" cy="274320"/>
+            <a:off x="9555480" y="3886200"/>
+            <a:ext cx="2103120" cy="274320"/>
           </a:xfrm>
           <a:prstGeom prst="rect">
             <a:avLst/>
@@ -5076,330 +4845,14 @@
       </p:sp>
       <p:sp>
         <p:nvSpPr>
-          <p:cNvPr id="18" name="TextBox 17"/>
+          <p:cNvPr id="15" name="TextBox 14"/>
           <p:cNvSpPr txBox="1"/>
           <p:nvPr/>
         </p:nvSpPr>
         <p:spPr>
           <a:xfrm>
-            <a:off x="10835640" y="4937759"/>
-            <a:ext cx="822960" cy="274320"/>
-          </a:xfrm>
-          <a:prstGeom prst="rect">
-            <a:avLst/>
-          </a:prstGeom>
-          <a:noFill/>
-        </p:spPr>
-        <p:txBody>
-          <a:bodyPr wrap="square" anchor="t" lIns="36576" rIns="36576" tIns="36576" bIns="36576">
-            <a:spAutoFit/>
-          </a:bodyPr>
-          <a:lstStyle/>
-          <a:p>
-            <a:pPr algn="r">
-              <a:lnSpc>
-                <a:spcPct val="100000"/>
-              </a:lnSpc>
-              <a:spcAft>
-                <a:spcPts val="0"/>
-              </a:spcAft>
-            </a:pPr>
-            <a:r>
-              <a:rPr sz="1300" b="0" i="0">
-                <a:solidFill>
-                  <a:srgbClr val="34D399"/>
-                </a:solidFill>
-                <a:latin typeface="Segoe UI Semibold"/>
-              </a:rPr>
-              <a:t>≈ 0.1 s</a:t>
-            </a:r>
-          </a:p>
-        </p:txBody>
-      </p:sp>
-      <p:sp>
-        <p:nvSpPr>
-          <p:cNvPr id="19" name="Rounded Rectangle 18"/>
-          <p:cNvSpPr/>
-          <p:nvPr/>
-        </p:nvSpPr>
-        <p:spPr>
-          <a:xfrm>
-            <a:off x="7726679" y="5285231"/>
-            <a:ext cx="1188720" cy="530352"/>
-          </a:xfrm>
-          <a:prstGeom prst="roundRect">
-            <a:avLst>
-              <a:gd name="adj" fmla="val 6000"/>
-            </a:avLst>
-          </a:prstGeom>
-          <a:solidFill>
-            <a:srgbClr val="242836"/>
-          </a:solidFill>
-          <a:ln>
-            <a:noFill/>
-          </a:ln>
-          <a:effectLst/>
-        </p:spPr>
-        <p:style>
-          <a:lnRef idx="1">
-            <a:schemeClr val="accent1"/>
-          </a:lnRef>
-          <a:fillRef idx="3">
-            <a:schemeClr val="accent1"/>
-          </a:fillRef>
-          <a:effectRef idx="2">
-            <a:schemeClr val="accent1"/>
-          </a:effectRef>
-          <a:fontRef idx="minor">
-            <a:schemeClr val="lt1"/>
-          </a:fontRef>
-        </p:style>
-        <p:txBody>
-          <a:bodyPr rtlCol="0" anchor="ctr" wrap="square" lIns="36576" rIns="36576" tIns="36576" bIns="36576"/>
-          <a:lstStyle/>
-          <a:p>
-            <a:pPr algn="ctr">
-              <a:lnSpc>
-                <a:spcPct val="100000"/>
-              </a:lnSpc>
-              <a:spcAft>
-                <a:spcPts val="0"/>
-              </a:spcAft>
-            </a:pPr>
-            <a:r>
-              <a:rPr sz="1000" b="0" i="0">
-                <a:solidFill>
-                  <a:srgbClr val="F5F6FA"/>
-                </a:solidFill>
-                <a:latin typeface="Segoe UI"/>
-              </a:rPr>
-              <a:t>state + question</a:t>
-            </a:r>
-          </a:p>
-        </p:txBody>
-      </p:sp>
-      <p:sp>
-        <p:nvSpPr>
-          <p:cNvPr id="20" name="TextBox 19"/>
-          <p:cNvSpPr txBox="1"/>
-          <p:nvPr/>
-        </p:nvSpPr>
-        <p:spPr>
-          <a:xfrm>
-            <a:off x="8887967" y="5367527"/>
-            <a:ext cx="201168" cy="365760"/>
-          </a:xfrm>
-          <a:prstGeom prst="rect">
-            <a:avLst/>
-          </a:prstGeom>
-          <a:noFill/>
-        </p:spPr>
-        <p:txBody>
-          <a:bodyPr wrap="square" anchor="t" lIns="36576" rIns="36576" tIns="36576" bIns="36576">
-            <a:spAutoFit/>
-          </a:bodyPr>
-          <a:lstStyle/>
-          <a:p>
-            <a:pPr algn="ctr">
-              <a:lnSpc>
-                <a:spcPct val="100000"/>
-              </a:lnSpc>
-              <a:spcAft>
-                <a:spcPts val="0"/>
-              </a:spcAft>
-            </a:pPr>
-            <a:r>
-              <a:rPr sz="1600" b="0" i="0">
-                <a:solidFill>
-                  <a:srgbClr val="A3A9BC"/>
-                </a:solidFill>
-                <a:latin typeface="Segoe UI"/>
-              </a:rPr>
-              <a:t>›</a:t>
-            </a:r>
-          </a:p>
-        </p:txBody>
-      </p:sp>
-      <p:sp>
-        <p:nvSpPr>
-          <p:cNvPr id="21" name="Rounded Rectangle 20"/>
-          <p:cNvSpPr/>
-          <p:nvPr/>
-        </p:nvSpPr>
-        <p:spPr>
-          <a:xfrm>
-            <a:off x="9052559" y="5285231"/>
-            <a:ext cx="1188720" cy="530352"/>
-          </a:xfrm>
-          <a:prstGeom prst="roundRect">
-            <a:avLst>
-              <a:gd name="adj" fmla="val 6000"/>
-            </a:avLst>
-          </a:prstGeom>
-          <a:solidFill>
-            <a:srgbClr val="242836"/>
-          </a:solidFill>
-          <a:ln>
-            <a:noFill/>
-          </a:ln>
-          <a:effectLst/>
-        </p:spPr>
-        <p:style>
-          <a:lnRef idx="1">
-            <a:schemeClr val="accent1"/>
-          </a:lnRef>
-          <a:fillRef idx="3">
-            <a:schemeClr val="accent1"/>
-          </a:fillRef>
-          <a:effectRef idx="2">
-            <a:schemeClr val="accent1"/>
-          </a:effectRef>
-          <a:fontRef idx="minor">
-            <a:schemeClr val="lt1"/>
-          </a:fontRef>
-        </p:style>
-        <p:txBody>
-          <a:bodyPr rtlCol="0" anchor="ctr" wrap="square" lIns="36576" rIns="36576" tIns="36576" bIns="36576"/>
-          <a:lstStyle/>
-          <a:p>
-            <a:pPr algn="ctr">
-              <a:lnSpc>
-                <a:spcPct val="100000"/>
-              </a:lnSpc>
-              <a:spcAft>
-                <a:spcPts val="0"/>
-              </a:spcAft>
-            </a:pPr>
-            <a:r>
-              <a:rPr sz="1000" b="0" i="0">
-                <a:solidFill>
-                  <a:srgbClr val="F5F6FA"/>
-                </a:solidFill>
-                <a:latin typeface="Segoe UI"/>
-              </a:rPr>
-              <a:t>1 parallel pass</a:t>
-            </a:r>
-          </a:p>
-        </p:txBody>
-      </p:sp>
-      <p:sp>
-        <p:nvSpPr>
-          <p:cNvPr id="22" name="TextBox 21"/>
-          <p:cNvSpPr txBox="1"/>
-          <p:nvPr/>
-        </p:nvSpPr>
-        <p:spPr>
-          <a:xfrm>
-            <a:off x="10213847" y="5367527"/>
-            <a:ext cx="201168" cy="365760"/>
-          </a:xfrm>
-          <a:prstGeom prst="rect">
-            <a:avLst/>
-          </a:prstGeom>
-          <a:noFill/>
-        </p:spPr>
-        <p:txBody>
-          <a:bodyPr wrap="square" anchor="t" lIns="36576" rIns="36576" tIns="36576" bIns="36576">
-            <a:spAutoFit/>
-          </a:bodyPr>
-          <a:lstStyle/>
-          <a:p>
-            <a:pPr algn="ctr">
-              <a:lnSpc>
-                <a:spcPct val="100000"/>
-              </a:lnSpc>
-              <a:spcAft>
-                <a:spcPts val="0"/>
-              </a:spcAft>
-            </a:pPr>
-            <a:r>
-              <a:rPr sz="1600" b="0" i="0">
-                <a:solidFill>
-                  <a:srgbClr val="A3A9BC"/>
-                </a:solidFill>
-                <a:latin typeface="Segoe UI"/>
-              </a:rPr>
-              <a:t>›</a:t>
-            </a:r>
-          </a:p>
-        </p:txBody>
-      </p:sp>
-      <p:sp>
-        <p:nvSpPr>
-          <p:cNvPr id="23" name="Rounded Rectangle 22"/>
-          <p:cNvSpPr/>
-          <p:nvPr/>
-        </p:nvSpPr>
-        <p:spPr>
-          <a:xfrm>
-            <a:off x="10378440" y="5285231"/>
-            <a:ext cx="1188720" cy="530352"/>
-          </a:xfrm>
-          <a:prstGeom prst="roundRect">
-            <a:avLst>
-              <a:gd name="adj" fmla="val 6000"/>
-            </a:avLst>
-          </a:prstGeom>
-          <a:solidFill>
-            <a:srgbClr val="242836"/>
-          </a:solidFill>
-          <a:ln w="15875">
-            <a:solidFill>
-              <a:srgbClr val="34D399"/>
-            </a:solidFill>
-          </a:ln>
-          <a:effectLst/>
-        </p:spPr>
-        <p:style>
-          <a:lnRef idx="1">
-            <a:schemeClr val="accent1"/>
-          </a:lnRef>
-          <a:fillRef idx="3">
-            <a:schemeClr val="accent1"/>
-          </a:fillRef>
-          <a:effectRef idx="2">
-            <a:schemeClr val="accent1"/>
-          </a:effectRef>
-          <a:fontRef idx="minor">
-            <a:schemeClr val="lt1"/>
-          </a:fontRef>
-        </p:style>
-        <p:txBody>
-          <a:bodyPr rtlCol="0" anchor="ctr" wrap="square" lIns="36576" rIns="36576" tIns="36576" bIns="36576"/>
-          <a:lstStyle/>
-          <a:p>
-            <a:pPr algn="ctr">
-              <a:lnSpc>
-                <a:spcPct val="100000"/>
-              </a:lnSpc>
-              <a:spcAft>
-                <a:spcPts val="0"/>
-              </a:spcAft>
-            </a:pPr>
-            <a:r>
-              <a:rPr sz="1000" b="0" i="0">
-                <a:solidFill>
-                  <a:srgbClr val="F5F6FA"/>
-                </a:solidFill>
-                <a:latin typeface="Segoe UI"/>
-              </a:rPr>
-              <a:t>noul = 0.98</a:t>
-            </a:r>
-          </a:p>
-        </p:txBody>
-      </p:sp>
-      <p:sp>
-        <p:nvSpPr>
-          <p:cNvPr id="24" name="TextBox 23">
-            <a:hlinkClick r:id="rId4"/>
-          </p:cNvPr>
-          <p:cNvSpPr txBox="1"/>
-          <p:nvPr/>
-        </p:nvSpPr>
-        <p:spPr>
-          <a:xfrm>
-            <a:off x="7726679" y="6108192"/>
-            <a:ext cx="3931920" cy="274320"/>
+            <a:off x="9555480" y="4206240"/>
+            <a:ext cx="2103120" cy="640080"/>
           </a:xfrm>
           <a:prstGeom prst="rect">
             <a:avLst/>
@@ -5421,20 +4874,106 @@
               </a:spcAft>
             </a:pPr>
             <a:r>
+              <a:rPr sz="3200" b="0" i="0">
+                <a:solidFill>
+                  <a:srgbClr val="F5F6FA"/>
+                </a:solidFill>
+                <a:latin typeface="Segoe UI Semibold"/>
+              </a:rPr>
+              <a:t>≈ 0.1 s</a:t>
+            </a:r>
+          </a:p>
+        </p:txBody>
+      </p:sp>
+      <p:sp>
+        <p:nvSpPr>
+          <p:cNvPr id="16" name="TextBox 15"/>
+          <p:cNvSpPr txBox="1"/>
+          <p:nvPr/>
+        </p:nvSpPr>
+        <p:spPr>
+          <a:xfrm>
+            <a:off x="9555480" y="4892040"/>
+            <a:ext cx="2103120" cy="411480"/>
+          </a:xfrm>
+          <a:prstGeom prst="rect">
+            <a:avLst/>
+          </a:prstGeom>
+          <a:noFill/>
+        </p:spPr>
+        <p:txBody>
+          <a:bodyPr wrap="square" anchor="t" lIns="36576" rIns="36576" tIns="36576" bIns="36576">
+            <a:spAutoFit/>
+          </a:bodyPr>
+          <a:lstStyle/>
+          <a:p>
+            <a:pPr algn="l">
+              <a:lnSpc>
+                <a:spcPct val="100000"/>
+              </a:lnSpc>
+              <a:spcAft>
+                <a:spcPts val="0"/>
+              </a:spcAft>
+            </a:pPr>
+            <a:r>
+              <a:rPr sz="1100" b="0" i="0">
+                <a:solidFill>
+                  <a:srgbClr val="A3A9BC"/>
+                </a:solidFill>
+                <a:latin typeface="Segoe UI"/>
+              </a:rPr>
+              <a:t>noul = 0.98</a:t>
+            </a:r>
+          </a:p>
+        </p:txBody>
+      </p:sp>
+      <p:sp>
+        <p:nvSpPr>
+          <p:cNvPr id="17" name="TextBox 16">
+            <a:hlinkClick r:id="rId4"/>
+          </p:cNvPr>
+          <p:cNvSpPr txBox="1"/>
+          <p:nvPr/>
+        </p:nvSpPr>
+        <p:spPr>
+          <a:xfrm>
+            <a:off x="6903720" y="5486400"/>
+            <a:ext cx="4846320" cy="274320"/>
+          </a:xfrm>
+          <a:prstGeom prst="rect">
+            <a:avLst/>
+          </a:prstGeom>
+          <a:noFill/>
+        </p:spPr>
+        <p:txBody>
+          <a:bodyPr wrap="square" anchor="t" lIns="36576" rIns="36576" tIns="36576" bIns="36576">
+            <a:spAutoFit/>
+          </a:bodyPr>
+          <a:lstStyle/>
+          <a:p>
+            <a:pPr algn="l">
+              <a:lnSpc>
+                <a:spcPct val="100000"/>
+              </a:lnSpc>
+              <a:spcAft>
+                <a:spcPts val="0"/>
+              </a:spcAft>
+            </a:pPr>
+            <a:r>
               <a:rPr sz="1000" b="0" i="0" u="sng">
                 <a:solidFill>
                   <a:srgbClr val="A3A9BC"/>
                 </a:solidFill>
                 <a:latin typeface="Segoe UI"/>
               </a:rPr>
-              <a:t>Demo from “Building a Harness with Jev” – LangChain</a:t>
-            </a:r>
-          </a:p>
-        </p:txBody>
-      </p:sp>
-      <p:sp>
-        <p:nvSpPr>
-          <p:cNvPr id="25" name="TextBox 24">
+              <a:t>“Is there PII in this text?” – LangChain demo</a:t>
+            </a:r>
+          </a:p>
+        </p:txBody>
+      </p:sp>
+      <p:sp>
+        <p:nvSpPr>
+          <p:cNvPr id="18" name="TextBox 17">
             <a:hlinkClick r:id="rId5"/>
           </p:cNvPr>
           <p:cNvSpPr txBox="1"/>
@@ -5632,7 +5171,7 @@
                 </a:solidFill>
                 <a:latin typeface="Segoe UI"/>
               </a:rPr>
-              <a:t>Like logic gates and registers: your code owns the control flow, Jev answers narrow typed questions.</a:t>
+              <a:t>Your code owns the flow - Jev answers narrow, typed questions.</a:t>
             </a:r>
           </a:p>
         </p:txBody>
@@ -5645,8 +5184,8 @@
         </p:nvSpPr>
         <p:spPr>
           <a:xfrm>
-            <a:off x="457200" y="1645920"/>
-            <a:ext cx="3657600" cy="2103120"/>
+            <a:off x="457200" y="1691640"/>
+            <a:ext cx="3657600" cy="1783080"/>
           </a:xfrm>
           <a:prstGeom prst="roundRect">
             <a:avLst>
@@ -5689,7 +5228,7 @@
         </p:nvSpPr>
         <p:spPr>
           <a:xfrm>
-            <a:off x="457200" y="1645920"/>
+            <a:off x="457200" y="1691640"/>
             <a:ext cx="3657600" cy="64008"/>
           </a:xfrm>
           <a:prstGeom prst="rect">
@@ -5731,8 +5270,8 @@
         </p:nvSpPr>
         <p:spPr>
           <a:xfrm>
-            <a:off x="640080" y="1783080"/>
-            <a:ext cx="3291840" cy="411480"/>
+            <a:off x="658368" y="1847088"/>
+            <a:ext cx="3291840" cy="457200"/>
           </a:xfrm>
           <a:prstGeom prst="rect">
             <a:avLst/>
@@ -5754,7 +5293,7 @@
               </a:spcAft>
             </a:pPr>
             <a:r>
-              <a:rPr sz="2200" b="0" i="0">
+              <a:rPr sz="2600" b="0" i="0">
                 <a:solidFill>
                   <a:srgbClr val="E040FB"/>
                 </a:solidFill>
@@ -5773,8 +5312,8 @@
         </p:nvSpPr>
         <p:spPr>
           <a:xfrm>
-            <a:off x="640080" y="2240280"/>
-            <a:ext cx="3291840" cy="365760"/>
+            <a:off x="658368" y="2450592"/>
+            <a:ext cx="3291840" cy="457200"/>
           </a:xfrm>
           <a:prstGeom prst="rect">
             <a:avLst/>
@@ -5796,13 +5335,13 @@
               </a:spcAft>
             </a:pPr>
             <a:r>
-              <a:rPr sz="1150" b="0" i="0">
-                <a:solidFill>
-                  <a:srgbClr val="A3A9BC"/>
+              <a:rPr sz="1450" b="0" i="0">
+                <a:solidFill>
+                  <a:srgbClr val="F5F6FA"/>
                 </a:solidFill>
                 <a:latin typeface="Segoe UI"/>
               </a:rPr>
-              <a:t>Pick one option from a set you define (up to 255).</a:t>
+              <a:t>Which team should handle this ticket?</a:t>
             </a:r>
           </a:p>
         </p:txBody>
@@ -5815,8 +5354,8 @@
         </p:nvSpPr>
         <p:spPr>
           <a:xfrm>
-            <a:off x="640080" y="2606040"/>
-            <a:ext cx="3291840" cy="548640"/>
+            <a:off x="658368" y="2926080"/>
+            <a:ext cx="3291840" cy="411480"/>
           </a:xfrm>
           <a:prstGeom prst="rect">
             <a:avLst/>
@@ -5838,70 +5377,27 @@
               </a:spcAft>
             </a:pPr>
             <a:r>
-              <a:rPr sz="1250" b="0" i="0">
-                <a:solidFill>
-                  <a:srgbClr val="F5F6FA"/>
-                </a:solidFill>
-                <a:latin typeface="Segoe UI"/>
-              </a:rPr>
-              <a:t>Which team should handle this ticket?</a:t>
-            </a:r>
-          </a:p>
-        </p:txBody>
-      </p:sp>
-      <p:sp>
-        <p:nvSpPr>
-          <p:cNvPr id="10" name="TextBox 9"/>
-          <p:cNvSpPr txBox="1"/>
-          <p:nvPr/>
-        </p:nvSpPr>
-        <p:spPr>
-          <a:xfrm>
-            <a:off x="640080" y="3127248"/>
-            <a:ext cx="3291840" cy="548640"/>
-          </a:xfrm>
-          <a:prstGeom prst="rect">
-            <a:avLst/>
-          </a:prstGeom>
-          <a:noFill/>
-        </p:spPr>
-        <p:txBody>
-          <a:bodyPr wrap="square" anchor="t" lIns="36576" rIns="36576" tIns="36576" bIns="36576">
-            <a:spAutoFit/>
-          </a:bodyPr>
-          <a:lstStyle/>
-          <a:p>
-            <a:pPr algn="l">
-              <a:lnSpc>
-                <a:spcPct val="100000"/>
-              </a:lnSpc>
-              <a:spcAft>
-                <a:spcPts val="0"/>
-              </a:spcAft>
-            </a:pPr>
-            <a:r>
-              <a:rPr sz="1200" b="0" i="0">
+              <a:rPr sz="1500" b="0" i="0">
                 <a:solidFill>
                   <a:srgbClr val="E040FB"/>
                 </a:solidFill>
                 <a:latin typeface="Consolas"/>
               </a:rPr>
-              <a:t>choice: "billing"
-p = .84 · confidence = .60</a:t>
-            </a:r>
-          </a:p>
-        </p:txBody>
-      </p:sp>
-      <p:sp>
-        <p:nvSpPr>
-          <p:cNvPr id="11" name="Rounded Rectangle 10"/>
+              <a:t>billing  (p 0.84)</a:t>
+            </a:r>
+          </a:p>
+        </p:txBody>
+      </p:sp>
+      <p:sp>
+        <p:nvSpPr>
+          <p:cNvPr id="10" name="Rounded Rectangle 9"/>
           <p:cNvSpPr/>
           <p:nvPr/>
         </p:nvSpPr>
         <p:spPr>
           <a:xfrm>
-            <a:off x="4270248" y="1645920"/>
-            <a:ext cx="3657600" cy="2103120"/>
+            <a:off x="4270248" y="1691640"/>
+            <a:ext cx="3657600" cy="1783080"/>
           </a:xfrm>
           <a:prstGeom prst="roundRect">
             <a:avLst>
@@ -5938,13 +5434,13 @@
       </p:sp>
       <p:sp>
         <p:nvSpPr>
-          <p:cNvPr id="12" name="Rectangle 11"/>
+          <p:cNvPr id="11" name="Rectangle 10"/>
           <p:cNvSpPr/>
           <p:nvPr/>
         </p:nvSpPr>
         <p:spPr>
           <a:xfrm>
-            <a:off x="4270248" y="1645920"/>
+            <a:off x="4270248" y="1691640"/>
             <a:ext cx="3657600" cy="64008"/>
           </a:xfrm>
           <a:prstGeom prst="rect">
@@ -5980,14 +5476,14 @@
       </p:sp>
       <p:sp>
         <p:nvSpPr>
-          <p:cNvPr id="13" name="TextBox 12"/>
+          <p:cNvPr id="12" name="TextBox 11"/>
           <p:cNvSpPr txBox="1"/>
           <p:nvPr/>
         </p:nvSpPr>
         <p:spPr>
           <a:xfrm>
-            <a:off x="4453128" y="1783080"/>
-            <a:ext cx="3291840" cy="411480"/>
+            <a:off x="4471416" y="1847088"/>
+            <a:ext cx="3291840" cy="457200"/>
           </a:xfrm>
           <a:prstGeom prst="rect">
             <a:avLst/>
@@ -6009,7 +5505,7 @@
               </a:spcAft>
             </a:pPr>
             <a:r>
-              <a:rPr sz="2200" b="0" i="0">
+              <a:rPr sz="2600" b="0" i="0">
                 <a:solidFill>
                   <a:srgbClr val="22D3EE"/>
                 </a:solidFill>
@@ -6022,14 +5518,14 @@
       </p:sp>
       <p:sp>
         <p:nvSpPr>
-          <p:cNvPr id="14" name="TextBox 13"/>
+          <p:cNvPr id="13" name="TextBox 12"/>
           <p:cNvSpPr txBox="1"/>
           <p:nvPr/>
         </p:nvSpPr>
         <p:spPr>
           <a:xfrm>
-            <a:off x="4453128" y="2240280"/>
-            <a:ext cx="3291840" cy="365760"/>
+            <a:off x="4471416" y="2450592"/>
+            <a:ext cx="3291840" cy="457200"/>
           </a:xfrm>
           <a:prstGeom prst="rect">
             <a:avLst/>
@@ -6051,27 +5547,27 @@
               </a:spcAft>
             </a:pPr>
             <a:r>
-              <a:rPr sz="1150" b="0" i="0">
-                <a:solidFill>
-                  <a:srgbClr val="A3A9BC"/>
+              <a:rPr sz="1450" b="0" i="0">
+                <a:solidFill>
+                  <a:srgbClr val="F5F6FA"/>
                 </a:solidFill>
                 <a:latin typeface="Segoe UI"/>
               </a:rPr>
-              <a:t>Rate on ordered levels you describe (2–10).</a:t>
-            </a:r>
-          </a:p>
-        </p:txBody>
-      </p:sp>
-      <p:sp>
-        <p:nvSpPr>
-          <p:cNvPr id="15" name="TextBox 14"/>
+              <a:t>How frustrated is the customer?</a:t>
+            </a:r>
+          </a:p>
+        </p:txBody>
+      </p:sp>
+      <p:sp>
+        <p:nvSpPr>
+          <p:cNvPr id="14" name="TextBox 13"/>
           <p:cNvSpPr txBox="1"/>
           <p:nvPr/>
         </p:nvSpPr>
         <p:spPr>
           <a:xfrm>
-            <a:off x="4453128" y="2606040"/>
-            <a:ext cx="3291840" cy="548640"/>
+            <a:off x="4471416" y="2926080"/>
+            <a:ext cx="3291840" cy="411480"/>
           </a:xfrm>
           <a:prstGeom prst="rect">
             <a:avLst/>
@@ -6093,71 +5589,27 @@
               </a:spcAft>
             </a:pPr>
             <a:r>
-              <a:rPr sz="1250" b="0" i="0">
-                <a:solidFill>
-                  <a:srgbClr val="F5F6FA"/>
-                </a:solidFill>
-                <a:latin typeface="Segoe UI"/>
-              </a:rPr>
-              <a:t>How frustrated is the customer?
-calm · frustrated · very angry</a:t>
-            </a:r>
-          </a:p>
-        </p:txBody>
-      </p:sp>
-      <p:sp>
-        <p:nvSpPr>
-          <p:cNvPr id="16" name="TextBox 15"/>
-          <p:cNvSpPr txBox="1"/>
-          <p:nvPr/>
-        </p:nvSpPr>
-        <p:spPr>
-          <a:xfrm>
-            <a:off x="4453128" y="3127248"/>
-            <a:ext cx="3291840" cy="548640"/>
-          </a:xfrm>
-          <a:prstGeom prst="rect">
-            <a:avLst/>
-          </a:prstGeom>
-          <a:noFill/>
-        </p:spPr>
-        <p:txBody>
-          <a:bodyPr wrap="square" anchor="t" lIns="36576" rIns="36576" tIns="36576" bIns="36576">
-            <a:spAutoFit/>
-          </a:bodyPr>
-          <a:lstStyle/>
-          <a:p>
-            <a:pPr algn="l">
-              <a:lnSpc>
-                <a:spcPct val="100000"/>
-              </a:lnSpc>
-              <a:spcAft>
-                <a:spcPts val="0"/>
-              </a:spcAft>
-            </a:pPr>
-            <a:r>
-              <a:rPr sz="1200" b="0" i="0">
+              <a:rPr sz="1500" b="0" i="0">
                 <a:solidFill>
                   <a:srgbClr val="22D3EE"/>
                 </a:solidFill>
                 <a:latin typeface="Consolas"/>
               </a:rPr>
-              <a:t>score: 1.04
-(frustrated, not very angry)</a:t>
-            </a:r>
-          </a:p>
-        </p:txBody>
-      </p:sp>
-      <p:sp>
-        <p:nvSpPr>
-          <p:cNvPr id="17" name="Rounded Rectangle 16"/>
+              <a:t>1.04 → frustrated</a:t>
+            </a:r>
+          </a:p>
+        </p:txBody>
+      </p:sp>
+      <p:sp>
+        <p:nvSpPr>
+          <p:cNvPr id="15" name="Rounded Rectangle 14"/>
           <p:cNvSpPr/>
           <p:nvPr/>
         </p:nvSpPr>
         <p:spPr>
           <a:xfrm>
-            <a:off x="8083296" y="1645920"/>
-            <a:ext cx="3657600" cy="2103120"/>
+            <a:off x="8083296" y="1691640"/>
+            <a:ext cx="3657600" cy="1783080"/>
           </a:xfrm>
           <a:prstGeom prst="roundRect">
             <a:avLst>
@@ -6194,13 +5646,13 @@
       </p:sp>
       <p:sp>
         <p:nvSpPr>
-          <p:cNvPr id="18" name="Rectangle 17"/>
+          <p:cNvPr id="16" name="Rectangle 15"/>
           <p:cNvSpPr/>
           <p:nvPr/>
         </p:nvSpPr>
         <p:spPr>
           <a:xfrm>
-            <a:off x="8083296" y="1645920"/>
+            <a:off x="8083296" y="1691640"/>
             <a:ext cx="3657600" cy="64008"/>
           </a:xfrm>
           <a:prstGeom prst="rect">
@@ -6236,14 +5688,14 @@
       </p:sp>
       <p:sp>
         <p:nvSpPr>
-          <p:cNvPr id="19" name="TextBox 18"/>
+          <p:cNvPr id="17" name="TextBox 16"/>
           <p:cNvSpPr txBox="1"/>
           <p:nvPr/>
         </p:nvSpPr>
         <p:spPr>
           <a:xfrm>
-            <a:off x="8266175" y="1783080"/>
-            <a:ext cx="3291840" cy="411480"/>
+            <a:off x="8284464" y="1847088"/>
+            <a:ext cx="3291840" cy="457200"/>
           </a:xfrm>
           <a:prstGeom prst="rect">
             <a:avLst/>
@@ -6265,7 +5717,7 @@
               </a:spcAft>
             </a:pPr>
             <a:r>
-              <a:rPr sz="2200" b="0" i="0">
+              <a:rPr sz="2600" b="0" i="0">
                 <a:solidFill>
                   <a:srgbClr val="FBBF24"/>
                 </a:solidFill>
@@ -6278,14 +5730,14 @@
       </p:sp>
       <p:sp>
         <p:nvSpPr>
-          <p:cNvPr id="20" name="TextBox 19"/>
+          <p:cNvPr id="18" name="TextBox 17"/>
           <p:cNvSpPr txBox="1"/>
           <p:nvPr/>
         </p:nvSpPr>
         <p:spPr>
           <a:xfrm>
-            <a:off x="8266175" y="2240280"/>
-            <a:ext cx="3291840" cy="365760"/>
+            <a:off x="8284464" y="2450592"/>
+            <a:ext cx="3291840" cy="457200"/>
           </a:xfrm>
           <a:prstGeom prst="rect">
             <a:avLst/>
@@ -6307,27 +5759,27 @@
               </a:spcAft>
             </a:pPr>
             <a:r>
-              <a:rPr sz="1150" b="0" i="0">
-                <a:solidFill>
-                  <a:srgbClr val="A3A9BC"/>
+              <a:rPr sz="1450" b="0" i="0">
+                <a:solidFill>
+                  <a:srgbClr val="F5F6FA"/>
                 </a:solidFill>
                 <a:latin typeface="Segoe UI"/>
               </a:rPr>
-              <a:t>Yes/no question → probability of “yes”.</a:t>
-            </a:r>
-          </a:p>
-        </p:txBody>
-      </p:sp>
-      <p:sp>
-        <p:nvSpPr>
-          <p:cNvPr id="21" name="TextBox 20"/>
+              <a:t>Does the message convey urgency?</a:t>
+            </a:r>
+          </a:p>
+        </p:txBody>
+      </p:sp>
+      <p:sp>
+        <p:nvSpPr>
+          <p:cNvPr id="19" name="TextBox 18"/>
           <p:cNvSpPr txBox="1"/>
           <p:nvPr/>
         </p:nvSpPr>
         <p:spPr>
           <a:xfrm>
-            <a:off x="8266175" y="2606040"/>
-            <a:ext cx="3291840" cy="548640"/>
+            <a:off x="8284464" y="2926080"/>
+            <a:ext cx="3291840" cy="411480"/>
           </a:xfrm>
           <a:prstGeom prst="rect">
             <a:avLst/>
@@ -6349,77 +5801,33 @@
               </a:spcAft>
             </a:pPr>
             <a:r>
-              <a:rPr sz="1250" b="0" i="0">
-                <a:solidFill>
-                  <a:srgbClr val="F5F6FA"/>
-                </a:solidFill>
-                <a:latin typeface="Segoe UI"/>
-              </a:rPr>
-              <a:t>Does the message convey urgency?</a:t>
-            </a:r>
-          </a:p>
-        </p:txBody>
-      </p:sp>
-      <p:sp>
-        <p:nvSpPr>
-          <p:cNvPr id="22" name="TextBox 21"/>
-          <p:cNvSpPr txBox="1"/>
-          <p:nvPr/>
-        </p:nvSpPr>
-        <p:spPr>
-          <a:xfrm>
-            <a:off x="8266175" y="3127248"/>
-            <a:ext cx="3291840" cy="548640"/>
-          </a:xfrm>
-          <a:prstGeom prst="rect">
-            <a:avLst/>
-          </a:prstGeom>
-          <a:noFill/>
-        </p:spPr>
-        <p:txBody>
-          <a:bodyPr wrap="square" anchor="t" lIns="36576" rIns="36576" tIns="36576" bIns="36576">
-            <a:spAutoFit/>
-          </a:bodyPr>
-          <a:lstStyle/>
-          <a:p>
-            <a:pPr algn="l">
-              <a:lnSpc>
-                <a:spcPct val="100000"/>
-              </a:lnSpc>
-              <a:spcAft>
-                <a:spcPts val="0"/>
-              </a:spcAft>
-            </a:pPr>
-            <a:r>
-              <a:rPr sz="1200" b="0" i="0">
+              <a:rPr sz="1500" b="0" i="0">
                 <a:solidFill>
                   <a:srgbClr val="FBBF24"/>
                 </a:solidFill>
                 <a:latin typeface="Consolas"/>
               </a:rPr>
-              <a:t>noul: 0.999</a:t>
-            </a:r>
-          </a:p>
-        </p:txBody>
-      </p:sp>
-      <p:sp>
-        <p:nvSpPr>
-          <p:cNvPr id="23" name="Rounded Rectangle 22"/>
+              <a:t>0.999 → yes</a:t>
+            </a:r>
+          </a:p>
+        </p:txBody>
+      </p:sp>
+      <p:sp>
+        <p:nvSpPr>
+          <p:cNvPr id="20" name="Pentagon 19"/>
           <p:cNvSpPr/>
           <p:nvPr/>
         </p:nvSpPr>
         <p:spPr>
           <a:xfrm>
             <a:off x="457200" y="3931920"/>
-            <a:ext cx="5623560" cy="2514600"/>
-          </a:xfrm>
-          <a:prstGeom prst="roundRect">
-            <a:avLst>
-              <a:gd name="adj" fmla="val 6000"/>
-            </a:avLst>
+            <a:ext cx="1755648" cy="822960"/>
+          </a:xfrm>
+          <a:prstGeom prst="homePlate">
+            <a:avLst/>
           </a:prstGeom>
           <a:solidFill>
-            <a:srgbClr val="1A1D27"/>
+            <a:srgbClr val="242836"/>
           </a:solidFill>
           <a:ln>
             <a:noFill/>
@@ -6441,34 +5849,10 @@
           </a:fontRef>
         </p:style>
         <p:txBody>
-          <a:bodyPr rtlCol="0" anchor="ctr"/>
-          <a:lstStyle/>
-          <a:p/>
-        </p:txBody>
-      </p:sp>
-      <p:sp>
-        <p:nvSpPr>
-          <p:cNvPr id="24" name="TextBox 23"/>
-          <p:cNvSpPr txBox="1"/>
-          <p:nvPr/>
-        </p:nvSpPr>
-        <p:spPr>
-          <a:xfrm>
-            <a:off x="621792" y="4005072"/>
-            <a:ext cx="5394960" cy="274320"/>
-          </a:xfrm>
-          <a:prstGeom prst="rect">
-            <a:avLst/>
-          </a:prstGeom>
-          <a:noFill/>
-        </p:spPr>
-        <p:txBody>
-          <a:bodyPr wrap="square" anchor="t" lIns="36576" rIns="36576" tIns="36576" bIns="36576">
-            <a:spAutoFit/>
-          </a:bodyPr>
-          <a:lstStyle/>
-          <a:p>
-            <a:pPr algn="l">
+          <a:bodyPr rtlCol="0" anchor="ctr" wrap="square" lIns="36576" rIns="36576" tIns="36576" bIns="36576"/>
+          <a:lstStyle/>
+          <a:p>
+            <a:pPr algn="ctr">
               <a:lnSpc>
                 <a:spcPct val="100000"/>
               </a:lnSpc>
@@ -6477,314 +5861,17 @@
               </a:spcAft>
             </a:pPr>
             <a:r>
-              <a:rPr sz="1100" b="0" i="0">
-                <a:solidFill>
-                  <a:srgbClr val="A3A9BC"/>
+              <a:rPr sz="1300" b="0" i="0">
+                <a:solidFill>
+                  <a:srgbClr val="F5F6FA"/>
                 </a:solidFill>
                 <a:latin typeface="Segoe UI Semibold"/>
               </a:rPr>
-              <a:t>One request, three answers (support-ticket example from the docs)</a:t>
-            </a:r>
-          </a:p>
-        </p:txBody>
-      </p:sp>
-      <p:sp>
-        <p:nvSpPr>
-          <p:cNvPr id="25" name="TextBox 24"/>
-          <p:cNvSpPr txBox="1"/>
-          <p:nvPr/>
-        </p:nvSpPr>
-        <p:spPr>
-          <a:xfrm>
-            <a:off x="621792" y="4343400"/>
-            <a:ext cx="5394960" cy="2103120"/>
-          </a:xfrm>
-          <a:prstGeom prst="rect">
-            <a:avLst/>
-          </a:prstGeom>
-          <a:noFill/>
-        </p:spPr>
-        <p:txBody>
-          <a:bodyPr wrap="square" anchor="t" lIns="36576" rIns="36576" tIns="36576" bIns="36576">
-            <a:spAutoFit/>
-          </a:bodyPr>
-          <a:lstStyle/>
-          <a:p>
-            <a:pPr algn="l">
-              <a:lnSpc>
-                <a:spcPct val="110000"/>
-              </a:lnSpc>
-              <a:spcAft>
-                <a:spcPts val="0"/>
-              </a:spcAft>
-            </a:pPr>
-            <a:r>
-              <a:rPr sz="1150" b="0" i="0">
-                <a:solidFill>
-                  <a:srgbClr val="22D3EE"/>
-                </a:solidFill>
-                <a:latin typeface="Consolas"/>
-              </a:rPr>
-              <a:t>POST</a:t>
-            </a:r>
-            <a:r>
-              <a:rPr sz="1150" b="0" i="0">
-                <a:solidFill>
-                  <a:srgbClr val="F5F6FA"/>
-                </a:solidFill>
-                <a:latin typeface="Consolas"/>
-              </a:rPr>
-              <a:t> /v1/systemone</a:t>
-            </a:r>
-          </a:p>
-          <a:p>
-            <a:pPr algn="l">
-              <a:lnSpc>
-                <a:spcPct val="110000"/>
-              </a:lnSpc>
-              <a:spcAft>
-                <a:spcPts val="0"/>
-              </a:spcAft>
-            </a:pPr>
-            <a:r>
-              <a:rPr sz="1150" b="0" i="0">
-                <a:solidFill>
-                  <a:srgbClr val="F5F6FA"/>
-                </a:solidFill>
-                <a:latin typeface="Consolas"/>
-              </a:rPr>
-              <a:t>{ </a:t>
-            </a:r>
-            <a:r>
-              <a:rPr sz="1150" b="0" i="0">
-                <a:solidFill>
-                  <a:srgbClr val="FBBF24"/>
-                </a:solidFill>
-                <a:latin typeface="Consolas"/>
-              </a:rPr>
-              <a:t>"state"</a:t>
-            </a:r>
-            <a:r>
-              <a:rPr sz="1150" b="0" i="0">
-                <a:solidFill>
-                  <a:srgbClr val="F5F6FA"/>
-                </a:solidFill>
-                <a:latin typeface="Consolas"/>
-              </a:rPr>
-              <a:t>: "My Stripe connection has failed for 3 days.</a:t>
-            </a:r>
-          </a:p>
-          <a:p>
-            <a:pPr algn="l">
-              <a:lnSpc>
-                <a:spcPct val="110000"/>
-              </a:lnSpc>
-              <a:spcAft>
-                <a:spcPts val="0"/>
-              </a:spcAft>
-            </a:pPr>
-            <a:r>
-              <a:rPr sz="1150" b="0" i="0">
-                <a:solidFill>
-                  <a:srgbClr val="F5F6FA"/>
-                </a:solidFill>
-                <a:latin typeface="Consolas"/>
-              </a:rPr>
-              <a:t>            I'm losing sales. Please help ASAP.",</a:t>
-            </a:r>
-          </a:p>
-          <a:p>
-            <a:pPr algn="l">
-              <a:lnSpc>
-                <a:spcPct val="110000"/>
-              </a:lnSpc>
-              <a:spcAft>
-                <a:spcPts val="0"/>
-              </a:spcAft>
-            </a:pPr>
-            <a:r>
-              <a:rPr sz="1150" b="0" i="0">
-                <a:solidFill>
-                  <a:srgbClr val="F5F6FA"/>
-                </a:solidFill>
-                <a:latin typeface="Consolas"/>
-              </a:rPr>
-              <a:t>  </a:t>
-            </a:r>
-            <a:r>
-              <a:rPr sz="1150" b="0" i="0">
-                <a:solidFill>
-                  <a:srgbClr val="FBBF24"/>
-                </a:solidFill>
-                <a:latin typeface="Consolas"/>
-              </a:rPr>
-              <a:t>"questions"</a:t>
-            </a:r>
-            <a:r>
-              <a:rPr sz="1150" b="0" i="0">
-                <a:solidFill>
-                  <a:srgbClr val="F5F6FA"/>
-                </a:solidFill>
-                <a:latin typeface="Consolas"/>
-              </a:rPr>
-              <a:t>: {</a:t>
-            </a:r>
-          </a:p>
-          <a:p>
-            <a:pPr algn="l">
-              <a:lnSpc>
-                <a:spcPct val="110000"/>
-              </a:lnSpc>
-              <a:spcAft>
-                <a:spcPts val="0"/>
-              </a:spcAft>
-            </a:pPr>
-            <a:r>
-              <a:rPr sz="1150" b="0" i="0">
-                <a:solidFill>
-                  <a:srgbClr val="F5F6FA"/>
-                </a:solidFill>
-                <a:latin typeface="Consolas"/>
-              </a:rPr>
-              <a:t>    "team":   {</a:t>
-            </a:r>
-            <a:r>
-              <a:rPr sz="1150" b="0" i="0">
-                <a:solidFill>
-                  <a:srgbClr val="E040FB"/>
-                </a:solidFill>
-                <a:latin typeface="Consolas"/>
-              </a:rPr>
-              <a:t>"type": "choice"</a:t>
-            </a:r>
-            <a:r>
-              <a:rPr sz="1150" b="0" i="0">
-                <a:solidFill>
-                  <a:srgbClr val="F5F6FA"/>
-                </a:solidFill>
-                <a:latin typeface="Consolas"/>
-              </a:rPr>
-              <a:t>, "criteria": {"billing": …}},</a:t>
-            </a:r>
-          </a:p>
-          <a:p>
-            <a:pPr algn="l">
-              <a:lnSpc>
-                <a:spcPct val="110000"/>
-              </a:lnSpc>
-              <a:spcAft>
-                <a:spcPts val="0"/>
-              </a:spcAft>
-            </a:pPr>
-            <a:r>
-              <a:rPr sz="1150" b="0" i="0">
-                <a:solidFill>
-                  <a:srgbClr val="F5F6FA"/>
-                </a:solidFill>
-                <a:latin typeface="Consolas"/>
-              </a:rPr>
-              <a:t>    "mood":   {</a:t>
-            </a:r>
-            <a:r>
-              <a:rPr sz="1150" b="0" i="0">
-                <a:solidFill>
-                  <a:srgbClr val="22D3EE"/>
-                </a:solidFill>
-                <a:latin typeface="Consolas"/>
-              </a:rPr>
-              <a:t>"type": "score"</a:t>
-            </a:r>
-            <a:r>
-              <a:rPr sz="1150" b="0" i="0">
-                <a:solidFill>
-                  <a:srgbClr val="F5F6FA"/>
-                </a:solidFill>
-                <a:latin typeface="Consolas"/>
-              </a:rPr>
-              <a:t>, "criteria": ["calm", …]},</a:t>
-            </a:r>
-          </a:p>
-          <a:p>
-            <a:pPr algn="l">
-              <a:lnSpc>
-                <a:spcPct val="110000"/>
-              </a:lnSpc>
-              <a:spcAft>
-                <a:spcPts val="0"/>
-              </a:spcAft>
-            </a:pPr>
-            <a:r>
-              <a:rPr sz="1150" b="0" i="0">
-                <a:solidFill>
-                  <a:srgbClr val="F5F6FA"/>
-                </a:solidFill>
-                <a:latin typeface="Consolas"/>
-              </a:rPr>
-              <a:t>    "urgent": {</a:t>
-            </a:r>
-            <a:r>
-              <a:rPr sz="1150" b="0" i="0">
-                <a:solidFill>
-                  <a:srgbClr val="FBBF24"/>
-                </a:solidFill>
-                <a:latin typeface="Consolas"/>
-              </a:rPr>
-              <a:t>"type": "noul"</a:t>
-            </a:r>
-            <a:r>
-              <a:rPr sz="1150" b="0" i="0">
-                <a:solidFill>
-                  <a:srgbClr val="F5F6FA"/>
-                </a:solidFill>
-                <a:latin typeface="Consolas"/>
-              </a:rPr>
-              <a:t>, "instructions": "Urgent?"} } }</a:t>
-            </a:r>
-          </a:p>
-          <a:p>
-            <a:pPr algn="l">
-              <a:lnSpc>
-                <a:spcPct val="110000"/>
-              </a:lnSpc>
-              <a:spcAft>
-                <a:spcPts val="0"/>
-              </a:spcAft>
-            </a:pPr>
-            <a:r>
-              <a:rPr sz="1150" b="0" i="0">
-                <a:solidFill>
-                  <a:srgbClr val="34D399"/>
-                </a:solidFill>
-                <a:latin typeface="Consolas"/>
-              </a:rPr>
-              <a:t>→ team = billing (.84) · mood = 1.04 · urgent = 0.999</a:t>
-            </a:r>
-          </a:p>
-        </p:txBody>
-      </p:sp>
-      <p:sp>
-        <p:nvSpPr>
-          <p:cNvPr id="26" name="TextBox 25"/>
-          <p:cNvSpPr txBox="1"/>
-          <p:nvPr/>
-        </p:nvSpPr>
-        <p:spPr>
-          <a:xfrm>
-            <a:off x="621792" y="5989320"/>
-            <a:ext cx="5394960" cy="411480"/>
-          </a:xfrm>
-          <a:prstGeom prst="rect">
-            <a:avLst/>
-          </a:prstGeom>
-          <a:noFill/>
-        </p:spPr>
-        <p:txBody>
-          <a:bodyPr wrap="square" anchor="t" lIns="36576" rIns="36576" tIns="36576" bIns="36576">
-            <a:spAutoFit/>
-          </a:bodyPr>
-          <a:lstStyle/>
-          <a:p>
-            <a:pPr algn="l">
+              <a:t>State</a:t>
+            </a:r>
+          </a:p>
+          <a:p>
+            <a:pPr algn="ctr">
               <a:lnSpc>
                 <a:spcPct val="100000"/>
               </a:lnSpc>
@@ -6797,40 +5884,29 @@
                 <a:solidFill>
                   <a:srgbClr val="F5F6FA"/>
                 </a:solidFill>
-                <a:latin typeface="Segoe UI Semibold"/>
-              </a:rPr>
-              <a:t>Good to know: </a:t>
-            </a:r>
-            <a:r>
-              <a:rPr sz="1000" b="0" i="0">
-                <a:solidFill>
-                  <a:srgbClr val="A3A9BC"/>
-                </a:solidFill>
                 <a:latin typeface="Segoe UI"/>
               </a:rPr>
-              <a:t>text input only (strings, JSON, arrays) · calibration holds across many predictions, not for every single answer</a:t>
-            </a:r>
-          </a:p>
-        </p:txBody>
-      </p:sp>
-      <p:sp>
-        <p:nvSpPr>
-          <p:cNvPr id="27" name="Rounded Rectangle 26"/>
+              <a:t>text or JSON</a:t>
+            </a:r>
+          </a:p>
+        </p:txBody>
+      </p:sp>
+      <p:sp>
+        <p:nvSpPr>
+          <p:cNvPr id="21" name="Chevron 20"/>
           <p:cNvSpPr/>
           <p:nvPr/>
         </p:nvSpPr>
         <p:spPr>
           <a:xfrm>
-            <a:off x="6263640" y="3931920"/>
-            <a:ext cx="5468112" cy="2514600"/>
-          </a:xfrm>
-          <a:prstGeom prst="roundRect">
-            <a:avLst>
-              <a:gd name="adj" fmla="val 6000"/>
-            </a:avLst>
+            <a:off x="2212848" y="3931920"/>
+            <a:ext cx="1755648" cy="822960"/>
+          </a:xfrm>
+          <a:prstGeom prst="chevron">
+            <a:avLst/>
           </a:prstGeom>
           <a:solidFill>
-            <a:srgbClr val="1A1D27"/>
+            <a:srgbClr val="242836"/>
           </a:solidFill>
           <a:ln>
             <a:noFill/>
@@ -6852,21 +5928,346 @@
           </a:fontRef>
         </p:style>
         <p:txBody>
-          <a:bodyPr rtlCol="0" anchor="ctr"/>
-          <a:lstStyle/>
-          <a:p/>
-        </p:txBody>
-      </p:sp>
-      <p:sp>
-        <p:nvSpPr>
-          <p:cNvPr id="28" name="TextBox 27"/>
+          <a:bodyPr rtlCol="0" anchor="ctr" wrap="square" lIns="36576" rIns="36576" tIns="36576" bIns="36576"/>
+          <a:lstStyle/>
+          <a:p>
+            <a:pPr algn="ctr">
+              <a:lnSpc>
+                <a:spcPct val="100000"/>
+              </a:lnSpc>
+              <a:spcAft>
+                <a:spcPts val="0"/>
+              </a:spcAft>
+            </a:pPr>
+            <a:r>
+              <a:rPr sz="1300" b="0" i="0">
+                <a:solidFill>
+                  <a:srgbClr val="F5F6FA"/>
+                </a:solidFill>
+                <a:latin typeface="Segoe UI Semibold"/>
+              </a:rPr>
+              <a:t>Questions</a:t>
+            </a:r>
+          </a:p>
+          <a:p>
+            <a:pPr algn="ctr">
+              <a:lnSpc>
+                <a:spcPct val="100000"/>
+              </a:lnSpc>
+              <a:spcAft>
+                <a:spcPts val="0"/>
+              </a:spcAft>
+            </a:pPr>
+            <a:r>
+              <a:rPr sz="1000" b="0" i="0">
+                <a:solidFill>
+                  <a:srgbClr val="F5F6FA"/>
+                </a:solidFill>
+                <a:latin typeface="Segoe UI"/>
+              </a:rPr>
+              <a:t>Choice · Score · Noul</a:t>
+            </a:r>
+          </a:p>
+        </p:txBody>
+      </p:sp>
+      <p:sp>
+        <p:nvSpPr>
+          <p:cNvPr id="22" name="Chevron 21"/>
+          <p:cNvSpPr/>
+          <p:nvPr/>
+        </p:nvSpPr>
+        <p:spPr>
+          <a:xfrm>
+            <a:off x="3968496" y="3931920"/>
+            <a:ext cx="1755648" cy="822960"/>
+          </a:xfrm>
+          <a:prstGeom prst="chevron">
+            <a:avLst/>
+          </a:prstGeom>
+          <a:solidFill>
+            <a:srgbClr val="22D3EE"/>
+          </a:solidFill>
+          <a:ln>
+            <a:noFill/>
+          </a:ln>
+          <a:effectLst/>
+        </p:spPr>
+        <p:style>
+          <a:lnRef idx="1">
+            <a:schemeClr val="accent1"/>
+          </a:lnRef>
+          <a:fillRef idx="3">
+            <a:schemeClr val="accent1"/>
+          </a:fillRef>
+          <a:effectRef idx="2">
+            <a:schemeClr val="accent1"/>
+          </a:effectRef>
+          <a:fontRef idx="minor">
+            <a:schemeClr val="lt1"/>
+          </a:fontRef>
+        </p:style>
+        <p:txBody>
+          <a:bodyPr rtlCol="0" anchor="ctr" wrap="square" lIns="36576" rIns="36576" tIns="36576" bIns="36576"/>
+          <a:lstStyle/>
+          <a:p>
+            <a:pPr algn="ctr">
+              <a:lnSpc>
+                <a:spcPct val="100000"/>
+              </a:lnSpc>
+              <a:spcAft>
+                <a:spcPts val="0"/>
+              </a:spcAft>
+            </a:pPr>
+            <a:r>
+              <a:rPr sz="1300" b="0" i="0">
+                <a:solidFill>
+                  <a:srgbClr val="0F1117"/>
+                </a:solidFill>
+                <a:latin typeface="Segoe UI Semibold"/>
+              </a:rPr>
+              <a:t>Answers</a:t>
+            </a:r>
+          </a:p>
+          <a:p>
+            <a:pPr algn="ctr">
+              <a:lnSpc>
+                <a:spcPct val="100000"/>
+              </a:lnSpc>
+              <a:spcAft>
+                <a:spcPts val="0"/>
+              </a:spcAft>
+            </a:pPr>
+            <a:r>
+              <a:rPr sz="1000" b="0" i="0">
+                <a:solidFill>
+                  <a:srgbClr val="0F1117"/>
+                </a:solidFill>
+                <a:latin typeface="Segoe UI"/>
+              </a:rPr>
+              <a:t>+ confidence</a:t>
+            </a:r>
+          </a:p>
+        </p:txBody>
+      </p:sp>
+      <p:sp>
+        <p:nvSpPr>
+          <p:cNvPr id="23" name="Chevron 22"/>
+          <p:cNvSpPr/>
+          <p:nvPr/>
+        </p:nvSpPr>
+        <p:spPr>
+          <a:xfrm>
+            <a:off x="5724144" y="3931920"/>
+            <a:ext cx="1755648" cy="822960"/>
+          </a:xfrm>
+          <a:prstGeom prst="chevron">
+            <a:avLst/>
+          </a:prstGeom>
+          <a:solidFill>
+            <a:srgbClr val="242836"/>
+          </a:solidFill>
+          <a:ln>
+            <a:noFill/>
+          </a:ln>
+          <a:effectLst/>
+        </p:spPr>
+        <p:style>
+          <a:lnRef idx="1">
+            <a:schemeClr val="accent1"/>
+          </a:lnRef>
+          <a:fillRef idx="3">
+            <a:schemeClr val="accent1"/>
+          </a:fillRef>
+          <a:effectRef idx="2">
+            <a:schemeClr val="accent1"/>
+          </a:effectRef>
+          <a:fontRef idx="minor">
+            <a:schemeClr val="lt1"/>
+          </a:fontRef>
+        </p:style>
+        <p:txBody>
+          <a:bodyPr rtlCol="0" anchor="ctr" wrap="square" lIns="36576" rIns="36576" tIns="36576" bIns="36576"/>
+          <a:lstStyle/>
+          <a:p>
+            <a:pPr algn="ctr">
+              <a:lnSpc>
+                <a:spcPct val="100000"/>
+              </a:lnSpc>
+              <a:spcAft>
+                <a:spcPts val="0"/>
+              </a:spcAft>
+            </a:pPr>
+            <a:r>
+              <a:rPr sz="1300" b="0" i="0">
+                <a:solidFill>
+                  <a:srgbClr val="F5F6FA"/>
+                </a:solidFill>
+                <a:latin typeface="Segoe UI Semibold"/>
+              </a:rPr>
+              <a:t>Your code</a:t>
+            </a:r>
+          </a:p>
+          <a:p>
+            <a:pPr algn="ctr">
+              <a:lnSpc>
+                <a:spcPct val="100000"/>
+              </a:lnSpc>
+              <a:spcAft>
+                <a:spcPts val="0"/>
+              </a:spcAft>
+            </a:pPr>
+            <a:r>
+              <a:rPr sz="1000" b="0" i="0">
+                <a:solidFill>
+                  <a:srgbClr val="F5F6FA"/>
+                </a:solidFill>
+                <a:latin typeface="Segoe UI"/>
+              </a:rPr>
+              <a:t>act · review · escalate</a:t>
+            </a:r>
+          </a:p>
+        </p:txBody>
+      </p:sp>
+      <p:sp>
+        <p:nvSpPr>
+          <p:cNvPr id="24" name="TextBox 23"/>
           <p:cNvSpPr txBox="1"/>
           <p:nvPr/>
         </p:nvSpPr>
         <p:spPr>
           <a:xfrm>
-            <a:off x="6428232" y="4005072"/>
-            <a:ext cx="5212080" cy="274320"/>
+            <a:off x="457200" y="5029200"/>
+            <a:ext cx="6583680" cy="1280160"/>
+          </a:xfrm>
+          <a:prstGeom prst="rect">
+            <a:avLst/>
+          </a:prstGeom>
+          <a:noFill/>
+        </p:spPr>
+        <p:txBody>
+          <a:bodyPr wrap="square" anchor="t" lIns="36576" rIns="36576" tIns="36576" bIns="36576">
+            <a:spAutoFit/>
+          </a:bodyPr>
+          <a:lstStyle/>
+          <a:p>
+            <a:pPr algn="l">
+              <a:lnSpc>
+                <a:spcPct val="105000"/>
+              </a:lnSpc>
+              <a:spcAft>
+                <a:spcPts val="800"/>
+              </a:spcAft>
+            </a:pPr>
+            <a:r>
+              <a:rPr sz="1500" b="0" i="0">
+                <a:solidFill>
+                  <a:srgbClr val="22D3EE"/>
+                </a:solidFill>
+                <a:latin typeface="Segoe UI Semibold"/>
+              </a:rPr>
+              <a:t>▸  </a:t>
+            </a:r>
+            <a:r>
+              <a:rPr sz="1500" b="0" i="0">
+                <a:solidFill>
+                  <a:srgbClr val="F5F6FA"/>
+                </a:solidFill>
+                <a:latin typeface="Segoe UI Semibold"/>
+              </a:rPr>
+              <a:t>All questions answered together </a:t>
+            </a:r>
+            <a:r>
+              <a:rPr sz="1500" b="0" i="0">
+                <a:solidFill>
+                  <a:srgbClr val="A3A9BC"/>
+                </a:solidFill>
+                <a:latin typeface="Segoe UI"/>
+              </a:rPr>
+              <a:t>in ~0.1 s</a:t>
+            </a:r>
+          </a:p>
+          <a:p>
+            <a:pPr algn="l">
+              <a:lnSpc>
+                <a:spcPct val="105000"/>
+              </a:lnSpc>
+              <a:spcAft>
+                <a:spcPts val="800"/>
+              </a:spcAft>
+            </a:pPr>
+            <a:r>
+              <a:rPr sz="1500" b="0" i="0">
+                <a:solidFill>
+                  <a:srgbClr val="22D3EE"/>
+                </a:solidFill>
+                <a:latin typeface="Segoe UI Semibold"/>
+              </a:rPr>
+              <a:t>▸  </a:t>
+            </a:r>
+            <a:r>
+              <a:rPr sz="1500" b="0" i="0">
+                <a:solidFill>
+                  <a:srgbClr val="F5F6FA"/>
+                </a:solidFill>
+                <a:latin typeface="Segoe UI Semibold"/>
+              </a:rPr>
+              <a:t>Text only; </a:t>
+            </a:r>
+            <a:r>
+              <a:rPr sz="1500" b="0" i="0">
+                <a:solidFill>
+                  <a:srgbClr val="A3A9BC"/>
+                </a:solidFill>
+                <a:latin typeface="Segoe UI"/>
+              </a:rPr>
+              <a:t>calibrated over many decisions, not each one</a:t>
+            </a:r>
+          </a:p>
+        </p:txBody>
+      </p:sp>
+      <p:pic>
+        <p:nvPicPr>
+          <p:cNvPr id="25" name="Picture 24" descr="yt_VE5dsWll06M.jpg">
+            <a:hlinkClick r:id="rId3"/>
+          </p:cNvPr>
+          <p:cNvPicPr>
+            <a:picLocks noChangeAspect="1"/>
+          </p:cNvPicPr>
+          <p:nvPr/>
+        </p:nvPicPr>
+        <p:blipFill>
+          <a:blip r:embed="rId2"/>
+          <a:stretch>
+            <a:fillRect/>
+          </a:stretch>
+        </p:blipFill>
+        <p:spPr>
+          <a:xfrm>
+            <a:off x="7589520" y="3611880"/>
+            <a:ext cx="4160520" cy="2340292"/>
+          </a:xfrm>
+          <a:prstGeom prst="rect">
+            <a:avLst/>
+          </a:prstGeom>
+          <a:ln w="12700">
+            <a:solidFill>
+              <a:srgbClr val="33384A"/>
+            </a:solidFill>
+          </a:ln>
+        </p:spPr>
+      </p:pic>
+      <p:sp>
+        <p:nvSpPr>
+          <p:cNvPr id="26" name="TextBox 25">
+            <a:hlinkClick r:id="rId3"/>
+          </p:cNvPr>
+          <p:cNvSpPr txBox="1"/>
+          <p:nvPr/>
+        </p:nvSpPr>
+        <p:spPr>
+          <a:xfrm>
+            <a:off x="7589520" y="5998464"/>
+            <a:ext cx="4160520" cy="274320"/>
           </a:xfrm>
           <a:prstGeom prst="rect">
             <a:avLst/>
@@ -6888,200 +6289,13 @@
               </a:spcAft>
             </a:pPr>
             <a:r>
-              <a:rPr sz="1150" b="0" i="0">
-                <a:solidFill>
-                  <a:srgbClr val="F5F6FA"/>
-                </a:solidFill>
-                <a:latin typeface="Segoe UI Semibold"/>
-              </a:rPr>
-              <a:t>Where it fits: around the LLM in the agent loop</a:t>
-            </a:r>
-            <a:r>
-              <a:rPr sz="1150" b="0" i="0">
+              <a:rPr sz="1000" b="0" i="0" u="sng">
                 <a:solidFill>
                   <a:srgbClr val="A3A9BC"/>
                 </a:solidFill>
                 <a:latin typeface="Segoe UI"/>
               </a:rPr>
-              <a:t>  (LangChain)</a:t>
-            </a:r>
-          </a:p>
-        </p:txBody>
-      </p:sp>
-      <p:sp>
-        <p:nvSpPr>
-          <p:cNvPr id="29" name="TextBox 28"/>
-          <p:cNvSpPr txBox="1"/>
-          <p:nvPr/>
-        </p:nvSpPr>
-        <p:spPr>
-          <a:xfrm>
-            <a:off x="6428232" y="4370832"/>
-            <a:ext cx="5166360" cy="2011680"/>
-          </a:xfrm>
-          <a:prstGeom prst="rect">
-            <a:avLst/>
-          </a:prstGeom>
-          <a:noFill/>
-        </p:spPr>
-        <p:txBody>
-          <a:bodyPr wrap="square" anchor="t" lIns="36576" rIns="36576" tIns="36576" bIns="36576">
-            <a:spAutoFit/>
-          </a:bodyPr>
-          <a:lstStyle/>
-          <a:p>
-            <a:pPr algn="l">
-              <a:lnSpc>
-                <a:spcPct val="105000"/>
-              </a:lnSpc>
-              <a:spcAft>
-                <a:spcPts val="600"/>
-              </a:spcAft>
-            </a:pPr>
-            <a:r>
-              <a:rPr sz="1150" b="0" i="0">
-                <a:solidFill>
-                  <a:srgbClr val="34D399"/>
-                </a:solidFill>
-                <a:latin typeface="Segoe UI Semibold"/>
-              </a:rPr>
-              <a:t>▸  </a:t>
-            </a:r>
-            <a:r>
-              <a:rPr sz="1150" b="0" i="0">
-                <a:solidFill>
-                  <a:srgbClr val="F5F6FA"/>
-                </a:solidFill>
-                <a:latin typeface="Segoe UI Semibold"/>
-              </a:rPr>
-              <a:t>Model routing.  </a:t>
-            </a:r>
-            <a:r>
-              <a:rPr sz="1150" b="0" i="0">
-                <a:solidFill>
-                  <a:srgbClr val="A3A9BC"/>
-                </a:solidFill>
-                <a:latin typeface="Segoe UI"/>
-              </a:rPr>
-              <a:t>Pick the cheapest LLM that can handle each request, almost instantly.</a:t>
-            </a:r>
-          </a:p>
-          <a:p>
-            <a:pPr algn="l">
-              <a:lnSpc>
-                <a:spcPct val="105000"/>
-              </a:lnSpc>
-              <a:spcAft>
-                <a:spcPts val="600"/>
-              </a:spcAft>
-            </a:pPr>
-            <a:r>
-              <a:rPr sz="1150" b="0" i="0">
-                <a:solidFill>
-                  <a:srgbClr val="34D399"/>
-                </a:solidFill>
-                <a:latin typeface="Segoe UI Semibold"/>
-              </a:rPr>
-              <a:t>▸  </a:t>
-            </a:r>
-            <a:r>
-              <a:rPr sz="1150" b="0" i="0">
-                <a:solidFill>
-                  <a:srgbClr val="F5F6FA"/>
-                </a:solidFill>
-                <a:latin typeface="Segoe UI Semibold"/>
-              </a:rPr>
-              <a:t>Auto mode.  </a:t>
-            </a:r>
-            <a:r>
-              <a:rPr sz="1150" b="0" i="0">
-                <a:solidFill>
-                  <a:srgbClr val="A3A9BC"/>
-                </a:solidFill>
-                <a:latin typeface="Segoe UI"/>
-              </a:rPr>
-              <a:t>Classify every tool call (delete DB, mass send) and block risky ones before they run - fast enough to keep it switched on.</a:t>
-            </a:r>
-          </a:p>
-          <a:p>
-            <a:pPr algn="l">
-              <a:lnSpc>
-                <a:spcPct val="105000"/>
-              </a:lnSpc>
-              <a:spcAft>
-                <a:spcPts val="600"/>
-              </a:spcAft>
-            </a:pPr>
-            <a:r>
-              <a:rPr sz="1150" b="0" i="0">
-                <a:solidFill>
-                  <a:srgbClr val="34D399"/>
-                </a:solidFill>
-                <a:latin typeface="Segoe UI Semibold"/>
-              </a:rPr>
-              <a:t>▸  </a:t>
-            </a:r>
-            <a:r>
-              <a:rPr sz="1150" b="0" i="0">
-                <a:solidFill>
-                  <a:srgbClr val="F5F6FA"/>
-                </a:solidFill>
-                <a:latin typeface="Segoe UI Semibold"/>
-              </a:rPr>
-              <a:t>Jev-as-a-judge.  </a:t>
-            </a:r>
-            <a:r>
-              <a:rPr sz="1150" b="0" i="0">
-                <a:solidFill>
-                  <a:srgbClr val="A3A9BC"/>
-                </a:solidFill>
-                <a:latin typeface="Segoe UI"/>
-              </a:rPr>
-              <a:t>Score agent answers against a rubric (correct? grounded? cited?) for online evals: cheaper, faster and more consistent than LLM-as-judge.</a:t>
-            </a:r>
-          </a:p>
-        </p:txBody>
-      </p:sp>
-      <p:sp>
-        <p:nvSpPr>
-          <p:cNvPr id="30" name="TextBox 29">
-            <a:hlinkClick r:id="rId2"/>
-          </p:cNvPr>
-          <p:cNvSpPr txBox="1"/>
-          <p:nvPr/>
-        </p:nvSpPr>
-        <p:spPr>
-          <a:xfrm>
-            <a:off x="6428232" y="6126480"/>
-            <a:ext cx="5212080" cy="274320"/>
-          </a:xfrm>
-          <a:prstGeom prst="rect">
-            <a:avLst/>
-          </a:prstGeom>
-          <a:noFill/>
-        </p:spPr>
-        <p:txBody>
-          <a:bodyPr wrap="square" anchor="t" lIns="36576" rIns="36576" tIns="36576" bIns="36576">
-            <a:spAutoFit/>
-          </a:bodyPr>
-          <a:lstStyle/>
-          <a:p>
-            <a:pPr algn="l">
-              <a:lnSpc>
-                <a:spcPct val="100000"/>
-              </a:lnSpc>
-              <a:spcAft>
-                <a:spcPts val="0"/>
-              </a:spcAft>
-            </a:pPr>
-            <a:r>
-              <a:rPr sz="1000" b="0" i="0" u="sng">
-                <a:solidFill>
-                  <a:srgbClr val="A3A9BC"/>
-                </a:solidFill>
-                <a:latin typeface="Segoe UI"/>
-              </a:rPr>
-              <a:t>Video: “Building a Harness with Jev” – LangChain  ·  pip install langchain-typesafe</a:t>
+              <a:t>▶  LangChain: Jev in the agent harness - routing · auto mode · judge</a:t>
             </a:r>
           </a:p>
         </p:txBody>
@@ -7191,1298 +6405,182 @@
                 </a:solidFill>
                 <a:latin typeface="Segoe UI Semibold"/>
               </a:rPr>
-              <a:t>Thousands of tiny marketing decisions, in milliseconds</a:t>
-            </a:r>
-          </a:p>
-        </p:txBody>
-      </p:sp>
-      <p:graphicFrame>
-        <p:nvGraphicFramePr>
-          <p:cNvPr id="4" name="Table 3"/>
-          <p:cNvGraphicFramePr>
-            <a:graphicFrameLocks noGrp="1"/>
-          </p:cNvGraphicFramePr>
+              <a:t>Thousands of tiny marketing decisions</a:t>
+            </a:r>
+          </a:p>
+        </p:txBody>
+      </p:sp>
+      <p:sp>
+        <p:nvSpPr>
+          <p:cNvPr id="4" name="TextBox 3"/>
+          <p:cNvSpPr txBox="1"/>
           <p:nvPr/>
-        </p:nvGraphicFramePr>
-        <p:xfrm>
-          <a:off x="457200" y="1280160"/>
-          <a:ext cx="7086598" cy="3538728"/>
-        </p:xfrm>
-        <a:graphic>
-          <a:graphicData uri="http://schemas.openxmlformats.org/drawingml/2006/table">
-            <a:tbl>
-              <a:tblPr firstRow="1">
-                <a:tableStyleId>{2D5ABB26-0587-4C30-8999-92F81FD0307C}</a:tableStyleId>
-              </a:tblPr>
-              <a:tblGrid>
-                <a:gridCol w="1874519"/>
-                <a:gridCol w="3977639"/>
-                <a:gridCol w="1234440"/>
-              </a:tblGrid>
-              <a:tr h="393192">
-                <a:tc>
-                  <a:txBody>
-                    <a:bodyPr wrap="square"/>
-                    <a:lstStyle/>
-                    <a:p>
-                      <a:r>
-                        <a:rPr sz="1050" b="0" i="0">
-                          <a:solidFill>
-                            <a:srgbClr val="A3A9BC"/>
-                          </a:solidFill>
-                          <a:latin typeface="Segoe UI Semibold"/>
-                        </a:rPr>
-                        <a:t>Use case</a:t>
-                      </a:r>
-                    </a:p>
-                  </a:txBody>
-                  <a:tcPr marL="73152" marR="73152" marT="27432" marB="27432" anchor="ctr">
-                    <a:lnL w="9525" cap="flat" cmpd="sng" algn="ctr">
-                      <a:solidFill>
-                        <a:srgbClr val="33384A"/>
-                      </a:solidFill>
-                      <a:prstDash val="solid"/>
-                    </a:lnL>
-                    <a:lnR w="9525" cap="flat" cmpd="sng" algn="ctr">
-                      <a:solidFill>
-                        <a:srgbClr val="33384A"/>
-                      </a:solidFill>
-                      <a:prstDash val="solid"/>
-                    </a:lnR>
-                    <a:lnT w="9525" cap="flat" cmpd="sng" algn="ctr">
-                      <a:solidFill>
-                        <a:srgbClr val="33384A"/>
-                      </a:solidFill>
-                      <a:prstDash val="solid"/>
-                    </a:lnT>
-                    <a:lnB w="9525" cap="flat" cmpd="sng" algn="ctr">
-                      <a:solidFill>
-                        <a:srgbClr val="33384A"/>
-                      </a:solidFill>
-                      <a:prstDash val="solid"/>
-                    </a:lnB>
-                    <a:solidFill>
-                      <a:srgbClr val="242836"/>
-                    </a:solidFill>
-                  </a:tcPr>
-                </a:tc>
-                <a:tc>
-                  <a:txBody>
-                    <a:bodyPr wrap="square"/>
-                    <a:lstStyle/>
-                    <a:p>
-                      <a:r>
-                        <a:rPr sz="1050" b="0" i="0">
-                          <a:solidFill>
-                            <a:srgbClr val="A3A9BC"/>
-                          </a:solidFill>
-                          <a:latin typeface="Segoe UI Semibold"/>
-                        </a:rPr>
-                        <a:t>Question Jev answers</a:t>
-                      </a:r>
-                    </a:p>
-                  </a:txBody>
-                  <a:tcPr marL="73152" marR="73152" marT="27432" marB="27432" anchor="ctr">
-                    <a:lnL w="9525" cap="flat" cmpd="sng" algn="ctr">
-                      <a:solidFill>
-                        <a:srgbClr val="33384A"/>
-                      </a:solidFill>
-                      <a:prstDash val="solid"/>
-                    </a:lnL>
-                    <a:lnR w="9525" cap="flat" cmpd="sng" algn="ctr">
-                      <a:solidFill>
-                        <a:srgbClr val="33384A"/>
-                      </a:solidFill>
-                      <a:prstDash val="solid"/>
-                    </a:lnR>
-                    <a:lnT w="9525" cap="flat" cmpd="sng" algn="ctr">
-                      <a:solidFill>
-                        <a:srgbClr val="33384A"/>
-                      </a:solidFill>
-                      <a:prstDash val="solid"/>
-                    </a:lnT>
-                    <a:lnB w="9525" cap="flat" cmpd="sng" algn="ctr">
-                      <a:solidFill>
-                        <a:srgbClr val="33384A"/>
-                      </a:solidFill>
-                      <a:prstDash val="solid"/>
-                    </a:lnB>
-                    <a:solidFill>
-                      <a:srgbClr val="242836"/>
-                    </a:solidFill>
-                  </a:tcPr>
-                </a:tc>
-                <a:tc>
-                  <a:txBody>
-                    <a:bodyPr wrap="square"/>
-                    <a:lstStyle/>
-                    <a:p>
-                      <a:r>
-                        <a:rPr sz="1050" b="0" i="0">
-                          <a:solidFill>
-                            <a:srgbClr val="A3A9BC"/>
-                          </a:solidFill>
-                          <a:latin typeface="Segoe UI Semibold"/>
-                        </a:rPr>
-                        <a:t>Primitive</a:t>
-                      </a:r>
-                    </a:p>
-                  </a:txBody>
-                  <a:tcPr marL="73152" marR="73152" marT="27432" marB="27432" anchor="ctr">
-                    <a:lnL w="9525" cap="flat" cmpd="sng" algn="ctr">
-                      <a:solidFill>
-                        <a:srgbClr val="33384A"/>
-                      </a:solidFill>
-                      <a:prstDash val="solid"/>
-                    </a:lnL>
-                    <a:lnR w="9525" cap="flat" cmpd="sng" algn="ctr">
-                      <a:solidFill>
-                        <a:srgbClr val="33384A"/>
-                      </a:solidFill>
-                      <a:prstDash val="solid"/>
-                    </a:lnR>
-                    <a:lnT w="9525" cap="flat" cmpd="sng" algn="ctr">
-                      <a:solidFill>
-                        <a:srgbClr val="33384A"/>
-                      </a:solidFill>
-                      <a:prstDash val="solid"/>
-                    </a:lnT>
-                    <a:lnB w="9525" cap="flat" cmpd="sng" algn="ctr">
-                      <a:solidFill>
-                        <a:srgbClr val="33384A"/>
-                      </a:solidFill>
-                      <a:prstDash val="solid"/>
-                    </a:lnB>
-                    <a:solidFill>
-                      <a:srgbClr val="242836"/>
-                    </a:solidFill>
-                  </a:tcPr>
-                </a:tc>
-              </a:tr>
-              <a:tr h="393192">
-                <a:tc>
-                  <a:txBody>
-                    <a:bodyPr wrap="square"/>
-                    <a:lstStyle/>
-                    <a:p>
-                      <a:r>
-                        <a:rPr sz="1150" b="0" i="0">
-                          <a:solidFill>
-                            <a:srgbClr val="F5F6FA"/>
-                          </a:solidFill>
-                          <a:latin typeface="Segoe UI Semibold"/>
-                        </a:rPr>
-                        <a:t>Lead scoring &amp; routing</a:t>
-                      </a:r>
-                    </a:p>
-                  </a:txBody>
-                  <a:tcPr marL="73152" marR="73152" marT="27432" marB="27432" anchor="ctr">
-                    <a:lnL w="9525" cap="flat" cmpd="sng" algn="ctr">
-                      <a:solidFill>
-                        <a:srgbClr val="33384A"/>
-                      </a:solidFill>
-                      <a:prstDash val="solid"/>
-                    </a:lnL>
-                    <a:lnR w="9525" cap="flat" cmpd="sng" algn="ctr">
-                      <a:solidFill>
-                        <a:srgbClr val="33384A"/>
-                      </a:solidFill>
-                      <a:prstDash val="solid"/>
-                    </a:lnR>
-                    <a:lnT w="9525" cap="flat" cmpd="sng" algn="ctr">
-                      <a:solidFill>
-                        <a:srgbClr val="33384A"/>
-                      </a:solidFill>
-                      <a:prstDash val="solid"/>
-                    </a:lnT>
-                    <a:lnB w="9525" cap="flat" cmpd="sng" algn="ctr">
-                      <a:solidFill>
-                        <a:srgbClr val="33384A"/>
-                      </a:solidFill>
-                      <a:prstDash val="solid"/>
-                    </a:lnB>
-                    <a:solidFill>
-                      <a:srgbClr val="1A1D27"/>
-                    </a:solidFill>
-                  </a:tcPr>
-                </a:tc>
-                <a:tc>
-                  <a:txBody>
-                    <a:bodyPr wrap="square"/>
-                    <a:lstStyle/>
-                    <a:p>
-                      <a:r>
-                        <a:rPr sz="1150" b="0" i="0">
-                          <a:solidFill>
-                            <a:srgbClr val="A3A9BC"/>
-                          </a:solidFill>
-                          <a:latin typeface="Segoe UI"/>
-                        </a:rPr>
-                        <a:t>How well does the lead fit our ICP? How ready to buy? Who owns it?</a:t>
-                      </a:r>
-                    </a:p>
-                  </a:txBody>
-                  <a:tcPr marL="73152" marR="73152" marT="27432" marB="27432" anchor="ctr">
-                    <a:lnL w="9525" cap="flat" cmpd="sng" algn="ctr">
-                      <a:solidFill>
-                        <a:srgbClr val="33384A"/>
-                      </a:solidFill>
-                      <a:prstDash val="solid"/>
-                    </a:lnL>
-                    <a:lnR w="9525" cap="flat" cmpd="sng" algn="ctr">
-                      <a:solidFill>
-                        <a:srgbClr val="33384A"/>
-                      </a:solidFill>
-                      <a:prstDash val="solid"/>
-                    </a:lnR>
-                    <a:lnT w="9525" cap="flat" cmpd="sng" algn="ctr">
-                      <a:solidFill>
-                        <a:srgbClr val="33384A"/>
-                      </a:solidFill>
-                      <a:prstDash val="solid"/>
-                    </a:lnT>
-                    <a:lnB w="9525" cap="flat" cmpd="sng" algn="ctr">
-                      <a:solidFill>
-                        <a:srgbClr val="33384A"/>
-                      </a:solidFill>
-                      <a:prstDash val="solid"/>
-                    </a:lnB>
-                    <a:solidFill>
-                      <a:srgbClr val="1A1D27"/>
-                    </a:solidFill>
-                  </a:tcPr>
-                </a:tc>
-                <a:tc>
-                  <a:txBody>
-                    <a:bodyPr wrap="square"/>
-                    <a:lstStyle/>
-                    <a:p>
-                      <a:r>
-                        <a:rPr sz="1150" b="0" i="0">
-                          <a:solidFill>
-                            <a:srgbClr val="22D3EE"/>
-                          </a:solidFill>
-                          <a:latin typeface="Segoe UI Semibold"/>
-                        </a:rPr>
-                        <a:t>Score + Choice</a:t>
-                      </a:r>
-                    </a:p>
-                  </a:txBody>
-                  <a:tcPr marL="73152" marR="73152" marT="27432" marB="27432" anchor="ctr">
-                    <a:lnL w="9525" cap="flat" cmpd="sng" algn="ctr">
-                      <a:solidFill>
-                        <a:srgbClr val="33384A"/>
-                      </a:solidFill>
-                      <a:prstDash val="solid"/>
-                    </a:lnL>
-                    <a:lnR w="9525" cap="flat" cmpd="sng" algn="ctr">
-                      <a:solidFill>
-                        <a:srgbClr val="33384A"/>
-                      </a:solidFill>
-                      <a:prstDash val="solid"/>
-                    </a:lnR>
-                    <a:lnT w="9525" cap="flat" cmpd="sng" algn="ctr">
-                      <a:solidFill>
-                        <a:srgbClr val="33384A"/>
-                      </a:solidFill>
-                      <a:prstDash val="solid"/>
-                    </a:lnT>
-                    <a:lnB w="9525" cap="flat" cmpd="sng" algn="ctr">
-                      <a:solidFill>
-                        <a:srgbClr val="33384A"/>
-                      </a:solidFill>
-                      <a:prstDash val="solid"/>
-                    </a:lnB>
-                    <a:solidFill>
-                      <a:srgbClr val="1A1D27"/>
-                    </a:solidFill>
-                  </a:tcPr>
-                </a:tc>
-              </a:tr>
-              <a:tr h="393192">
-                <a:tc>
-                  <a:txBody>
-                    <a:bodyPr wrap="square"/>
-                    <a:lstStyle/>
-                    <a:p>
-                      <a:r>
-                        <a:rPr sz="1150" b="0" i="0">
-                          <a:solidFill>
-                            <a:srgbClr val="F5F6FA"/>
-                          </a:solidFill>
-                          <a:latin typeface="Segoe UI Semibold"/>
-                        </a:rPr>
-                        <a:t>Campaign reply triage</a:t>
-                      </a:r>
-                    </a:p>
-                  </a:txBody>
-                  <a:tcPr marL="73152" marR="73152" marT="27432" marB="27432" anchor="ctr">
-                    <a:lnL w="9525" cap="flat" cmpd="sng" algn="ctr">
-                      <a:solidFill>
-                        <a:srgbClr val="33384A"/>
-                      </a:solidFill>
-                      <a:prstDash val="solid"/>
-                    </a:lnL>
-                    <a:lnR w="9525" cap="flat" cmpd="sng" algn="ctr">
-                      <a:solidFill>
-                        <a:srgbClr val="33384A"/>
-                      </a:solidFill>
-                      <a:prstDash val="solid"/>
-                    </a:lnR>
-                    <a:lnT w="9525" cap="flat" cmpd="sng" algn="ctr">
-                      <a:solidFill>
-                        <a:srgbClr val="33384A"/>
-                      </a:solidFill>
-                      <a:prstDash val="solid"/>
-                    </a:lnT>
-                    <a:lnB w="9525" cap="flat" cmpd="sng" algn="ctr">
-                      <a:solidFill>
-                        <a:srgbClr val="33384A"/>
-                      </a:solidFill>
-                      <a:prstDash val="solid"/>
-                    </a:lnB>
-                    <a:solidFill>
-                      <a:srgbClr val="0F1117"/>
-                    </a:solidFill>
-                  </a:tcPr>
-                </a:tc>
-                <a:tc>
-                  <a:txBody>
-                    <a:bodyPr wrap="square"/>
-                    <a:lstStyle/>
-                    <a:p>
-                      <a:r>
-                        <a:rPr sz="1150" b="0" i="0">
-                          <a:solidFill>
-                            <a:srgbClr val="A3A9BC"/>
-                          </a:solidFill>
-                          <a:latin typeface="Segoe UI"/>
-                        </a:rPr>
-                        <a:t>Meeting, not now, unsubscribe, out of office, wrong person?</a:t>
-                      </a:r>
-                    </a:p>
-                  </a:txBody>
-                  <a:tcPr marL="73152" marR="73152" marT="27432" marB="27432" anchor="ctr">
-                    <a:lnL w="9525" cap="flat" cmpd="sng" algn="ctr">
-                      <a:solidFill>
-                        <a:srgbClr val="33384A"/>
-                      </a:solidFill>
-                      <a:prstDash val="solid"/>
-                    </a:lnL>
-                    <a:lnR w="9525" cap="flat" cmpd="sng" algn="ctr">
-                      <a:solidFill>
-                        <a:srgbClr val="33384A"/>
-                      </a:solidFill>
-                      <a:prstDash val="solid"/>
-                    </a:lnR>
-                    <a:lnT w="9525" cap="flat" cmpd="sng" algn="ctr">
-                      <a:solidFill>
-                        <a:srgbClr val="33384A"/>
-                      </a:solidFill>
-                      <a:prstDash val="solid"/>
-                    </a:lnT>
-                    <a:lnB w="9525" cap="flat" cmpd="sng" algn="ctr">
-                      <a:solidFill>
-                        <a:srgbClr val="33384A"/>
-                      </a:solidFill>
-                      <a:prstDash val="solid"/>
-                    </a:lnB>
-                    <a:solidFill>
-                      <a:srgbClr val="0F1117"/>
-                    </a:solidFill>
-                  </a:tcPr>
-                </a:tc>
-                <a:tc>
-                  <a:txBody>
-                    <a:bodyPr wrap="square"/>
-                    <a:lstStyle/>
-                    <a:p>
-                      <a:r>
-                        <a:rPr sz="1150" b="0" i="0">
-                          <a:solidFill>
-                            <a:srgbClr val="E040FB"/>
-                          </a:solidFill>
-                          <a:latin typeface="Segoe UI Semibold"/>
-                        </a:rPr>
-                        <a:t>Choice + Noul</a:t>
-                      </a:r>
-                    </a:p>
-                  </a:txBody>
-                  <a:tcPr marL="73152" marR="73152" marT="27432" marB="27432" anchor="ctr">
-                    <a:lnL w="9525" cap="flat" cmpd="sng" algn="ctr">
-                      <a:solidFill>
-                        <a:srgbClr val="33384A"/>
-                      </a:solidFill>
-                      <a:prstDash val="solid"/>
-                    </a:lnL>
-                    <a:lnR w="9525" cap="flat" cmpd="sng" algn="ctr">
-                      <a:solidFill>
-                        <a:srgbClr val="33384A"/>
-                      </a:solidFill>
-                      <a:prstDash val="solid"/>
-                    </a:lnR>
-                    <a:lnT w="9525" cap="flat" cmpd="sng" algn="ctr">
-                      <a:solidFill>
-                        <a:srgbClr val="33384A"/>
-                      </a:solidFill>
-                      <a:prstDash val="solid"/>
-                    </a:lnT>
-                    <a:lnB w="9525" cap="flat" cmpd="sng" algn="ctr">
-                      <a:solidFill>
-                        <a:srgbClr val="33384A"/>
-                      </a:solidFill>
-                      <a:prstDash val="solid"/>
-                    </a:lnB>
-                    <a:solidFill>
-                      <a:srgbClr val="0F1117"/>
-                    </a:solidFill>
-                  </a:tcPr>
-                </a:tc>
-              </a:tr>
-              <a:tr h="393192">
-                <a:tc>
-                  <a:txBody>
-                    <a:bodyPr wrap="square"/>
-                    <a:lstStyle/>
-                    <a:p>
-                      <a:r>
-                        <a:rPr sz="1150" b="0" i="0">
-                          <a:solidFill>
-                            <a:srgbClr val="F5F6FA"/>
-                          </a:solidFill>
-                          <a:latin typeface="Segoe UI Semibold"/>
-                        </a:rPr>
-                        <a:t>Search terms &amp; negatives</a:t>
-                      </a:r>
-                    </a:p>
-                  </a:txBody>
-                  <a:tcPr marL="73152" marR="73152" marT="27432" marB="27432" anchor="ctr">
-                    <a:lnL w="9525" cap="flat" cmpd="sng" algn="ctr">
-                      <a:solidFill>
-                        <a:srgbClr val="33384A"/>
-                      </a:solidFill>
-                      <a:prstDash val="solid"/>
-                    </a:lnL>
-                    <a:lnR w="9525" cap="flat" cmpd="sng" algn="ctr">
-                      <a:solidFill>
-                        <a:srgbClr val="33384A"/>
-                      </a:solidFill>
-                      <a:prstDash val="solid"/>
-                    </a:lnR>
-                    <a:lnT w="9525" cap="flat" cmpd="sng" algn="ctr">
-                      <a:solidFill>
-                        <a:srgbClr val="33384A"/>
-                      </a:solidFill>
-                      <a:prstDash val="solid"/>
-                    </a:lnT>
-                    <a:lnB w="9525" cap="flat" cmpd="sng" algn="ctr">
-                      <a:solidFill>
-                        <a:srgbClr val="33384A"/>
-                      </a:solidFill>
-                      <a:prstDash val="solid"/>
-                    </a:lnB>
-                    <a:solidFill>
-                      <a:srgbClr val="1A1D27"/>
-                    </a:solidFill>
-                  </a:tcPr>
-                </a:tc>
-                <a:tc>
-                  <a:txBody>
-                    <a:bodyPr wrap="square"/>
-                    <a:lstStyle/>
-                    <a:p>
-                      <a:r>
-                        <a:rPr sz="1150" b="0" i="0">
-                          <a:solidFill>
-                            <a:srgbClr val="A3A9BC"/>
-                          </a:solidFill>
-                          <a:latin typeface="Segoe UI"/>
-                        </a:rPr>
-                        <a:t>Buyer, researcher, job seeker, competitor or junk?</a:t>
-                      </a:r>
-                    </a:p>
-                  </a:txBody>
-                  <a:tcPr marL="73152" marR="73152" marT="27432" marB="27432" anchor="ctr">
-                    <a:lnL w="9525" cap="flat" cmpd="sng" algn="ctr">
-                      <a:solidFill>
-                        <a:srgbClr val="33384A"/>
-                      </a:solidFill>
-                      <a:prstDash val="solid"/>
-                    </a:lnL>
-                    <a:lnR w="9525" cap="flat" cmpd="sng" algn="ctr">
-                      <a:solidFill>
-                        <a:srgbClr val="33384A"/>
-                      </a:solidFill>
-                      <a:prstDash val="solid"/>
-                    </a:lnR>
-                    <a:lnT w="9525" cap="flat" cmpd="sng" algn="ctr">
-                      <a:solidFill>
-                        <a:srgbClr val="33384A"/>
-                      </a:solidFill>
-                      <a:prstDash val="solid"/>
-                    </a:lnT>
-                    <a:lnB w="9525" cap="flat" cmpd="sng" algn="ctr">
-                      <a:solidFill>
-                        <a:srgbClr val="33384A"/>
-                      </a:solidFill>
-                      <a:prstDash val="solid"/>
-                    </a:lnB>
-                    <a:solidFill>
-                      <a:srgbClr val="1A1D27"/>
-                    </a:solidFill>
-                  </a:tcPr>
-                </a:tc>
-                <a:tc>
-                  <a:txBody>
-                    <a:bodyPr wrap="square"/>
-                    <a:lstStyle/>
-                    <a:p>
-                      <a:r>
-                        <a:rPr sz="1150" b="0" i="0">
-                          <a:solidFill>
-                            <a:srgbClr val="E040FB"/>
-                          </a:solidFill>
-                          <a:latin typeface="Segoe UI Semibold"/>
-                        </a:rPr>
-                        <a:t>Choice</a:t>
-                      </a:r>
-                    </a:p>
-                  </a:txBody>
-                  <a:tcPr marL="73152" marR="73152" marT="27432" marB="27432" anchor="ctr">
-                    <a:lnL w="9525" cap="flat" cmpd="sng" algn="ctr">
-                      <a:solidFill>
-                        <a:srgbClr val="33384A"/>
-                      </a:solidFill>
-                      <a:prstDash val="solid"/>
-                    </a:lnL>
-                    <a:lnR w="9525" cap="flat" cmpd="sng" algn="ctr">
-                      <a:solidFill>
-                        <a:srgbClr val="33384A"/>
-                      </a:solidFill>
-                      <a:prstDash val="solid"/>
-                    </a:lnR>
-                    <a:lnT w="9525" cap="flat" cmpd="sng" algn="ctr">
-                      <a:solidFill>
-                        <a:srgbClr val="33384A"/>
-                      </a:solidFill>
-                      <a:prstDash val="solid"/>
-                    </a:lnT>
-                    <a:lnB w="9525" cap="flat" cmpd="sng" algn="ctr">
-                      <a:solidFill>
-                        <a:srgbClr val="33384A"/>
-                      </a:solidFill>
-                      <a:prstDash val="solid"/>
-                    </a:lnB>
-                    <a:solidFill>
-                      <a:srgbClr val="1A1D27"/>
-                    </a:solidFill>
-                  </a:tcPr>
-                </a:tc>
-              </a:tr>
-              <a:tr h="393192">
-                <a:tc>
-                  <a:txBody>
-                    <a:bodyPr wrap="square"/>
-                    <a:lstStyle/>
-                    <a:p>
-                      <a:r>
-                        <a:rPr sz="1150" b="0" i="0">
-                          <a:solidFill>
-                            <a:srgbClr val="F5F6FA"/>
-                          </a:solidFill>
-                          <a:latin typeface="Segoe UI Semibold"/>
-                        </a:rPr>
-                        <a:t>Ad creative tagging</a:t>
-                      </a:r>
-                    </a:p>
-                  </a:txBody>
-                  <a:tcPr marL="73152" marR="73152" marT="27432" marB="27432" anchor="ctr">
-                    <a:lnL w="9525" cap="flat" cmpd="sng" algn="ctr">
-                      <a:solidFill>
-                        <a:srgbClr val="33384A"/>
-                      </a:solidFill>
-                      <a:prstDash val="solid"/>
-                    </a:lnL>
-                    <a:lnR w="9525" cap="flat" cmpd="sng" algn="ctr">
-                      <a:solidFill>
-                        <a:srgbClr val="33384A"/>
-                      </a:solidFill>
-                      <a:prstDash val="solid"/>
-                    </a:lnR>
-                    <a:lnT w="9525" cap="flat" cmpd="sng" algn="ctr">
-                      <a:solidFill>
-                        <a:srgbClr val="33384A"/>
-                      </a:solidFill>
-                      <a:prstDash val="solid"/>
-                    </a:lnT>
-                    <a:lnB w="9525" cap="flat" cmpd="sng" algn="ctr">
-                      <a:solidFill>
-                        <a:srgbClr val="33384A"/>
-                      </a:solidFill>
-                      <a:prstDash val="solid"/>
-                    </a:lnB>
-                    <a:solidFill>
-                      <a:srgbClr val="0F1117"/>
-                    </a:solidFill>
-                  </a:tcPr>
-                </a:tc>
-                <a:tc>
-                  <a:txBody>
-                    <a:bodyPr wrap="square"/>
-                    <a:lstStyle/>
-                    <a:p>
-                      <a:r>
-                        <a:rPr sz="1150" b="0" i="0">
-                          <a:solidFill>
-                            <a:srgbClr val="A3A9BC"/>
-                          </a:solidFill>
-                          <a:latin typeface="Segoe UI"/>
-                        </a:rPr>
-                        <a:t>Hook, format, offer, awareness stage? (724 ads in 40 s ≈ $0.09)</a:t>
-                      </a:r>
-                    </a:p>
-                  </a:txBody>
-                  <a:tcPr marL="73152" marR="73152" marT="27432" marB="27432" anchor="ctr">
-                    <a:lnL w="9525" cap="flat" cmpd="sng" algn="ctr">
-                      <a:solidFill>
-                        <a:srgbClr val="33384A"/>
-                      </a:solidFill>
-                      <a:prstDash val="solid"/>
-                    </a:lnL>
-                    <a:lnR w="9525" cap="flat" cmpd="sng" algn="ctr">
-                      <a:solidFill>
-                        <a:srgbClr val="33384A"/>
-                      </a:solidFill>
-                      <a:prstDash val="solid"/>
-                    </a:lnR>
-                    <a:lnT w="9525" cap="flat" cmpd="sng" algn="ctr">
-                      <a:solidFill>
-                        <a:srgbClr val="33384A"/>
-                      </a:solidFill>
-                      <a:prstDash val="solid"/>
-                    </a:lnT>
-                    <a:lnB w="9525" cap="flat" cmpd="sng" algn="ctr">
-                      <a:solidFill>
-                        <a:srgbClr val="33384A"/>
-                      </a:solidFill>
-                      <a:prstDash val="solid"/>
-                    </a:lnB>
-                    <a:solidFill>
-                      <a:srgbClr val="0F1117"/>
-                    </a:solidFill>
-                  </a:tcPr>
-                </a:tc>
-                <a:tc>
-                  <a:txBody>
-                    <a:bodyPr wrap="square"/>
-                    <a:lstStyle/>
-                    <a:p>
-                      <a:r>
-                        <a:rPr sz="1150" b="0" i="0">
-                          <a:solidFill>
-                            <a:srgbClr val="E040FB"/>
-                          </a:solidFill>
-                          <a:latin typeface="Segoe UI Semibold"/>
-                        </a:rPr>
-                        <a:t>Choice ×4</a:t>
-                      </a:r>
-                    </a:p>
-                  </a:txBody>
-                  <a:tcPr marL="73152" marR="73152" marT="27432" marB="27432" anchor="ctr">
-                    <a:lnL w="9525" cap="flat" cmpd="sng" algn="ctr">
-                      <a:solidFill>
-                        <a:srgbClr val="33384A"/>
-                      </a:solidFill>
-                      <a:prstDash val="solid"/>
-                    </a:lnL>
-                    <a:lnR w="9525" cap="flat" cmpd="sng" algn="ctr">
-                      <a:solidFill>
-                        <a:srgbClr val="33384A"/>
-                      </a:solidFill>
-                      <a:prstDash val="solid"/>
-                    </a:lnR>
-                    <a:lnT w="9525" cap="flat" cmpd="sng" algn="ctr">
-                      <a:solidFill>
-                        <a:srgbClr val="33384A"/>
-                      </a:solidFill>
-                      <a:prstDash val="solid"/>
-                    </a:lnT>
-                    <a:lnB w="9525" cap="flat" cmpd="sng" algn="ctr">
-                      <a:solidFill>
-                        <a:srgbClr val="33384A"/>
-                      </a:solidFill>
-                      <a:prstDash val="solid"/>
-                    </a:lnB>
-                    <a:solidFill>
-                      <a:srgbClr val="0F1117"/>
-                    </a:solidFill>
-                  </a:tcPr>
-                </a:tc>
-              </a:tr>
-              <a:tr h="393192">
-                <a:tc>
-                  <a:txBody>
-                    <a:bodyPr wrap="square"/>
-                    <a:lstStyle/>
-                    <a:p>
-                      <a:r>
-                        <a:rPr sz="1150" b="0" i="0">
-                          <a:solidFill>
-                            <a:srgbClr val="F5F6FA"/>
-                          </a:solidFill>
-                          <a:latin typeface="Segoe UI Semibold"/>
-                        </a:rPr>
-                        <a:t>SEO internal linking</a:t>
-                      </a:r>
-                    </a:p>
-                  </a:txBody>
-                  <a:tcPr marL="73152" marR="73152" marT="27432" marB="27432" anchor="ctr">
-                    <a:lnL w="9525" cap="flat" cmpd="sng" algn="ctr">
-                      <a:solidFill>
-                        <a:srgbClr val="33384A"/>
-                      </a:solidFill>
-                      <a:prstDash val="solid"/>
-                    </a:lnL>
-                    <a:lnR w="9525" cap="flat" cmpd="sng" algn="ctr">
-                      <a:solidFill>
-                        <a:srgbClr val="33384A"/>
-                      </a:solidFill>
-                      <a:prstDash val="solid"/>
-                    </a:lnR>
-                    <a:lnT w="9525" cap="flat" cmpd="sng" algn="ctr">
-                      <a:solidFill>
-                        <a:srgbClr val="33384A"/>
-                      </a:solidFill>
-                      <a:prstDash val="solid"/>
-                    </a:lnT>
-                    <a:lnB w="9525" cap="flat" cmpd="sng" algn="ctr">
-                      <a:solidFill>
-                        <a:srgbClr val="33384A"/>
-                      </a:solidFill>
-                      <a:prstDash val="solid"/>
-                    </a:lnB>
-                    <a:solidFill>
-                      <a:srgbClr val="1A1D27"/>
-                    </a:solidFill>
-                  </a:tcPr>
-                </a:tc>
-                <a:tc>
-                  <a:txBody>
-                    <a:bodyPr wrap="square"/>
-                    <a:lstStyle/>
-                    <a:p>
-                      <a:r>
-                        <a:rPr sz="1150" b="0" i="0">
-                          <a:solidFill>
-                            <a:srgbClr val="A3A9BC"/>
-                          </a:solidFill>
-                          <a:latin typeface="Segoe UI"/>
-                        </a:rPr>
-                        <a:t>Is there an honest reason to link page A to page B?</a:t>
-                      </a:r>
-                    </a:p>
-                  </a:txBody>
-                  <a:tcPr marL="73152" marR="73152" marT="27432" marB="27432" anchor="ctr">
-                    <a:lnL w="9525" cap="flat" cmpd="sng" algn="ctr">
-                      <a:solidFill>
-                        <a:srgbClr val="33384A"/>
-                      </a:solidFill>
-                      <a:prstDash val="solid"/>
-                    </a:lnL>
-                    <a:lnR w="9525" cap="flat" cmpd="sng" algn="ctr">
-                      <a:solidFill>
-                        <a:srgbClr val="33384A"/>
-                      </a:solidFill>
-                      <a:prstDash val="solid"/>
-                    </a:lnR>
-                    <a:lnT w="9525" cap="flat" cmpd="sng" algn="ctr">
-                      <a:solidFill>
-                        <a:srgbClr val="33384A"/>
-                      </a:solidFill>
-                      <a:prstDash val="solid"/>
-                    </a:lnT>
-                    <a:lnB w="9525" cap="flat" cmpd="sng" algn="ctr">
-                      <a:solidFill>
-                        <a:srgbClr val="33384A"/>
-                      </a:solidFill>
-                      <a:prstDash val="solid"/>
-                    </a:lnB>
-                    <a:solidFill>
-                      <a:srgbClr val="1A1D27"/>
-                    </a:solidFill>
-                  </a:tcPr>
-                </a:tc>
-                <a:tc>
-                  <a:txBody>
-                    <a:bodyPr wrap="square"/>
-                    <a:lstStyle/>
-                    <a:p>
-                      <a:r>
-                        <a:rPr sz="1150" b="0" i="0">
-                          <a:solidFill>
-                            <a:srgbClr val="FBBF24"/>
-                          </a:solidFill>
-                          <a:latin typeface="Segoe UI Semibold"/>
-                        </a:rPr>
-                        <a:t>Noul</a:t>
-                      </a:r>
-                    </a:p>
-                  </a:txBody>
-                  <a:tcPr marL="73152" marR="73152" marT="27432" marB="27432" anchor="ctr">
-                    <a:lnL w="9525" cap="flat" cmpd="sng" algn="ctr">
-                      <a:solidFill>
-                        <a:srgbClr val="33384A"/>
-                      </a:solidFill>
-                      <a:prstDash val="solid"/>
-                    </a:lnL>
-                    <a:lnR w="9525" cap="flat" cmpd="sng" algn="ctr">
-                      <a:solidFill>
-                        <a:srgbClr val="33384A"/>
-                      </a:solidFill>
-                      <a:prstDash val="solid"/>
-                    </a:lnR>
-                    <a:lnT w="9525" cap="flat" cmpd="sng" algn="ctr">
-                      <a:solidFill>
-                        <a:srgbClr val="33384A"/>
-                      </a:solidFill>
-                      <a:prstDash val="solid"/>
-                    </a:lnT>
-                    <a:lnB w="9525" cap="flat" cmpd="sng" algn="ctr">
-                      <a:solidFill>
-                        <a:srgbClr val="33384A"/>
-                      </a:solidFill>
-                      <a:prstDash val="solid"/>
-                    </a:lnB>
-                    <a:solidFill>
-                      <a:srgbClr val="1A1D27"/>
-                    </a:solidFill>
-                  </a:tcPr>
-                </a:tc>
-              </a:tr>
-              <a:tr h="393192">
-                <a:tc>
-                  <a:txBody>
-                    <a:bodyPr wrap="square"/>
-                    <a:lstStyle/>
-                    <a:p>
-                      <a:r>
-                        <a:rPr sz="1150" b="0" i="0">
-                          <a:solidFill>
-                            <a:srgbClr val="F5F6FA"/>
-                          </a:solidFill>
-                          <a:latin typeface="Segoe UI Semibold"/>
-                        </a:rPr>
-                        <a:t>Social listening</a:t>
-                      </a:r>
-                    </a:p>
-                  </a:txBody>
-                  <a:tcPr marL="73152" marR="73152" marT="27432" marB="27432" anchor="ctr">
-                    <a:lnL w="9525" cap="flat" cmpd="sng" algn="ctr">
-                      <a:solidFill>
-                        <a:srgbClr val="33384A"/>
-                      </a:solidFill>
-                      <a:prstDash val="solid"/>
-                    </a:lnL>
-                    <a:lnR w="9525" cap="flat" cmpd="sng" algn="ctr">
-                      <a:solidFill>
-                        <a:srgbClr val="33384A"/>
-                      </a:solidFill>
-                      <a:prstDash val="solid"/>
-                    </a:lnR>
-                    <a:lnT w="9525" cap="flat" cmpd="sng" algn="ctr">
-                      <a:solidFill>
-                        <a:srgbClr val="33384A"/>
-                      </a:solidFill>
-                      <a:prstDash val="solid"/>
-                    </a:lnT>
-                    <a:lnB w="9525" cap="flat" cmpd="sng" algn="ctr">
-                      <a:solidFill>
-                        <a:srgbClr val="33384A"/>
-                      </a:solidFill>
-                      <a:prstDash val="solid"/>
-                    </a:lnB>
-                    <a:solidFill>
-                      <a:srgbClr val="0F1117"/>
-                    </a:solidFill>
-                  </a:tcPr>
-                </a:tc>
-                <a:tc>
-                  <a:txBody>
-                    <a:bodyPr wrap="square"/>
-                    <a:lstStyle/>
-                    <a:p>
-                      <a:r>
-                        <a:rPr sz="1150" b="0" i="0">
-                          <a:solidFill>
-                            <a:srgbClr val="A3A9BC"/>
-                          </a:solidFill>
-                          <a:latin typeface="Segoe UI"/>
-                        </a:rPr>
-                        <a:t>Engagement bait? Sentiment? Complaint, question or churn?</a:t>
-                      </a:r>
-                    </a:p>
-                  </a:txBody>
-                  <a:tcPr marL="73152" marR="73152" marT="27432" marB="27432" anchor="ctr">
-                    <a:lnL w="9525" cap="flat" cmpd="sng" algn="ctr">
-                      <a:solidFill>
-                        <a:srgbClr val="33384A"/>
-                      </a:solidFill>
-                      <a:prstDash val="solid"/>
-                    </a:lnL>
-                    <a:lnR w="9525" cap="flat" cmpd="sng" algn="ctr">
-                      <a:solidFill>
-                        <a:srgbClr val="33384A"/>
-                      </a:solidFill>
-                      <a:prstDash val="solid"/>
-                    </a:lnR>
-                    <a:lnT w="9525" cap="flat" cmpd="sng" algn="ctr">
-                      <a:solidFill>
-                        <a:srgbClr val="33384A"/>
-                      </a:solidFill>
-                      <a:prstDash val="solid"/>
-                    </a:lnT>
-                    <a:lnB w="9525" cap="flat" cmpd="sng" algn="ctr">
-                      <a:solidFill>
-                        <a:srgbClr val="33384A"/>
-                      </a:solidFill>
-                      <a:prstDash val="solid"/>
-                    </a:lnB>
-                    <a:solidFill>
-                      <a:srgbClr val="0F1117"/>
-                    </a:solidFill>
-                  </a:tcPr>
-                </a:tc>
-                <a:tc>
-                  <a:txBody>
-                    <a:bodyPr wrap="square"/>
-                    <a:lstStyle/>
-                    <a:p>
-                      <a:r>
-                        <a:rPr sz="1150" b="0" i="0">
-                          <a:solidFill>
-                            <a:srgbClr val="FBBF24"/>
-                          </a:solidFill>
-                          <a:latin typeface="Segoe UI Semibold"/>
-                        </a:rPr>
-                        <a:t>Noul + Score</a:t>
-                      </a:r>
-                    </a:p>
-                  </a:txBody>
-                  <a:tcPr marL="73152" marR="73152" marT="27432" marB="27432" anchor="ctr">
-                    <a:lnL w="9525" cap="flat" cmpd="sng" algn="ctr">
-                      <a:solidFill>
-                        <a:srgbClr val="33384A"/>
-                      </a:solidFill>
-                      <a:prstDash val="solid"/>
-                    </a:lnL>
-                    <a:lnR w="9525" cap="flat" cmpd="sng" algn="ctr">
-                      <a:solidFill>
-                        <a:srgbClr val="33384A"/>
-                      </a:solidFill>
-                      <a:prstDash val="solid"/>
-                    </a:lnR>
-                    <a:lnT w="9525" cap="flat" cmpd="sng" algn="ctr">
-                      <a:solidFill>
-                        <a:srgbClr val="33384A"/>
-                      </a:solidFill>
-                      <a:prstDash val="solid"/>
-                    </a:lnT>
-                    <a:lnB w="9525" cap="flat" cmpd="sng" algn="ctr">
-                      <a:solidFill>
-                        <a:srgbClr val="33384A"/>
-                      </a:solidFill>
-                      <a:prstDash val="solid"/>
-                    </a:lnB>
-                    <a:solidFill>
-                      <a:srgbClr val="0F1117"/>
-                    </a:solidFill>
-                  </a:tcPr>
-                </a:tc>
-              </a:tr>
-              <a:tr h="393192">
-                <a:tc>
-                  <a:txBody>
-                    <a:bodyPr wrap="square"/>
-                    <a:lstStyle/>
-                    <a:p>
-                      <a:r>
-                        <a:rPr sz="1150" b="0" i="0">
-                          <a:solidFill>
-                            <a:srgbClr val="F5F6FA"/>
-                          </a:solidFill>
-                          <a:latin typeface="Segoe UI Semibold"/>
-                        </a:rPr>
-                        <a:t>Content QA gate</a:t>
-                      </a:r>
-                    </a:p>
-                  </a:txBody>
-                  <a:tcPr marL="73152" marR="73152" marT="27432" marB="27432" anchor="ctr">
-                    <a:lnL w="9525" cap="flat" cmpd="sng" algn="ctr">
-                      <a:solidFill>
-                        <a:srgbClr val="33384A"/>
-                      </a:solidFill>
-                      <a:prstDash val="solid"/>
-                    </a:lnL>
-                    <a:lnR w="9525" cap="flat" cmpd="sng" algn="ctr">
-                      <a:solidFill>
-                        <a:srgbClr val="33384A"/>
-                      </a:solidFill>
-                      <a:prstDash val="solid"/>
-                    </a:lnR>
-                    <a:lnT w="9525" cap="flat" cmpd="sng" algn="ctr">
-                      <a:solidFill>
-                        <a:srgbClr val="33384A"/>
-                      </a:solidFill>
-                      <a:prstDash val="solid"/>
-                    </a:lnT>
-                    <a:lnB w="9525" cap="flat" cmpd="sng" algn="ctr">
-                      <a:solidFill>
-                        <a:srgbClr val="33384A"/>
-                      </a:solidFill>
-                      <a:prstDash val="solid"/>
-                    </a:lnB>
-                    <a:solidFill>
-                      <a:srgbClr val="1A1D27"/>
-                    </a:solidFill>
-                  </a:tcPr>
-                </a:tc>
-                <a:tc>
-                  <a:txBody>
-                    <a:bodyPr wrap="square"/>
-                    <a:lstStyle/>
-                    <a:p>
-                      <a:r>
-                        <a:rPr sz="1150" b="0" i="0">
-                          <a:solidFill>
-                            <a:srgbClr val="A3A9BC"/>
-                          </a:solidFill>
-                          <a:latin typeface="Segoe UI"/>
-                        </a:rPr>
-                        <a:t>Does this draft meet each of the 20 checklist points?</a:t>
-                      </a:r>
-                    </a:p>
-                  </a:txBody>
-                  <a:tcPr marL="73152" marR="73152" marT="27432" marB="27432" anchor="ctr">
-                    <a:lnL w="9525" cap="flat" cmpd="sng" algn="ctr">
-                      <a:solidFill>
-                        <a:srgbClr val="33384A"/>
-                      </a:solidFill>
-                      <a:prstDash val="solid"/>
-                    </a:lnL>
-                    <a:lnR w="9525" cap="flat" cmpd="sng" algn="ctr">
-                      <a:solidFill>
-                        <a:srgbClr val="33384A"/>
-                      </a:solidFill>
-                      <a:prstDash val="solid"/>
-                    </a:lnR>
-                    <a:lnT w="9525" cap="flat" cmpd="sng" algn="ctr">
-                      <a:solidFill>
-                        <a:srgbClr val="33384A"/>
-                      </a:solidFill>
-                      <a:prstDash val="solid"/>
-                    </a:lnT>
-                    <a:lnB w="9525" cap="flat" cmpd="sng" algn="ctr">
-                      <a:solidFill>
-                        <a:srgbClr val="33384A"/>
-                      </a:solidFill>
-                      <a:prstDash val="solid"/>
-                    </a:lnB>
-                    <a:solidFill>
-                      <a:srgbClr val="1A1D27"/>
-                    </a:solidFill>
-                  </a:tcPr>
-                </a:tc>
-                <a:tc>
-                  <a:txBody>
-                    <a:bodyPr wrap="square"/>
-                    <a:lstStyle/>
-                    <a:p>
-                      <a:r>
-                        <a:rPr sz="1150" b="0" i="0">
-                          <a:solidFill>
-                            <a:srgbClr val="FBBF24"/>
-                          </a:solidFill>
-                          <a:latin typeface="Segoe UI Semibold"/>
-                        </a:rPr>
-                        <a:t>Noul ×20</a:t>
-                      </a:r>
-                    </a:p>
-                  </a:txBody>
-                  <a:tcPr marL="73152" marR="73152" marT="27432" marB="27432" anchor="ctr">
-                    <a:lnL w="9525" cap="flat" cmpd="sng" algn="ctr">
-                      <a:solidFill>
-                        <a:srgbClr val="33384A"/>
-                      </a:solidFill>
-                      <a:prstDash val="solid"/>
-                    </a:lnL>
-                    <a:lnR w="9525" cap="flat" cmpd="sng" algn="ctr">
-                      <a:solidFill>
-                        <a:srgbClr val="33384A"/>
-                      </a:solidFill>
-                      <a:prstDash val="solid"/>
-                    </a:lnR>
-                    <a:lnT w="9525" cap="flat" cmpd="sng" algn="ctr">
-                      <a:solidFill>
-                        <a:srgbClr val="33384A"/>
-                      </a:solidFill>
-                      <a:prstDash val="solid"/>
-                    </a:lnT>
-                    <a:lnB w="9525" cap="flat" cmpd="sng" algn="ctr">
-                      <a:solidFill>
-                        <a:srgbClr val="33384A"/>
-                      </a:solidFill>
-                      <a:prstDash val="solid"/>
-                    </a:lnB>
-                    <a:solidFill>
-                      <a:srgbClr val="1A1D27"/>
-                    </a:solidFill>
-                  </a:tcPr>
-                </a:tc>
-              </a:tr>
-              <a:tr h="393192">
-                <a:tc>
-                  <a:txBody>
-                    <a:bodyPr wrap="square"/>
-                    <a:lstStyle/>
-                    <a:p>
-                      <a:r>
-                        <a:rPr sz="1150" b="0" i="0">
-                          <a:solidFill>
-                            <a:srgbClr val="F5F6FA"/>
-                          </a:solidFill>
-                          <a:latin typeface="Segoe UI Semibold"/>
-                        </a:rPr>
-                        <a:t>AI assistant harness</a:t>
-                      </a:r>
-                    </a:p>
-                  </a:txBody>
-                  <a:tcPr marL="73152" marR="73152" marT="27432" marB="27432" anchor="ctr">
-                    <a:lnL w="9525" cap="flat" cmpd="sng" algn="ctr">
-                      <a:solidFill>
-                        <a:srgbClr val="33384A"/>
-                      </a:solidFill>
-                      <a:prstDash val="solid"/>
-                    </a:lnL>
-                    <a:lnR w="9525" cap="flat" cmpd="sng" algn="ctr">
-                      <a:solidFill>
-                        <a:srgbClr val="33384A"/>
-                      </a:solidFill>
-                      <a:prstDash val="solid"/>
-                    </a:lnR>
-                    <a:lnT w="9525" cap="flat" cmpd="sng" algn="ctr">
-                      <a:solidFill>
-                        <a:srgbClr val="33384A"/>
-                      </a:solidFill>
-                      <a:prstDash val="solid"/>
-                    </a:lnT>
-                    <a:lnB w="9525" cap="flat" cmpd="sng" algn="ctr">
-                      <a:solidFill>
-                        <a:srgbClr val="33384A"/>
-                      </a:solidFill>
-                      <a:prstDash val="solid"/>
-                    </a:lnB>
-                    <a:solidFill>
-                      <a:srgbClr val="0F1117"/>
-                    </a:solidFill>
-                  </a:tcPr>
-                </a:tc>
-                <a:tc>
-                  <a:txBody>
-                    <a:bodyPr wrap="square"/>
-                    <a:lstStyle/>
-                    <a:p>
-                      <a:r>
-                        <a:rPr sz="1150" b="0" i="0">
-                          <a:solidFill>
-                            <a:srgbClr val="A3A9BC"/>
-                          </a:solidFill>
-                          <a:latin typeface="Segoe UI"/>
-                        </a:rPr>
-                        <a:t>Fast or powerful LLM? Is this tool call risky? Is the claim grounded?</a:t>
-                      </a:r>
-                    </a:p>
-                  </a:txBody>
-                  <a:tcPr marL="73152" marR="73152" marT="27432" marB="27432" anchor="ctr">
-                    <a:lnL w="9525" cap="flat" cmpd="sng" algn="ctr">
-                      <a:solidFill>
-                        <a:srgbClr val="33384A"/>
-                      </a:solidFill>
-                      <a:prstDash val="solid"/>
-                    </a:lnL>
-                    <a:lnR w="9525" cap="flat" cmpd="sng" algn="ctr">
-                      <a:solidFill>
-                        <a:srgbClr val="33384A"/>
-                      </a:solidFill>
-                      <a:prstDash val="solid"/>
-                    </a:lnR>
-                    <a:lnT w="9525" cap="flat" cmpd="sng" algn="ctr">
-                      <a:solidFill>
-                        <a:srgbClr val="33384A"/>
-                      </a:solidFill>
-                      <a:prstDash val="solid"/>
-                    </a:lnT>
-                    <a:lnB w="9525" cap="flat" cmpd="sng" algn="ctr">
-                      <a:solidFill>
-                        <a:srgbClr val="33384A"/>
-                      </a:solidFill>
-                      <a:prstDash val="solid"/>
-                    </a:lnB>
-                    <a:solidFill>
-                      <a:srgbClr val="0F1117"/>
-                    </a:solidFill>
-                  </a:tcPr>
-                </a:tc>
-                <a:tc>
-                  <a:txBody>
-                    <a:bodyPr wrap="square"/>
-                    <a:lstStyle/>
-                    <a:p>
-                      <a:r>
-                        <a:rPr sz="1150" b="0" i="0">
-                          <a:solidFill>
-                            <a:srgbClr val="E040FB"/>
-                          </a:solidFill>
-                          <a:latin typeface="Segoe UI Semibold"/>
-                        </a:rPr>
-                        <a:t>Choice + Noul</a:t>
-                      </a:r>
-                    </a:p>
-                  </a:txBody>
-                  <a:tcPr marL="73152" marR="73152" marT="27432" marB="27432" anchor="ctr">
-                    <a:lnL w="9525" cap="flat" cmpd="sng" algn="ctr">
-                      <a:solidFill>
-                        <a:srgbClr val="33384A"/>
-                      </a:solidFill>
-                      <a:prstDash val="solid"/>
-                    </a:lnL>
-                    <a:lnR w="9525" cap="flat" cmpd="sng" algn="ctr">
-                      <a:solidFill>
-                        <a:srgbClr val="33384A"/>
-                      </a:solidFill>
-                      <a:prstDash val="solid"/>
-                    </a:lnR>
-                    <a:lnT w="9525" cap="flat" cmpd="sng" algn="ctr">
-                      <a:solidFill>
-                        <a:srgbClr val="33384A"/>
-                      </a:solidFill>
-                      <a:prstDash val="solid"/>
-                    </a:lnT>
-                    <a:lnB w="9525" cap="flat" cmpd="sng" algn="ctr">
-                      <a:solidFill>
-                        <a:srgbClr val="33384A"/>
-                      </a:solidFill>
-                      <a:prstDash val="solid"/>
-                    </a:lnB>
-                    <a:solidFill>
-                      <a:srgbClr val="0F1117"/>
-                    </a:solidFill>
-                  </a:tcPr>
-                </a:tc>
-              </a:tr>
-            </a:tbl>
-          </a:graphicData>
-        </a:graphic>
-      </p:graphicFrame>
+        </p:nvSpPr>
+        <p:spPr>
+          <a:xfrm>
+            <a:off x="457200" y="1508760"/>
+            <a:ext cx="6492240" cy="3108960"/>
+          </a:xfrm>
+          <a:prstGeom prst="rect">
+            <a:avLst/>
+          </a:prstGeom>
+          <a:noFill/>
+        </p:spPr>
+        <p:txBody>
+          <a:bodyPr wrap="square" anchor="t" lIns="36576" rIns="36576" tIns="36576" bIns="36576">
+            <a:spAutoFit/>
+          </a:bodyPr>
+          <a:lstStyle/>
+          <a:p>
+            <a:pPr algn="l">
+              <a:lnSpc>
+                <a:spcPct val="100000"/>
+              </a:lnSpc>
+              <a:spcAft>
+                <a:spcPts val="1800"/>
+              </a:spcAft>
+            </a:pPr>
+            <a:r>
+              <a:rPr sz="1900" b="0" i="0">
+                <a:solidFill>
+                  <a:srgbClr val="22D3EE"/>
+                </a:solidFill>
+                <a:latin typeface="Segoe UI Semibold"/>
+              </a:rPr>
+              <a:t>▸  </a:t>
+            </a:r>
+            <a:r>
+              <a:rPr sz="1900" b="0" i="0">
+                <a:solidFill>
+                  <a:srgbClr val="F5F6FA"/>
+                </a:solidFill>
+                <a:latin typeface="Segoe UI Semibold"/>
+              </a:rPr>
+              <a:t>Lead scoring &amp; routing</a:t>
+            </a:r>
+            <a:r>
+              <a:rPr sz="1400" b="0" i="0">
+                <a:solidFill>
+                  <a:srgbClr val="22D3EE"/>
+                </a:solidFill>
+                <a:latin typeface="Segoe UI Semibold"/>
+              </a:rPr>
+              <a:t>    Score + Choice</a:t>
+            </a:r>
+          </a:p>
+          <a:p>
+            <a:pPr algn="l">
+              <a:lnSpc>
+                <a:spcPct val="100000"/>
+              </a:lnSpc>
+              <a:spcAft>
+                <a:spcPts val="1800"/>
+              </a:spcAft>
+            </a:pPr>
+            <a:r>
+              <a:rPr sz="1900" b="0" i="0">
+                <a:solidFill>
+                  <a:srgbClr val="22D3EE"/>
+                </a:solidFill>
+                <a:latin typeface="Segoe UI Semibold"/>
+              </a:rPr>
+              <a:t>▸  </a:t>
+            </a:r>
+            <a:r>
+              <a:rPr sz="1900" b="0" i="0">
+                <a:solidFill>
+                  <a:srgbClr val="F5F6FA"/>
+                </a:solidFill>
+                <a:latin typeface="Segoe UI Semibold"/>
+              </a:rPr>
+              <a:t>Reply &amp; intent triage</a:t>
+            </a:r>
+            <a:r>
+              <a:rPr sz="1400" b="0" i="0">
+                <a:solidFill>
+                  <a:srgbClr val="E040FB"/>
+                </a:solidFill>
+                <a:latin typeface="Segoe UI Semibold"/>
+              </a:rPr>
+              <a:t>    Choice + Noul</a:t>
+            </a:r>
+          </a:p>
+          <a:p>
+            <a:pPr algn="l">
+              <a:lnSpc>
+                <a:spcPct val="100000"/>
+              </a:lnSpc>
+              <a:spcAft>
+                <a:spcPts val="1800"/>
+              </a:spcAft>
+            </a:pPr>
+            <a:r>
+              <a:rPr sz="1900" b="0" i="0">
+                <a:solidFill>
+                  <a:srgbClr val="22D3EE"/>
+                </a:solidFill>
+                <a:latin typeface="Segoe UI Semibold"/>
+              </a:rPr>
+              <a:t>▸  </a:t>
+            </a:r>
+            <a:r>
+              <a:rPr sz="1900" b="0" i="0">
+                <a:solidFill>
+                  <a:srgbClr val="F5F6FA"/>
+                </a:solidFill>
+                <a:latin typeface="Segoe UI Semibold"/>
+              </a:rPr>
+              <a:t>Ad, SEO &amp; content tagging at scale</a:t>
+            </a:r>
+            <a:r>
+              <a:rPr sz="1400" b="0" i="0">
+                <a:solidFill>
+                  <a:srgbClr val="E040FB"/>
+                </a:solidFill>
+                <a:latin typeface="Segoe UI Semibold"/>
+              </a:rPr>
+              <a:t>    Choice · Noul</a:t>
+            </a:r>
+          </a:p>
+          <a:p>
+            <a:pPr algn="l">
+              <a:lnSpc>
+                <a:spcPct val="100000"/>
+              </a:lnSpc>
+              <a:spcAft>
+                <a:spcPts val="1800"/>
+              </a:spcAft>
+            </a:pPr>
+            <a:r>
+              <a:rPr sz="1900" b="0" i="0">
+                <a:solidFill>
+                  <a:srgbClr val="22D3EE"/>
+                </a:solidFill>
+                <a:latin typeface="Segoe UI Semibold"/>
+              </a:rPr>
+              <a:t>▸  </a:t>
+            </a:r>
+            <a:r>
+              <a:rPr sz="1900" b="0" i="0">
+                <a:solidFill>
+                  <a:srgbClr val="F5F6FA"/>
+                </a:solidFill>
+                <a:latin typeface="Segoe UI Semibold"/>
+              </a:rPr>
+              <a:t>Social listening &amp; AI guardrails</a:t>
+            </a:r>
+            <a:r>
+              <a:rPr sz="1400" b="0" i="0">
+                <a:solidFill>
+                  <a:srgbClr val="FBBF24"/>
+                </a:solidFill>
+                <a:latin typeface="Segoe UI Semibold"/>
+              </a:rPr>
+              <a:t>    Noul + Score</a:t>
+            </a:r>
+          </a:p>
+        </p:txBody>
+      </p:sp>
       <p:pic>
         <p:nvPicPr>
           <p:cNvPr id="5" name="Picture 4" descr="yt_I34qxJjyms0_demos.jpg">
@@ -8501,8 +6599,8 @@
         </p:blipFill>
         <p:spPr>
           <a:xfrm>
-            <a:off x="7772400" y="1280160"/>
-            <a:ext cx="3959352" cy="1781708"/>
+            <a:off x="7178040" y="1371600"/>
+            <a:ext cx="4572000" cy="2057400"/>
           </a:xfrm>
           <a:prstGeom prst="rect">
             <a:avLst/>
@@ -8524,8 +6622,8 @@
         </p:nvSpPr>
         <p:spPr>
           <a:xfrm>
-            <a:off x="7772400" y="3098444"/>
-            <a:ext cx="3977639" cy="274320"/>
+            <a:off x="7178040" y="3474720"/>
+            <a:ext cx="4572000" cy="274320"/>
           </a:xfrm>
           <a:prstGeom prst="rect">
             <a:avLst/>
@@ -8553,7 +6651,7 @@
                 </a:solidFill>
                 <a:latin typeface="Segoe UI"/>
               </a:rPr>
-              <a:t>Video: “Jev Is WAY More Powerful Than We Thought” – Pursuing AI</a:t>
+              <a:t>▶  “Jev Is WAY More Powerful Than We Thought” – Pursuing AI</a:t>
             </a:r>
           </a:p>
         </p:txBody>
@@ -8566,115 +6664,8 @@
         </p:nvSpPr>
         <p:spPr>
           <a:xfrm>
-            <a:off x="7772400" y="3445916"/>
-            <a:ext cx="3977639" cy="1463040"/>
-          </a:xfrm>
-          <a:prstGeom prst="rect">
-            <a:avLst/>
-          </a:prstGeom>
-          <a:noFill/>
-        </p:spPr>
-        <p:txBody>
-          <a:bodyPr wrap="square" anchor="t" lIns="36576" rIns="36576" tIns="36576" bIns="36576">
-            <a:spAutoFit/>
-          </a:bodyPr>
-          <a:lstStyle/>
-          <a:p>
-            <a:pPr algn="l">
-              <a:lnSpc>
-                <a:spcPct val="100000"/>
-              </a:lnSpc>
-              <a:spcAft>
-                <a:spcPts val="400"/>
-              </a:spcAft>
-            </a:pPr>
-            <a:r>
-              <a:rPr sz="1050" b="0" i="0">
-                <a:solidFill>
-                  <a:srgbClr val="F5F6FA"/>
-                </a:solidFill>
-                <a:latin typeface="Segoe UI Semibold"/>
-              </a:rPr>
-              <a:t>SEO: </a:t>
-            </a:r>
-            <a:r>
-              <a:rPr sz="1050" b="0" i="0">
-                <a:solidFill>
-                  <a:srgbClr val="A3A9BC"/>
-                </a:solidFill>
-                <a:latin typeface="Segoe UI"/>
-              </a:rPr>
-              <a:t>586 pages in 45 s, 584 links placed, 139 rejected, $0.21 (Claude Opus 5: 21 pages, $1.43)</a:t>
-            </a:r>
-          </a:p>
-          <a:p>
-            <a:pPr algn="l">
-              <a:lnSpc>
-                <a:spcPct val="100000"/>
-              </a:lnSpc>
-              <a:spcAft>
-                <a:spcPts val="400"/>
-              </a:spcAft>
-            </a:pPr>
-            <a:r>
-              <a:rPr sz="1050" b="0" i="0">
-                <a:solidFill>
-                  <a:srgbClr val="F5F6FA"/>
-                </a:solidFill>
-                <a:latin typeface="Segoe UI Semibold"/>
-              </a:rPr>
-              <a:t>Also: </a:t>
-            </a:r>
-            <a:r>
-              <a:rPr sz="1050" b="0" i="0">
-                <a:solidFill>
-                  <a:srgbClr val="A3A9BC"/>
-                </a:solidFill>
-                <a:latin typeface="Segoe UI"/>
-              </a:rPr>
-              <a:t>driving sim, trolley problem 100/100, designer's emoji explorer, voice-controlled drawing app, live slop detector, Laya playing Snake at ~60 decisions/s</a:t>
-            </a:r>
-          </a:p>
-          <a:p>
-            <a:pPr algn="l">
-              <a:lnSpc>
-                <a:spcPct val="100000"/>
-              </a:lnSpc>
-              <a:spcAft>
-                <a:spcPts val="400"/>
-              </a:spcAft>
-            </a:pPr>
-            <a:r>
-              <a:rPr sz="1050" b="0" i="0">
-                <a:solidFill>
-                  <a:srgbClr val="22D3EE"/>
-                </a:solidFill>
-                <a:latin typeface="Segoe UI Semibold"/>
-              </a:rPr>
-              <a:t>We rebuilt two of them </a:t>
-            </a:r>
-            <a:r>
-              <a:rPr sz="1050" b="0" i="0">
-                <a:solidFill>
-                  <a:srgbClr val="22D3EE"/>
-                </a:solidFill>
-                <a:latin typeface="Segoe UI"/>
-              </a:rPr>
-              <a:t>→ slide 6</a:t>
-            </a:r>
-          </a:p>
-        </p:txBody>
-      </p:sp>
-      <p:sp>
-        <p:nvSpPr>
-          <p:cNvPr id="8" name="TextBox 7"/>
-          <p:cNvSpPr txBox="1"/>
-          <p:nvPr/>
-        </p:nvSpPr>
-        <p:spPr>
-          <a:xfrm>
-            <a:off x="457200" y="4937760"/>
-            <a:ext cx="7315200" cy="274320"/>
+            <a:off x="7178040" y="3886200"/>
+            <a:ext cx="4572000" cy="457200"/>
           </a:xfrm>
           <a:prstGeom prst="rect">
             <a:avLst/>
@@ -8696,22 +6687,55 @@
               </a:spcAft>
             </a:pPr>
             <a:r>
-              <a:rPr sz="1200" b="0" i="0">
+              <a:rPr sz="2200" b="0" i="0">
                 <a:solidFill>
                   <a:srgbClr val="F5F6FA"/>
                 </a:solidFill>
                 <a:latin typeface="Segoe UI Semibold"/>
               </a:rPr>
-              <a:t>The decide-then-act loop</a:t>
-            </a:r>
-            <a:r>
-              <a:rPr sz="1200" b="0" i="0">
+              <a:t>586 pages · 45 s · $0.21</a:t>
+            </a:r>
+          </a:p>
+        </p:txBody>
+      </p:sp>
+      <p:sp>
+        <p:nvSpPr>
+          <p:cNvPr id="8" name="TextBox 7"/>
+          <p:cNvSpPr txBox="1"/>
+          <p:nvPr/>
+        </p:nvSpPr>
+        <p:spPr>
+          <a:xfrm>
+            <a:off x="7178040" y="4343400"/>
+            <a:ext cx="4572000" cy="365760"/>
+          </a:xfrm>
+          <a:prstGeom prst="rect">
+            <a:avLst/>
+          </a:prstGeom>
+          <a:noFill/>
+        </p:spPr>
+        <p:txBody>
+          <a:bodyPr wrap="square" anchor="t" lIns="36576" rIns="36576" tIns="36576" bIns="36576">
+            <a:spAutoFit/>
+          </a:bodyPr>
+          <a:lstStyle/>
+          <a:p>
+            <a:pPr algn="l">
+              <a:lnSpc>
+                <a:spcPct val="100000"/>
+              </a:lnSpc>
+              <a:spcAft>
+                <a:spcPts val="0"/>
+              </a:spcAft>
+            </a:pPr>
+            <a:r>
+              <a:rPr sz="1100" b="0" i="0">
                 <a:solidFill>
                   <a:srgbClr val="A3A9BC"/>
                 </a:solidFill>
                 <a:latin typeface="Segoe UI"/>
               </a:rPr>
-              <a:t>  ·  same architecture for every row above</a:t>
+              <a:t>SEO internal links placed by Jev (Claude Opus 5: 21 pages, $1.43)</a:t>
             </a:r>
           </a:p>
         </p:txBody>
@@ -8724,8 +6748,8 @@
         </p:nvSpPr>
         <p:spPr>
           <a:xfrm>
-            <a:off x="457200" y="5285232"/>
-            <a:ext cx="2011680" cy="749808"/>
+            <a:off x="457200" y="4983480"/>
+            <a:ext cx="2816352" cy="777240"/>
           </a:xfrm>
           <a:prstGeom prst="homePlate">
             <a:avLst/>
@@ -8765,7 +6789,7 @@
               </a:spcAft>
             </a:pPr>
             <a:r>
-              <a:rPr sz="1250" b="0" i="0">
+              <a:rPr sz="1300" b="0" i="0">
                 <a:solidFill>
                   <a:srgbClr val="F5F6FA"/>
                 </a:solidFill>
@@ -8784,13 +6808,13 @@
               </a:spcAft>
             </a:pPr>
             <a:r>
-              <a:rPr sz="950" b="0" i="0">
+              <a:rPr sz="1000" b="0" i="0">
                 <a:solidFill>
                   <a:srgbClr val="F5F6FA"/>
                 </a:solidFill>
                 <a:latin typeface="Segoe UI"/>
               </a:rPr>
-              <a:t>rows via API / code</a:t>
+              <a:t>rows via code</a:t>
             </a:r>
           </a:p>
         </p:txBody>
@@ -8803,14 +6827,14 @@
         </p:nvSpPr>
         <p:spPr>
           <a:xfrm>
-            <a:off x="2340864" y="5285232"/>
-            <a:ext cx="2011680" cy="749808"/>
+            <a:off x="3273552" y="4983480"/>
+            <a:ext cx="2816352" cy="777240"/>
           </a:xfrm>
           <a:prstGeom prst="chevron">
             <a:avLst/>
           </a:prstGeom>
           <a:solidFill>
-            <a:srgbClr val="242836"/>
+            <a:srgbClr val="E040FB"/>
           </a:solidFill>
           <a:ln>
             <a:noFill/>
@@ -8844,13 +6868,13 @@
               </a:spcAft>
             </a:pPr>
             <a:r>
-              <a:rPr sz="1250" b="0" i="0">
-                <a:solidFill>
-                  <a:srgbClr val="F5F6FA"/>
+              <a:rPr sz="1300" b="0" i="0">
+                <a:solidFill>
+                  <a:srgbClr val="0F1117"/>
                 </a:solidFill>
                 <a:latin typeface="Segoe UI Semibold"/>
               </a:rPr>
-              <a:t>Shortlist</a:t>
+              <a:t>Ask Jev</a:t>
             </a:r>
           </a:p>
           <a:p>
@@ -8863,13 +6887,13 @@
               </a:spcAft>
             </a:pPr>
             <a:r>
-              <a:rPr sz="950" b="0" i="0">
-                <a:solidFill>
-                  <a:srgbClr val="F5F6FA"/>
+              <a:rPr sz="1000" b="0" i="0">
+                <a:solidFill>
+                  <a:srgbClr val="0F1117"/>
                 </a:solidFill>
                 <a:latin typeface="Segoe UI"/>
               </a:rPr>
-              <a:t>rules or embeddings</a:t>
+              <a:t>Choice · Score · Noul</a:t>
             </a:r>
           </a:p>
         </p:txBody>
@@ -8882,14 +6906,14 @@
         </p:nvSpPr>
         <p:spPr>
           <a:xfrm>
-            <a:off x="4224528" y="5285232"/>
-            <a:ext cx="2011680" cy="749808"/>
+            <a:off x="6089904" y="4983480"/>
+            <a:ext cx="2816352" cy="777240"/>
           </a:xfrm>
           <a:prstGeom prst="chevron">
             <a:avLst/>
           </a:prstGeom>
           <a:solidFill>
-            <a:srgbClr val="E040FB"/>
+            <a:srgbClr val="22D3EE"/>
           </a:solidFill>
           <a:ln>
             <a:noFill/>
@@ -8923,13 +6947,13 @@
               </a:spcAft>
             </a:pPr>
             <a:r>
-              <a:rPr sz="1250" b="0" i="0">
+              <a:rPr sz="1300" b="0" i="0">
                 <a:solidFill>
                   <a:srgbClr val="0F1117"/>
                 </a:solidFill>
                 <a:latin typeface="Segoe UI Semibold"/>
               </a:rPr>
-              <a:t>Ask Jev</a:t>
+              <a:t>Threshold</a:t>
             </a:r>
           </a:p>
           <a:p>
@@ -8942,13 +6966,13 @@
               </a:spcAft>
             </a:pPr>
             <a:r>
-              <a:rPr sz="950" b="0" i="0">
+              <a:rPr sz="1000" b="0" i="0">
                 <a:solidFill>
                   <a:srgbClr val="0F1117"/>
                 </a:solidFill>
                 <a:latin typeface="Segoe UI"/>
               </a:rPr>
-              <a:t>Choice · Score · Noul</a:t>
+              <a:t>auto · review · drop</a:t>
             </a:r>
           </a:p>
         </p:txBody>
@@ -8961,14 +6985,14 @@
         </p:nvSpPr>
         <p:spPr>
           <a:xfrm>
-            <a:off x="6108192" y="5285232"/>
-            <a:ext cx="2011680" cy="749808"/>
+            <a:off x="8906256" y="4983480"/>
+            <a:ext cx="2816352" cy="777240"/>
           </a:xfrm>
           <a:prstGeom prst="chevron">
             <a:avLst/>
           </a:prstGeom>
           <a:solidFill>
-            <a:srgbClr val="22D3EE"/>
+            <a:srgbClr val="242836"/>
           </a:solidFill>
           <a:ln>
             <a:noFill/>
@@ -9002,13 +7026,13 @@
               </a:spcAft>
             </a:pPr>
             <a:r>
-              <a:rPr sz="1250" b="0" i="0">
-                <a:solidFill>
-                  <a:srgbClr val="0F1117"/>
+              <a:rPr sz="1300" b="0" i="0">
+                <a:solidFill>
+                  <a:srgbClr val="F5F6FA"/>
                 </a:solidFill>
                 <a:latin typeface="Segoe UI Semibold"/>
               </a:rPr>
-              <a:t>Threshold</a:t>
+              <a:t>LLM writes</a:t>
             </a:r>
           </a:p>
           <a:p>
@@ -9021,91 +7045,12 @@
               </a:spcAft>
             </a:pPr>
             <a:r>
-              <a:rPr sz="950" b="0" i="0">
-                <a:solidFill>
-                  <a:srgbClr val="0F1117"/>
+              <a:rPr sz="1000" b="0" i="0">
+                <a:solidFill>
+                  <a:srgbClr val="F5F6FA"/>
                 </a:solidFill>
                 <a:latin typeface="Segoe UI"/>
               </a:rPr>
-              <a:t>auto · review · drop</a:t>
-            </a:r>
-          </a:p>
-        </p:txBody>
-      </p:sp>
-      <p:sp>
-        <p:nvSpPr>
-          <p:cNvPr id="13" name="Chevron 12"/>
-          <p:cNvSpPr/>
-          <p:nvPr/>
-        </p:nvSpPr>
-        <p:spPr>
-          <a:xfrm>
-            <a:off x="7991856" y="5285232"/>
-            <a:ext cx="2011680" cy="749808"/>
-          </a:xfrm>
-          <a:prstGeom prst="chevron">
-            <a:avLst/>
-          </a:prstGeom>
-          <a:solidFill>
-            <a:srgbClr val="242836"/>
-          </a:solidFill>
-          <a:ln>
-            <a:noFill/>
-          </a:ln>
-          <a:effectLst/>
-        </p:spPr>
-        <p:style>
-          <a:lnRef idx="1">
-            <a:schemeClr val="accent1"/>
-          </a:lnRef>
-          <a:fillRef idx="3">
-            <a:schemeClr val="accent1"/>
-          </a:fillRef>
-          <a:effectRef idx="2">
-            <a:schemeClr val="accent1"/>
-          </a:effectRef>
-          <a:fontRef idx="minor">
-            <a:schemeClr val="lt1"/>
-          </a:fontRef>
-        </p:style>
-        <p:txBody>
-          <a:bodyPr rtlCol="0" anchor="ctr" wrap="square" lIns="36576" rIns="36576" tIns="36576" bIns="36576"/>
-          <a:lstStyle/>
-          <a:p>
-            <a:pPr algn="ctr">
-              <a:lnSpc>
-                <a:spcPct val="100000"/>
-              </a:lnSpc>
-              <a:spcAft>
-                <a:spcPts val="0"/>
-              </a:spcAft>
-            </a:pPr>
-            <a:r>
-              <a:rPr sz="1250" b="0" i="0">
-                <a:solidFill>
-                  <a:srgbClr val="F5F6FA"/>
-                </a:solidFill>
-                <a:latin typeface="Segoe UI Semibold"/>
-              </a:rPr>
-              <a:t>LLM writes</a:t>
-            </a:r>
-          </a:p>
-          <a:p>
-            <a:pPr algn="ctr">
-              <a:lnSpc>
-                <a:spcPct val="100000"/>
-              </a:lnSpc>
-              <a:spcAft>
-                <a:spcPts val="0"/>
-              </a:spcAft>
-            </a:pPr>
-            <a:r>
-              <a:rPr sz="950" b="0" i="0">
-                <a:solidFill>
-                  <a:srgbClr val="F5F6FA"/>
-                </a:solidFill>
-                <a:latin typeface="Segoe UI"/>
-              </a:rPr>
               <a:t>only what passed</a:t>
             </a:r>
           </a:p>
@@ -9113,93 +7058,14 @@
       </p:sp>
       <p:sp>
         <p:nvSpPr>
-          <p:cNvPr id="14" name="Chevron 13"/>
-          <p:cNvSpPr/>
-          <p:nvPr/>
-        </p:nvSpPr>
-        <p:spPr>
-          <a:xfrm>
-            <a:off x="9875520" y="5285232"/>
-            <a:ext cx="2011680" cy="749808"/>
-          </a:xfrm>
-          <a:prstGeom prst="chevron">
-            <a:avLst/>
-          </a:prstGeom>
-          <a:solidFill>
-            <a:srgbClr val="FBBF24"/>
-          </a:solidFill>
-          <a:ln>
-            <a:noFill/>
-          </a:ln>
-          <a:effectLst/>
-        </p:spPr>
-        <p:style>
-          <a:lnRef idx="1">
-            <a:schemeClr val="accent1"/>
-          </a:lnRef>
-          <a:fillRef idx="3">
-            <a:schemeClr val="accent1"/>
-          </a:fillRef>
-          <a:effectRef idx="2">
-            <a:schemeClr val="accent1"/>
-          </a:effectRef>
-          <a:fontRef idx="minor">
-            <a:schemeClr val="lt1"/>
-          </a:fontRef>
-        </p:style>
-        <p:txBody>
-          <a:bodyPr rtlCol="0" anchor="ctr" wrap="square" lIns="36576" rIns="36576" tIns="36576" bIns="36576"/>
-          <a:lstStyle/>
-          <a:p>
-            <a:pPr algn="ctr">
-              <a:lnSpc>
-                <a:spcPct val="100000"/>
-              </a:lnSpc>
-              <a:spcAft>
-                <a:spcPts val="0"/>
-              </a:spcAft>
-            </a:pPr>
-            <a:r>
-              <a:rPr sz="1250" b="0" i="0">
-                <a:solidFill>
-                  <a:srgbClr val="0F1117"/>
-                </a:solidFill>
-                <a:latin typeface="Segoe UI Semibold"/>
-              </a:rPr>
-              <a:t>Verify</a:t>
-            </a:r>
-          </a:p>
-          <a:p>
-            <a:pPr algn="ctr">
-              <a:lnSpc>
-                <a:spcPct val="100000"/>
-              </a:lnSpc>
-              <a:spcAft>
-                <a:spcPts val="0"/>
-              </a:spcAft>
-            </a:pPr>
-            <a:r>
-              <a:rPr sz="950" b="0" i="0">
-                <a:solidFill>
-                  <a:srgbClr val="0F1117"/>
-                </a:solidFill>
-                <a:latin typeface="Segoe UI"/>
-              </a:rPr>
-              <a:t>Jev checks the output</a:t>
-            </a:r>
-          </a:p>
-        </p:txBody>
-      </p:sp>
-      <p:sp>
-        <p:nvSpPr>
-          <p:cNvPr id="15" name="TextBox 14"/>
+          <p:cNvPr id="13" name="TextBox 12"/>
           <p:cNvSpPr txBox="1"/>
           <p:nvPr/>
         </p:nvSpPr>
         <p:spPr>
           <a:xfrm>
-            <a:off x="457200" y="6144768"/>
-            <a:ext cx="11338560" cy="457200"/>
+            <a:off x="457200" y="6035040"/>
+            <a:ext cx="11247120" cy="365760"/>
           </a:xfrm>
           <a:prstGeom prst="rect">
             <a:avLst/>
@@ -9221,7 +7087,7 @@
               </a:spcAft>
             </a:pPr>
             <a:r>
-              <a:rPr sz="1100" b="0" i="0">
+              <a:rPr sz="1250" b="0" i="0">
                 <a:solidFill>
                   <a:srgbClr val="F87171"/>
                 </a:solidFill>
@@ -9230,13 +7096,13 @@
               <a:t>Limits: </a:t>
             </a:r>
             <a:r>
-              <a:rPr sz="1100" b="0" i="0">
+              <a:rPr sz="1250" b="0" i="0">
                 <a:solidFill>
                   <a:srgbClr val="A3A9BC"/>
                 </a:solidFill>
                 <a:latin typeface="Segoe UI"/>
               </a:rPr>
-              <a:t>no rationale (a number, not a reason) · closed answer sets, text input only · “zero hallucinations” means always a valid type, not always the right answer · triage-grade accuracy (vendor benchmark ~68% vs ~73% for frontier LLMs) · early access, price may change. If the answer must be written, it belongs to an LLM.</a:t>
+              <a:t>no explanations · closed answer sets · triage-grade accuracy → keep a human for the middle band</a:t>
             </a:r>
           </a:p>
         </p:txBody>
@@ -9346,7 +7212,7 @@
                 </a:solidFill>
                 <a:latin typeface="Segoe UI Semibold"/>
               </a:rPr>
-              <a:t>Jev is not publicly available yet - not even in Microsoft Foundry</a:t>
+              <a:t>Jev isn't public yet - not even in Microsoft Foundry</a:t>
             </a:r>
           </a:p>
         </p:txBody>
@@ -9388,7 +7254,7 @@
                 </a:solidFill>
                 <a:latin typeface="Segoe UI"/>
               </a:rPr>
-              <a:t>Early access since 15 Sep 2026, sign-up required. Three ways to work with a System One model today:</a:t>
+              <a:t>Early access since 15 Sep 2026, sign-up required. Three ways in:</a:t>
             </a:r>
           </a:p>
         </p:txBody>
@@ -9401,8 +7267,8 @@
         </p:nvSpPr>
         <p:spPr>
           <a:xfrm>
-            <a:off x="457200" y="1600200"/>
-            <a:ext cx="3611880" cy="2834640"/>
+            <a:off x="457200" y="1691640"/>
+            <a:ext cx="3611880" cy="2240280"/>
           </a:xfrm>
           <a:prstGeom prst="roundRect">
             <a:avLst>
@@ -9445,7 +7311,7 @@
         </p:nvSpPr>
         <p:spPr>
           <a:xfrm>
-            <a:off x="457200" y="1600200"/>
+            <a:off x="457200" y="1691640"/>
             <a:ext cx="3611880" cy="64008"/>
           </a:xfrm>
           <a:prstGeom prst="rect">
@@ -9487,8 +7353,8 @@
         </p:nvSpPr>
         <p:spPr>
           <a:xfrm>
-            <a:off x="621792" y="1746504"/>
-            <a:ext cx="3337560" cy="365760"/>
+            <a:off x="640080" y="1856232"/>
+            <a:ext cx="3291840" cy="411480"/>
           </a:xfrm>
           <a:prstGeom prst="rect">
             <a:avLst/>
@@ -9510,13 +7376,13 @@
               </a:spcAft>
             </a:pPr>
             <a:r>
-              <a:rPr sz="1450" b="0" i="0">
+              <a:rPr sz="1700" b="0" i="0">
                 <a:solidFill>
                   <a:srgbClr val="FBBF24"/>
                 </a:solidFill>
                 <a:latin typeface="Segoe UI Semibold"/>
               </a:rPr>
-              <a:t>①  TypeSafe API  (sign-up)</a:t>
+              <a:t>①  TypeSafe API</a:t>
             </a:r>
           </a:p>
         </p:txBody>
@@ -9529,8 +7395,8 @@
         </p:nvSpPr>
         <p:spPr>
           <a:xfrm>
-            <a:off x="621792" y="2148840"/>
-            <a:ext cx="3337560" cy="1920240"/>
+            <a:off x="640080" y="2377440"/>
+            <a:ext cx="3291840" cy="1143000"/>
           </a:xfrm>
           <a:prstGeom prst="rect">
             <a:avLst/>
@@ -9548,11 +7414,11 @@
                 <a:spcPct val="100000"/>
               </a:lnSpc>
               <a:spcAft>
-                <a:spcPts val="500"/>
+                <a:spcPts val="600"/>
               </a:spcAft>
             </a:pPr>
             <a:r>
-              <a:rPr sz="1050" b="0" i="0">
+              <a:rPr sz="1400" b="0" i="0">
                 <a:solidFill>
                   <a:srgbClr val="FBBF24"/>
                 </a:solidFill>
@@ -9561,13 +7427,13 @@
               <a:t>•  </a:t>
             </a:r>
             <a:r>
-              <a:rPr sz="1050" b="0" i="0">
+              <a:rPr sz="1400" b="0" i="0">
                 <a:solidFill>
                   <a:srgbClr val="F5F6FA"/>
                 </a:solidFill>
                 <a:latin typeface="Segoe UI"/>
               </a:rPr>
-              <a:t>Request early access at typesafe.ai, sign in at console.typesafe.ai, create an API key (free credit).</a:t>
+              <a:t>Sign up for early access</a:t>
             </a:r>
           </a:p>
           <a:p>
@@ -9576,11 +7442,11 @@
                 <a:spcPct val="100000"/>
               </a:lnSpc>
               <a:spcAft>
-                <a:spcPts val="500"/>
+                <a:spcPts val="600"/>
               </a:spcAft>
             </a:pPr>
             <a:r>
-              <a:rPr sz="1050" b="0" i="0">
+              <a:rPr sz="1400" b="0" i="0">
                 <a:solidFill>
                   <a:srgbClr val="FBBF24"/>
                 </a:solidFill>
@@ -9589,69 +7455,13 @@
               <a:t>•  </a:t>
             </a:r>
             <a:r>
-              <a:rPr sz="1050" b="0" i="0">
+              <a:rPr sz="1400" b="0" i="0">
                 <a:solidFill>
                   <a:srgbClr val="F5F6FA"/>
                 </a:solidFill>
                 <a:latin typeface="Segoe UI"/>
               </a:rPr>
-              <a:t>POST api.typesafe.ai/v1/systemone, model “jev-latest”; SDKs and langchain-typesafe.</a:t>
-            </a:r>
-          </a:p>
-          <a:p>
-            <a:pPr algn="l">
-              <a:lnSpc>
-                <a:spcPct val="100000"/>
-              </a:lnSpc>
-              <a:spcAft>
-                <a:spcPts val="500"/>
-              </a:spcAft>
-            </a:pPr>
-            <a:r>
-              <a:rPr sz="1050" b="0" i="0">
-                <a:solidFill>
-                  <a:srgbClr val="FBBF24"/>
-                </a:solidFill>
-                <a:latin typeface="Segoe UI"/>
-              </a:rPr>
-              <a:t>•  </a:t>
-            </a:r>
-            <a:r>
-              <a:rPr sz="1050" b="0" i="0">
-                <a:solidFill>
-                  <a:srgbClr val="F5F6FA"/>
-                </a:solidFill>
-                <a:latin typeface="Segoe UI"/>
-              </a:rPr>
-              <a:t>$0.042 per 1M input tokens, output free · 250k tokens/s, 1,200 requests/min.</a:t>
-            </a:r>
-          </a:p>
-          <a:p>
-            <a:pPr algn="l">
-              <a:lnSpc>
-                <a:spcPct val="100000"/>
-              </a:lnSpc>
-              <a:spcAft>
-                <a:spcPts val="500"/>
-              </a:spcAft>
-            </a:pPr>
-            <a:r>
-              <a:rPr sz="1050" b="0" i="0">
-                <a:solidFill>
-                  <a:srgbClr val="FBBF24"/>
-                </a:solidFill>
-                <a:latin typeface="Segoe UI"/>
-              </a:rPr>
-              <a:t>•  </a:t>
-            </a:r>
-            <a:r>
-              <a:rPr sz="1050" b="0" i="0">
-                <a:solidFill>
-                  <a:srgbClr val="F5F6FA"/>
-                </a:solidFill>
-                <a:latin typeface="Segoe UI"/>
-              </a:rPr>
-              <a:t>Our samples: set JEV_BASE_URL + JEV_API_KEY.</a:t>
+              <a:t>$0.042 per 1M input tokens</a:t>
             </a:r>
           </a:p>
         </p:txBody>
@@ -9666,8 +7476,8 @@
         </p:nvSpPr>
         <p:spPr>
           <a:xfrm>
-            <a:off x="621792" y="4069079"/>
-            <a:ext cx="3337560" cy="292608"/>
+            <a:off x="640080" y="3520440"/>
+            <a:ext cx="3291840" cy="292608"/>
           </a:xfrm>
           <a:prstGeom prst="rect">
             <a:avLst/>
@@ -9689,7 +7499,7 @@
               </a:spcAft>
             </a:pPr>
             <a:r>
-              <a:rPr sz="1000" b="0" i="0" u="sng">
+              <a:rPr sz="1100" b="0" i="0" u="sng">
                 <a:solidFill>
                   <a:srgbClr val="FBBF24"/>
                 </a:solidFill>
@@ -9708,8 +7518,8 @@
         </p:nvSpPr>
         <p:spPr>
           <a:xfrm>
-            <a:off x="4288536" y="1600200"/>
-            <a:ext cx="3611880" cy="2834640"/>
+            <a:off x="4288536" y="1691640"/>
+            <a:ext cx="3611880" cy="2240280"/>
           </a:xfrm>
           <a:prstGeom prst="roundRect">
             <a:avLst>
@@ -9752,7 +7562,7 @@
         </p:nvSpPr>
         <p:spPr>
           <a:xfrm>
-            <a:off x="4288536" y="1600200"/>
+            <a:off x="4288536" y="1691640"/>
             <a:ext cx="3611880" cy="64008"/>
           </a:xfrm>
           <a:prstGeom prst="rect">
@@ -9794,8 +7604,8 @@
         </p:nvSpPr>
         <p:spPr>
           <a:xfrm>
-            <a:off x="4453128" y="1746504"/>
-            <a:ext cx="3337560" cy="365760"/>
+            <a:off x="4471416" y="1856232"/>
+            <a:ext cx="3291840" cy="411480"/>
           </a:xfrm>
           <a:prstGeom prst="rect">
             <a:avLst/>
@@ -9817,13 +7627,13 @@
               </a:spcAft>
             </a:pPr>
             <a:r>
-              <a:rPr sz="1450" b="0" i="0">
+              <a:rPr sz="1700" b="0" i="0">
                 <a:solidFill>
                   <a:srgbClr val="22D3EE"/>
                 </a:solidFill>
                 <a:latin typeface="Segoe UI Semibold"/>
               </a:rPr>
-              <a:t>②  Microsoft Foundry agent</a:t>
+              <a:t>②  Microsoft Foundry</a:t>
             </a:r>
           </a:p>
         </p:txBody>
@@ -9836,8 +7646,8 @@
         </p:nvSpPr>
         <p:spPr>
           <a:xfrm>
-            <a:off x="4453128" y="2148840"/>
-            <a:ext cx="3337560" cy="1920240"/>
+            <a:off x="4471416" y="2377440"/>
+            <a:ext cx="3291840" cy="1143000"/>
           </a:xfrm>
           <a:prstGeom prst="rect">
             <a:avLst/>
@@ -9855,11 +7665,11 @@
                 <a:spcPct val="100000"/>
               </a:lnSpc>
               <a:spcAft>
-                <a:spcPts val="500"/>
+                <a:spcPts val="600"/>
               </a:spcAft>
             </a:pPr>
             <a:r>
-              <a:rPr sz="1050" b="0" i="0">
+              <a:rPr sz="1400" b="0" i="0">
                 <a:solidFill>
                   <a:srgbClr val="22D3EE"/>
                 </a:solidFill>
@@ -9868,13 +7678,13 @@
               <a:t>•  </a:t>
             </a:r>
             <a:r>
-              <a:rPr sz="1050" b="0" i="0">
+              <a:rPr sz="1400" b="0" i="0">
                 <a:solidFill>
                   <a:srgbClr val="F5F6FA"/>
                 </a:solidFill>
                 <a:latin typeface="Segoe UI"/>
               </a:rPr>
-              <a:t>Not in the Foundry model catalog - you bring your own TypeSafe key.</a:t>
+              <a:t>Not in the model catalog</a:t>
             </a:r>
           </a:p>
           <a:p>
@@ -9883,11 +7693,11 @@
                 <a:spcPct val="100000"/>
               </a:lnSpc>
               <a:spcAft>
-                <a:spcPts val="500"/>
+                <a:spcPts val="600"/>
               </a:spcAft>
             </a:pPr>
             <a:r>
-              <a:rPr sz="1050" b="0" i="0">
+              <a:rPr sz="1400" b="0" i="0">
                 <a:solidFill>
                   <a:srgbClr val="22D3EE"/>
                 </a:solidFill>
@@ -9896,69 +7706,13 @@
               <a:t>•  </a:t>
             </a:r>
             <a:r>
-              <a:rPr sz="1050" b="0" i="0">
+              <a:rPr sz="1400" b="0" i="0">
                 <a:solidFill>
                   <a:srgbClr val="F5F6FA"/>
                 </a:solidFill>
                 <a:latin typeface="Segoe UI"/>
               </a:rPr>
-              <a:t>Add an OpenAPI tool “evaluate_with_jev” (POST /v1/systemone) with a “Bearer &lt;key&gt;” connection.</a:t>
-            </a:r>
-          </a:p>
-          <a:p>
-            <a:pPr algn="l">
-              <a:lnSpc>
-                <a:spcPct val="100000"/>
-              </a:lnSpc>
-              <a:spcAft>
-                <a:spcPts val="500"/>
-              </a:spcAft>
-            </a:pPr>
-            <a:r>
-              <a:rPr sz="1050" b="0" i="0">
-                <a:solidFill>
-                  <a:srgbClr val="22D3EE"/>
-                </a:solidFill>
-                <a:latin typeface="Segoe UI"/>
-              </a:rPr>
-              <a:t>•  </a:t>
-            </a:r>
-            <a:r>
-              <a:rPr sz="1050" b="0" i="0">
-                <a:solidFill>
-                  <a:srgbClr val="F5F6FA"/>
-                </a:solidFill>
-                <a:latin typeface="Segoe UI"/>
-              </a:rPr>
-              <a:t>Agent instructions: always call Jev, use its values, never classify on its own.</a:t>
-            </a:r>
-          </a:p>
-          <a:p>
-            <a:pPr algn="l">
-              <a:lnSpc>
-                <a:spcPct val="100000"/>
-              </a:lnSpc>
-              <a:spcAft>
-                <a:spcPts val="500"/>
-              </a:spcAft>
-            </a:pPr>
-            <a:r>
-              <a:rPr sz="1050" b="0" i="0">
-                <a:solidFill>
-                  <a:srgbClr val="22D3EE"/>
-                </a:solidFill>
-                <a:latin typeface="Segoe UI"/>
-              </a:rPr>
-              <a:t>•  </a:t>
-            </a:r>
-            <a:r>
-              <a:rPr sz="1050" b="0" i="0">
-                <a:solidFill>
-                  <a:srgbClr val="F5F6FA"/>
-                </a:solidFill>
-                <a:latin typeface="Segoe UI"/>
-              </a:rPr>
-              <a:t>“The room had no water and a towel was dirty” → billing 0.02 · tone frustrated (.74) · urgency 1.81 → handle today.</a:t>
+              <a:t>Call it via an agent OpenAPI tool</a:t>
             </a:r>
           </a:p>
         </p:txBody>
@@ -9973,8 +7727,8 @@
         </p:nvSpPr>
         <p:spPr>
           <a:xfrm>
-            <a:off x="4453128" y="4069079"/>
-            <a:ext cx="3337560" cy="292608"/>
+            <a:off x="4471416" y="3520440"/>
+            <a:ext cx="3291840" cy="292608"/>
           </a:xfrm>
           <a:prstGeom prst="rect">
             <a:avLst/>
@@ -9996,7 +7750,7 @@
               </a:spcAft>
             </a:pPr>
             <a:r>
-              <a:rPr sz="1000" b="0" i="0" u="sng">
+              <a:rPr sz="1100" b="0" i="0" u="sng">
                 <a:solidFill>
                   <a:srgbClr val="22D3EE"/>
                 </a:solidFill>
@@ -10015,8 +7769,8 @@
         </p:nvSpPr>
         <p:spPr>
           <a:xfrm>
-            <a:off x="8119872" y="1600200"/>
-            <a:ext cx="3611880" cy="2834640"/>
+            <a:off x="8119872" y="1691640"/>
+            <a:ext cx="3611880" cy="2240280"/>
           </a:xfrm>
           <a:prstGeom prst="roundRect">
             <a:avLst>
@@ -10059,7 +7813,7 @@
         </p:nvSpPr>
         <p:spPr>
           <a:xfrm>
-            <a:off x="8119872" y="1600200"/>
+            <a:off x="8119872" y="1691640"/>
             <a:ext cx="3611880" cy="64008"/>
           </a:xfrm>
           <a:prstGeom prst="rect">
@@ -10101,8 +7855,8 @@
         </p:nvSpPr>
         <p:spPr>
           <a:xfrm>
-            <a:off x="8284464" y="1746504"/>
-            <a:ext cx="3337560" cy="365760"/>
+            <a:off x="8302752" y="1856232"/>
+            <a:ext cx="3291840" cy="411480"/>
           </a:xfrm>
           <a:prstGeom prst="rect">
             <a:avLst/>
@@ -10124,13 +7878,13 @@
               </a:spcAft>
             </a:pPr>
             <a:r>
-              <a:rPr sz="1450" b="0" i="0">
+              <a:rPr sz="1700" b="0" i="0">
                 <a:solidFill>
                   <a:srgbClr val="34D399"/>
                 </a:solidFill>
                 <a:latin typeface="Segoe UI Semibold"/>
               </a:rPr>
-              <a:t>③  Open-source Laya  (no sign-up)</a:t>
+              <a:t>③  Open-source Laya</a:t>
             </a:r>
           </a:p>
         </p:txBody>
@@ -10143,8 +7897,8 @@
         </p:nvSpPr>
         <p:spPr>
           <a:xfrm>
-            <a:off x="8284464" y="2148840"/>
-            <a:ext cx="3337560" cy="1920240"/>
+            <a:off x="8302752" y="2377440"/>
+            <a:ext cx="3291840" cy="1143000"/>
           </a:xfrm>
           <a:prstGeom prst="rect">
             <a:avLst/>
@@ -10162,11 +7916,11 @@
                 <a:spcPct val="100000"/>
               </a:lnSpc>
               <a:spcAft>
-                <a:spcPts val="500"/>
+                <a:spcPts val="600"/>
               </a:spcAft>
             </a:pPr>
             <a:r>
-              <a:rPr sz="1050" b="0" i="0">
+              <a:rPr sz="1400" b="0" i="0">
                 <a:solidFill>
                   <a:srgbClr val="34D399"/>
                 </a:solidFill>
@@ -10175,13 +7929,13 @@
               <a:t>•  </a:t>
             </a:r>
             <a:r>
-              <a:rPr sz="1050" b="0" i="0">
+              <a:rPr sz="1400" b="0" i="0">
                 <a:solidFill>
                   <a:srgbClr val="F5F6FA"/>
                 </a:solidFill>
                 <a:latin typeface="Segoe UI"/>
               </a:rPr>
-              <a:t>Apache-2.0, 421M params, runs on a laptop CPU (~0.3 s per question; ~33 ms on a T4 GPU).</a:t>
+              <a:t>No sign-up, runs on a laptop</a:t>
             </a:r>
           </a:p>
           <a:p>
@@ -10190,11 +7944,11 @@
                 <a:spcPct val="100000"/>
               </a:lnSpc>
               <a:spcAft>
-                <a:spcPts val="500"/>
+                <a:spcPts val="600"/>
               </a:spcAft>
             </a:pPr>
             <a:r>
-              <a:rPr sz="1050" b="0" i="0">
+              <a:rPr sz="1400" b="0" i="0">
                 <a:solidFill>
                   <a:srgbClr val="34D399"/>
                 </a:solidFill>
@@ -10203,69 +7957,13 @@
               <a:t>•  </a:t>
             </a:r>
             <a:r>
-              <a:rPr sz="1050" b="0" i="0">
+              <a:rPr sz="1400" b="0" i="0">
                 <a:solidFill>
                   <a:srgbClr val="F5F6FA"/>
                 </a:solidFill>
                 <a:latin typeface="Segoe UI"/>
               </a:rPr>
-              <a:t>Same state + questions → typed answers; laya-serve exposes /v1/systemone.</a:t>
-            </a:r>
-          </a:p>
-          <a:p>
-            <a:pPr algn="l">
-              <a:lnSpc>
-                <a:spcPct val="100000"/>
-              </a:lnSpc>
-              <a:spcAft>
-                <a:spcPts val="500"/>
-              </a:spcAft>
-            </a:pPr>
-            <a:r>
-              <a:rPr sz="1050" b="0" i="0">
-                <a:solidFill>
-                  <a:srgbClr val="34D399"/>
-                </a:solidFill>
-                <a:latin typeface="Segoe UI"/>
-              </a:rPr>
-              <a:t>•  </a:t>
-            </a:r>
-            <a:r>
-              <a:rPr sz="1050" b="0" i="0">
-                <a:solidFill>
-                  <a:srgbClr val="F5F6FA"/>
-                </a:solidFill>
-                <a:latin typeface="Segoe UI"/>
-              </a:rPr>
-              <a:t>Zero-shot quality is lower than Jev: test wording, fine-tune for production.</a:t>
-            </a:r>
-          </a:p>
-          <a:p>
-            <a:pPr algn="l">
-              <a:lnSpc>
-                <a:spcPct val="100000"/>
-              </a:lnSpc>
-              <a:spcAft>
-                <a:spcPts val="500"/>
-              </a:spcAft>
-            </a:pPr>
-            <a:r>
-              <a:rPr sz="1050" b="0" i="0">
-                <a:solidFill>
-                  <a:srgbClr val="34D399"/>
-                </a:solidFill>
-                <a:latin typeface="Segoe UI"/>
-              </a:rPr>
-              <a:t>•  </a:t>
-            </a:r>
-            <a:r>
-              <a:rPr sz="1050" b="0" i="0">
-                <a:solidFill>
-                  <a:srgbClr val="F5F6FA"/>
-                </a:solidFill>
-                <a:latin typeface="Segoe UI"/>
-              </a:rPr>
-              <a:t>Powers all our samples and UI demos.</a:t>
+              <a:t>Powers all our demos</a:t>
             </a:r>
           </a:p>
         </p:txBody>
@@ -10280,8 +7978,8 @@
         </p:nvSpPr>
         <p:spPr>
           <a:xfrm>
-            <a:off x="8284464" y="4069079"/>
-            <a:ext cx="3337560" cy="292608"/>
+            <a:off x="8302752" y="3520440"/>
+            <a:ext cx="3291840" cy="292608"/>
           </a:xfrm>
           <a:prstGeom prst="rect">
             <a:avLst/>
@@ -10303,7 +8001,7 @@
               </a:spcAft>
             </a:pPr>
             <a:r>
-              <a:rPr sz="1000" b="0" i="0" u="sng">
+              <a:rPr sz="1100" b="0" i="0" u="sng">
                 <a:solidFill>
                   <a:srgbClr val="34D399"/>
                 </a:solidFill>
@@ -10322,8 +8020,8 @@
         </p:nvSpPr>
         <p:spPr>
           <a:xfrm>
-            <a:off x="457200" y="4617720"/>
-            <a:ext cx="6812280" cy="1874519"/>
+            <a:off x="457200" y="4206240"/>
+            <a:ext cx="11274552" cy="1783080"/>
           </a:xfrm>
           <a:prstGeom prst="roundRect">
             <a:avLst>
@@ -10333,8 +8031,10 @@
           <a:solidFill>
             <a:srgbClr val="1A1D27"/>
           </a:solidFill>
-          <a:ln>
-            <a:noFill/>
+          <a:ln w="15875">
+            <a:solidFill>
+              <a:srgbClr val="34D399"/>
+            </a:solidFill>
           </a:ln>
           <a:effectLst/>
         </p:spPr>
@@ -10360,14 +8060,16 @@
       </p:sp>
       <p:sp>
         <p:nvSpPr>
-          <p:cNvPr id="21" name="TextBox 20"/>
+          <p:cNvPr id="21" name="TextBox 20">
+            <a:hlinkClick r:id="rId5"/>
+          </p:cNvPr>
           <p:cNvSpPr txBox="1"/>
           <p:nvPr/>
         </p:nvSpPr>
         <p:spPr>
           <a:xfrm>
-            <a:off x="621792" y="4690872"/>
-            <a:ext cx="6583680" cy="274320"/>
+            <a:off x="658368" y="4315968"/>
+            <a:ext cx="10881360" cy="292608"/>
           </a:xfrm>
           <a:prstGeom prst="rect">
             <a:avLst/>
@@ -10389,631 +8091,102 @@
               </a:spcAft>
             </a:pPr>
             <a:r>
-              <a:rPr sz="1200" b="0" i="0">
-                <a:solidFill>
-                  <a:srgbClr val="F5F6FA"/>
+              <a:rPr sz="1500" b="0" i="0">
+                <a:solidFill>
+                  <a:srgbClr val="A3A9BC"/>
+                </a:solidFill>
+                <a:latin typeface="Segoe UI"/>
+              </a:rPr>
+              <a:t>Try it:  </a:t>
+            </a:r>
+            <a:r>
+              <a:rPr sz="1500" b="0" i="0" u="sng">
+                <a:solidFill>
+                  <a:srgbClr val="34D399"/>
                 </a:solidFill>
                 <a:latin typeface="Segoe UI Semibold"/>
               </a:rPr>
-              <a:t>Pattern from the Foundry article: </a:t>
-            </a:r>
-            <a:r>
-              <a:rPr sz="1200" b="0" i="0">
-                <a:solidFill>
-                  <a:srgbClr val="A3A9BC"/>
-                </a:solidFill>
-                <a:latin typeface="Segoe UI"/>
-              </a:rPr>
-              <a:t>Jev as a judgement layer</a:t>
-            </a:r>
-          </a:p>
-        </p:txBody>
-      </p:sp>
-      <p:sp>
-        <p:nvSpPr>
-          <p:cNvPr id="22" name="Pentagon 21"/>
-          <p:cNvSpPr/>
+              <a:t>github.com/stvonolf/jev-samples</a:t>
+            </a:r>
+          </a:p>
+        </p:txBody>
+      </p:sp>
+      <p:sp>
+        <p:nvSpPr>
+          <p:cNvPr id="22" name="TextBox 21"/>
+          <p:cNvSpPr txBox="1"/>
           <p:nvPr/>
         </p:nvSpPr>
         <p:spPr>
           <a:xfrm>
-            <a:off x="621792" y="5074920"/>
-            <a:ext cx="1417320" cy="640080"/>
-          </a:xfrm>
-          <a:prstGeom prst="homePlate">
+            <a:off x="658368" y="4800600"/>
+            <a:ext cx="10881360" cy="1463040"/>
+          </a:xfrm>
+          <a:prstGeom prst="rect">
             <a:avLst/>
           </a:prstGeom>
-          <a:solidFill>
-            <a:srgbClr val="242836"/>
-          </a:solidFill>
-          <a:ln>
-            <a:noFill/>
-          </a:ln>
-          <a:effectLst/>
-        </p:spPr>
-        <p:style>
-          <a:lnRef idx="1">
-            <a:schemeClr val="accent1"/>
-          </a:lnRef>
-          <a:fillRef idx="3">
-            <a:schemeClr val="accent1"/>
-          </a:fillRef>
-          <a:effectRef idx="2">
-            <a:schemeClr val="accent1"/>
-          </a:effectRef>
-          <a:fontRef idx="minor">
-            <a:schemeClr val="lt1"/>
-          </a:fontRef>
-        </p:style>
-        <p:txBody>
-          <a:bodyPr rtlCol="0" anchor="ctr" wrap="square" lIns="36576" rIns="36576" tIns="36576" bIns="36576"/>
-          <a:lstStyle/>
-          <a:p>
-            <a:pPr algn="ctr">
+          <a:noFill/>
+        </p:spPr>
+        <p:txBody>
+          <a:bodyPr wrap="square" anchor="t" lIns="36576" rIns="36576" tIns="36576" bIns="36576">
+            <a:spAutoFit/>
+          </a:bodyPr>
+          <a:lstStyle/>
+          <a:p>
+            <a:pPr algn="l">
               <a:lnSpc>
-                <a:spcPct val="100000"/>
+                <a:spcPct val="125000"/>
               </a:lnSpc>
               <a:spcAft>
                 <a:spcPts val="0"/>
               </a:spcAft>
             </a:pPr>
             <a:r>
-              <a:rPr sz="950" b="0" i="0">
+              <a:rPr sz="1400" b="0" i="0">
                 <a:solidFill>
                   <a:srgbClr val="F5F6FA"/>
                 </a:solidFill>
-                <a:latin typeface="Segoe UI"/>
-              </a:rPr>
-              <a:t>User / app</a:t>
-            </a:r>
-          </a:p>
-        </p:txBody>
-      </p:sp>
-      <p:sp>
-        <p:nvSpPr>
-          <p:cNvPr id="23" name="Chevron 22"/>
-          <p:cNvSpPr/>
-          <p:nvPr/>
-        </p:nvSpPr>
-        <p:spPr>
-          <a:xfrm>
-            <a:off x="1920240" y="5074920"/>
-            <a:ext cx="1417320" cy="640080"/>
-          </a:xfrm>
-          <a:prstGeom prst="chevron">
-            <a:avLst/>
-          </a:prstGeom>
-          <a:solidFill>
-            <a:srgbClr val="242836"/>
-          </a:solidFill>
-          <a:ln>
-            <a:noFill/>
-          </a:ln>
-          <a:effectLst/>
-        </p:spPr>
-        <p:style>
-          <a:lnRef idx="1">
-            <a:schemeClr val="accent1"/>
-          </a:lnRef>
-          <a:fillRef idx="3">
-            <a:schemeClr val="accent1"/>
-          </a:fillRef>
-          <a:effectRef idx="2">
-            <a:schemeClr val="accent1"/>
-          </a:effectRef>
-          <a:fontRef idx="minor">
-            <a:schemeClr val="lt1"/>
-          </a:fontRef>
-        </p:style>
-        <p:txBody>
-          <a:bodyPr rtlCol="0" anchor="ctr" wrap="square" lIns="36576" rIns="36576" tIns="36576" bIns="36576"/>
-          <a:lstStyle/>
-          <a:p>
-            <a:pPr algn="ctr">
+                <a:latin typeface="Consolas"/>
+              </a:rPr>
+              <a:t>git clone https://github.com/stvonolf/jev-samples; cd jev-samples</a:t>
+            </a:r>
+          </a:p>
+          <a:p>
+            <a:pPr algn="l">
               <a:lnSpc>
-                <a:spcPct val="100000"/>
+                <a:spcPct val="125000"/>
               </a:lnSpc>
               <a:spcAft>
                 <a:spcPts val="0"/>
               </a:spcAft>
             </a:pPr>
             <a:r>
-              <a:rPr sz="950" b="0" i="0">
+              <a:rPr sz="1400" b="0" i="0">
                 <a:solidFill>
                   <a:srgbClr val="F5F6FA"/>
                 </a:solidFill>
-                <a:latin typeface="Segoe UI"/>
-              </a:rPr>
-              <a:t>Foundry agent
-or model</a:t>
-            </a:r>
-          </a:p>
-        </p:txBody>
-      </p:sp>
-      <p:sp>
-        <p:nvSpPr>
-          <p:cNvPr id="24" name="Chevron 23"/>
-          <p:cNvSpPr/>
-          <p:nvPr/>
-        </p:nvSpPr>
-        <p:spPr>
-          <a:xfrm>
-            <a:off x="3218688" y="5074920"/>
-            <a:ext cx="1417320" cy="640080"/>
-          </a:xfrm>
-          <a:prstGeom prst="chevron">
-            <a:avLst/>
-          </a:prstGeom>
-          <a:solidFill>
-            <a:srgbClr val="22D3EE"/>
-          </a:solidFill>
-          <a:ln>
-            <a:noFill/>
-          </a:ln>
-          <a:effectLst/>
-        </p:spPr>
-        <p:style>
-          <a:lnRef idx="1">
-            <a:schemeClr val="accent1"/>
-          </a:lnRef>
-          <a:fillRef idx="3">
-            <a:schemeClr val="accent1"/>
-          </a:fillRef>
-          <a:effectRef idx="2">
-            <a:schemeClr val="accent1"/>
-          </a:effectRef>
-          <a:fontRef idx="minor">
-            <a:schemeClr val="lt1"/>
-          </a:fontRef>
-        </p:style>
-        <p:txBody>
-          <a:bodyPr rtlCol="0" anchor="ctr" wrap="square" lIns="36576" rIns="36576" tIns="36576" bIns="36576"/>
-          <a:lstStyle/>
-          <a:p>
-            <a:pPr algn="ctr">
+                <a:latin typeface="Consolas"/>
+              </a:rPr>
+              <a:t>python -m venv .venv; .venv\Scripts\pip install -r samples\requirements.txt</a:t>
+            </a:r>
+          </a:p>
+          <a:p>
+            <a:pPr algn="l">
               <a:lnSpc>
-                <a:spcPct val="100000"/>
+                <a:spcPct val="125000"/>
               </a:lnSpc>
               <a:spcAft>
                 <a:spcPts val="0"/>
               </a:spcAft>
             </a:pPr>
             <a:r>
-              <a:rPr sz="950" b="0" i="0">
-                <a:solidFill>
-                  <a:srgbClr val="0F1117"/>
-                </a:solidFill>
-                <a:latin typeface="Segoe UI Semibold"/>
-              </a:rPr>
-              <a:t>Jev judgement</a:t>
-            </a:r>
-          </a:p>
-        </p:txBody>
-      </p:sp>
-      <p:sp>
-        <p:nvSpPr>
-          <p:cNvPr id="25" name="Chevron 24"/>
-          <p:cNvSpPr/>
-          <p:nvPr/>
-        </p:nvSpPr>
-        <p:spPr>
-          <a:xfrm>
-            <a:off x="4517136" y="5074920"/>
-            <a:ext cx="1417320" cy="640080"/>
-          </a:xfrm>
-          <a:prstGeom prst="chevron">
-            <a:avLst/>
-          </a:prstGeom>
-          <a:solidFill>
-            <a:srgbClr val="242836"/>
-          </a:solidFill>
-          <a:ln>
-            <a:noFill/>
-          </a:ln>
-          <a:effectLst/>
-        </p:spPr>
-        <p:style>
-          <a:lnRef idx="1">
-            <a:schemeClr val="accent1"/>
-          </a:lnRef>
-          <a:fillRef idx="3">
-            <a:schemeClr val="accent1"/>
-          </a:fillRef>
-          <a:effectRef idx="2">
-            <a:schemeClr val="accent1"/>
-          </a:effectRef>
-          <a:fontRef idx="minor">
-            <a:schemeClr val="lt1"/>
-          </a:fontRef>
-        </p:style>
-        <p:txBody>
-          <a:bodyPr rtlCol="0" anchor="ctr" wrap="square" lIns="36576" rIns="36576" tIns="36576" bIns="36576"/>
-          <a:lstStyle/>
-          <a:p>
-            <a:pPr algn="ctr">
-              <a:lnSpc>
-                <a:spcPct val="100000"/>
-              </a:lnSpc>
-              <a:spcAft>
-                <a:spcPts val="0"/>
-              </a:spcAft>
-            </a:pPr>
-            <a:r>
-              <a:rPr sz="950" b="0" i="0">
+              <a:rPr sz="1400" b="0" i="0">
                 <a:solidFill>
                   <a:srgbClr val="F5F6FA"/>
                 </a:solidFill>
-                <a:latin typeface="Segoe UI"/>
-              </a:rPr>
-              <a:t>Business rules
-(code)</a:t>
-            </a:r>
-          </a:p>
-        </p:txBody>
-      </p:sp>
-      <p:sp>
-        <p:nvSpPr>
-          <p:cNvPr id="26" name="Chevron 25"/>
-          <p:cNvSpPr/>
-          <p:nvPr/>
-        </p:nvSpPr>
-        <p:spPr>
-          <a:xfrm>
-            <a:off x="5815583" y="5074920"/>
-            <a:ext cx="1417320" cy="640080"/>
-          </a:xfrm>
-          <a:prstGeom prst="chevron">
-            <a:avLst/>
-          </a:prstGeom>
-          <a:solidFill>
-            <a:srgbClr val="242836"/>
-          </a:solidFill>
-          <a:ln>
-            <a:noFill/>
-          </a:ln>
-          <a:effectLst/>
-        </p:spPr>
-        <p:style>
-          <a:lnRef idx="1">
-            <a:schemeClr val="accent1"/>
-          </a:lnRef>
-          <a:fillRef idx="3">
-            <a:schemeClr val="accent1"/>
-          </a:fillRef>
-          <a:effectRef idx="2">
-            <a:schemeClr val="accent1"/>
-          </a:effectRef>
-          <a:fontRef idx="minor">
-            <a:schemeClr val="lt1"/>
-          </a:fontRef>
-        </p:style>
-        <p:txBody>
-          <a:bodyPr rtlCol="0" anchor="ctr" wrap="square" lIns="36576" rIns="36576" tIns="36576" bIns="36576"/>
-          <a:lstStyle/>
-          <a:p>
-            <a:pPr algn="ctr">
-              <a:lnSpc>
-                <a:spcPct val="100000"/>
-              </a:lnSpc>
-              <a:spcAft>
-                <a:spcPts val="0"/>
-              </a:spcAft>
-            </a:pPr>
-            <a:r>
-              <a:rPr sz="950" b="0" i="0">
-                <a:solidFill>
-                  <a:srgbClr val="F5F6FA"/>
-                </a:solidFill>
-                <a:latin typeface="Segoe UI"/>
-              </a:rPr>
-              <a:t>Action /
-response</a:t>
-            </a:r>
-          </a:p>
-        </p:txBody>
-      </p:sp>
-      <p:sp>
-        <p:nvSpPr>
-          <p:cNvPr id="27" name="TextBox 26"/>
-          <p:cNvSpPr txBox="1"/>
-          <p:nvPr/>
-        </p:nvSpPr>
-        <p:spPr>
-          <a:xfrm>
-            <a:off x="621792" y="5806440"/>
-            <a:ext cx="6537960" cy="685800"/>
-          </a:xfrm>
-          <a:prstGeom prst="rect">
-            <a:avLst/>
-          </a:prstGeom>
-          <a:noFill/>
-        </p:spPr>
-        <p:txBody>
-          <a:bodyPr wrap="square" anchor="t" lIns="36576" rIns="36576" tIns="36576" bIns="36576">
-            <a:spAutoFit/>
-          </a:bodyPr>
-          <a:lstStyle/>
-          <a:p>
-            <a:pPr algn="l">
-              <a:lnSpc>
-                <a:spcPct val="100000"/>
-              </a:lnSpc>
-              <a:spcAft>
-                <a:spcPts val="0"/>
-              </a:spcAft>
-            </a:pPr>
-            <a:r>
-              <a:rPr sz="1050" b="0" i="0">
-                <a:solidFill>
-                  <a:srgbClr val="F5F6FA"/>
-                </a:solidFill>
-                <a:latin typeface="Segoe UI Semibold"/>
-              </a:rPr>
-              <a:t>Explainability for Model-as-a-Service: </a:t>
-            </a:r>
-            <a:r>
-              <a:rPr sz="1050" b="0" i="0">
-                <a:solidFill>
-                  <a:srgbClr val="A3A9BC"/>
-                </a:solidFill>
-                <a:latin typeface="Segoe UI"/>
-              </a:rPr>
-              <a:t>not SHAP-style feature attribution, but a measurable layer that checks an opaque hosted LLM's inputs, outputs and proposed actions against explicit criteria - with a confidence to gate on.</a:t>
-            </a:r>
-          </a:p>
-        </p:txBody>
-      </p:sp>
-      <p:sp>
-        <p:nvSpPr>
-          <p:cNvPr id="28" name="Rounded Rectangle 27"/>
-          <p:cNvSpPr/>
-          <p:nvPr/>
-        </p:nvSpPr>
-        <p:spPr>
-          <a:xfrm>
-            <a:off x="7452360" y="4617720"/>
-            <a:ext cx="4279392" cy="1874519"/>
-          </a:xfrm>
-          <a:prstGeom prst="roundRect">
-            <a:avLst>
-              <a:gd name="adj" fmla="val 6000"/>
-            </a:avLst>
-          </a:prstGeom>
-          <a:solidFill>
-            <a:srgbClr val="1A1D27"/>
-          </a:solidFill>
-          <a:ln w="15875">
-            <a:solidFill>
-              <a:srgbClr val="34D399"/>
-            </a:solidFill>
-          </a:ln>
-          <a:effectLst/>
-        </p:spPr>
-        <p:style>
-          <a:lnRef idx="1">
-            <a:schemeClr val="accent1"/>
-          </a:lnRef>
-          <a:fillRef idx="3">
-            <a:schemeClr val="accent1"/>
-          </a:fillRef>
-          <a:effectRef idx="2">
-            <a:schemeClr val="accent1"/>
-          </a:effectRef>
-          <a:fontRef idx="minor">
-            <a:schemeClr val="lt1"/>
-          </a:fontRef>
-        </p:style>
-        <p:txBody>
-          <a:bodyPr rtlCol="0" anchor="ctr"/>
-          <a:lstStyle/>
-          <a:p/>
-        </p:txBody>
-      </p:sp>
-      <p:sp>
-        <p:nvSpPr>
-          <p:cNvPr id="29" name="TextBox 28">
-            <a:hlinkClick r:id="rId5"/>
-          </p:cNvPr>
-          <p:cNvSpPr txBox="1"/>
-          <p:nvPr/>
-        </p:nvSpPr>
-        <p:spPr>
-          <a:xfrm>
-            <a:off x="7589520" y="4681728"/>
-            <a:ext cx="4023360" cy="292608"/>
-          </a:xfrm>
-          <a:prstGeom prst="rect">
-            <a:avLst/>
-          </a:prstGeom>
-          <a:noFill/>
-        </p:spPr>
-        <p:txBody>
-          <a:bodyPr wrap="square" anchor="t" lIns="36576" rIns="36576" tIns="36576" bIns="36576">
-            <a:spAutoFit/>
-          </a:bodyPr>
-          <a:lstStyle/>
-          <a:p>
-            <a:pPr algn="l">
-              <a:lnSpc>
-                <a:spcPct val="100000"/>
-              </a:lnSpc>
-              <a:spcAft>
-                <a:spcPts val="0"/>
-              </a:spcAft>
-            </a:pPr>
-            <a:r>
-              <a:rPr sz="1150" b="0" i="0">
-                <a:solidFill>
-                  <a:srgbClr val="A3A9BC"/>
-                </a:solidFill>
-                <a:latin typeface="Segoe UI"/>
-              </a:rPr>
-              <a:t>Run our samples:  </a:t>
-            </a:r>
-            <a:r>
-              <a:rPr sz="1150" b="0" i="0" u="sng">
-                <a:solidFill>
-                  <a:srgbClr val="34D399"/>
-                </a:solidFill>
-                <a:latin typeface="Segoe UI Semibold"/>
-              </a:rPr>
-              <a:t>github.com/stvonolf/jev-samples</a:t>
-            </a:r>
-          </a:p>
-        </p:txBody>
-      </p:sp>
-      <p:sp>
-        <p:nvSpPr>
-          <p:cNvPr id="30" name="TextBox 29"/>
-          <p:cNvSpPr txBox="1"/>
-          <p:nvPr/>
-        </p:nvSpPr>
-        <p:spPr>
-          <a:xfrm>
-            <a:off x="7589520" y="5029200"/>
-            <a:ext cx="4069080" cy="1463040"/>
-          </a:xfrm>
-          <a:prstGeom prst="rect">
-            <a:avLst/>
-          </a:prstGeom>
-          <a:noFill/>
-        </p:spPr>
-        <p:txBody>
-          <a:bodyPr wrap="square" anchor="t" lIns="36576" rIns="36576" tIns="36576" bIns="36576">
-            <a:spAutoFit/>
-          </a:bodyPr>
-          <a:lstStyle/>
-          <a:p>
-            <a:pPr algn="l">
-              <a:lnSpc>
-                <a:spcPct val="110000"/>
-              </a:lnSpc>
-              <a:spcAft>
-                <a:spcPts val="0"/>
-              </a:spcAft>
-            </a:pPr>
-            <a:r>
-              <a:rPr sz="900" b="0" i="0">
-                <a:solidFill>
-                  <a:srgbClr val="F5F6FA"/>
-                </a:solidFill>
                 <a:latin typeface="Consolas"/>
               </a:rPr>
-              <a:t>git clone https://github.com/stvonolf/jev-samples</a:t>
-            </a:r>
-          </a:p>
-          <a:p>
-            <a:pPr algn="l">
-              <a:lnSpc>
-                <a:spcPct val="110000"/>
-              </a:lnSpc>
-              <a:spcAft>
-                <a:spcPts val="0"/>
-              </a:spcAft>
-            </a:pPr>
-            <a:r>
-              <a:rPr sz="900" b="0" i="0">
-                <a:solidFill>
-                  <a:srgbClr val="F5F6FA"/>
-                </a:solidFill>
-                <a:latin typeface="Consolas"/>
-              </a:rPr>
-              <a:t>cd jev-samples</a:t>
-            </a:r>
-          </a:p>
-          <a:p>
-            <a:pPr algn="l">
-              <a:lnSpc>
-                <a:spcPct val="110000"/>
-              </a:lnSpc>
-              <a:spcAft>
-                <a:spcPts val="0"/>
-              </a:spcAft>
-            </a:pPr>
-            <a:r>
-              <a:rPr sz="900" b="0" i="0">
-                <a:solidFill>
-                  <a:srgbClr val="F5F6FA"/>
-                </a:solidFill>
-                <a:latin typeface="Consolas"/>
-              </a:rPr>
-              <a:t>python -m venv .venv</a:t>
-            </a:r>
-          </a:p>
-          <a:p>
-            <a:pPr algn="l">
-              <a:lnSpc>
-                <a:spcPct val="110000"/>
-              </a:lnSpc>
-              <a:spcAft>
-                <a:spcPts val="0"/>
-              </a:spcAft>
-            </a:pPr>
-            <a:r>
-              <a:rPr sz="900" b="0" i="0">
-                <a:solidFill>
-                  <a:srgbClr val="F5F6FA"/>
-                </a:solidFill>
-                <a:latin typeface="Consolas"/>
-              </a:rPr>
-              <a:t>.venv\Scripts\pip install -r samples\requirements.txt</a:t>
-            </a:r>
-          </a:p>
-          <a:p>
-            <a:pPr algn="l">
-              <a:lnSpc>
-                <a:spcPct val="110000"/>
-              </a:lnSpc>
-              <a:spcAft>
-                <a:spcPts val="0"/>
-              </a:spcAft>
-            </a:pPr>
-            <a:r>
-              <a:rPr sz="900" b="0" i="0">
-                <a:solidFill>
-                  <a:srgbClr val="F5F6FA"/>
-                </a:solidFill>
-                <a:latin typeface="Consolas"/>
-              </a:rPr>
-              <a:t>cd samples</a:t>
-            </a:r>
-          </a:p>
-          <a:p>
-            <a:pPr algn="l">
-              <a:lnSpc>
-                <a:spcPct val="110000"/>
-              </a:lnSpc>
-              <a:spcAft>
-                <a:spcPts val="0"/>
-              </a:spcAft>
-            </a:pPr>
-            <a:r>
-              <a:rPr sz="900" b="0" i="0">
-                <a:solidFill>
-                  <a:srgbClr val="F5F6FA"/>
-                </a:solidFill>
-                <a:latin typeface="Consolas"/>
-              </a:rPr>
-              <a:t>..\.venv\Scripts\python 01_lead_scoring.py</a:t>
-            </a:r>
-          </a:p>
-          <a:p>
-            <a:pPr algn="l">
-              <a:lnSpc>
-                <a:spcPct val="110000"/>
-              </a:lnSpc>
-              <a:spcAft>
-                <a:spcPts val="0"/>
-              </a:spcAft>
-            </a:pPr>
-            <a:r>
-              <a:rPr sz="900" b="0" i="0">
-                <a:solidFill>
-                  <a:srgbClr val="F5F6FA"/>
-                </a:solidFill>
-                <a:latin typeface="Consolas"/>
-              </a:rPr>
-              <a:t>..\.venv\Scripts\python 07_ui_demos.py   # UI demos</a:t>
+              <a:t>cd samples; ..\.venv\Scripts\python 07_ui_demos.py      # → http://localhost:8765</a:t>
             </a:r>
           </a:p>
         </p:txBody>
@@ -11123,21 +8296,23 @@
                 </a:solidFill>
                 <a:latin typeface="Segoe UI Semibold"/>
               </a:rPr>
-              <a:t>We built it: 7 samples running locally on Laya</a:t>
-            </a:r>
-          </a:p>
-        </p:txBody>
-      </p:sp>
-      <p:sp>
-        <p:nvSpPr>
-          <p:cNvPr id="4" name="TextBox 3"/>
+              <a:t>We built it: 6 samples + 3 UI demos</a:t>
+            </a:r>
+          </a:p>
+        </p:txBody>
+      </p:sp>
+      <p:sp>
+        <p:nvSpPr>
+          <p:cNvPr id="4" name="TextBox 3">
+            <a:hlinkClick r:id="rId2"/>
+          </p:cNvPr>
           <p:cNvSpPr txBox="1"/>
           <p:nvPr/>
         </p:nvSpPr>
         <p:spPr>
           <a:xfrm>
-            <a:off x="457200" y="1115568"/>
-            <a:ext cx="7132320" cy="365760"/>
+            <a:off x="457200" y="1143000"/>
+            <a:ext cx="6400800" cy="292608"/>
           </a:xfrm>
           <a:prstGeom prst="rect">
             <a:avLst/>
@@ -11165,23 +8340,164 @@
                 </a:solidFill>
                 <a:latin typeface="Segoe UI"/>
               </a:rPr>
-              <a:t>Laya: open-source (Apache-2.0), Jev-compatible, 421M params. Runs on a laptop CPU.</a:t>
-            </a:r>
-          </a:p>
-        </p:txBody>
-      </p:sp>
-      <p:sp>
-        <p:nvSpPr>
-          <p:cNvPr id="5" name="TextBox 4">
-            <a:hlinkClick r:id="rId2"/>
-          </p:cNvPr>
+              <a:t>Code:  </a:t>
+            </a:r>
+            <a:r>
+              <a:rPr sz="1400" b="0" i="0" u="sng">
+                <a:solidFill>
+                  <a:srgbClr val="22D3EE"/>
+                </a:solidFill>
+                <a:latin typeface="Segoe UI Semibold"/>
+              </a:rPr>
+              <a:t>github.com/stvonolf/jev-samples</a:t>
+            </a:r>
+          </a:p>
+        </p:txBody>
+      </p:sp>
+      <p:sp>
+        <p:nvSpPr>
+          <p:cNvPr id="5" name="TextBox 4"/>
           <p:cNvSpPr txBox="1"/>
           <p:nvPr/>
         </p:nvSpPr>
         <p:spPr>
           <a:xfrm>
-            <a:off x="7726679" y="1143000"/>
-            <a:ext cx="4023360" cy="292608"/>
+            <a:off x="457200" y="1737360"/>
+            <a:ext cx="6400800" cy="2194560"/>
+          </a:xfrm>
+          <a:prstGeom prst="rect">
+            <a:avLst/>
+          </a:prstGeom>
+          <a:noFill/>
+        </p:spPr>
+        <p:txBody>
+          <a:bodyPr wrap="square" anchor="t" lIns="36576" rIns="36576" tIns="36576" bIns="36576">
+            <a:spAutoFit/>
+          </a:bodyPr>
+          <a:lstStyle/>
+          <a:p>
+            <a:pPr algn="l">
+              <a:lnSpc>
+                <a:spcPct val="105000"/>
+              </a:lnSpc>
+              <a:spcAft>
+                <a:spcPts val="1200"/>
+              </a:spcAft>
+            </a:pPr>
+            <a:r>
+              <a:rPr sz="1600" b="0" i="0">
+                <a:solidFill>
+                  <a:srgbClr val="22D3EE"/>
+                </a:solidFill>
+                <a:latin typeface="Segoe UI Semibold"/>
+              </a:rPr>
+              <a:t>▸  </a:t>
+            </a:r>
+            <a:r>
+              <a:rPr sz="1600" b="0" i="0">
+                <a:solidFill>
+                  <a:srgbClr val="F5F6FA"/>
+                </a:solidFill>
+                <a:latin typeface="Segoe UI Semibold"/>
+              </a:rPr>
+              <a:t>6 marketing samples: </a:t>
+            </a:r>
+            <a:r>
+              <a:rPr sz="1600" b="0" i="0">
+                <a:solidFill>
+                  <a:srgbClr val="A3A9BC"/>
+                </a:solidFill>
+                <a:latin typeface="Segoe UI"/>
+              </a:rPr>
+              <a:t>leads, replies, SEO, social, commands, agents</a:t>
+            </a:r>
+          </a:p>
+          <a:p>
+            <a:pPr algn="l">
+              <a:lnSpc>
+                <a:spcPct val="105000"/>
+              </a:lnSpc>
+              <a:spcAft>
+                <a:spcPts val="1200"/>
+              </a:spcAft>
+            </a:pPr>
+            <a:r>
+              <a:rPr sz="1600" b="0" i="0">
+                <a:solidFill>
+                  <a:srgbClr val="22D3EE"/>
+                </a:solidFill>
+                <a:latin typeface="Segoe UI Semibold"/>
+              </a:rPr>
+              <a:t>▸  </a:t>
+            </a:r>
+            <a:r>
+              <a:rPr sz="1600" b="0" i="0">
+                <a:solidFill>
+                  <a:srgbClr val="F5F6FA"/>
+                </a:solidFill>
+                <a:latin typeface="Segoe UI Semibold"/>
+              </a:rPr>
+              <a:t>3 UI demos, </a:t>
+            </a:r>
+            <a:r>
+              <a:rPr sz="1600" b="0" i="0">
+                <a:solidFill>
+                  <a:srgbClr val="A3A9BC"/>
+                </a:solidFill>
+                <a:latin typeface="Segoe UI"/>
+              </a:rPr>
+              <a:t>one per primitive (next slide)</a:t>
+            </a:r>
+          </a:p>
+          <a:p>
+            <a:pPr algn="l">
+              <a:lnSpc>
+                <a:spcPct val="105000"/>
+              </a:lnSpc>
+              <a:spcAft>
+                <a:spcPts val="1200"/>
+              </a:spcAft>
+            </a:pPr>
+            <a:r>
+              <a:rPr sz="1600" b="0" i="0">
+                <a:solidFill>
+                  <a:srgbClr val="22D3EE"/>
+                </a:solidFill>
+                <a:latin typeface="Segoe UI Semibold"/>
+              </a:rPr>
+              <a:t>▸  </a:t>
+            </a:r>
+            <a:r>
+              <a:rPr sz="1600" b="0" i="0">
+                <a:solidFill>
+                  <a:srgbClr val="F5F6FA"/>
+                </a:solidFill>
+                <a:latin typeface="Segoe UI Semibold"/>
+              </a:rPr>
+              <a:t>Local Laya or the Jev API: </a:t>
+            </a:r>
+            <a:r>
+              <a:rPr sz="1600" b="0" i="0">
+                <a:solidFill>
+                  <a:srgbClr val="A3A9BC"/>
+                </a:solidFill>
+                <a:latin typeface="Segoe UI"/>
+              </a:rPr>
+              <a:t>one env variable</a:t>
+            </a:r>
+          </a:p>
+        </p:txBody>
+      </p:sp>
+      <p:sp>
+        <p:nvSpPr>
+          <p:cNvPr id="6" name="TextBox 5"/>
+          <p:cNvSpPr txBox="1"/>
+          <p:nvPr/>
+        </p:nvSpPr>
+        <p:spPr>
+          <a:xfrm>
+            <a:off x="457200" y="4069080"/>
+            <a:ext cx="6400800" cy="365760"/>
           </a:xfrm>
           <a:prstGeom prst="rect">
             <a:avLst/>
@@ -11203,1545 +8519,154 @@
               </a:spcAft>
             </a:pPr>
             <a:r>
-              <a:rPr sz="1300" b="0" i="0">
+              <a:rPr sz="1600" b="0" i="0">
+                <a:solidFill>
+                  <a:srgbClr val="34D399"/>
+                </a:solidFill>
+                <a:latin typeface="Segoe UI Semibold"/>
+              </a:rPr>
+              <a:t>What we learned</a:t>
+            </a:r>
+          </a:p>
+        </p:txBody>
+      </p:sp>
+      <p:sp>
+        <p:nvSpPr>
+          <p:cNvPr id="7" name="TextBox 6"/>
+          <p:cNvSpPr txBox="1"/>
+          <p:nvPr/>
+        </p:nvSpPr>
+        <p:spPr>
+          <a:xfrm>
+            <a:off x="457200" y="4480560"/>
+            <a:ext cx="6400800" cy="1554480"/>
+          </a:xfrm>
+          <a:prstGeom prst="rect">
+            <a:avLst/>
+          </a:prstGeom>
+          <a:noFill/>
+        </p:spPr>
+        <p:txBody>
+          <a:bodyPr wrap="square" anchor="t" lIns="36576" rIns="36576" tIns="36576" bIns="36576">
+            <a:spAutoFit/>
+          </a:bodyPr>
+          <a:lstStyle/>
+          <a:p>
+            <a:pPr algn="l">
+              <a:lnSpc>
+                <a:spcPct val="105000"/>
+              </a:lnSpc>
+              <a:spcAft>
+                <a:spcPts val="800"/>
+              </a:spcAft>
+            </a:pPr>
+            <a:r>
+              <a:rPr sz="1500" b="0" i="0">
+                <a:solidFill>
+                  <a:srgbClr val="34D399"/>
+                </a:solidFill>
+                <a:latin typeface="Segoe UI Semibold"/>
+              </a:rPr>
+              <a:t>▸  </a:t>
+            </a:r>
+            <a:r>
+              <a:rPr sz="1500" b="0" i="0">
+                <a:solidFill>
+                  <a:srgbClr val="F5F6FA"/>
+                </a:solidFill>
+                <a:latin typeface="Segoe UI Semibold"/>
+              </a:rPr>
+              <a:t>Ask small, atomic questions</a:t>
+            </a:r>
+            <a:r>
+              <a:rPr sz="1500" b="0" i="0">
                 <a:solidFill>
                   <a:srgbClr val="A3A9BC"/>
                 </a:solidFill>
                 <a:latin typeface="Segoe UI"/>
               </a:rPr>
-              <a:t>Code:  </a:t>
-            </a:r>
-            <a:r>
-              <a:rPr sz="1300" b="0" i="0" u="sng">
-                <a:solidFill>
-                  <a:srgbClr val="22D3EE"/>
+              <a:t/>
+            </a:r>
+          </a:p>
+          <a:p>
+            <a:pPr algn="l">
+              <a:lnSpc>
+                <a:spcPct val="105000"/>
+              </a:lnSpc>
+              <a:spcAft>
+                <a:spcPts val="800"/>
+              </a:spcAft>
+            </a:pPr>
+            <a:r>
+              <a:rPr sz="1500" b="0" i="0">
+                <a:solidFill>
+                  <a:srgbClr val="34D399"/>
                 </a:solidFill>
                 <a:latin typeface="Segoe UI Semibold"/>
               </a:rPr>
-              <a:t>github.com/stvonolf/jev-samples</a:t>
-            </a:r>
-          </a:p>
-        </p:txBody>
-      </p:sp>
-      <p:graphicFrame>
-        <p:nvGraphicFramePr>
-          <p:cNvPr id="6" name="Table 5"/>
-          <p:cNvGraphicFramePr>
-            <a:graphicFrameLocks noGrp="1"/>
-          </p:cNvGraphicFramePr>
-          <p:nvPr/>
-        </p:nvGraphicFramePr>
-        <p:xfrm>
-          <a:off x="457200" y="1600200"/>
-          <a:ext cx="7040880" cy="3218688"/>
-        </p:xfrm>
-        <a:graphic>
-          <a:graphicData uri="http://schemas.openxmlformats.org/drawingml/2006/table">
-            <a:tbl>
-              <a:tblPr firstRow="1">
-                <a:tableStyleId>{2D5ABB26-0587-4C30-8999-92F81FD0307C}</a:tableStyleId>
-              </a:tblPr>
-              <a:tblGrid>
-                <a:gridCol w="384048"/>
-                <a:gridCol w="1691640"/>
-                <a:gridCol w="1554480"/>
-                <a:gridCol w="3410712"/>
-              </a:tblGrid>
-              <a:tr h="402336">
-                <a:tc>
-                  <a:txBody>
-                    <a:bodyPr wrap="square"/>
-                    <a:lstStyle/>
-                    <a:p>
-                      <a:r>
-                        <a:rPr sz="950" b="0" i="0">
-                          <a:solidFill>
-                            <a:srgbClr val="A3A9BC"/>
-                          </a:solidFill>
-                          <a:latin typeface="Segoe UI Semibold"/>
-                        </a:rPr>
-                        <a:t>#</a:t>
-                      </a:r>
-                    </a:p>
-                  </a:txBody>
-                  <a:tcPr marL="73152" marR="73152" marT="27432" marB="27432" anchor="ctr">
-                    <a:lnL w="9525" cap="flat" cmpd="sng" algn="ctr">
-                      <a:solidFill>
-                        <a:srgbClr val="33384A"/>
-                      </a:solidFill>
-                      <a:prstDash val="solid"/>
-                    </a:lnL>
-                    <a:lnR w="9525" cap="flat" cmpd="sng" algn="ctr">
-                      <a:solidFill>
-                        <a:srgbClr val="33384A"/>
-                      </a:solidFill>
-                      <a:prstDash val="solid"/>
-                    </a:lnR>
-                    <a:lnT w="9525" cap="flat" cmpd="sng" algn="ctr">
-                      <a:solidFill>
-                        <a:srgbClr val="33384A"/>
-                      </a:solidFill>
-                      <a:prstDash val="solid"/>
-                    </a:lnT>
-                    <a:lnB w="9525" cap="flat" cmpd="sng" algn="ctr">
-                      <a:solidFill>
-                        <a:srgbClr val="33384A"/>
-                      </a:solidFill>
-                      <a:prstDash val="solid"/>
-                    </a:lnB>
-                    <a:solidFill>
-                      <a:srgbClr val="242836"/>
-                    </a:solidFill>
-                  </a:tcPr>
-                </a:tc>
-                <a:tc>
-                  <a:txBody>
-                    <a:bodyPr wrap="square"/>
-                    <a:lstStyle/>
-                    <a:p>
-                      <a:r>
-                        <a:rPr sz="950" b="0" i="0">
-                          <a:solidFill>
-                            <a:srgbClr val="A3A9BC"/>
-                          </a:solidFill>
-                          <a:latin typeface="Segoe UI Semibold"/>
-                        </a:rPr>
-                        <a:t>Sample</a:t>
-                      </a:r>
-                    </a:p>
-                  </a:txBody>
-                  <a:tcPr marL="73152" marR="73152" marT="27432" marB="27432" anchor="ctr">
-                    <a:lnL w="9525" cap="flat" cmpd="sng" algn="ctr">
-                      <a:solidFill>
-                        <a:srgbClr val="33384A"/>
-                      </a:solidFill>
-                      <a:prstDash val="solid"/>
-                    </a:lnL>
-                    <a:lnR w="9525" cap="flat" cmpd="sng" algn="ctr">
-                      <a:solidFill>
-                        <a:srgbClr val="33384A"/>
-                      </a:solidFill>
-                      <a:prstDash val="solid"/>
-                    </a:lnR>
-                    <a:lnT w="9525" cap="flat" cmpd="sng" algn="ctr">
-                      <a:solidFill>
-                        <a:srgbClr val="33384A"/>
-                      </a:solidFill>
-                      <a:prstDash val="solid"/>
-                    </a:lnT>
-                    <a:lnB w="9525" cap="flat" cmpd="sng" algn="ctr">
-                      <a:solidFill>
-                        <a:srgbClr val="33384A"/>
-                      </a:solidFill>
-                      <a:prstDash val="solid"/>
-                    </a:lnB>
-                    <a:solidFill>
-                      <a:srgbClr val="242836"/>
-                    </a:solidFill>
-                  </a:tcPr>
-                </a:tc>
-                <a:tc>
-                  <a:txBody>
-                    <a:bodyPr wrap="square"/>
-                    <a:lstStyle/>
-                    <a:p>
-                      <a:r>
-                        <a:rPr sz="950" b="0" i="0">
-                          <a:solidFill>
-                            <a:srgbClr val="A3A9BC"/>
-                          </a:solidFill>
-                          <a:latin typeface="Segoe UI Semibold"/>
-                        </a:rPr>
-                        <a:t>Primitives</a:t>
-                      </a:r>
-                    </a:p>
-                  </a:txBody>
-                  <a:tcPr marL="73152" marR="73152" marT="27432" marB="27432" anchor="ctr">
-                    <a:lnL w="9525" cap="flat" cmpd="sng" algn="ctr">
-                      <a:solidFill>
-                        <a:srgbClr val="33384A"/>
-                      </a:solidFill>
-                      <a:prstDash val="solid"/>
-                    </a:lnL>
-                    <a:lnR w="9525" cap="flat" cmpd="sng" algn="ctr">
-                      <a:solidFill>
-                        <a:srgbClr val="33384A"/>
-                      </a:solidFill>
-                      <a:prstDash val="solid"/>
-                    </a:lnR>
-                    <a:lnT w="9525" cap="flat" cmpd="sng" algn="ctr">
-                      <a:solidFill>
-                        <a:srgbClr val="33384A"/>
-                      </a:solidFill>
-                      <a:prstDash val="solid"/>
-                    </a:lnT>
-                    <a:lnB w="9525" cap="flat" cmpd="sng" algn="ctr">
-                      <a:solidFill>
-                        <a:srgbClr val="33384A"/>
-                      </a:solidFill>
-                      <a:prstDash val="solid"/>
-                    </a:lnB>
-                    <a:solidFill>
-                      <a:srgbClr val="242836"/>
-                    </a:solidFill>
-                  </a:tcPr>
-                </a:tc>
-                <a:tc>
-                  <a:txBody>
-                    <a:bodyPr wrap="square"/>
-                    <a:lstStyle/>
-                    <a:p>
-                      <a:r>
-                        <a:rPr sz="950" b="0" i="0">
-                          <a:solidFill>
-                            <a:srgbClr val="A3A9BC"/>
-                          </a:solidFill>
-                          <a:latin typeface="Segoe UI Semibold"/>
-                        </a:rPr>
-                        <a:t>What happened on our laptop</a:t>
-                      </a:r>
-                    </a:p>
-                  </a:txBody>
-                  <a:tcPr marL="73152" marR="73152" marT="27432" marB="27432" anchor="ctr">
-                    <a:lnL w="9525" cap="flat" cmpd="sng" algn="ctr">
-                      <a:solidFill>
-                        <a:srgbClr val="33384A"/>
-                      </a:solidFill>
-                      <a:prstDash val="solid"/>
-                    </a:lnL>
-                    <a:lnR w="9525" cap="flat" cmpd="sng" algn="ctr">
-                      <a:solidFill>
-                        <a:srgbClr val="33384A"/>
-                      </a:solidFill>
-                      <a:prstDash val="solid"/>
-                    </a:lnR>
-                    <a:lnT w="9525" cap="flat" cmpd="sng" algn="ctr">
-                      <a:solidFill>
-                        <a:srgbClr val="33384A"/>
-                      </a:solidFill>
-                      <a:prstDash val="solid"/>
-                    </a:lnT>
-                    <a:lnB w="9525" cap="flat" cmpd="sng" algn="ctr">
-                      <a:solidFill>
-                        <a:srgbClr val="33384A"/>
-                      </a:solidFill>
-                      <a:prstDash val="solid"/>
-                    </a:lnB>
-                    <a:solidFill>
-                      <a:srgbClr val="242836"/>
-                    </a:solidFill>
-                  </a:tcPr>
-                </a:tc>
-              </a:tr>
-              <a:tr h="402336">
-                <a:tc>
-                  <a:txBody>
-                    <a:bodyPr wrap="square"/>
-                    <a:lstStyle/>
-                    <a:p>
-                      <a:r>
-                        <a:rPr sz="1050" b="0" i="0">
-                          <a:solidFill>
-                            <a:srgbClr val="A3A9BC"/>
-                          </a:solidFill>
-                          <a:latin typeface="Segoe UI Semibold"/>
-                        </a:rPr>
-                        <a:t>01</a:t>
-                      </a:r>
-                    </a:p>
-                  </a:txBody>
-                  <a:tcPr marL="73152" marR="73152" marT="27432" marB="27432" anchor="ctr">
-                    <a:lnL w="9525" cap="flat" cmpd="sng" algn="ctr">
-                      <a:solidFill>
-                        <a:srgbClr val="33384A"/>
-                      </a:solidFill>
-                      <a:prstDash val="solid"/>
-                    </a:lnL>
-                    <a:lnR w="9525" cap="flat" cmpd="sng" algn="ctr">
-                      <a:solidFill>
-                        <a:srgbClr val="33384A"/>
-                      </a:solidFill>
-                      <a:prstDash val="solid"/>
-                    </a:lnR>
-                    <a:lnT w="9525" cap="flat" cmpd="sng" algn="ctr">
-                      <a:solidFill>
-                        <a:srgbClr val="33384A"/>
-                      </a:solidFill>
-                      <a:prstDash val="solid"/>
-                    </a:lnT>
-                    <a:lnB w="9525" cap="flat" cmpd="sng" algn="ctr">
-                      <a:solidFill>
-                        <a:srgbClr val="33384A"/>
-                      </a:solidFill>
-                      <a:prstDash val="solid"/>
-                    </a:lnB>
-                    <a:solidFill>
-                      <a:srgbClr val="1A1D27"/>
-                    </a:solidFill>
-                  </a:tcPr>
-                </a:tc>
-                <a:tc>
-                  <a:txBody>
-                    <a:bodyPr wrap="square"/>
-                    <a:lstStyle/>
-                    <a:p>
-                      <a:r>
-                        <a:rPr sz="1050" b="0" i="0">
-                          <a:solidFill>
-                            <a:srgbClr val="F5F6FA"/>
-                          </a:solidFill>
-                          <a:latin typeface="Segoe UI Semibold"/>
-                        </a:rPr>
-                        <a:t>Lead scoring</a:t>
-                      </a:r>
-                    </a:p>
-                  </a:txBody>
-                  <a:tcPr marL="73152" marR="73152" marT="27432" marB="27432" anchor="ctr">
-                    <a:lnL w="9525" cap="flat" cmpd="sng" algn="ctr">
-                      <a:solidFill>
-                        <a:srgbClr val="33384A"/>
-                      </a:solidFill>
-                      <a:prstDash val="solid"/>
-                    </a:lnL>
-                    <a:lnR w="9525" cap="flat" cmpd="sng" algn="ctr">
-                      <a:solidFill>
-                        <a:srgbClr val="33384A"/>
-                      </a:solidFill>
-                      <a:prstDash val="solid"/>
-                    </a:lnR>
-                    <a:lnT w="9525" cap="flat" cmpd="sng" algn="ctr">
-                      <a:solidFill>
-                        <a:srgbClr val="33384A"/>
-                      </a:solidFill>
-                      <a:prstDash val="solid"/>
-                    </a:lnT>
-                    <a:lnB w="9525" cap="flat" cmpd="sng" algn="ctr">
-                      <a:solidFill>
-                        <a:srgbClr val="33384A"/>
-                      </a:solidFill>
-                      <a:prstDash val="solid"/>
-                    </a:lnB>
-                    <a:solidFill>
-                      <a:srgbClr val="1A1D27"/>
-                    </a:solidFill>
-                  </a:tcPr>
-                </a:tc>
-                <a:tc>
-                  <a:txBody>
-                    <a:bodyPr wrap="square"/>
-                    <a:lstStyle/>
-                    <a:p>
-                      <a:r>
-                        <a:rPr sz="1050" b="0" i="0">
-                          <a:solidFill>
-                            <a:srgbClr val="E040FB"/>
-                          </a:solidFill>
-                          <a:latin typeface="Segoe UI Semibold"/>
-                        </a:rPr>
-                        <a:t>Choice + Score + Noul</a:t>
-                      </a:r>
-                    </a:p>
-                  </a:txBody>
-                  <a:tcPr marL="73152" marR="73152" marT="27432" marB="27432" anchor="ctr">
-                    <a:lnL w="9525" cap="flat" cmpd="sng" algn="ctr">
-                      <a:solidFill>
-                        <a:srgbClr val="33384A"/>
-                      </a:solidFill>
-                      <a:prstDash val="solid"/>
-                    </a:lnL>
-                    <a:lnR w="9525" cap="flat" cmpd="sng" algn="ctr">
-                      <a:solidFill>
-                        <a:srgbClr val="33384A"/>
-                      </a:solidFill>
-                      <a:prstDash val="solid"/>
-                    </a:lnR>
-                    <a:lnT w="9525" cap="flat" cmpd="sng" algn="ctr">
-                      <a:solidFill>
-                        <a:srgbClr val="33384A"/>
-                      </a:solidFill>
-                      <a:prstDash val="solid"/>
-                    </a:lnT>
-                    <a:lnB w="9525" cap="flat" cmpd="sng" algn="ctr">
-                      <a:solidFill>
-                        <a:srgbClr val="33384A"/>
-                      </a:solidFill>
-                      <a:prstDash val="solid"/>
-                    </a:lnB>
-                    <a:solidFill>
-                      <a:srgbClr val="1A1D27"/>
-                    </a:solidFill>
-                  </a:tcPr>
-                </a:tc>
-                <a:tc>
-                  <a:txBody>
-                    <a:bodyPr wrap="square"/>
-                    <a:lstStyle/>
-                    <a:p>
-                      <a:r>
-                        <a:rPr sz="1050" b="0" i="0">
-                          <a:solidFill>
-                            <a:srgbClr val="A3A9BC"/>
-                          </a:solidFill>
-                          <a:latin typeface="Segoe UI"/>
-                        </a:rPr>
-                        <a:t>VP with budget → 86/100, enterprise AE; student &amp; agency dropped; possible competitor → human check</a:t>
-                      </a:r>
-                    </a:p>
-                  </a:txBody>
-                  <a:tcPr marL="73152" marR="73152" marT="27432" marB="27432" anchor="ctr">
-                    <a:lnL w="9525" cap="flat" cmpd="sng" algn="ctr">
-                      <a:solidFill>
-                        <a:srgbClr val="33384A"/>
-                      </a:solidFill>
-                      <a:prstDash val="solid"/>
-                    </a:lnL>
-                    <a:lnR w="9525" cap="flat" cmpd="sng" algn="ctr">
-                      <a:solidFill>
-                        <a:srgbClr val="33384A"/>
-                      </a:solidFill>
-                      <a:prstDash val="solid"/>
-                    </a:lnR>
-                    <a:lnT w="9525" cap="flat" cmpd="sng" algn="ctr">
-                      <a:solidFill>
-                        <a:srgbClr val="33384A"/>
-                      </a:solidFill>
-                      <a:prstDash val="solid"/>
-                    </a:lnT>
-                    <a:lnB w="9525" cap="flat" cmpd="sng" algn="ctr">
-                      <a:solidFill>
-                        <a:srgbClr val="33384A"/>
-                      </a:solidFill>
-                      <a:prstDash val="solid"/>
-                    </a:lnB>
-                    <a:solidFill>
-                      <a:srgbClr val="1A1D27"/>
-                    </a:solidFill>
-                  </a:tcPr>
-                </a:tc>
-              </a:tr>
-              <a:tr h="402336">
-                <a:tc>
-                  <a:txBody>
-                    <a:bodyPr wrap="square"/>
-                    <a:lstStyle/>
-                    <a:p>
-                      <a:r>
-                        <a:rPr sz="1050" b="0" i="0">
-                          <a:solidFill>
-                            <a:srgbClr val="A3A9BC"/>
-                          </a:solidFill>
-                          <a:latin typeface="Segoe UI Semibold"/>
-                        </a:rPr>
-                        <a:t>02</a:t>
-                      </a:r>
-                    </a:p>
-                  </a:txBody>
-                  <a:tcPr marL="73152" marR="73152" marT="27432" marB="27432" anchor="ctr">
-                    <a:lnL w="9525" cap="flat" cmpd="sng" algn="ctr">
-                      <a:solidFill>
-                        <a:srgbClr val="33384A"/>
-                      </a:solidFill>
-                      <a:prstDash val="solid"/>
-                    </a:lnL>
-                    <a:lnR w="9525" cap="flat" cmpd="sng" algn="ctr">
-                      <a:solidFill>
-                        <a:srgbClr val="33384A"/>
-                      </a:solidFill>
-                      <a:prstDash val="solid"/>
-                    </a:lnR>
-                    <a:lnT w="9525" cap="flat" cmpd="sng" algn="ctr">
-                      <a:solidFill>
-                        <a:srgbClr val="33384A"/>
-                      </a:solidFill>
-                      <a:prstDash val="solid"/>
-                    </a:lnT>
-                    <a:lnB w="9525" cap="flat" cmpd="sng" algn="ctr">
-                      <a:solidFill>
-                        <a:srgbClr val="33384A"/>
-                      </a:solidFill>
-                      <a:prstDash val="solid"/>
-                    </a:lnB>
-                    <a:solidFill>
-                      <a:srgbClr val="0F1117"/>
-                    </a:solidFill>
-                  </a:tcPr>
-                </a:tc>
-                <a:tc>
-                  <a:txBody>
-                    <a:bodyPr wrap="square"/>
-                    <a:lstStyle/>
-                    <a:p>
-                      <a:r>
-                        <a:rPr sz="1050" b="0" i="0">
-                          <a:solidFill>
-                            <a:srgbClr val="F5F6FA"/>
-                          </a:solidFill>
-                          <a:latin typeface="Segoe UI Semibold"/>
-                        </a:rPr>
-                        <a:t>Reply triage (EN/DE/CZ)</a:t>
-                      </a:r>
-                    </a:p>
-                  </a:txBody>
-                  <a:tcPr marL="73152" marR="73152" marT="27432" marB="27432" anchor="ctr">
-                    <a:lnL w="9525" cap="flat" cmpd="sng" algn="ctr">
-                      <a:solidFill>
-                        <a:srgbClr val="33384A"/>
-                      </a:solidFill>
-                      <a:prstDash val="solid"/>
-                    </a:lnL>
-                    <a:lnR w="9525" cap="flat" cmpd="sng" algn="ctr">
-                      <a:solidFill>
-                        <a:srgbClr val="33384A"/>
-                      </a:solidFill>
-                      <a:prstDash val="solid"/>
-                    </a:lnR>
-                    <a:lnT w="9525" cap="flat" cmpd="sng" algn="ctr">
-                      <a:solidFill>
-                        <a:srgbClr val="33384A"/>
-                      </a:solidFill>
-                      <a:prstDash val="solid"/>
-                    </a:lnT>
-                    <a:lnB w="9525" cap="flat" cmpd="sng" algn="ctr">
-                      <a:solidFill>
-                        <a:srgbClr val="33384A"/>
-                      </a:solidFill>
-                      <a:prstDash val="solid"/>
-                    </a:lnB>
-                    <a:solidFill>
-                      <a:srgbClr val="0F1117"/>
-                    </a:solidFill>
-                  </a:tcPr>
-                </a:tc>
-                <a:tc>
-                  <a:txBody>
-                    <a:bodyPr wrap="square"/>
-                    <a:lstStyle/>
-                    <a:p>
-                      <a:r>
-                        <a:rPr sz="1050" b="0" i="0">
-                          <a:solidFill>
-                            <a:srgbClr val="E040FB"/>
-                          </a:solidFill>
-                          <a:latin typeface="Segoe UI Semibold"/>
-                        </a:rPr>
-                        <a:t>Choice + Noul</a:t>
-                      </a:r>
-                    </a:p>
-                  </a:txBody>
-                  <a:tcPr marL="73152" marR="73152" marT="27432" marB="27432" anchor="ctr">
-                    <a:lnL w="9525" cap="flat" cmpd="sng" algn="ctr">
-                      <a:solidFill>
-                        <a:srgbClr val="33384A"/>
-                      </a:solidFill>
-                      <a:prstDash val="solid"/>
-                    </a:lnL>
-                    <a:lnR w="9525" cap="flat" cmpd="sng" algn="ctr">
-                      <a:solidFill>
-                        <a:srgbClr val="33384A"/>
-                      </a:solidFill>
-                      <a:prstDash val="solid"/>
-                    </a:lnR>
-                    <a:lnT w="9525" cap="flat" cmpd="sng" algn="ctr">
-                      <a:solidFill>
-                        <a:srgbClr val="33384A"/>
-                      </a:solidFill>
-                      <a:prstDash val="solid"/>
-                    </a:lnT>
-                    <a:lnB w="9525" cap="flat" cmpd="sng" algn="ctr">
-                      <a:solidFill>
-                        <a:srgbClr val="33384A"/>
-                      </a:solidFill>
-                      <a:prstDash val="solid"/>
-                    </a:lnB>
-                    <a:solidFill>
-                      <a:srgbClr val="0F1117"/>
-                    </a:solidFill>
-                  </a:tcPr>
-                </a:tc>
-                <a:tc>
-                  <a:txBody>
-                    <a:bodyPr wrap="square"/>
-                    <a:lstStyle/>
-                    <a:p>
-                      <a:r>
-                        <a:rPr sz="1050" b="0" i="0">
-                          <a:solidFill>
-                            <a:srgbClr val="A3A9BC"/>
-                          </a:solidFill>
-                          <a:latin typeface="Segoe UI"/>
-                        </a:rPr>
-                        <a:t>10/10 correct labels; 7 automated, 1 review, 2 escalated; opt-outs always suppressed</a:t>
-                      </a:r>
-                    </a:p>
-                  </a:txBody>
-                  <a:tcPr marL="73152" marR="73152" marT="27432" marB="27432" anchor="ctr">
-                    <a:lnL w="9525" cap="flat" cmpd="sng" algn="ctr">
-                      <a:solidFill>
-                        <a:srgbClr val="33384A"/>
-                      </a:solidFill>
-                      <a:prstDash val="solid"/>
-                    </a:lnL>
-                    <a:lnR w="9525" cap="flat" cmpd="sng" algn="ctr">
-                      <a:solidFill>
-                        <a:srgbClr val="33384A"/>
-                      </a:solidFill>
-                      <a:prstDash val="solid"/>
-                    </a:lnR>
-                    <a:lnT w="9525" cap="flat" cmpd="sng" algn="ctr">
-                      <a:solidFill>
-                        <a:srgbClr val="33384A"/>
-                      </a:solidFill>
-                      <a:prstDash val="solid"/>
-                    </a:lnT>
-                    <a:lnB w="9525" cap="flat" cmpd="sng" algn="ctr">
-                      <a:solidFill>
-                        <a:srgbClr val="33384A"/>
-                      </a:solidFill>
-                      <a:prstDash val="solid"/>
-                    </a:lnB>
-                    <a:solidFill>
-                      <a:srgbClr val="0F1117"/>
-                    </a:solidFill>
-                  </a:tcPr>
-                </a:tc>
-              </a:tr>
-              <a:tr h="402336">
-                <a:tc>
-                  <a:txBody>
-                    <a:bodyPr wrap="square"/>
-                    <a:lstStyle/>
-                    <a:p>
-                      <a:r>
-                        <a:rPr sz="1050" b="0" i="0">
-                          <a:solidFill>
-                            <a:srgbClr val="A3A9BC"/>
-                          </a:solidFill>
-                          <a:latin typeface="Segoe UI Semibold"/>
-                        </a:rPr>
-                        <a:t>03</a:t>
-                      </a:r>
-                    </a:p>
-                  </a:txBody>
-                  <a:tcPr marL="73152" marR="73152" marT="27432" marB="27432" anchor="ctr">
-                    <a:lnL w="9525" cap="flat" cmpd="sng" algn="ctr">
-                      <a:solidFill>
-                        <a:srgbClr val="33384A"/>
-                      </a:solidFill>
-                      <a:prstDash val="solid"/>
-                    </a:lnL>
-                    <a:lnR w="9525" cap="flat" cmpd="sng" algn="ctr">
-                      <a:solidFill>
-                        <a:srgbClr val="33384A"/>
-                      </a:solidFill>
-                      <a:prstDash val="solid"/>
-                    </a:lnR>
-                    <a:lnT w="9525" cap="flat" cmpd="sng" algn="ctr">
-                      <a:solidFill>
-                        <a:srgbClr val="33384A"/>
-                      </a:solidFill>
-                      <a:prstDash val="solid"/>
-                    </a:lnT>
-                    <a:lnB w="9525" cap="flat" cmpd="sng" algn="ctr">
-                      <a:solidFill>
-                        <a:srgbClr val="33384A"/>
-                      </a:solidFill>
-                      <a:prstDash val="solid"/>
-                    </a:lnB>
-                    <a:solidFill>
-                      <a:srgbClr val="1A1D27"/>
-                    </a:solidFill>
-                  </a:tcPr>
-                </a:tc>
-                <a:tc>
-                  <a:txBody>
-                    <a:bodyPr wrap="square"/>
-                    <a:lstStyle/>
-                    <a:p>
-                      <a:r>
-                        <a:rPr sz="1050" b="0" i="0">
-                          <a:solidFill>
-                            <a:srgbClr val="F5F6FA"/>
-                          </a:solidFill>
-                          <a:latin typeface="Segoe UI Semibold"/>
-                        </a:rPr>
-                        <a:t>SEO internal linking</a:t>
-                      </a:r>
-                    </a:p>
-                  </a:txBody>
-                  <a:tcPr marL="73152" marR="73152" marT="27432" marB="27432" anchor="ctr">
-                    <a:lnL w="9525" cap="flat" cmpd="sng" algn="ctr">
-                      <a:solidFill>
-                        <a:srgbClr val="33384A"/>
-                      </a:solidFill>
-                      <a:prstDash val="solid"/>
-                    </a:lnL>
-                    <a:lnR w="9525" cap="flat" cmpd="sng" algn="ctr">
-                      <a:solidFill>
-                        <a:srgbClr val="33384A"/>
-                      </a:solidFill>
-                      <a:prstDash val="solid"/>
-                    </a:lnR>
-                    <a:lnT w="9525" cap="flat" cmpd="sng" algn="ctr">
-                      <a:solidFill>
-                        <a:srgbClr val="33384A"/>
-                      </a:solidFill>
-                      <a:prstDash val="solid"/>
-                    </a:lnT>
-                    <a:lnB w="9525" cap="flat" cmpd="sng" algn="ctr">
-                      <a:solidFill>
-                        <a:srgbClr val="33384A"/>
-                      </a:solidFill>
-                      <a:prstDash val="solid"/>
-                    </a:lnB>
-                    <a:solidFill>
-                      <a:srgbClr val="1A1D27"/>
-                    </a:solidFill>
-                  </a:tcPr>
-                </a:tc>
-                <a:tc>
-                  <a:txBody>
-                    <a:bodyPr wrap="square"/>
-                    <a:lstStyle/>
-                    <a:p>
-                      <a:r>
-                        <a:rPr sz="1050" b="0" i="0">
-                          <a:solidFill>
-                            <a:srgbClr val="FBBF24"/>
-                          </a:solidFill>
-                          <a:latin typeface="Segoe UI Semibold"/>
-                        </a:rPr>
-                        <a:t>Noul + Choice</a:t>
-                      </a:r>
-                    </a:p>
-                  </a:txBody>
-                  <a:tcPr marL="73152" marR="73152" marT="27432" marB="27432" anchor="ctr">
-                    <a:lnL w="9525" cap="flat" cmpd="sng" algn="ctr">
-                      <a:solidFill>
-                        <a:srgbClr val="33384A"/>
-                      </a:solidFill>
-                      <a:prstDash val="solid"/>
-                    </a:lnL>
-                    <a:lnR w="9525" cap="flat" cmpd="sng" algn="ctr">
-                      <a:solidFill>
-                        <a:srgbClr val="33384A"/>
-                      </a:solidFill>
-                      <a:prstDash val="solid"/>
-                    </a:lnR>
-                    <a:lnT w="9525" cap="flat" cmpd="sng" algn="ctr">
-                      <a:solidFill>
-                        <a:srgbClr val="33384A"/>
-                      </a:solidFill>
-                      <a:prstDash val="solid"/>
-                    </a:lnT>
-                    <a:lnB w="9525" cap="flat" cmpd="sng" algn="ctr">
-                      <a:solidFill>
-                        <a:srgbClr val="33384A"/>
-                      </a:solidFill>
-                      <a:prstDash val="solid"/>
-                    </a:lnB>
-                    <a:solidFill>
-                      <a:srgbClr val="1A1D27"/>
-                    </a:solidFill>
-                  </a:tcPr>
-                </a:tc>
-                <a:tc>
-                  <a:txBody>
-                    <a:bodyPr wrap="square"/>
-                    <a:lstStyle/>
-                    <a:p>
-                      <a:r>
-                        <a:rPr sz="1050" b="0" i="0">
-                          <a:solidFill>
-                            <a:srgbClr val="A3A9BC"/>
-                          </a:solidFill>
-                          <a:latin typeface="Segoe UI"/>
-                        </a:rPr>
-                        <a:t>36 page pairs → 18 links + anchor texts; party page gets none</a:t>
-                      </a:r>
-                    </a:p>
-                  </a:txBody>
-                  <a:tcPr marL="73152" marR="73152" marT="27432" marB="27432" anchor="ctr">
-                    <a:lnL w="9525" cap="flat" cmpd="sng" algn="ctr">
-                      <a:solidFill>
-                        <a:srgbClr val="33384A"/>
-                      </a:solidFill>
-                      <a:prstDash val="solid"/>
-                    </a:lnL>
-                    <a:lnR w="9525" cap="flat" cmpd="sng" algn="ctr">
-                      <a:solidFill>
-                        <a:srgbClr val="33384A"/>
-                      </a:solidFill>
-                      <a:prstDash val="solid"/>
-                    </a:lnR>
-                    <a:lnT w="9525" cap="flat" cmpd="sng" algn="ctr">
-                      <a:solidFill>
-                        <a:srgbClr val="33384A"/>
-                      </a:solidFill>
-                      <a:prstDash val="solid"/>
-                    </a:lnT>
-                    <a:lnB w="9525" cap="flat" cmpd="sng" algn="ctr">
-                      <a:solidFill>
-                        <a:srgbClr val="33384A"/>
-                      </a:solidFill>
-                      <a:prstDash val="solid"/>
-                    </a:lnB>
-                    <a:solidFill>
-                      <a:srgbClr val="1A1D27"/>
-                    </a:solidFill>
-                  </a:tcPr>
-                </a:tc>
-              </a:tr>
-              <a:tr h="402336">
-                <a:tc>
-                  <a:txBody>
-                    <a:bodyPr wrap="square"/>
-                    <a:lstStyle/>
-                    <a:p>
-                      <a:r>
-                        <a:rPr sz="1050" b="0" i="0">
-                          <a:solidFill>
-                            <a:srgbClr val="A3A9BC"/>
-                          </a:solidFill>
-                          <a:latin typeface="Segoe UI Semibold"/>
-                        </a:rPr>
-                        <a:t>04</a:t>
-                      </a:r>
-                    </a:p>
-                  </a:txBody>
-                  <a:tcPr marL="73152" marR="73152" marT="27432" marB="27432" anchor="ctr">
-                    <a:lnL w="9525" cap="flat" cmpd="sng" algn="ctr">
-                      <a:solidFill>
-                        <a:srgbClr val="33384A"/>
-                      </a:solidFill>
-                      <a:prstDash val="solid"/>
-                    </a:lnL>
-                    <a:lnR w="9525" cap="flat" cmpd="sng" algn="ctr">
-                      <a:solidFill>
-                        <a:srgbClr val="33384A"/>
-                      </a:solidFill>
-                      <a:prstDash val="solid"/>
-                    </a:lnR>
-                    <a:lnT w="9525" cap="flat" cmpd="sng" algn="ctr">
-                      <a:solidFill>
-                        <a:srgbClr val="33384A"/>
-                      </a:solidFill>
-                      <a:prstDash val="solid"/>
-                    </a:lnT>
-                    <a:lnB w="9525" cap="flat" cmpd="sng" algn="ctr">
-                      <a:solidFill>
-                        <a:srgbClr val="33384A"/>
-                      </a:solidFill>
-                      <a:prstDash val="solid"/>
-                    </a:lnB>
-                    <a:solidFill>
-                      <a:srgbClr val="0F1117"/>
-                    </a:solidFill>
-                  </a:tcPr>
-                </a:tc>
-                <a:tc>
-                  <a:txBody>
-                    <a:bodyPr wrap="square"/>
-                    <a:lstStyle/>
-                    <a:p>
-                      <a:r>
-                        <a:rPr sz="1050" b="0" i="0">
-                          <a:solidFill>
-                            <a:srgbClr val="F5F6FA"/>
-                          </a:solidFill>
-                          <a:latin typeface="Segoe UI Semibold"/>
-                        </a:rPr>
-                        <a:t>Social feed monitor</a:t>
-                      </a:r>
-                    </a:p>
-                  </a:txBody>
-                  <a:tcPr marL="73152" marR="73152" marT="27432" marB="27432" anchor="ctr">
-                    <a:lnL w="9525" cap="flat" cmpd="sng" algn="ctr">
-                      <a:solidFill>
-                        <a:srgbClr val="33384A"/>
-                      </a:solidFill>
-                      <a:prstDash val="solid"/>
-                    </a:lnL>
-                    <a:lnR w="9525" cap="flat" cmpd="sng" algn="ctr">
-                      <a:solidFill>
-                        <a:srgbClr val="33384A"/>
-                      </a:solidFill>
-                      <a:prstDash val="solid"/>
-                    </a:lnR>
-                    <a:lnT w="9525" cap="flat" cmpd="sng" algn="ctr">
-                      <a:solidFill>
-                        <a:srgbClr val="33384A"/>
-                      </a:solidFill>
-                      <a:prstDash val="solid"/>
-                    </a:lnT>
-                    <a:lnB w="9525" cap="flat" cmpd="sng" algn="ctr">
-                      <a:solidFill>
-                        <a:srgbClr val="33384A"/>
-                      </a:solidFill>
-                      <a:prstDash val="solid"/>
-                    </a:lnB>
-                    <a:solidFill>
-                      <a:srgbClr val="0F1117"/>
-                    </a:solidFill>
-                  </a:tcPr>
-                </a:tc>
-                <a:tc>
-                  <a:txBody>
-                    <a:bodyPr wrap="square"/>
-                    <a:lstStyle/>
-                    <a:p>
-                      <a:r>
-                        <a:rPr sz="1050" b="0" i="0">
-                          <a:solidFill>
-                            <a:srgbClr val="FBBF24"/>
-                          </a:solidFill>
-                          <a:latin typeface="Segoe UI Semibold"/>
-                        </a:rPr>
-                        <a:t>Noul + Score + Choice</a:t>
-                      </a:r>
-                    </a:p>
-                  </a:txBody>
-                  <a:tcPr marL="73152" marR="73152" marT="27432" marB="27432" anchor="ctr">
-                    <a:lnL w="9525" cap="flat" cmpd="sng" algn="ctr">
-                      <a:solidFill>
-                        <a:srgbClr val="33384A"/>
-                      </a:solidFill>
-                      <a:prstDash val="solid"/>
-                    </a:lnL>
-                    <a:lnR w="9525" cap="flat" cmpd="sng" algn="ctr">
-                      <a:solidFill>
-                        <a:srgbClr val="33384A"/>
-                      </a:solidFill>
-                      <a:prstDash val="solid"/>
-                    </a:lnR>
-                    <a:lnT w="9525" cap="flat" cmpd="sng" algn="ctr">
-                      <a:solidFill>
-                        <a:srgbClr val="33384A"/>
-                      </a:solidFill>
-                      <a:prstDash val="solid"/>
-                    </a:lnT>
-                    <a:lnB w="9525" cap="flat" cmpd="sng" algn="ctr">
-                      <a:solidFill>
-                        <a:srgbClr val="33384A"/>
-                      </a:solidFill>
-                      <a:prstDash val="solid"/>
-                    </a:lnB>
-                    <a:solidFill>
-                      <a:srgbClr val="0F1117"/>
-                    </a:solidFill>
-                  </a:tcPr>
-                </a:tc>
-                <a:tc>
-                  <a:txBody>
-                    <a:bodyPr wrap="square"/>
-                    <a:lstStyle/>
-                    <a:p>
-                      <a:r>
-                        <a:rPr sz="1050" b="0" i="0">
-                          <a:solidFill>
-                            <a:srgbClr val="A3A9BC"/>
-                          </a:solidFill>
-                          <a:latin typeface="Segoe UI"/>
-                        </a:rPr>
-                        <a:t>3/3 slop posts hidden; complaint → support, cancellation → retention</a:t>
-                      </a:r>
-                    </a:p>
-                  </a:txBody>
-                  <a:tcPr marL="73152" marR="73152" marT="27432" marB="27432" anchor="ctr">
-                    <a:lnL w="9525" cap="flat" cmpd="sng" algn="ctr">
-                      <a:solidFill>
-                        <a:srgbClr val="33384A"/>
-                      </a:solidFill>
-                      <a:prstDash val="solid"/>
-                    </a:lnL>
-                    <a:lnR w="9525" cap="flat" cmpd="sng" algn="ctr">
-                      <a:solidFill>
-                        <a:srgbClr val="33384A"/>
-                      </a:solidFill>
-                      <a:prstDash val="solid"/>
-                    </a:lnR>
-                    <a:lnT w="9525" cap="flat" cmpd="sng" algn="ctr">
-                      <a:solidFill>
-                        <a:srgbClr val="33384A"/>
-                      </a:solidFill>
-                      <a:prstDash val="solid"/>
-                    </a:lnT>
-                    <a:lnB w="9525" cap="flat" cmpd="sng" algn="ctr">
-                      <a:solidFill>
-                        <a:srgbClr val="33384A"/>
-                      </a:solidFill>
-                      <a:prstDash val="solid"/>
-                    </a:lnB>
-                    <a:solidFill>
-                      <a:srgbClr val="0F1117"/>
-                    </a:solidFill>
-                  </a:tcPr>
-                </a:tc>
-              </a:tr>
-              <a:tr h="402336">
-                <a:tc>
-                  <a:txBody>
-                    <a:bodyPr wrap="square"/>
-                    <a:lstStyle/>
-                    <a:p>
-                      <a:r>
-                        <a:rPr sz="1050" b="0" i="0">
-                          <a:solidFill>
-                            <a:srgbClr val="A3A9BC"/>
-                          </a:solidFill>
-                          <a:latin typeface="Segoe UI Semibold"/>
-                        </a:rPr>
-                        <a:t>05</a:t>
-                      </a:r>
-                    </a:p>
-                  </a:txBody>
-                  <a:tcPr marL="73152" marR="73152" marT="27432" marB="27432" anchor="ctr">
-                    <a:lnL w="9525" cap="flat" cmpd="sng" algn="ctr">
-                      <a:solidFill>
-                        <a:srgbClr val="33384A"/>
-                      </a:solidFill>
-                      <a:prstDash val="solid"/>
-                    </a:lnL>
-                    <a:lnR w="9525" cap="flat" cmpd="sng" algn="ctr">
-                      <a:solidFill>
-                        <a:srgbClr val="33384A"/>
-                      </a:solidFill>
-                      <a:prstDash val="solid"/>
-                    </a:lnR>
-                    <a:lnT w="9525" cap="flat" cmpd="sng" algn="ctr">
-                      <a:solidFill>
-                        <a:srgbClr val="33384A"/>
-                      </a:solidFill>
-                      <a:prstDash val="solid"/>
-                    </a:lnT>
-                    <a:lnB w="9525" cap="flat" cmpd="sng" algn="ctr">
-                      <a:solidFill>
-                        <a:srgbClr val="33384A"/>
-                      </a:solidFill>
-                      <a:prstDash val="solid"/>
-                    </a:lnB>
-                    <a:solidFill>
-                      <a:srgbClr val="1A1D27"/>
-                    </a:solidFill>
-                  </a:tcPr>
-                </a:tc>
-                <a:tc>
-                  <a:txBody>
-                    <a:bodyPr wrap="square"/>
-                    <a:lstStyle/>
-                    <a:p>
-                      <a:r>
-                        <a:rPr sz="1050" b="0" i="0">
-                          <a:solidFill>
-                            <a:srgbClr val="F5F6FA"/>
-                          </a:solidFill>
-                          <a:latin typeface="Segoe UI Semibold"/>
-                        </a:rPr>
-                        <a:t>Command bar</a:t>
-                      </a:r>
-                    </a:p>
-                  </a:txBody>
-                  <a:tcPr marL="73152" marR="73152" marT="27432" marB="27432" anchor="ctr">
-                    <a:lnL w="9525" cap="flat" cmpd="sng" algn="ctr">
-                      <a:solidFill>
-                        <a:srgbClr val="33384A"/>
-                      </a:solidFill>
-                      <a:prstDash val="solid"/>
-                    </a:lnL>
-                    <a:lnR w="9525" cap="flat" cmpd="sng" algn="ctr">
-                      <a:solidFill>
-                        <a:srgbClr val="33384A"/>
-                      </a:solidFill>
-                      <a:prstDash val="solid"/>
-                    </a:lnR>
-                    <a:lnT w="9525" cap="flat" cmpd="sng" algn="ctr">
-                      <a:solidFill>
-                        <a:srgbClr val="33384A"/>
-                      </a:solidFill>
-                      <a:prstDash val="solid"/>
-                    </a:lnT>
-                    <a:lnB w="9525" cap="flat" cmpd="sng" algn="ctr">
-                      <a:solidFill>
-                        <a:srgbClr val="33384A"/>
-                      </a:solidFill>
-                      <a:prstDash val="solid"/>
-                    </a:lnB>
-                    <a:solidFill>
-                      <a:srgbClr val="1A1D27"/>
-                    </a:solidFill>
-                  </a:tcPr>
-                </a:tc>
-                <a:tc>
-                  <a:txBody>
-                    <a:bodyPr wrap="square"/>
-                    <a:lstStyle/>
-                    <a:p>
-                      <a:r>
-                        <a:rPr sz="1050" b="0" i="0">
-                          <a:solidFill>
-                            <a:srgbClr val="E040FB"/>
-                          </a:solidFill>
-                          <a:latin typeface="Segoe UI Semibold"/>
-                        </a:rPr>
-                        <a:t>Choice</a:t>
-                      </a:r>
-                    </a:p>
-                  </a:txBody>
-                  <a:tcPr marL="73152" marR="73152" marT="27432" marB="27432" anchor="ctr">
-                    <a:lnL w="9525" cap="flat" cmpd="sng" algn="ctr">
-                      <a:solidFill>
-                        <a:srgbClr val="33384A"/>
-                      </a:solidFill>
-                      <a:prstDash val="solid"/>
-                    </a:lnL>
-                    <a:lnR w="9525" cap="flat" cmpd="sng" algn="ctr">
-                      <a:solidFill>
-                        <a:srgbClr val="33384A"/>
-                      </a:solidFill>
-                      <a:prstDash val="solid"/>
-                    </a:lnR>
-                    <a:lnT w="9525" cap="flat" cmpd="sng" algn="ctr">
-                      <a:solidFill>
-                        <a:srgbClr val="33384A"/>
-                      </a:solidFill>
-                      <a:prstDash val="solid"/>
-                    </a:lnT>
-                    <a:lnB w="9525" cap="flat" cmpd="sng" algn="ctr">
-                      <a:solidFill>
-                        <a:srgbClr val="33384A"/>
-                      </a:solidFill>
-                      <a:prstDash val="solid"/>
-                    </a:lnB>
-                    <a:solidFill>
-                      <a:srgbClr val="1A1D27"/>
-                    </a:solidFill>
-                  </a:tcPr>
-                </a:tc>
-                <a:tc>
-                  <a:txBody>
-                    <a:bodyPr wrap="square"/>
-                    <a:lstStyle/>
-                    <a:p>
-                      <a:r>
-                        <a:rPr sz="1050" b="0" i="0">
-                          <a:solidFill>
-                            <a:srgbClr val="A3A9BC"/>
-                          </a:solidFill>
-                          <a:latin typeface="Segoe UI"/>
-                        </a:rPr>
-                        <a:t>“cut meta prospecting in half” → change_budget(…, 50%); vague → “did you mean…?”</a:t>
-                      </a:r>
-                    </a:p>
-                  </a:txBody>
-                  <a:tcPr marL="73152" marR="73152" marT="27432" marB="27432" anchor="ctr">
-                    <a:lnL w="9525" cap="flat" cmpd="sng" algn="ctr">
-                      <a:solidFill>
-                        <a:srgbClr val="33384A"/>
-                      </a:solidFill>
-                      <a:prstDash val="solid"/>
-                    </a:lnL>
-                    <a:lnR w="9525" cap="flat" cmpd="sng" algn="ctr">
-                      <a:solidFill>
-                        <a:srgbClr val="33384A"/>
-                      </a:solidFill>
-                      <a:prstDash val="solid"/>
-                    </a:lnR>
-                    <a:lnT w="9525" cap="flat" cmpd="sng" algn="ctr">
-                      <a:solidFill>
-                        <a:srgbClr val="33384A"/>
-                      </a:solidFill>
-                      <a:prstDash val="solid"/>
-                    </a:lnT>
-                    <a:lnB w="9525" cap="flat" cmpd="sng" algn="ctr">
-                      <a:solidFill>
-                        <a:srgbClr val="33384A"/>
-                      </a:solidFill>
-                      <a:prstDash val="solid"/>
-                    </a:lnB>
-                    <a:solidFill>
-                      <a:srgbClr val="1A1D27"/>
-                    </a:solidFill>
-                  </a:tcPr>
-                </a:tc>
-              </a:tr>
-              <a:tr h="402336">
-                <a:tc>
-                  <a:txBody>
-                    <a:bodyPr wrap="square"/>
-                    <a:lstStyle/>
-                    <a:p>
-                      <a:r>
-                        <a:rPr sz="1050" b="0" i="0">
-                          <a:solidFill>
-                            <a:srgbClr val="A3A9BC"/>
-                          </a:solidFill>
-                          <a:latin typeface="Segoe UI Semibold"/>
-                        </a:rPr>
-                        <a:t>06</a:t>
-                      </a:r>
-                    </a:p>
-                  </a:txBody>
-                  <a:tcPr marL="73152" marR="73152" marT="27432" marB="27432" anchor="ctr">
-                    <a:lnL w="9525" cap="flat" cmpd="sng" algn="ctr">
-                      <a:solidFill>
-                        <a:srgbClr val="33384A"/>
-                      </a:solidFill>
-                      <a:prstDash val="solid"/>
-                    </a:lnL>
-                    <a:lnR w="9525" cap="flat" cmpd="sng" algn="ctr">
-                      <a:solidFill>
-                        <a:srgbClr val="33384A"/>
-                      </a:solidFill>
-                      <a:prstDash val="solid"/>
-                    </a:lnR>
-                    <a:lnT w="9525" cap="flat" cmpd="sng" algn="ctr">
-                      <a:solidFill>
-                        <a:srgbClr val="33384A"/>
-                      </a:solidFill>
-                      <a:prstDash val="solid"/>
-                    </a:lnT>
-                    <a:lnB w="9525" cap="flat" cmpd="sng" algn="ctr">
-                      <a:solidFill>
-                        <a:srgbClr val="33384A"/>
-                      </a:solidFill>
-                      <a:prstDash val="solid"/>
-                    </a:lnB>
-                    <a:solidFill>
-                      <a:srgbClr val="0F1117"/>
-                    </a:solidFill>
-                  </a:tcPr>
-                </a:tc>
-                <a:tc>
-                  <a:txBody>
-                    <a:bodyPr wrap="square"/>
-                    <a:lstStyle/>
-                    <a:p>
-                      <a:r>
-                        <a:rPr sz="1050" b="0" i="0">
-                          <a:solidFill>
-                            <a:srgbClr val="F5F6FA"/>
-                          </a:solidFill>
-                          <a:latin typeface="Segoe UI Semibold"/>
-                        </a:rPr>
-                        <a:t>Agent harness</a:t>
-                      </a:r>
-                    </a:p>
-                  </a:txBody>
-                  <a:tcPr marL="73152" marR="73152" marT="27432" marB="27432" anchor="ctr">
-                    <a:lnL w="9525" cap="flat" cmpd="sng" algn="ctr">
-                      <a:solidFill>
-                        <a:srgbClr val="33384A"/>
-                      </a:solidFill>
-                      <a:prstDash val="solid"/>
-                    </a:lnL>
-                    <a:lnR w="9525" cap="flat" cmpd="sng" algn="ctr">
-                      <a:solidFill>
-                        <a:srgbClr val="33384A"/>
-                      </a:solidFill>
-                      <a:prstDash val="solid"/>
-                    </a:lnR>
-                    <a:lnT w="9525" cap="flat" cmpd="sng" algn="ctr">
-                      <a:solidFill>
-                        <a:srgbClr val="33384A"/>
-                      </a:solidFill>
-                      <a:prstDash val="solid"/>
-                    </a:lnT>
-                    <a:lnB w="9525" cap="flat" cmpd="sng" algn="ctr">
-                      <a:solidFill>
-                        <a:srgbClr val="33384A"/>
-                      </a:solidFill>
-                      <a:prstDash val="solid"/>
-                    </a:lnB>
-                    <a:solidFill>
-                      <a:srgbClr val="0F1117"/>
-                    </a:solidFill>
-                  </a:tcPr>
-                </a:tc>
-                <a:tc>
-                  <a:txBody>
-                    <a:bodyPr wrap="square"/>
-                    <a:lstStyle/>
-                    <a:p>
-                      <a:r>
-                        <a:rPr sz="1050" b="0" i="0">
-                          <a:solidFill>
-                            <a:srgbClr val="E040FB"/>
-                          </a:solidFill>
-                          <a:latin typeface="Segoe UI Semibold"/>
-                        </a:rPr>
-                        <a:t>Choice + Noul</a:t>
-                      </a:r>
-                    </a:p>
-                  </a:txBody>
-                  <a:tcPr marL="73152" marR="73152" marT="27432" marB="27432" anchor="ctr">
-                    <a:lnL w="9525" cap="flat" cmpd="sng" algn="ctr">
-                      <a:solidFill>
-                        <a:srgbClr val="33384A"/>
-                      </a:solidFill>
-                      <a:prstDash val="solid"/>
-                    </a:lnL>
-                    <a:lnR w="9525" cap="flat" cmpd="sng" algn="ctr">
-                      <a:solidFill>
-                        <a:srgbClr val="33384A"/>
-                      </a:solidFill>
-                      <a:prstDash val="solid"/>
-                    </a:lnR>
-                    <a:lnT w="9525" cap="flat" cmpd="sng" algn="ctr">
-                      <a:solidFill>
-                        <a:srgbClr val="33384A"/>
-                      </a:solidFill>
-                      <a:prstDash val="solid"/>
-                    </a:lnT>
-                    <a:lnB w="9525" cap="flat" cmpd="sng" algn="ctr">
-                      <a:solidFill>
-                        <a:srgbClr val="33384A"/>
-                      </a:solidFill>
-                      <a:prstDash val="solid"/>
-                    </a:lnB>
-                    <a:solidFill>
-                      <a:srgbClr val="0F1117"/>
-                    </a:solidFill>
-                  </a:tcPr>
-                </a:tc>
-                <a:tc>
-                  <a:txBody>
-                    <a:bodyPr wrap="square"/>
-                    <a:lstStyle/>
-                    <a:p>
-                      <a:r>
-                        <a:rPr sz="1050" b="0" i="0">
-                          <a:solidFill>
-                            <a:srgbClr val="A3A9BC"/>
-                          </a:solidFill>
-                          <a:latin typeface="Segoe UI"/>
-                        </a:rPr>
-                        <a:t>48% LLM cost saved by routing; 6/6 tool calls gated; fake claims caught</a:t>
-                      </a:r>
-                    </a:p>
-                  </a:txBody>
-                  <a:tcPr marL="73152" marR="73152" marT="27432" marB="27432" anchor="ctr">
-                    <a:lnL w="9525" cap="flat" cmpd="sng" algn="ctr">
-                      <a:solidFill>
-                        <a:srgbClr val="33384A"/>
-                      </a:solidFill>
-                      <a:prstDash val="solid"/>
-                    </a:lnL>
-                    <a:lnR w="9525" cap="flat" cmpd="sng" algn="ctr">
-                      <a:solidFill>
-                        <a:srgbClr val="33384A"/>
-                      </a:solidFill>
-                      <a:prstDash val="solid"/>
-                    </a:lnR>
-                    <a:lnT w="9525" cap="flat" cmpd="sng" algn="ctr">
-                      <a:solidFill>
-                        <a:srgbClr val="33384A"/>
-                      </a:solidFill>
-                      <a:prstDash val="solid"/>
-                    </a:lnT>
-                    <a:lnB w="9525" cap="flat" cmpd="sng" algn="ctr">
-                      <a:solidFill>
-                        <a:srgbClr val="33384A"/>
-                      </a:solidFill>
-                      <a:prstDash val="solid"/>
-                    </a:lnB>
-                    <a:solidFill>
-                      <a:srgbClr val="0F1117"/>
-                    </a:solidFill>
-                  </a:tcPr>
-                </a:tc>
-              </a:tr>
-              <a:tr h="402336">
-                <a:tc>
-                  <a:txBody>
-                    <a:bodyPr wrap="square"/>
-                    <a:lstStyle/>
-                    <a:p>
-                      <a:r>
-                        <a:rPr sz="1050" b="0" i="0">
-                          <a:solidFill>
-                            <a:srgbClr val="A3A9BC"/>
-                          </a:solidFill>
-                          <a:latin typeface="Segoe UI Semibold"/>
-                        </a:rPr>
-                        <a:t>07</a:t>
-                      </a:r>
-                    </a:p>
-                  </a:txBody>
-                  <a:tcPr marL="73152" marR="73152" marT="27432" marB="27432" anchor="ctr">
-                    <a:lnL w="9525" cap="flat" cmpd="sng" algn="ctr">
-                      <a:solidFill>
-                        <a:srgbClr val="33384A"/>
-                      </a:solidFill>
-                      <a:prstDash val="solid"/>
-                    </a:lnL>
-                    <a:lnR w="9525" cap="flat" cmpd="sng" algn="ctr">
-                      <a:solidFill>
-                        <a:srgbClr val="33384A"/>
-                      </a:solidFill>
-                      <a:prstDash val="solid"/>
-                    </a:lnR>
-                    <a:lnT w="9525" cap="flat" cmpd="sng" algn="ctr">
-                      <a:solidFill>
-                        <a:srgbClr val="33384A"/>
-                      </a:solidFill>
-                      <a:prstDash val="solid"/>
-                    </a:lnT>
-                    <a:lnB w="9525" cap="flat" cmpd="sng" algn="ctr">
-                      <a:solidFill>
-                        <a:srgbClr val="33384A"/>
-                      </a:solidFill>
-                      <a:prstDash val="solid"/>
-                    </a:lnB>
-                    <a:solidFill>
-                      <a:srgbClr val="1A1D27"/>
-                    </a:solidFill>
-                  </a:tcPr>
-                </a:tc>
-                <a:tc>
-                  <a:txBody>
-                    <a:bodyPr wrap="square"/>
-                    <a:lstStyle/>
-                    <a:p>
-                      <a:r>
-                        <a:rPr sz="1050" b="0" i="0">
-                          <a:solidFill>
-                            <a:srgbClr val="F5F6FA"/>
-                          </a:solidFill>
-                          <a:latin typeface="Segoe UI Semibold"/>
-                        </a:rPr>
-                        <a:t>UI demos (browser)</a:t>
-                      </a:r>
-                    </a:p>
-                  </a:txBody>
-                  <a:tcPr marL="73152" marR="73152" marT="27432" marB="27432" anchor="ctr">
-                    <a:lnL w="9525" cap="flat" cmpd="sng" algn="ctr">
-                      <a:solidFill>
-                        <a:srgbClr val="33384A"/>
-                      </a:solidFill>
-                      <a:prstDash val="solid"/>
-                    </a:lnL>
-                    <a:lnR w="9525" cap="flat" cmpd="sng" algn="ctr">
-                      <a:solidFill>
-                        <a:srgbClr val="33384A"/>
-                      </a:solidFill>
-                      <a:prstDash val="solid"/>
-                    </a:lnR>
-                    <a:lnT w="9525" cap="flat" cmpd="sng" algn="ctr">
-                      <a:solidFill>
-                        <a:srgbClr val="33384A"/>
-                      </a:solidFill>
-                      <a:prstDash val="solid"/>
-                    </a:lnT>
-                    <a:lnB w="9525" cap="flat" cmpd="sng" algn="ctr">
-                      <a:solidFill>
-                        <a:srgbClr val="33384A"/>
-                      </a:solidFill>
-                      <a:prstDash val="solid"/>
-                    </a:lnB>
-                    <a:solidFill>
-                      <a:srgbClr val="1A1D27"/>
-                    </a:solidFill>
-                  </a:tcPr>
-                </a:tc>
-                <a:tc>
-                  <a:txBody>
-                    <a:bodyPr wrap="square"/>
-                    <a:lstStyle/>
-                    <a:p>
-                      <a:r>
-                        <a:rPr sz="1050" b="0" i="0">
-                          <a:solidFill>
-                            <a:srgbClr val="E040FB"/>
-                          </a:solidFill>
-                          <a:latin typeface="Segoe UI Semibold"/>
-                        </a:rPr>
-                        <a:t>Choice + Score + Noul</a:t>
-                      </a:r>
-                    </a:p>
-                  </a:txBody>
-                  <a:tcPr marL="73152" marR="73152" marT="27432" marB="27432" anchor="ctr">
-                    <a:lnL w="9525" cap="flat" cmpd="sng" algn="ctr">
-                      <a:solidFill>
-                        <a:srgbClr val="33384A"/>
-                      </a:solidFill>
-                      <a:prstDash val="solid"/>
-                    </a:lnL>
-                    <a:lnR w="9525" cap="flat" cmpd="sng" algn="ctr">
-                      <a:solidFill>
-                        <a:srgbClr val="33384A"/>
-                      </a:solidFill>
-                      <a:prstDash val="solid"/>
-                    </a:lnR>
-                    <a:lnT w="9525" cap="flat" cmpd="sng" algn="ctr">
-                      <a:solidFill>
-                        <a:srgbClr val="33384A"/>
-                      </a:solidFill>
-                      <a:prstDash val="solid"/>
-                    </a:lnT>
-                    <a:lnB w="9525" cap="flat" cmpd="sng" algn="ctr">
-                      <a:solidFill>
-                        <a:srgbClr val="33384A"/>
-                      </a:solidFill>
-                      <a:prstDash val="solid"/>
-                    </a:lnB>
-                    <a:solidFill>
-                      <a:srgbClr val="1A1D27"/>
-                    </a:solidFill>
-                  </a:tcPr>
-                </a:tc>
-                <a:tc>
-                  <a:txBody>
-                    <a:bodyPr wrap="square"/>
-                    <a:lstStyle/>
-                    <a:p>
-                      <a:r>
-                        <a:rPr sz="1050" b="0" i="0">
-                          <a:solidFill>
-                            <a:srgbClr val="A3A9BC"/>
-                          </a:solidFill>
-                          <a:latin typeface="Segoe UI"/>
-                        </a:rPr>
-                        <a:t>Trolley ×100, creative emoji pile, live Score gauges for customer messages → slide 6</a:t>
-                      </a:r>
-                    </a:p>
-                  </a:txBody>
-                  <a:tcPr marL="73152" marR="73152" marT="27432" marB="27432" anchor="ctr">
-                    <a:lnL w="9525" cap="flat" cmpd="sng" algn="ctr">
-                      <a:solidFill>
-                        <a:srgbClr val="33384A"/>
-                      </a:solidFill>
-                      <a:prstDash val="solid"/>
-                    </a:lnL>
-                    <a:lnR w="9525" cap="flat" cmpd="sng" algn="ctr">
-                      <a:solidFill>
-                        <a:srgbClr val="33384A"/>
-                      </a:solidFill>
-                      <a:prstDash val="solid"/>
-                    </a:lnR>
-                    <a:lnT w="9525" cap="flat" cmpd="sng" algn="ctr">
-                      <a:solidFill>
-                        <a:srgbClr val="33384A"/>
-                      </a:solidFill>
-                      <a:prstDash val="solid"/>
-                    </a:lnT>
-                    <a:lnB w="9525" cap="flat" cmpd="sng" algn="ctr">
-                      <a:solidFill>
-                        <a:srgbClr val="33384A"/>
-                      </a:solidFill>
-                      <a:prstDash val="solid"/>
-                    </a:lnB>
-                    <a:solidFill>
-                      <a:srgbClr val="1A1D27"/>
-                    </a:solidFill>
-                  </a:tcPr>
-                </a:tc>
-              </a:tr>
-            </a:tbl>
-          </a:graphicData>
-        </a:graphic>
-      </p:graphicFrame>
+              <a:t>▸  </a:t>
+            </a:r>
+            <a:r>
+              <a:rPr sz="1500" b="0" i="0">
+                <a:solidFill>
+                  <a:srgbClr val="F5F6FA"/>
+                </a:solidFill>
+                <a:latin typeface="Segoe UI Semibold"/>
+              </a:rPr>
+              <a:t>Keep numbers and business rules in code</a:t>
+            </a:r>
+            <a:r>
+              <a:rPr sz="1500" b="0" i="0">
+                <a:solidFill>
+                  <a:srgbClr val="A3A9BC"/>
+                </a:solidFill>
+                <a:latin typeface="Segoe UI"/>
+              </a:rPr>
+              <a:t/>
+            </a:r>
+          </a:p>
+          <a:p>
+            <a:pPr algn="l">
+              <a:lnSpc>
+                <a:spcPct val="105000"/>
+              </a:lnSpc>
+              <a:spcAft>
+                <a:spcPts val="800"/>
+              </a:spcAft>
+            </a:pPr>
+            <a:r>
+              <a:rPr sz="1500" b="0" i="0">
+                <a:solidFill>
+                  <a:srgbClr val="34D399"/>
+                </a:solidFill>
+                <a:latin typeface="Segoe UI Semibold"/>
+              </a:rPr>
+              <a:t>▸  </a:t>
+            </a:r>
+            <a:r>
+              <a:rPr sz="1500" b="0" i="0">
+                <a:solidFill>
+                  <a:srgbClr val="F5F6FA"/>
+                </a:solidFill>
+                <a:latin typeface="Segoe UI Semibold"/>
+              </a:rPr>
+              <a:t>Test wording on labelled examples, gate on confidence</a:t>
+            </a:r>
+            <a:r>
+              <a:rPr sz="1500" b="0" i="0">
+                <a:solidFill>
+                  <a:srgbClr val="A3A9BC"/>
+                </a:solidFill>
+                <a:latin typeface="Segoe UI"/>
+              </a:rPr>
+              <a:t/>
+            </a:r>
+          </a:p>
+        </p:txBody>
+      </p:sp>
       <p:pic>
         <p:nvPicPr>
-          <p:cNvPr id="7" name="Picture 6" descr="terminal_06_agent_harness.png"/>
+          <p:cNvPr id="8" name="Picture 7" descr="terminal_06_agent_harness.png"/>
           <p:cNvPicPr>
             <a:picLocks noChangeAspect="1"/>
           </p:cNvPicPr>
@@ -12755,8 +8680,8 @@
         </p:blipFill>
         <p:spPr>
           <a:xfrm>
-            <a:off x="7726679" y="1645920"/>
-            <a:ext cx="4005072" cy="3111552"/>
+            <a:off x="7223760" y="1737360"/>
+            <a:ext cx="4526280" cy="3516480"/>
           </a:xfrm>
           <a:prstGeom prst="rect">
             <a:avLst/>
@@ -12770,14 +8695,14 @@
       </p:pic>
       <p:sp>
         <p:nvSpPr>
-          <p:cNvPr id="8" name="TextBox 7"/>
+          <p:cNvPr id="9" name="TextBox 8"/>
           <p:cNvSpPr txBox="1"/>
           <p:nvPr/>
         </p:nvSpPr>
         <p:spPr>
           <a:xfrm>
-            <a:off x="7726679" y="4784904"/>
-            <a:ext cx="4005072" cy="274320"/>
+            <a:off x="7223760" y="5290416"/>
+            <a:ext cx="4526280" cy="274320"/>
           </a:xfrm>
           <a:prstGeom prst="rect">
             <a:avLst/>
@@ -12812,58 +8737,14 @@
       </p:sp>
       <p:sp>
         <p:nvSpPr>
-          <p:cNvPr id="9" name="Rounded Rectangle 8"/>
-          <p:cNvSpPr/>
-          <p:nvPr/>
-        </p:nvSpPr>
-        <p:spPr>
-          <a:xfrm>
-            <a:off x="457200" y="4983480"/>
-            <a:ext cx="7040880" cy="1508760"/>
-          </a:xfrm>
-          <a:prstGeom prst="roundRect">
-            <a:avLst>
-              <a:gd name="adj" fmla="val 6000"/>
-            </a:avLst>
-          </a:prstGeom>
-          <a:solidFill>
-            <a:srgbClr val="1A1D27"/>
-          </a:solidFill>
-          <a:ln>
-            <a:noFill/>
-          </a:ln>
-          <a:effectLst/>
-        </p:spPr>
-        <p:style>
-          <a:lnRef idx="1">
-            <a:schemeClr val="accent1"/>
-          </a:lnRef>
-          <a:fillRef idx="3">
-            <a:schemeClr val="accent1"/>
-          </a:fillRef>
-          <a:effectRef idx="2">
-            <a:schemeClr val="accent1"/>
-          </a:effectRef>
-          <a:fontRef idx="minor">
-            <a:schemeClr val="lt1"/>
-          </a:fontRef>
-        </p:style>
-        <p:txBody>
-          <a:bodyPr rtlCol="0" anchor="ctr"/>
-          <a:lstStyle/>
-          <a:p/>
-        </p:txBody>
-      </p:sp>
-      <p:sp>
-        <p:nvSpPr>
           <p:cNvPr id="10" name="TextBox 9"/>
           <p:cNvSpPr txBox="1"/>
           <p:nvPr/>
         </p:nvSpPr>
         <p:spPr>
           <a:xfrm>
-            <a:off x="621792" y="5047488"/>
-            <a:ext cx="6766560" cy="274320"/>
+            <a:off x="457200" y="6172200"/>
+            <a:ext cx="11247120" cy="365760"/>
           </a:xfrm>
           <a:prstGeom prst="rect">
             <a:avLst/>
@@ -12885,371 +8766,22 @@
               </a:spcAft>
             </a:pPr>
             <a:r>
-              <a:rPr sz="1200" b="0" i="0">
-                <a:solidFill>
-                  <a:srgbClr val="34D399"/>
+              <a:rPr sz="1400" b="0" i="0">
+                <a:solidFill>
+                  <a:srgbClr val="22D3EE"/>
                 </a:solidFill>
                 <a:latin typeface="Segoe UI Semibold"/>
               </a:rPr>
-              <a:t>What we learned (zero-shot, no fine-tuning)</a:t>
-            </a:r>
-          </a:p>
-        </p:txBody>
-      </p:sp>
-      <p:sp>
-        <p:nvSpPr>
-          <p:cNvPr id="11" name="TextBox 10"/>
-          <p:cNvSpPr txBox="1"/>
-          <p:nvPr/>
-        </p:nvSpPr>
-        <p:spPr>
-          <a:xfrm>
-            <a:off x="621792" y="5349240"/>
-            <a:ext cx="6812280" cy="1143000"/>
-          </a:xfrm>
-          <a:prstGeom prst="rect">
-            <a:avLst/>
-          </a:prstGeom>
-          <a:noFill/>
-        </p:spPr>
-        <p:txBody>
-          <a:bodyPr wrap="square" anchor="t" lIns="36576" rIns="36576" tIns="36576" bIns="36576">
-            <a:spAutoFit/>
-          </a:bodyPr>
-          <a:lstStyle/>
-          <a:p>
-            <a:pPr algn="l">
-              <a:lnSpc>
-                <a:spcPct val="105000"/>
-              </a:lnSpc>
-              <a:spcAft>
-                <a:spcPts val="150"/>
-              </a:spcAft>
-            </a:pPr>
-            <a:r>
-              <a:rPr sz="1050" b="0" i="0">
-                <a:solidFill>
-                  <a:srgbClr val="34D399"/>
-                </a:solidFill>
-                <a:latin typeface="Segoe UI Semibold"/>
-              </a:rPr>
-              <a:t>▸  </a:t>
-            </a:r>
-            <a:r>
-              <a:rPr sz="1050" b="0" i="0">
+              <a:t>Next: </a:t>
+            </a:r>
+            <a:r>
+              <a:rPr sz="1400" b="0" i="0">
                 <a:solidFill>
                   <a:srgbClr val="F5F6FA"/>
                 </a:solidFill>
-                <a:latin typeface="Segoe UI Semibold"/>
-              </a:rPr>
-              <a:t>Atomic questions win: </a:t>
-            </a:r>
-            <a:r>
-              <a:rPr sz="1050" b="0" i="0">
-                <a:solidFill>
-                  <a:srgbClr val="A3A9BC"/>
-                </a:solidFill>
                 <a:latin typeface="Segoe UI"/>
               </a:rPr>
-              <a:t>one persona Choice beat four disqualifier Nouls.</a:t>
-            </a:r>
-          </a:p>
-          <a:p>
-            <a:pPr algn="l">
-              <a:lnSpc>
-                <a:spcPct val="105000"/>
-              </a:lnSpc>
-              <a:spcAft>
-                <a:spcPts val="150"/>
-              </a:spcAft>
-            </a:pPr>
-            <a:r>
-              <a:rPr sz="1050" b="0" i="0">
-                <a:solidFill>
-                  <a:srgbClr val="34D399"/>
-                </a:solidFill>
-                <a:latin typeface="Segoe UI Semibold"/>
-              </a:rPr>
-              <a:t>▸  </a:t>
-            </a:r>
-            <a:r>
-              <a:rPr sz="1050" b="0" i="0">
-                <a:solidFill>
-                  <a:srgbClr val="F5F6FA"/>
-                </a:solidFill>
-                <a:latin typeface="Segoe UI Semibold"/>
-              </a:rPr>
-              <a:t>Data and business rules stay in code; </a:t>
-            </a:r>
-            <a:r>
-              <a:rPr sz="1050" b="0" i="0">
-                <a:solidFill>
-                  <a:srgbClr val="A3A9BC"/>
-                </a:solidFill>
-                <a:latin typeface="Segoe UI"/>
-              </a:rPr>
-              <a:t>the model only judges language.</a:t>
-            </a:r>
-          </a:p>
-          <a:p>
-            <a:pPr algn="l">
-              <a:lnSpc>
-                <a:spcPct val="105000"/>
-              </a:lnSpc>
-              <a:spcAft>
-                <a:spcPts val="150"/>
-              </a:spcAft>
-            </a:pPr>
-            <a:r>
-              <a:rPr sz="1050" b="0" i="0">
-                <a:solidFill>
-                  <a:srgbClr val="34D399"/>
-                </a:solidFill>
-                <a:latin typeface="Segoe UI Semibold"/>
-              </a:rPr>
-              <a:t>▸  </a:t>
-            </a:r>
-            <a:r>
-              <a:rPr sz="1050" b="0" i="0">
-                <a:solidFill>
-                  <a:srgbClr val="F5F6FA"/>
-                </a:solidFill>
-                <a:latin typeface="Segoe UI Semibold"/>
-              </a:rPr>
-              <a:t>Wording matters: </a:t>
-            </a:r>
-            <a:r>
-              <a:rPr sz="1050" b="0" i="0">
-                <a:solidFill>
-                  <a:srgbClr val="A3A9BC"/>
-                </a:solidFill>
-                <a:latin typeface="Segoe UI"/>
-              </a:rPr>
-              <a:t>test 3–5 phrasings on a small labelled set before you trust a threshold.</a:t>
-            </a:r>
-          </a:p>
-          <a:p>
-            <a:pPr algn="l">
-              <a:lnSpc>
-                <a:spcPct val="105000"/>
-              </a:lnSpc>
-              <a:spcAft>
-                <a:spcPts val="150"/>
-              </a:spcAft>
-            </a:pPr>
-            <a:r>
-              <a:rPr sz="1050" b="0" i="0">
-                <a:solidFill>
-                  <a:srgbClr val="34D399"/>
-                </a:solidFill>
-                <a:latin typeface="Segoe UI Semibold"/>
-              </a:rPr>
-              <a:t>▸  </a:t>
-            </a:r>
-            <a:r>
-              <a:rPr sz="1050" b="0" i="0">
-                <a:solidFill>
-                  <a:srgbClr val="F5F6FA"/>
-                </a:solidFill>
-                <a:latin typeface="Segoe UI Semibold"/>
-              </a:rPr>
-              <a:t>Gate on confidence, fail safe: </a:t>
-            </a:r>
-            <a:r>
-              <a:rPr sz="1050" b="0" i="0">
-                <a:solidFill>
-                  <a:srgbClr val="A3A9BC"/>
-                </a:solidFill>
-                <a:latin typeface="Segoe UI"/>
-              </a:rPr>
-              <a:t>uncertain → human or “did you mean…?”. CPU ≈ 0.3 s/question, GPU ≈ 33 ms.</a:t>
-            </a:r>
-          </a:p>
-        </p:txBody>
-      </p:sp>
-      <p:sp>
-        <p:nvSpPr>
-          <p:cNvPr id="12" name="Rounded Rectangle 11"/>
-          <p:cNvSpPr/>
-          <p:nvPr/>
-        </p:nvSpPr>
-        <p:spPr>
-          <a:xfrm>
-            <a:off x="7726679" y="5123232"/>
-            <a:ext cx="4005072" cy="1369007"/>
-          </a:xfrm>
-          <a:prstGeom prst="roundRect">
-            <a:avLst>
-              <a:gd name="adj" fmla="val 6000"/>
-            </a:avLst>
-          </a:prstGeom>
-          <a:solidFill>
-            <a:srgbClr val="1A1D27"/>
-          </a:solidFill>
-          <a:ln w="15875">
-            <a:solidFill>
-              <a:srgbClr val="22D3EE"/>
-            </a:solidFill>
-          </a:ln>
-          <a:effectLst/>
-        </p:spPr>
-        <p:style>
-          <a:lnRef idx="1">
-            <a:schemeClr val="accent1"/>
-          </a:lnRef>
-          <a:fillRef idx="3">
-            <a:schemeClr val="accent1"/>
-          </a:fillRef>
-          <a:effectRef idx="2">
-            <a:schemeClr val="accent1"/>
-          </a:effectRef>
-          <a:fontRef idx="minor">
-            <a:schemeClr val="lt1"/>
-          </a:fontRef>
-        </p:style>
-        <p:txBody>
-          <a:bodyPr rtlCol="0" anchor="ctr"/>
-          <a:lstStyle/>
-          <a:p/>
-        </p:txBody>
-      </p:sp>
-      <p:sp>
-        <p:nvSpPr>
-          <p:cNvPr id="13" name="TextBox 12"/>
-          <p:cNvSpPr txBox="1"/>
-          <p:nvPr/>
-        </p:nvSpPr>
-        <p:spPr>
-          <a:xfrm>
-            <a:off x="7882127" y="5187240"/>
-            <a:ext cx="3749039" cy="274320"/>
-          </a:xfrm>
-          <a:prstGeom prst="rect">
-            <a:avLst/>
-          </a:prstGeom>
-          <a:noFill/>
-        </p:spPr>
-        <p:txBody>
-          <a:bodyPr wrap="square" anchor="t" lIns="36576" rIns="36576" tIns="36576" bIns="36576">
-            <a:spAutoFit/>
-          </a:bodyPr>
-          <a:lstStyle/>
-          <a:p>
-            <a:pPr algn="l">
-              <a:lnSpc>
-                <a:spcPct val="100000"/>
-              </a:lnSpc>
-              <a:spcAft>
-                <a:spcPts val="0"/>
-              </a:spcAft>
-            </a:pPr>
-            <a:r>
-              <a:rPr sz="1200" b="0" i="0">
-                <a:solidFill>
-                  <a:srgbClr val="22D3EE"/>
-                </a:solidFill>
-                <a:latin typeface="Segoe UI Semibold"/>
-              </a:rPr>
-              <a:t>Next steps</a:t>
-            </a:r>
-          </a:p>
-        </p:txBody>
-      </p:sp>
-      <p:sp>
-        <p:nvSpPr>
-          <p:cNvPr id="14" name="TextBox 13"/>
-          <p:cNvSpPr txBox="1"/>
-          <p:nvPr/>
-        </p:nvSpPr>
-        <p:spPr>
-          <a:xfrm>
-            <a:off x="7882127" y="5488992"/>
-            <a:ext cx="3749039" cy="957527"/>
-          </a:xfrm>
-          <a:prstGeom prst="rect">
-            <a:avLst/>
-          </a:prstGeom>
-          <a:noFill/>
-        </p:spPr>
-        <p:txBody>
-          <a:bodyPr wrap="square" anchor="t" lIns="36576" rIns="36576" tIns="36576" bIns="36576">
-            <a:spAutoFit/>
-          </a:bodyPr>
-          <a:lstStyle/>
-          <a:p>
-            <a:pPr algn="l">
-              <a:lnSpc>
-                <a:spcPct val="100000"/>
-              </a:lnSpc>
-              <a:spcAft>
-                <a:spcPts val="200"/>
-              </a:spcAft>
-            </a:pPr>
-            <a:r>
-              <a:rPr sz="1050" b="0" i="0">
-                <a:solidFill>
-                  <a:srgbClr val="F5F6FA"/>
-                </a:solidFill>
-                <a:latin typeface="Segoe UI"/>
-              </a:rPr>
-              <a:t>1. Pick one pilot: reply triage or lead scoring</a:t>
-            </a:r>
-          </a:p>
-          <a:p>
-            <a:pPr algn="l">
-              <a:lnSpc>
-                <a:spcPct val="100000"/>
-              </a:lnSpc>
-              <a:spcAft>
-                <a:spcPts val="200"/>
-              </a:spcAft>
-            </a:pPr>
-            <a:r>
-              <a:rPr sz="1050" b="0" i="0">
-                <a:solidFill>
-                  <a:srgbClr val="F5F6FA"/>
-                </a:solidFill>
-                <a:latin typeface="Segoe UI"/>
-              </a:rPr>
-              <a:t>2. Label 300–500 real examples, set thresholds</a:t>
-            </a:r>
-          </a:p>
-          <a:p>
-            <a:pPr algn="l">
-              <a:lnSpc>
-                <a:spcPct val="100000"/>
-              </a:lnSpc>
-              <a:spcAft>
-                <a:spcPts val="200"/>
-              </a:spcAft>
-            </a:pPr>
-            <a:r>
-              <a:rPr sz="1050" b="0" i="0">
-                <a:solidFill>
-                  <a:srgbClr val="F5F6FA"/>
-                </a:solidFill>
-                <a:latin typeface="Segoe UI"/>
-              </a:rPr>
-              <a:t>3. Compare Laya (fine-tuned) vs Jev API on it</a:t>
-            </a:r>
-          </a:p>
-          <a:p>
-            <a:pPr algn="l">
-              <a:lnSpc>
-                <a:spcPct val="100000"/>
-              </a:lnSpc>
-              <a:spcAft>
-                <a:spcPts val="200"/>
-              </a:spcAft>
-            </a:pPr>
-            <a:r>
-              <a:rPr sz="1050" b="0" i="0">
-                <a:solidFill>
-                  <a:srgbClr val="F5F6FA"/>
-                </a:solidFill>
-                <a:latin typeface="Segoe UI"/>
-              </a:rPr>
-              <a:t>4. Ship behind a confidence gate + human review</a:t>
+              <a:t>pick one pilot · label 300–500 real examples · compare Laya vs the Jev API</a:t>
             </a:r>
           </a:p>
         </p:txBody>
@@ -13359,7 +8891,7 @@
                 </a:solidFill>
                 <a:latin typeface="Segoe UI Semibold"/>
               </a:rPr>
-              <a:t>Three live UI demos: Choice, Noul and Score</a:t>
+              <a:t>Live demos: one per primitive</a:t>
             </a:r>
           </a:p>
         </p:txBody>
@@ -13419,27 +8951,36 @@
       </p:sp>
       <p:pic>
         <p:nvPicPr>
-          <p:cNvPr id="5" name="Picture 4" descr="ui_trolley.png"/>
+          <p:cNvPr id="5" name="demo_trolley.mp4">
+            <a:hlinkClick r:id="" action="ppaction://media"/>
+          </p:cNvPr>
           <p:cNvPicPr>
             <a:picLocks noChangeAspect="1"/>
           </p:cNvPicPr>
-          <p:nvPr/>
+          <p:nvPr>
+            <a:videoFile r:link="rId4"/>
+            <p:extLst>
+              <p:ext uri="{DAA4B4D4-6D71-4841-9C94-3DE7FCFB9230}">
+                <p14:media xmlns:p14="http://schemas.microsoft.com/office/powerpoint/2010/main" r:embed="rId3"/>
+              </p:ext>
+            </p:extLst>
+          </p:nvPr>
         </p:nvPicPr>
         <p:blipFill>
-          <a:blip r:embed="rId3"/>
+          <a:blip r:embed="rId5"/>
           <a:stretch>
             <a:fillRect/>
           </a:stretch>
         </p:blipFill>
         <p:spPr>
           <a:xfrm>
-            <a:off x="457200" y="1554480"/>
-            <a:ext cx="3611880" cy="2152680"/>
+            <a:off x="457200" y="1645920"/>
+            <a:ext cx="3611880" cy="2257425"/>
           </a:xfrm>
           <a:prstGeom prst="rect">
             <a:avLst/>
           </a:prstGeom>
-          <a:ln w="12700">
+          <a:ln>
             <a:solidFill>
               <a:srgbClr val="33384A"/>
             </a:solidFill>
@@ -13454,8 +8995,8 @@
         </p:nvSpPr>
         <p:spPr>
           <a:xfrm>
-            <a:off x="457200" y="3992757"/>
-            <a:ext cx="3611880" cy="320040"/>
+            <a:off x="457200" y="4086225"/>
+            <a:ext cx="3611880" cy="365760"/>
           </a:xfrm>
           <a:prstGeom prst="rect">
             <a:avLst/>
@@ -13477,16 +9018,16 @@
               </a:spcAft>
             </a:pPr>
             <a:r>
-              <a:rPr sz="1300" b="0" i="0">
+              <a:rPr sz="1500" b="0" i="0">
                 <a:solidFill>
                   <a:srgbClr val="F5F6FA"/>
                 </a:solidFill>
                 <a:latin typeface="Segoe UI Semibold"/>
               </a:rPr>
-              <a:t>Trolley problem ×100</a:t>
-            </a:r>
-            <a:r>
-              <a:rPr sz="1300" b="0" i="0">
+              <a:t>Trolley ×100</a:t>
+            </a:r>
+            <a:r>
+              <a:rPr sz="1500" b="0" i="0">
                 <a:solidFill>
                   <a:srgbClr val="E040FB"/>
                 </a:solidFill>
@@ -13505,144 +9046,8 @@
         </p:nvSpPr>
         <p:spPr>
           <a:xfrm>
-            <a:off x="457200" y="4340229"/>
-            <a:ext cx="3611880" cy="2103120"/>
-          </a:xfrm>
-          <a:prstGeom prst="rect">
-            <a:avLst/>
-          </a:prstGeom>
-          <a:noFill/>
-        </p:spPr>
-        <p:txBody>
-          <a:bodyPr wrap="square" anchor="t" lIns="36576" rIns="36576" tIns="36576" bIns="36576">
-            <a:spAutoFit/>
-          </a:bodyPr>
-          <a:lstStyle/>
-          <a:p>
-            <a:pPr algn="l">
-              <a:lnSpc>
-                <a:spcPct val="100000"/>
-              </a:lnSpc>
-              <a:spcAft>
-                <a:spcPts val="400"/>
-              </a:spcAft>
-            </a:pPr>
-            <a:r>
-              <a:rPr sz="1050" b="0" i="0">
-                <a:solidFill>
-                  <a:srgbClr val="E040FB"/>
-                </a:solidFill>
-                <a:latin typeface="Segoe UI"/>
-              </a:rPr>
-              <a:t>•  </a:t>
-            </a:r>
-            <a:r>
-              <a:rPr sz="1050" b="0" i="0">
-                <a:solidFill>
-                  <a:srgbClr val="A3A9BC"/>
-                </a:solidFill>
-                <a:latin typeface="Segoe UI"/>
-              </a:rPr>
-              <a:t>Rebuilt from the video. 100 trials, randomised wording: pulled the lever 100 / 100 (P 0.75–0.98).</a:t>
-            </a:r>
-          </a:p>
-          <a:p>
-            <a:pPr algn="l">
-              <a:lnSpc>
-                <a:spcPct val="100000"/>
-              </a:lnSpc>
-              <a:spcAft>
-                <a:spcPts val="400"/>
-              </a:spcAft>
-            </a:pPr>
-            <a:r>
-              <a:rPr sz="1050" b="0" i="0">
-                <a:solidFill>
-                  <a:srgbClr val="E040FB"/>
-                </a:solidFill>
-                <a:latin typeface="Segoe UI"/>
-              </a:rPr>
-              <a:t>•  </a:t>
-            </a:r>
-            <a:r>
-              <a:rPr sz="1050" b="0" i="0">
-                <a:solidFill>
-                  <a:srgbClr val="A3A9BC"/>
-                </a:solidFill>
-                <a:latin typeface="Segoe UI"/>
-              </a:rPr>
-              <a:t>Sanity check with 1 on main and 5 on side: it still pulls (0 / 13 chose fewer deaths).</a:t>
-            </a:r>
-          </a:p>
-          <a:p>
-            <a:pPr algn="l">
-              <a:lnSpc>
-                <a:spcPct val="100000"/>
-              </a:lnSpc>
-              <a:spcAft>
-                <a:spcPts val="400"/>
-              </a:spcAft>
-            </a:pPr>
-            <a:r>
-              <a:rPr sz="1050" b="0" i="0">
-                <a:solidFill>
-                  <a:srgbClr val="E040FB"/>
-                </a:solidFill>
-                <a:latin typeface="Segoe UI"/>
-              </a:rPr>
-              <a:t>•  </a:t>
-            </a:r>
-            <a:r>
-              <a:rPr sz="1050" b="0" i="0">
-                <a:solidFill>
-                  <a:srgbClr val="A3A9BC"/>
-                </a:solidFill>
-                <a:latin typeface="Segoe UI"/>
-              </a:rPr>
-              <a:t>System-1 models react to the story pattern; they don't count.</a:t>
-            </a:r>
-          </a:p>
-        </p:txBody>
-      </p:sp>
-      <p:pic>
-        <p:nvPicPr>
-          <p:cNvPr id="8" name="Picture 7" descr="ui_creative.png"/>
-          <p:cNvPicPr>
-            <a:picLocks noChangeAspect="1"/>
-          </p:cNvPicPr>
-          <p:nvPr/>
-        </p:nvPicPr>
-        <p:blipFill>
-          <a:blip r:embed="rId4"/>
-          <a:stretch>
-            <a:fillRect/>
-          </a:stretch>
-        </p:blipFill>
-        <p:spPr>
-          <a:xfrm>
-            <a:off x="4288536" y="1554480"/>
-            <a:ext cx="3611880" cy="2124635"/>
-          </a:xfrm>
-          <a:prstGeom prst="rect">
-            <a:avLst/>
-          </a:prstGeom>
-          <a:ln w="12700">
-            <a:solidFill>
-              <a:srgbClr val="33384A"/>
-            </a:solidFill>
-          </a:ln>
-        </p:spPr>
-      </p:pic>
-      <p:sp>
-        <p:nvSpPr>
-          <p:cNvPr id="9" name="TextBox 8"/>
-          <p:cNvSpPr txBox="1"/>
-          <p:nvPr/>
-        </p:nvSpPr>
-        <p:spPr>
-          <a:xfrm>
-            <a:off x="4288536" y="3992757"/>
-            <a:ext cx="3611880" cy="320040"/>
+            <a:off x="457200" y="4543425"/>
+            <a:ext cx="3611880" cy="1280160"/>
           </a:xfrm>
           <a:prstGeom prst="rect">
             <a:avLst/>
@@ -13666,154 +9071,47 @@
             <a:r>
               <a:rPr sz="1300" b="0" i="0">
                 <a:solidFill>
-                  <a:srgbClr val="F5F6FA"/>
-                </a:solidFill>
-                <a:latin typeface="Segoe UI Semibold"/>
-              </a:rPr>
-              <a:t>Creative emoji pile</a:t>
-            </a:r>
-            <a:r>
-              <a:rPr sz="1300" b="0" i="0">
-                <a:solidFill>
-                  <a:srgbClr val="FBBF24"/>
-                </a:solidFill>
-                <a:latin typeface="Segoe UI Semibold"/>
-              </a:rPr>
-              <a:t>   Noul × 235</a:t>
-            </a:r>
-          </a:p>
-        </p:txBody>
-      </p:sp>
-      <p:sp>
-        <p:nvSpPr>
-          <p:cNvPr id="10" name="TextBox 9"/>
-          <p:cNvSpPr txBox="1"/>
-          <p:nvPr/>
-        </p:nvSpPr>
-        <p:spPr>
-          <a:xfrm>
-            <a:off x="4288536" y="4340229"/>
-            <a:ext cx="3611880" cy="2103120"/>
-          </a:xfrm>
-          <a:prstGeom prst="rect">
-            <a:avLst/>
-          </a:prstGeom>
-          <a:noFill/>
-        </p:spPr>
-        <p:txBody>
-          <a:bodyPr wrap="square" anchor="t" lIns="36576" rIns="36576" tIns="36576" bIns="36576">
-            <a:spAutoFit/>
-          </a:bodyPr>
-          <a:lstStyle/>
-          <a:p>
-            <a:pPr algn="l">
-              <a:lnSpc>
-                <a:spcPct val="100000"/>
-              </a:lnSpc>
-              <a:spcAft>
-                <a:spcPts val="400"/>
-              </a:spcAft>
-            </a:pPr>
-            <a:r>
-              <a:rPr sz="1050" b="0" i="0">
-                <a:solidFill>
-                  <a:srgbClr val="FBBF24"/>
+                  <a:srgbClr val="A3A9BC"/>
                 </a:solidFill>
                 <a:latin typeface="Segoe UI"/>
               </a:rPr>
-              <a:t>•  </a:t>
-            </a:r>
-            <a:r>
-              <a:rPr sz="1050" b="0" i="0">
-                <a:solidFill>
-                  <a:srgbClr val="A3A9BC"/>
-                </a:solidFill>
-                <a:latin typeface="Segoe UI"/>
-              </a:rPr>
-              <a:t>Rebuilt from the video. Each emoji is one Noul: “Is this related to: &lt;request&gt;?”; outliers fly up live.</a:t>
-            </a:r>
-          </a:p>
-          <a:p>
-            <a:pPr algn="l">
-              <a:lnSpc>
-                <a:spcPct val="100000"/>
-              </a:lnSpc>
-              <a:spcAft>
-                <a:spcPts val="400"/>
-              </a:spcAft>
-            </a:pPr>
-            <a:r>
-              <a:rPr sz="1050" b="0" i="0">
-                <a:solidFill>
-                  <a:srgbClr val="FBBF24"/>
-                </a:solidFill>
-                <a:latin typeface="Segoe UI"/>
-              </a:rPr>
-              <a:t>•  </a:t>
-            </a:r>
-            <a:r>
-              <a:rPr sz="1050" b="0" i="0">
-                <a:solidFill>
-                  <a:srgbClr val="A3A9BC"/>
-                </a:solidFill>
-                <a:latin typeface="Segoe UI"/>
-              </a:rPr>
-              <a:t>Good ranking (winter → scarf, coat, gloves, socks); probability levels differ per prompt → relative threshold.</a:t>
-            </a:r>
-          </a:p>
-          <a:p>
-            <a:pPr algn="l">
-              <a:lnSpc>
-                <a:spcPct val="100000"/>
-              </a:lnSpc>
-              <a:spcAft>
-                <a:spcPts val="400"/>
-              </a:spcAft>
-            </a:pPr>
-            <a:r>
-              <a:rPr sz="1050" b="0" i="0">
-                <a:solidFill>
-                  <a:srgbClr val="FBBF24"/>
-                </a:solidFill>
-                <a:latin typeface="Segoe UI"/>
-              </a:rPr>
-              <a:t>•  </a:t>
-            </a:r>
-            <a:r>
-              <a:rPr sz="1050" b="0" i="0">
-                <a:solidFill>
-                  <a:srgbClr val="A3A9BC"/>
-                </a:solidFill>
-                <a:latin typeface="Segoe UI"/>
-              </a:rPr>
-              <a:t>“starting a band” also picks the bandage.</a:t>
+              <a:t>100 / 100 pulls, like the video - but it also pulls when 5 are on the side track.</a:t>
             </a:r>
           </a:p>
         </p:txBody>
       </p:sp>
       <p:pic>
         <p:nvPicPr>
-          <p:cNvPr id="11" name="Picture 10" descr="ui_score.png"/>
+          <p:cNvPr id="8" name="demo_creative.mp4">
+            <a:hlinkClick r:id="" action="ppaction://media"/>
+          </p:cNvPr>
           <p:cNvPicPr>
             <a:picLocks noChangeAspect="1"/>
           </p:cNvPicPr>
-          <p:nvPr/>
+          <p:nvPr>
+            <a:videoFile r:link="rId7"/>
+            <p:extLst>
+              <p:ext uri="{DAA4B4D4-6D71-4841-9C94-3DE7FCFB9230}">
+                <p14:media xmlns:p14="http://schemas.microsoft.com/office/powerpoint/2010/main" r:embed="rId6"/>
+              </p:ext>
+            </p:extLst>
+          </p:nvPr>
         </p:nvPicPr>
         <p:blipFill>
-          <a:blip r:embed="rId5"/>
+          <a:blip r:embed="rId8"/>
           <a:stretch>
             <a:fillRect/>
           </a:stretch>
         </p:blipFill>
         <p:spPr>
           <a:xfrm>
-            <a:off x="8119872" y="1554480"/>
-            <a:ext cx="3611880" cy="2301117"/>
+            <a:off x="4288536" y="1645920"/>
+            <a:ext cx="3611880" cy="2257425"/>
           </a:xfrm>
           <a:prstGeom prst="rect">
             <a:avLst/>
           </a:prstGeom>
-          <a:ln w="12700">
+          <a:ln>
             <a:solidFill>
               <a:srgbClr val="33384A"/>
             </a:solidFill>
@@ -13822,14 +9120,14 @@
       </p:pic>
       <p:sp>
         <p:nvSpPr>
-          <p:cNvPr id="12" name="TextBox 11"/>
+          <p:cNvPr id="9" name="TextBox 8"/>
           <p:cNvSpPr txBox="1"/>
           <p:nvPr/>
         </p:nvSpPr>
         <p:spPr>
           <a:xfrm>
-            <a:off x="8119872" y="3992757"/>
-            <a:ext cx="3611880" cy="320040"/>
+            <a:off x="4288536" y="4086225"/>
+            <a:ext cx="3611880" cy="365760"/>
           </a:xfrm>
           <a:prstGeom prst="rect">
             <a:avLst/>
@@ -13851,36 +9149,36 @@
               </a:spcAft>
             </a:pPr>
             <a:r>
-              <a:rPr sz="1300" b="0" i="0">
+              <a:rPr sz="1500" b="0" i="0">
                 <a:solidFill>
                   <a:srgbClr val="F5F6FA"/>
                 </a:solidFill>
                 <a:latin typeface="Segoe UI Semibold"/>
               </a:rPr>
-              <a:t>How hot is this message?</a:t>
-            </a:r>
-            <a:r>
-              <a:rPr sz="1300" b="0" i="0">
-                <a:solidFill>
-                  <a:srgbClr val="22D3EE"/>
+              <a:t>Emoji pile</a:t>
+            </a:r>
+            <a:r>
+              <a:rPr sz="1500" b="0" i="0">
+                <a:solidFill>
+                  <a:srgbClr val="FBBF24"/>
                 </a:solidFill>
                 <a:latin typeface="Segoe UI Semibold"/>
               </a:rPr>
-              <a:t>   Score × 4</a:t>
-            </a:r>
-          </a:p>
-        </p:txBody>
-      </p:sp>
-      <p:sp>
-        <p:nvSpPr>
-          <p:cNvPr id="13" name="TextBox 12"/>
+              <a:t>   Noul</a:t>
+            </a:r>
+          </a:p>
+        </p:txBody>
+      </p:sp>
+      <p:sp>
+        <p:nvSpPr>
+          <p:cNvPr id="10" name="TextBox 9"/>
           <p:cNvSpPr txBox="1"/>
           <p:nvPr/>
         </p:nvSpPr>
         <p:spPr>
           <a:xfrm>
-            <a:off x="8119872" y="4340229"/>
-            <a:ext cx="3611880" cy="2103120"/>
+            <a:off x="4288536" y="4543425"/>
+            <a:ext cx="3611880" cy="1280160"/>
           </a:xfrm>
           <a:prstGeom prst="rect">
             <a:avLst/>
@@ -13898,82 +9196,190 @@
                 <a:spcPct val="100000"/>
               </a:lnSpc>
               <a:spcAft>
-                <a:spcPts val="400"/>
+                <a:spcPts val="0"/>
               </a:spcAft>
             </a:pPr>
             <a:r>
-              <a:rPr sz="1050" b="0" i="0">
-                <a:solidFill>
-                  <a:srgbClr val="22D3EE"/>
+              <a:rPr sz="1300" b="0" i="0">
+                <a:solidFill>
+                  <a:srgbClr val="A3A9BC"/>
                 </a:solidFill>
                 <a:latin typeface="Segoe UI"/>
               </a:rPr>
-              <a:t>•  </a:t>
-            </a:r>
-            <a:r>
-              <a:rPr sz="1050" b="0" i="0">
-                <a:solidFill>
-                  <a:srgbClr val="A3A9BC"/>
-                </a:solidFill>
-                <a:latin typeface="Segoe UI"/>
-              </a:rPr>
-              <a:t>Frustration, urgency, churn risk and sentiment, re-scored while you type.</a:t>
-            </a:r>
-          </a:p>
+              <a:t>~235 yes/no decisions per prompt; matches fly up as they stream in.</a:t>
+            </a:r>
+          </a:p>
+        </p:txBody>
+      </p:sp>
+      <p:pic>
+        <p:nvPicPr>
+          <p:cNvPr id="11" name="demo_score.mp4">
+            <a:hlinkClick r:id="" action="ppaction://media"/>
+          </p:cNvPr>
+          <p:cNvPicPr>
+            <a:picLocks noChangeAspect="1"/>
+          </p:cNvPicPr>
+          <p:nvPr>
+            <a:videoFile r:link="rId10"/>
+            <p:extLst>
+              <p:ext uri="{DAA4B4D4-6D71-4841-9C94-3DE7FCFB9230}">
+                <p14:media xmlns:p14="http://schemas.microsoft.com/office/powerpoint/2010/main" r:embed="rId9"/>
+              </p:ext>
+            </p:extLst>
+          </p:nvPr>
+        </p:nvPicPr>
+        <p:blipFill>
+          <a:blip r:embed="rId11"/>
+          <a:stretch>
+            <a:fillRect/>
+          </a:stretch>
+        </p:blipFill>
+        <p:spPr>
+          <a:xfrm>
+            <a:off x="8119872" y="1645920"/>
+            <a:ext cx="3611880" cy="2257425"/>
+          </a:xfrm>
+          <a:prstGeom prst="rect">
+            <a:avLst/>
+          </a:prstGeom>
+          <a:ln>
+            <a:solidFill>
+              <a:srgbClr val="33384A"/>
+            </a:solidFill>
+          </a:ln>
+        </p:spPr>
+      </p:pic>
+      <p:sp>
+        <p:nvSpPr>
+          <p:cNvPr id="12" name="TextBox 11"/>
+          <p:cNvSpPr txBox="1"/>
+          <p:nvPr/>
+        </p:nvSpPr>
+        <p:spPr>
+          <a:xfrm>
+            <a:off x="8119872" y="4086225"/>
+            <a:ext cx="3611880" cy="365760"/>
+          </a:xfrm>
+          <a:prstGeom prst="rect">
+            <a:avLst/>
+          </a:prstGeom>
+          <a:noFill/>
+        </p:spPr>
+        <p:txBody>
+          <a:bodyPr wrap="square" anchor="t" lIns="36576" rIns="36576" tIns="36576" bIns="36576">
+            <a:spAutoFit/>
+          </a:bodyPr>
+          <a:lstStyle/>
           <a:p>
             <a:pPr algn="l">
               <a:lnSpc>
                 <a:spcPct val="100000"/>
               </a:lnSpc>
               <a:spcAft>
-                <a:spcPts val="400"/>
+                <a:spcPts val="0"/>
               </a:spcAft>
             </a:pPr>
             <a:r>
-              <a:rPr sz="1050" b="0" i="0">
+              <a:rPr sz="1500" b="0" i="0">
+                <a:solidFill>
+                  <a:srgbClr val="F5F6FA"/>
+                </a:solidFill>
+                <a:latin typeface="Segoe UI Semibold"/>
+              </a:rPr>
+              <a:t>Message heat</a:t>
+            </a:r>
+            <a:r>
+              <a:rPr sz="1500" b="0" i="0">
                 <a:solidFill>
                   <a:srgbClr val="22D3EE"/>
                 </a:solidFill>
-                <a:latin typeface="Segoe UI"/>
-              </a:rPr>
-              <a:t>•  </a:t>
-            </a:r>
-            <a:r>
-              <a:rPr sz="1050" b="0" i="0">
-                <a:solidFill>
-                  <a:srgbClr val="A3A9BC"/>
-                </a:solidFill>
-                <a:latin typeface="Segoe UI"/>
-              </a:rPr>
-              <a:t>Answers land between levels: frustration 0.96 → 1.42 → 1.84 → 2.11 → 2.44 as the message escalates.</a:t>
-            </a:r>
-          </a:p>
+                <a:latin typeface="Segoe UI Semibold"/>
+              </a:rPr>
+              <a:t>   Score</a:t>
+            </a:r>
+          </a:p>
+        </p:txBody>
+      </p:sp>
+      <p:sp>
+        <p:nvSpPr>
+          <p:cNvPr id="13" name="TextBox 12"/>
+          <p:cNvSpPr txBox="1"/>
+          <p:nvPr/>
+        </p:nvSpPr>
+        <p:spPr>
+          <a:xfrm>
+            <a:off x="8119872" y="4543425"/>
+            <a:ext cx="3611880" cy="1280160"/>
+          </a:xfrm>
+          <a:prstGeom prst="rect">
+            <a:avLst/>
+          </a:prstGeom>
+          <a:noFill/>
+        </p:spPr>
+        <p:txBody>
+          <a:bodyPr wrap="square" anchor="t" lIns="36576" rIns="36576" tIns="36576" bIns="36576">
+            <a:spAutoFit/>
+          </a:bodyPr>
+          <a:lstStyle/>
           <a:p>
             <a:pPr algn="l">
               <a:lnSpc>
                 <a:spcPct val="100000"/>
               </a:lnSpc>
               <a:spcAft>
-                <a:spcPts val="400"/>
+                <a:spcPts val="0"/>
               </a:spcAft>
             </a:pPr>
             <a:r>
+              <a:rPr sz="1300" b="0" i="0">
+                <a:solidFill>
+                  <a:srgbClr val="A3A9BC"/>
+                </a:solidFill>
+                <a:latin typeface="Segoe UI"/>
+              </a:rPr>
+              <a:t>Gauges move between levels as the complaint escalates → retention.</a:t>
+            </a:r>
+          </a:p>
+        </p:txBody>
+      </p:sp>
+      <p:sp>
+        <p:nvSpPr>
+          <p:cNvPr id="14" name="TextBox 13"/>
+          <p:cNvSpPr txBox="1"/>
+          <p:nvPr/>
+        </p:nvSpPr>
+        <p:spPr>
+          <a:xfrm>
+            <a:off x="457200" y="6263640"/>
+            <a:ext cx="11247120" cy="274320"/>
+          </a:xfrm>
+          <a:prstGeom prst="rect">
+            <a:avLst/>
+          </a:prstGeom>
+          <a:noFill/>
+        </p:spPr>
+        <p:txBody>
+          <a:bodyPr wrap="square" anchor="t" lIns="36576" rIns="36576" tIns="36576" bIns="36576">
+            <a:spAutoFit/>
+          </a:bodyPr>
+          <a:lstStyle/>
+          <a:p>
+            <a:pPr algn="l">
+              <a:lnSpc>
+                <a:spcPct val="100000"/>
+              </a:lnSpc>
+              <a:spcAft>
+                <a:spcPts val="0"/>
+              </a:spcAft>
+            </a:pPr>
+            <a:r>
               <a:rPr sz="1050" b="0" i="0">
                 <a:solidFill>
-                  <a:srgbClr val="22D3EE"/>
+                  <a:srgbClr val="A3A9BC"/>
                 </a:solidFill>
                 <a:latin typeface="Segoe UI"/>
               </a:rPr>
-              <a:t>•  </a:t>
-            </a:r>
-            <a:r>
-              <a:rPr sz="1050" b="0" i="0">
-                <a:solidFill>
-                  <a:srgbClr val="A3A9BC"/>
-                </a:solidFill>
-                <a:latin typeface="Segoe UI"/>
-              </a:rPr>
-              <a:t>Code: priority 0.81 → escalate to retention; a thank-you note → testimonial for marketing.</a:t>
+              <a:t>Click a video to play it · recorded from samples/07_ui_demos.py on a laptop CPU</a:t>
             </a:r>
           </a:p>
         </p:txBody>
@@ -13983,6 +9389,52 @@
   <p:clrMapOvr>
     <a:masterClrMapping/>
   </p:clrMapOvr>
+  <p:timing>
+    <p:tnLst>
+      <p:par>
+        <p:cTn id="1" dur="indefinite" restart="never" nodeType="tmRoot">
+          <p:childTnLst>
+            <p:video>
+              <p:cMediaNode vol="80000">
+                <p:cTn id="2" fill="hold" display="0">
+                  <p:stCondLst>
+                    <p:cond delay="indefinite"/>
+                  </p:stCondLst>
+                </p:cTn>
+                <p:tgtEl>
+                  <p:spTgt spid="5"/>
+                </p:tgtEl>
+              </p:cMediaNode>
+            </p:video>
+            <p:video>
+              <p:cMediaNode vol="80000">
+                <p:cTn id="3" fill="hold" display="0">
+                  <p:stCondLst>
+                    <p:cond delay="indefinite"/>
+                  </p:stCondLst>
+                </p:cTn>
+                <p:tgtEl>
+                  <p:spTgt spid="8"/>
+                </p:tgtEl>
+              </p:cMediaNode>
+            </p:video>
+            <p:video>
+              <p:cMediaNode vol="80000">
+                <p:cTn id="4" fill="hold" display="0">
+                  <p:stCondLst>
+                    <p:cond delay="indefinite"/>
+                  </p:stCondLst>
+                </p:cTn>
+                <p:tgtEl>
+                  <p:spTgt spid="11"/>
+                </p:tgtEl>
+              </p:cMediaNode>
+            </p:video>
+          </p:childTnLst>
+        </p:cTn>
+      </p:par>
+    </p:tnLst>
+  </p:timing>
 </p:sld>
 </file>
 

--- a/presentation/Jev_Team_Overview.pptx
+++ b/presentation/Jev_Team_Overview.pptx
@@ -5821,7 +5821,7 @@
         <p:spPr>
           <a:xfrm>
             <a:off x="457200" y="3931920"/>
-            <a:ext cx="1755648" cy="822960"/>
+            <a:ext cx="2816352" cy="822960"/>
           </a:xfrm>
           <a:prstGeom prst="homePlate">
             <a:avLst/>
@@ -5899,8 +5899,8 @@
         </p:nvSpPr>
         <p:spPr>
           <a:xfrm>
-            <a:off x="2212848" y="3931920"/>
-            <a:ext cx="1755648" cy="822960"/>
+            <a:off x="3273552" y="3931920"/>
+            <a:ext cx="2816352" cy="822960"/>
           </a:xfrm>
           <a:prstGeom prst="chevron">
             <a:avLst/>
@@ -5978,8 +5978,8 @@
         </p:nvSpPr>
         <p:spPr>
           <a:xfrm>
-            <a:off x="3968496" y="3931920"/>
-            <a:ext cx="1755648" cy="822960"/>
+            <a:off x="6089904" y="3931920"/>
+            <a:ext cx="2816352" cy="822960"/>
           </a:xfrm>
           <a:prstGeom prst="chevron">
             <a:avLst/>
@@ -6057,8 +6057,8 @@
         </p:nvSpPr>
         <p:spPr>
           <a:xfrm>
-            <a:off x="5724144" y="3931920"/>
-            <a:ext cx="1755648" cy="822960"/>
+            <a:off x="8906256" y="3931920"/>
+            <a:ext cx="2816352" cy="822960"/>
           </a:xfrm>
           <a:prstGeom prst="chevron">
             <a:avLst/>
@@ -6136,8 +6136,8 @@
         </p:nvSpPr>
         <p:spPr>
           <a:xfrm>
-            <a:off x="457200" y="5029200"/>
-            <a:ext cx="6583680" cy="1280160"/>
+            <a:off x="457200" y="5074920"/>
+            <a:ext cx="11247120" cy="1280160"/>
           </a:xfrm>
           <a:prstGeom prst="rect">
             <a:avLst/>
@@ -6155,11 +6155,11 @@
                 <a:spcPct val="105000"/>
               </a:lnSpc>
               <a:spcAft>
-                <a:spcPts val="800"/>
+                <a:spcPts val="1000"/>
               </a:spcAft>
             </a:pPr>
             <a:r>
-              <a:rPr sz="1500" b="0" i="0">
+              <a:rPr sz="1600" b="0" i="0">
                 <a:solidFill>
                   <a:srgbClr val="22D3EE"/>
                 </a:solidFill>
@@ -6168,7 +6168,7 @@
               <a:t>▸  </a:t>
             </a:r>
             <a:r>
-              <a:rPr sz="1500" b="0" i="0">
+              <a:rPr sz="1600" b="0" i="0">
                 <a:solidFill>
                   <a:srgbClr val="F5F6FA"/>
                 </a:solidFill>
@@ -6177,13 +6177,13 @@
               <a:t>All questions answered together </a:t>
             </a:r>
             <a:r>
-              <a:rPr sz="1500" b="0" i="0">
+              <a:rPr sz="1600" b="0" i="0">
                 <a:solidFill>
                   <a:srgbClr val="A3A9BC"/>
                 </a:solidFill>
                 <a:latin typeface="Segoe UI"/>
               </a:rPr>
-              <a:t>in ~0.1 s</a:t>
+              <a:t>in ~0.1 s · text only · calibrated over many decisions, not each one</a:t>
             </a:r>
           </a:p>
           <a:p>
@@ -6192,11 +6192,11 @@
                 <a:spcPct val="105000"/>
               </a:lnSpc>
               <a:spcAft>
-                <a:spcPts val="800"/>
+                <a:spcPts val="1000"/>
               </a:spcAft>
             </a:pPr>
             <a:r>
-              <a:rPr sz="1500" b="0" i="0">
+              <a:rPr sz="1600" b="0" i="0">
                 <a:solidFill>
                   <a:srgbClr val="22D3EE"/>
                 </a:solidFill>
@@ -6205,69 +6205,38 @@
               <a:t>▸  </a:t>
             </a:r>
             <a:r>
-              <a:rPr sz="1500" b="0" i="0">
+              <a:rPr sz="1600" b="0" i="0">
                 <a:solidFill>
                   <a:srgbClr val="F5F6FA"/>
                 </a:solidFill>
                 <a:latin typeface="Segoe UI Semibold"/>
               </a:rPr>
-              <a:t>Text only; </a:t>
-            </a:r>
-            <a:r>
-              <a:rPr sz="1500" b="0" i="0">
+              <a:t>Where it fits: </a:t>
+            </a:r>
+            <a:r>
+              <a:rPr sz="1600" b="0" i="0">
                 <a:solidFill>
                   <a:srgbClr val="A3A9BC"/>
                 </a:solidFill>
                 <a:latin typeface="Segoe UI"/>
               </a:rPr>
-              <a:t>calibrated over many decisions, not each one</a:t>
-            </a:r>
-          </a:p>
-        </p:txBody>
-      </p:sp>
-      <p:pic>
-        <p:nvPicPr>
-          <p:cNvPr id="25" name="Picture 24" descr="yt_VE5dsWll06M.jpg">
-            <a:hlinkClick r:id="rId3"/>
-          </p:cNvPr>
-          <p:cNvPicPr>
-            <a:picLocks noChangeAspect="1"/>
-          </p:cNvPicPr>
-          <p:nvPr/>
-        </p:nvPicPr>
-        <p:blipFill>
-          <a:blip r:embed="rId2"/>
-          <a:stretch>
-            <a:fillRect/>
-          </a:stretch>
-        </p:blipFill>
-        <p:spPr>
-          <a:xfrm>
-            <a:off x="7589520" y="3611880"/>
-            <a:ext cx="4160520" cy="2340292"/>
-          </a:xfrm>
-          <a:prstGeom prst="rect">
-            <a:avLst/>
-          </a:prstGeom>
-          <a:ln w="12700">
-            <a:solidFill>
-              <a:srgbClr val="33384A"/>
-            </a:solidFill>
-          </a:ln>
-        </p:spPr>
-      </p:pic>
-      <p:sp>
-        <p:nvSpPr>
-          <p:cNvPr id="26" name="TextBox 25">
-            <a:hlinkClick r:id="rId3"/>
+              <a:t>model routing · tool-call guardrails · LLM-as-judge around your agent</a:t>
+            </a:r>
+          </a:p>
+        </p:txBody>
+      </p:sp>
+      <p:sp>
+        <p:nvSpPr>
+          <p:cNvPr id="25" name="TextBox 24">
+            <a:hlinkClick r:id="rId2"/>
           </p:cNvPr>
           <p:cNvSpPr txBox="1"/>
           <p:nvPr/>
         </p:nvSpPr>
         <p:spPr>
           <a:xfrm>
-            <a:off x="7589520" y="5998464"/>
-            <a:ext cx="4160520" cy="274320"/>
+            <a:off x="457200" y="6172200"/>
+            <a:ext cx="11247120" cy="274320"/>
           </a:xfrm>
           <a:prstGeom prst="rect">
             <a:avLst/>
@@ -6295,7 +6264,7 @@
                 </a:solidFill>
                 <a:latin typeface="Segoe UI"/>
               </a:rPr>
-              <a:t>▶  LangChain: Jev in the agent harness - routing · auto mode · judge</a:t>
+              <a:t>▶  LangChain: “Building a Harness with Jev”</a:t>
             </a:r>
           </a:p>
         </p:txBody>

--- a/presentation/Jev_Team_Overview.pptx
+++ b/presentation/Jev_Team_Overview.pptx
@@ -6220,7 +6220,7 @@
                 </a:solidFill>
                 <a:latin typeface="Segoe UI"/>
               </a:rPr>
-              <a:t>model routing · tool-call guardrails · LLM-as-judge around your agent</a:t>
+              <a:t>any repetitive judgement in your product - classify, prioritise, check; LLMs keep the writing</a:t>
             </a:r>
           </a:p>
         </p:txBody>
@@ -6264,7 +6264,7 @@
                 </a:solidFill>
                 <a:latin typeface="Segoe UI"/>
               </a:rPr>
-              <a:t>▶  LangChain: “Building a Harness with Jev”</a:t>
+              <a:t>▶  More: LangChain “Building a Harness with Jev” (routing, guardrails, judge)</a:t>
             </a:r>
           </a:p>
         </p:txBody>

--- a/presentation/Jev_Team_Overview.pptx
+++ b/presentation/Jev_Team_Overview.pptx
@@ -6136,8 +6136,8 @@
         </p:nvSpPr>
         <p:spPr>
           <a:xfrm>
-            <a:off x="457200" y="5074920"/>
-            <a:ext cx="11247120" cy="1280160"/>
+            <a:off x="457200" y="4937760"/>
+            <a:ext cx="11247120" cy="914400"/>
           </a:xfrm>
           <a:prstGeom prst="rect">
             <a:avLst/>
@@ -6227,16 +6227,14 @@
       </p:sp>
       <p:sp>
         <p:nvSpPr>
-          <p:cNvPr id="25" name="TextBox 24">
-            <a:hlinkClick r:id="rId2"/>
-          </p:cNvPr>
+          <p:cNvPr id="25" name="TextBox 24"/>
           <p:cNvSpPr txBox="1"/>
           <p:nvPr/>
         </p:nvSpPr>
         <p:spPr>
           <a:xfrm>
-            <a:off x="457200" y="6172200"/>
-            <a:ext cx="11247120" cy="274320"/>
+            <a:off x="868680" y="5687568"/>
+            <a:ext cx="10881360" cy="365760"/>
           </a:xfrm>
           <a:prstGeom prst="rect">
             <a:avLst/>
@@ -6258,13 +6256,66 @@
               </a:spcAft>
             </a:pPr>
             <a:r>
+              <a:rPr sz="1400" b="0" i="0">
+                <a:solidFill>
+                  <a:srgbClr val="F5F6FA"/>
+                </a:solidFill>
+                <a:latin typeface="Segoe UI Semibold"/>
+              </a:rPr>
+              <a:t>–  In AI agents (harness engineering): </a:t>
+            </a:r>
+            <a:r>
+              <a:rPr sz="1400" b="0" i="0">
+                <a:solidFill>
+                  <a:srgbClr val="A3A9BC"/>
+                </a:solidFill>
+                <a:latin typeface="Segoe UI"/>
+              </a:rPr>
+              <a:t>model routing · tool-call guardrails · LLM-as-judge</a:t>
+            </a:r>
+          </a:p>
+        </p:txBody>
+      </p:sp>
+      <p:sp>
+        <p:nvSpPr>
+          <p:cNvPr id="26" name="TextBox 25">
+            <a:hlinkClick r:id="rId2"/>
+          </p:cNvPr>
+          <p:cNvSpPr txBox="1"/>
+          <p:nvPr/>
+        </p:nvSpPr>
+        <p:spPr>
+          <a:xfrm>
+            <a:off x="868680" y="6089904"/>
+            <a:ext cx="10881360" cy="274320"/>
+          </a:xfrm>
+          <a:prstGeom prst="rect">
+            <a:avLst/>
+          </a:prstGeom>
+          <a:noFill/>
+        </p:spPr>
+        <p:txBody>
+          <a:bodyPr wrap="square" anchor="t" lIns="36576" rIns="36576" tIns="36576" bIns="36576">
+            <a:spAutoFit/>
+          </a:bodyPr>
+          <a:lstStyle/>
+          <a:p>
+            <a:pPr algn="l">
+              <a:lnSpc>
+                <a:spcPct val="100000"/>
+              </a:lnSpc>
+              <a:spcAft>
+                <a:spcPts val="0"/>
+              </a:spcAft>
+            </a:pPr>
+            <a:r>
               <a:rPr sz="1000" b="0" i="0" u="sng">
                 <a:solidFill>
                   <a:srgbClr val="A3A9BC"/>
                 </a:solidFill>
                 <a:latin typeface="Segoe UI"/>
               </a:rPr>
-              <a:t>▶  More: LangChain “Building a Harness with Jev” (routing, guardrails, judge)</a:t>
+              <a:t>▶  LangChain: “Building a Harness with Jev”</a:t>
             </a:r>
           </a:p>
         </p:txBody>
